--- a/docs/meetings/TSAT_ESM_Department_Roadshow_2026-10.pptx
+++ b/docs/meetings/TSAT_ESM_Department_Roadshow_2026-10.pptx
@@ -23,6 +23,7 @@
     <p:sldId id="271" r:id="rId23"/>
     <p:sldId id="272" r:id="rId24"/>
     <p:sldId id="273" r:id="rId25"/>
+    <p:sldId id="274" r:id="rId26"/>
   </p:sldIdLst>
   <p:sldSz cx="12191695" cy="6858000" type="screen4x3"/>
   <p:notesSz cx="6858000" cy="9144000"/>
@@ -589,17 +590,27 @@
           <a:lstStyle/>
           <a:p>
             <a:r>
-              <a:t>Logistic: Demo /planner-sales แผง 📬 ไฟล์จากเมลรอนำเข้า → กดนำเข้า → /customer-demand ดูสีรอบส่ง (เมลเข้า → แผนส่ง โดยไม่มีคนเปิดไฟล์แนบ)</a:t>
-            </a:r>
-          </a:p>
-          <a:p>
-            <a:r>
-              <a:t>ใช้เลขใหม่: ปิดส่งลูกค้า 232 เที่ยว/8 วัน (30/09) — ห้ามใช้เลข "38 จาก 472" ของ 25/08</a:t>
-            </a:r>
-          </a:p>
-          <a:p>
-            <a:r>
-              <a:t>ห้ามพูดเกิน: ยังใช้บัญชีร่วมเป็นหลัก · ตัวดึงเมลทำงานเฉพาะตอนเครื่อง Outlook เปิด และยังต้องกดยืนยันนำเข้า</a:t>
+              <a:t>สโตร์: เล่าด้วยคำของทีมเอง (27/08) "อ่านจาก LINE chat กลุ่มว่ามีใครเบิกงาน เห็นใครเบิกก่อนก็จัดของไปส่งเลย มั่วมาก"</a:t>
+            </a:r>
+          </a:p>
+          <a:p>
+            <a:r>
+              <a:t>ขาที่ระบบทำเองทำงานครบ (ปิดใบผลิต/ระเบิด BOM สำเร็จ 15,094/15,185 ครั้ง ณ 24/09) — ขาที่ต้องมีคนกดยังค้าง</a:t>
+            </a:r>
+          </a:p>
+          <a:p>
+            <a:r>
+              <a:t>Demo: /heijunka แท็บคิวเติม WIP ให้เห็นใบที่เดินครบทุกขั้น หรือ /flow-tower ให้เห็นว่าปิดใบ FG ใบเดียวไหลไปถึงใบสั่งซื้อ</a:t>
+            </a:r>
+          </a:p>
+          <a:p>
+            <a:r>
+              <a:t>ตัวเลขจริง (ต.ค.): ใบรอรับเข้าคลัง ปิดใบ→คลังกดรับ ค่ากลาง ~73 ชม. (โหมดนับก่อนรับเพิ่งเริ่ม 02/10 — ยังช้า) · ใบขอซื้อ "เร็วขึ้น" ห้ามอ้าง เพราะปนกับการเคลียร์แบบ bulk</a:t>
+            </a:r>
+          </a:p>
+          <a:p>
+            <a:r>
+              <a:t>ห้ามพูดเกิน: ไลน์ประกอบยังไม่ตั้ง min/max · ห้ามวาดว่ามีขั้นสแกน lot · ยอดรับของ bulk 01/10 (~2 ล้านชิ้น) ยังรอยืนยันว่าเป็นของจริง</a:t>
             </a:r>
           </a:p>
         </p:txBody>
@@ -669,12 +680,22 @@
           <a:lstStyle/>
           <a:p>
             <a:r>
-              <a:t>Planning: Demo /monitoring เปิดบอร์ดชีทเดียวกับที่ทีมทำใน Excel แล้วชี้แถว IN ที่ระบบเติมเอง เทียบกับช่องที่ยังว่าง (บอกตรงๆ ว่าว่างเพราะพาร์ทนั้นยังไม่มีใบผลิตในระบบ)</a:t>
-            </a:r>
-          </a:p>
-          <a:p>
-            <a:r>
-              <a:t>ห้ามพูดเกิน: วางแผนผลิต + คำนวณ kanban ยังไม่ถูกใช้จริง · มีประวัติผลิตในระบบแค่ 26/106 พาร์ทของชีทไลน์ปั๊ม</a:t>
+              <a:t>Logistic: Demo /planner-sales แผง 📬 ไฟล์จากเมลรอนำเข้า → กดนำเข้า → /customer-demand ดูสีรอบส่ง (เมลเข้า → แผนส่ง โดยไม่มีคนเปิดไฟล์แนบ)</a:t>
+            </a:r>
+          </a:p>
+          <a:p>
+            <a:r>
+              <a:t>ใช้เลขใหม่: ปิดส่งลูกค้า 232 เที่ยว/8 วัน (30/09) — ห้ามใช้เลข "38 จาก 472" ของ 25/08</a:t>
+            </a:r>
+          </a:p>
+          <a:p>
+            <a:r>
+              <a:t>ตัวเลขจริง: ส่งลูกค้าตรง/ก่อนกำหนด ส.ค. 91% → ก.ย. 72% (แย่ลง — ต้องอธิบายสาเหตุ) → ต.ค. 87% (6 วัน) · EDI จากเมลถึง→นำเข้า ค่ากลาง 87 → 5 ชม. (ข้อมูลน้อย)</a:t>
+            </a:r>
+          </a:p>
+          <a:p>
+            <a:r>
+              <a:t>ห้ามพูดเกิน: ยังใช้บัญชีร่วมเป็นหลัก · ตัวดึงเมลทำงานเฉพาะตอนเครื่อง Outlook เปิด และยังต้องกดยืนยันนำเข้า</a:t>
             </a:r>
           </a:p>
         </p:txBody>
@@ -744,17 +765,12 @@
           <a:lstStyle/>
           <a:p>
             <a:r>
-              <a:t>QA: ส่วนนี้ต้องพูดตรงที่สุด — ระบบพร้อม แต่ยังไม่เริ่มใช้จริง (ถังแดงค้าง 33 ใบ · QA ยังไม่เคยตัดสินถัง · ใบซ่อมรอ QA ตรวจ 205 ใบ)</a:t>
-            </a:r>
-          </a:p>
-          <a:p>
-            <a:r>
-              <a:t>ข้อแนะนำ: อย่าเปิดจอ QA โชว์จนกว่าจะตัดสินถังแดงครบ — ถ้าตัดสินแล้ว ให้โชว์ /qa แท็บถัง → ใบที่ตัดสิน "ทำลาย" → ไปเห็นที่ใบ FM-PD2-002</a:t>
-            </a:r>
-          </a:p>
-          <a:p>
-            <a:r>
-              <a:t>สิ่งที่ QA ควรประกาศบนเวที: แผนเคลียร์ใบรอตรวจ + เริ่มตัดสินถังทุกวัน</a:t>
+              <a:t>Planning: Demo /monitoring เปิดบอร์ดชีทเดียวกับที่ทีมทำใน Excel แล้วชี้แถว IN ที่ระบบเติมเอง เทียบกับช่องที่ยังว่าง (บอกตรงๆ ว่าว่างเพราะพาร์ทนั้นยังไม่มีใบผลิตในระบบ)</a:t>
+            </a:r>
+          </a:p>
+          <a:p>
+            <a:r>
+              <a:t>ห้ามพูดเกิน: วางแผนผลิต + คำนวณ kanban ยังไม่ถูกใช้จริง · มีประวัติผลิตในระบบแค่ 26/106 พาร์ทของชีทไลน์ปั๊ม</a:t>
             </a:r>
           </a:p>
         </p:txBody>
@@ -824,12 +840,17 @@
           <a:lstStyle/>
           <a:p>
             <a:r>
-              <a:t>PE: Demo /pe-docs ชุด P703 (Line 60) แท็บ Flow → ผังที่ระบบวาดเอง → แท็บ PFMEA เดียวกัน OP เดียวกัน (ข้อมูลจริงครบ) แล้วเชื่อมไป /order-trace ให้เห็นการสอบกลับถึง PFMEA</a:t>
-            </a:r>
-          </a:p>
-          <a:p>
-            <a:r>
-              <a:t>ห้ามพูดเกิน: เอกสาร PE ไม่มีการอัปเดตตั้งแต่ 18 ส.ค. · PE ยังค้างส่ง CT 11 พาร์ท (ทำให้ %P ต่ำปลอม) · ห้ามเปิดจอ closed-loop 8D</a:t>
+              <a:t>QA: ส่วนนี้ต้องพูดตรงที่สุด — ระบบพร้อม แต่ยังไม่เริ่มใช้จริง (ถังแดงค้าง 33 ใบ · QA ยังไม่เคยตัดสินถัง · ใบซ่อมรอ QA ตรวจ 205 ใบ)</a:t>
+            </a:r>
+          </a:p>
+          <a:p>
+            <a:r>
+              <a:t>ข้อแนะนำ: อย่าเปิดจอ QA โชว์จนกว่าจะตัดสินถังแดงครบ — ถ้าตัดสินแล้ว ให้โชว์ /qa แท็บถัง → ใบที่ตัดสิน "ทำลาย" → ไปเห็นที่ใบ FM-PD2-002</a:t>
+            </a:r>
+          </a:p>
+          <a:p>
+            <a:r>
+              <a:t>สิ่งที่ QA ควรประกาศบนเวที: แผนเคลียร์ใบรอตรวจ + เริ่มตัดสินถังทุกวัน</a:t>
             </a:r>
           </a:p>
         </p:txBody>
@@ -899,12 +920,12 @@
           <a:lstStyle/>
           <a:p>
             <a:r>
-              <a:t>HR/ธุรการ: เน้นว่าปฏิทินบริษัทเป็น "ข้อมูลกลาง" — ถ้าผิด kanban / แผนผลิต / PM / LPA ผิดตามหมดเงียบๆ (บทเรียนจริง 28–29 ก.ย.) · ตอนนี้ปฏิทินมีถึงปี 2027 แล้ว</a:t>
-            </a:r>
-          </a:p>
-          <a:p>
-            <a:r>
-              <a:t>ก่อนพูด: ยังไม่มีตัวเลขการใช้งาน OJT จริงในเอกสาร ต้องคิวรีก่อน (ถ้าไม่มีใบจริง อย่าเปิดจอ)</a:t>
+              <a:t>PE: Demo /pe-docs ชุด P703 (Line 60) แท็บ Flow → ผังที่ระบบวาดเอง → แท็บ PFMEA เดียวกัน OP เดียวกัน (ข้อมูลจริงครบ) แล้วเชื่อมไป /order-trace ให้เห็นการสอบกลับถึง PFMEA</a:t>
+            </a:r>
+          </a:p>
+          <a:p>
+            <a:r>
+              <a:t>ห้ามพูดเกิน: เอกสาร PE ไม่มีการอัปเดตตั้งแต่ 18 ส.ค. · PE ยังค้างส่ง CT 11 พาร์ท (ทำให้ %P ต่ำปลอม) · ห้ามเปิดจอ closed-loop 8D</a:t>
             </a:r>
           </a:p>
         </p:txBody>
@@ -974,12 +995,12 @@
           <a:lstStyle/>
           <a:p>
             <a:r>
-              <a:t>ผู้บริหาร: Demo เส้นทางที่ล็อกไว้ /factory-map → /tv → /obeya → ไลน์ 060/061 → /order-trace → /mtn-repair → /program-update</a:t>
-            </a:r>
-          </a:p>
-          <a:p>
-            <a:r>
-              <a:t>ห้ามพูดเกิน: ACTION BOARD ยังไม่มีใบจริง (ต้องมี 5–10 ใบก่อนวันโชว์) · /group-overview เป็น mockup · ยังไม่ต่อ SAP/SCADA · ยังไม่ย้ายลง server บริษัท</a:t>
+              <a:t>HR/ธุรการ: เน้นว่าปฏิทินบริษัทเป็น "ข้อมูลกลาง" — ถ้าผิด kanban / แผนผลิต / PM / LPA ผิดตามหมดเงียบๆ (บทเรียนจริง 28–29 ก.ย.) · ตอนนี้ปฏิทินมีถึงปี 2027 แล้ว</a:t>
+            </a:r>
+          </a:p>
+          <a:p>
+            <a:r>
+              <a:t>ตัวเลขจริง: ใบ OJT ในระบบ ก.ค. 1 · ส.ค. 12 · ก.ย. 6 · ต.ค. 1 ใบ · เช็คชื่อ ~3,500 แถว/เดือน · BBS 8/6/11 ใบ (ส.ค.–ต.ค.)</a:t>
             </a:r>
           </a:p>
         </p:txBody>
@@ -1049,12 +1070,12 @@
           <a:lstStyle/>
           <a:p>
             <a:r>
-              <a:t>สไลด์นี้ต้องพูด — GM ต่างโรงจะถามแน่ว่า "ใช้จริงแค่ไหน" การบอกเองดีกว่าโดนจับได้</a:t>
-            </a:r>
-          </a:p>
-          <a:p>
-            <a:r>
-              <a:t>สรุปเดียว: ส่วนที่ระบบทำเองทำงานครบ · ส่วนที่ค้างคือขั้นที่ต้องมีคนกด ⇒ แต่ละส่วนงานรับปากเรื่องไหนบนเวที</a:t>
+              <a:t>ผู้บริหาร: Demo เส้นทางที่ล็อกไว้ /factory-map → /tv → /obeya → ไลน์ 060/061 → /order-trace → /mtn-repair → /program-update</a:t>
+            </a:r>
+          </a:p>
+          <a:p>
+            <a:r>
+              <a:t>ห้ามพูดเกิน: ACTION BOARD ยังไม่มีใบจริง (ต้องมี 5–10 ใบก่อนวันโชว์) · /group-overview เป็น mockup · ยังไม่ต่อ SAP/SCADA · ยังไม่ย้ายลง server บริษัท</a:t>
             </a:r>
           </a:p>
         </p:txBody>
@@ -1124,7 +1145,12 @@
           <a:lstStyle/>
           <a:p>
             <a:r>
-              <a:t>อ้างอิงไทม์ไลน์คุมงานใน docs/ADOPTION-ROADMAP.md · ตัวเลขบนสไลด์ทั้งหมดจะวัดใหม่เช้าวันโชว์ และเขียนวันที่วัดไว้ทุกสไลด์</a:t>
+              <a:t>สไลด์นี้ต้องพูด — GM ต่างโรงจะถามแน่ว่า "ใช้จริงแค่ไหน" การบอกเองดีกว่าโดนจับได้</a:t>
+            </a:r>
+          </a:p>
+          <a:p>
+            <a:r>
+              <a:t>สรุปเดียว: ส่วนที่ระบบทำเองทำงานครบ · ส่วนที่ค้างคือขั้นที่ต้องมีคนกด ⇒ แต่ละส่วนงานรับปากเรื่องไหนบนเวที</a:t>
             </a:r>
           </a:p>
         </p:txBody>
@@ -1194,6 +1220,76 @@
           <a:lstStyle/>
           <a:p>
             <a:r>
+              <a:t>อ้างอิงไทม์ไลน์คุมงานใน docs/ADOPTION-ROADMAP.md · ตัวเลขบนสไลด์ทั้งหมดจะวัดใหม่เช้าวันโชว์ และเขียนวันที่วัดไว้ทุกสไลด์</a:t>
+            </a:r>
+          </a:p>
+        </p:txBody>
+      </p:sp>
+      <p:sp>
+        <p:nvSpPr>
+          <p:cNvPr id="4" name="Slide Number Placeholder 3"/>
+          <p:cNvSpPr>
+            <a:spLocks noGrp="1"/>
+          </p:cNvSpPr>
+          <p:nvPr>
+            <p:ph type="sldNum" idx="5" sz="quarter"/>
+          </p:nvPr>
+        </p:nvSpPr>
+        <p:spPr/>
+      </p:sp>
+    </p:spTree>
+  </p:cSld>
+  <p:clrMapOvr>
+    <a:masterClrMapping/>
+  </p:clrMapOvr>
+</p:notes>
+</file>
+
+<file path=ppt/notesSlides/notesSlide19.xml><?xml version="1.0" encoding="utf-8"?>
+<p:notes xmlns:a="http://schemas.openxmlformats.org/drawingml/2006/main" xmlns:p="http://schemas.openxmlformats.org/presentationml/2006/main" xmlns:r="http://schemas.openxmlformats.org/officeDocument/2006/relationships">
+  <p:cSld>
+    <p:spTree>
+      <p:nvGrpSpPr>
+        <p:cNvPr id="1" name=""/>
+        <p:cNvGrpSpPr/>
+        <p:nvPr/>
+      </p:nvGrpSpPr>
+      <p:grpSpPr>
+        <a:xfrm>
+          <a:off x="0" y="0"/>
+          <a:ext cx="0" cy="0"/>
+          <a:chOff x="0" y="0"/>
+          <a:chExt cx="0" cy="0"/>
+        </a:xfrm>
+      </p:grpSpPr>
+      <p:sp>
+        <p:nvSpPr>
+          <p:cNvPr id="2" name="Slide Image Placeholder 1"/>
+          <p:cNvSpPr>
+            <a:spLocks noGrp="1"/>
+          </p:cNvSpPr>
+          <p:nvPr>
+            <p:ph type="sldImg" idx="2"/>
+          </p:nvPr>
+        </p:nvSpPr>
+        <p:spPr/>
+      </p:sp>
+      <p:sp>
+        <p:nvSpPr>
+          <p:cNvPr id="3" name="Notes Placeholder 2"/>
+          <p:cNvSpPr>
+            <a:spLocks noGrp="1"/>
+          </p:cNvSpPr>
+          <p:nvPr>
+            <p:ph type="body" idx="3" sz="quarter"/>
+          </p:nvPr>
+        </p:nvSpPr>
+        <p:spPr/>
+        <p:txBody>
+          <a:bodyPr/>
+          <a:lstStyle/>
+          <a:p>
+            <a:r>
               <a:t>ปิด: ระบบไม่ได้ทำงานแทนคน — ระบบทำให้คนทุกแผนกเห็นข้อมูลชุดเดียวกัน และส่งงานต่อกันได้เร็วขึ้น</a:t>
             </a:r>
           </a:p>
@@ -1569,22 +1665,22 @@
           <a:lstStyle/>
           <a:p>
             <a:r>
-              <a:t>ผลิต: ยกตัวอย่างหัวหน้ากลุ่ม Assy2 ที่เคยเขียนมือ 3 ใบ (FM-PD1-019 / FM-PD2-002 / FM-PD2-023) — ตอนนี้กดปุ่มเดียวจากข้อมูลกะ</a:t>
-            </a:r>
-          </a:p>
-          <a:p>
-            <a:r>
-              <a:t>Demo: /daily-report ไลน์ 060/061 → OEE สด + %Q 100 ที่ยืนยันแล้ว → /morning-meeting โหมด TV แล้วกด ➕ Action สร้างใบติดตามจริง 1 ใบ</a:t>
-            </a:r>
-          </a:p>
-          <a:p>
-            <a:r>
-              <a:t>ห้ามพูดเกิน: PD1/PD2 เพิ่งเริ่ม 17/09 ยังโชว์ OEE ไม่ได้ · งานแก้ (rework) ยังแทบไม่มีคนบันทึก · ปิดกะยังไม่บังคับตอบเรื่องคุณภาพ</a:t>
-            </a:r>
-          </a:p>
-          <a:p>
-            <a:r>
-              <a:t>ให้หัวหน้าส่วนงานกรอกกล่องสีเหลือง: เมื่อก่อนใช้เวลาเขียนใบ/ทำสไลด์วันละกี่นาที</a:t>
+              <a:t>ทุกแถว = ใบ/บันทึกที่เมื่อก่อนเขียนมือหรือทำ Excel — ตอนนี้บันทึกครั้งเดียวในระบบแล้วทุกแผนกเห็น (ตัวเลขนับจากฐานข้อมูลจริง 06/10)</a:t>
+            </a:r>
+          </a:p>
+          <a:p>
+            <a:r>
+              <a:t>เด่นสุด: ใบซ่อม 76 → 496 ใบ/เดือน · ใบตรวจ PM 6 → 88 · downtime เกือบ 3,800 รายการ/เดือน</a:t>
+            </a:r>
+          </a:p>
+          <a:p>
+            <a:r>
+              <a:t>บัญชีผู้ใช้ 100 · เข้าใช้ใน 30 วัน 71 คน · ใน 7 วัน 47 คน</a:t>
+            </a:r>
+          </a:p>
+          <a:p>
+            <a:r>
+              <a:t>อย่าอ้าง: ใบรายงานของเสีย FM-PD2-002 ก.ย. = 0 ใบ และใบเบิก FM-STO-003 ยังไม่เคยใช้</a:t>
             </a:r>
           </a:p>
         </p:txBody>
@@ -1654,22 +1750,22 @@
           <a:lstStyle/>
           <a:p>
             <a:r>
-              <a:t>MTN: ตัวเลขจริง ก.ย. — ช่างรับทราบการเรียก P80 30 นาที (ส.ค. 529 นาที) · เครื่องหยุด→เปิดใบซ่อม 3.2 นาที · ใบซ่อม→ซ่อมเสร็จ P80 0.9 ชม.</a:t>
-            </a:r>
-          </a:p>
-          <a:p>
-            <a:r>
-              <a:t>ก่อนแก้ 21/09: เรียกช่างครั้งเดียวเด้งถึงช่างทั้ง 13 คน 278 ครั้ง/30 วัน — ตอนนี้เด้งเฉพาะทีมที่ถูกเรียก</a:t>
-            </a:r>
-          </a:p>
-          <a:p>
-            <a:r>
-              <a:t>Demo: /daily-report กด 📞 เรียกช่าง → เลือกทีม → เปิด /mtn-repair ใบเดียวกันเห็นข้อมูลเครื่องเติมแล้ว → /mtn-analysis?tab=qc7</a:t>
-            </a:r>
-          </a:p>
-          <a:p>
-            <a:r>
-              <a:t>ห้ามพูดเกิน: ซ่อมเร็วแล้ว แต่ปิดใบช้า — ใบค้างที่ขั้น QA 205 ใบ (06/10) · ห้ามใช้เลข "ใบซ่อม 7 ใบ" ใน infographic เก่า</a:t>
+              <a:t>ผลิต: ยกตัวอย่างหัวหน้ากลุ่ม Assy2 ที่เคยเขียนมือ 3 ใบ (FM-PD1-019 / FM-PD2-002 / FM-PD2-023) — ตอนนี้กดปุ่มเดียวจากข้อมูลกะ</a:t>
+            </a:r>
+          </a:p>
+          <a:p>
+            <a:r>
+              <a:t>Demo: /daily-report ไลน์ 060/061 → OEE สด + %Q 100 ที่ยืนยันแล้ว → /morning-meeting โหมด TV แล้วกด ➕ Action สร้างใบติดตามจริง 1 ใบ</a:t>
+            </a:r>
+          </a:p>
+          <a:p>
+            <a:r>
+              <a:t>ห้ามพูดเกิน: PD1/PD2 เพิ่งเริ่ม 17/09 ยังโชว์ OEE ไม่ได้ · งานแก้ (rework) ยังแทบไม่มีคนบันทึก · ปิดกะยังไม่บังคับตอบเรื่องคุณภาพ</a:t>
+            </a:r>
+          </a:p>
+          <a:p>
+            <a:r>
+              <a:t>ให้หัวหน้าส่วนงานกรอกกล่องสีเหลือง: เมื่อก่อนใช้เวลาเขียนใบ/ทำสไลด์วันละกี่นาที</a:t>
             </a:r>
           </a:p>
         </p:txBody>
@@ -1739,22 +1835,27 @@
           <a:lstStyle/>
           <a:p>
             <a:r>
-              <a:t>JIG/DIE: ระบบพร้อมแล้ว แต่ยังไม่เริ่มใช้จริง — สถานะแม่พิมพ์ยังไม่เคยอัปเดต · ชิม fixture = 0 · ใบตรวจจิ๊กค้างรออนุมัติ</a:t>
-            </a:r>
-          </a:p>
-          <a:p>
-            <a:r>
-              <a:t>สิ่งที่พูดได้จริง: ระบบชี้ว่าคิวกองอยู่ที่ทีมไหน (24/09: ใบรอทีม JIG รับ 23 ใบ นานสุด 22 วัน)</a:t>
-            </a:r>
-          </a:p>
-          <a:p>
-            <a:r>
-              <a:t>Demo ใช้ได้เฉพาะถ้าทีม DIE วางหมุดบนผัง + อัปเดตสถานะจริงก่อนวันโชว์ (/equipment?tab=die) · ห้ามเปิดจอ fixture shim</a:t>
-            </a:r>
-          </a:p>
-          <a:p>
-            <a:r>
-              <a:t>ระวัง: "262 แม่พิมพ์" (นับตัว) กับ "92 ชุด" (นับชุด) คนละหน่วย ให้เลือกพูดอย่างใดอย่างหนึ่ง</a:t>
+              <a:t>MTN: ตัวเลขจริง ก.ย. — ช่างรับทราบการเรียก P80 30 นาที (ส.ค. 529 นาที) · เครื่องหยุด→เปิดใบซ่อม 3.2 นาที · ใบซ่อม→ซ่อมเสร็จ P80 0.9 ชม.</a:t>
+            </a:r>
+          </a:p>
+          <a:p>
+            <a:r>
+              <a:t>ก่อนแก้ 21/09: เรียกช่างครั้งเดียวเด้งถึงช่างทั้ง 13 คน 278 ครั้ง/30 วัน — ตอนนี้เด้งเฉพาะทีมที่ถูกเรียก</a:t>
+            </a:r>
+          </a:p>
+          <a:p>
+            <a:r>
+              <a:t>Demo: /daily-report กด 📞 เรียกช่าง → เลือกทีม → เปิด /mtn-repair ใบเดียวกันเห็นข้อมูลเครื่องเติมแล้ว → /mtn-analysis?tab=qc7</a:t>
+            </a:r>
+          </a:p>
+          <a:p>
+            <a:r>
+              <a:t>PM: ใบตรวจ ส.ค. 6 → ก.ย. 88 ใบ · แผน PM 147 แผน เลยกำหนดวันนี้แค่ 1</a:t>
+            </a:r>
+          </a:p>
+          <a:p>
+            <a:r>
+              <a:t>ห้ามพูดเกิน: ซ่อมเร็วแล้ว แต่ปิดใบช้า — ใบค้างที่ขั้น QA 205 ใบ (06/10) · ห้ามใช้เลข "ใบซ่อม 7 ใบ" ใน infographic เก่า</a:t>
             </a:r>
           </a:p>
         </p:txBody>
@@ -1824,22 +1925,22 @@
           <a:lstStyle/>
           <a:p>
             <a:r>
-              <a:t>สโตร์: เล่าด้วยคำของทีมเอง (27/08) "อ่านจาก LINE chat กลุ่มว่ามีใครเบิกงาน เห็นใครเบิกก่อนก็จัดของไปส่งเลย มั่วมาก"</a:t>
-            </a:r>
-          </a:p>
-          <a:p>
-            <a:r>
-              <a:t>ขาที่ระบบทำเองทำงานครบ (ปิดใบผลิต/ระเบิด BOM สำเร็จ 15,094/15,185 ครั้ง ณ 24/09) — ขาที่ต้องมีคนกดยังค้าง</a:t>
-            </a:r>
-          </a:p>
-          <a:p>
-            <a:r>
-              <a:t>Demo: /heijunka แท็บคิวเติม WIP ให้เห็นใบที่เดินครบทุกขั้น หรือ /flow-tower ให้เห็นว่าปิดใบ FG ใบเดียวไหลไปถึงใบสั่งซื้อ</a:t>
-            </a:r>
-          </a:p>
-          <a:p>
-            <a:r>
-              <a:t>ห้ามพูดเกิน: ไลน์ประกอบยังไม่ตั้ง min/max · ห้ามวาดว่ามีขั้นสแกน lot · ยอดรับของ bulk 01/10 (~2 ล้านชิ้น) ยังรอยืนยันว่าเป็นของจริง</a:t>
+              <a:t>JIG/DIE: ระบบพร้อมแล้ว แต่ยังไม่เริ่มใช้จริง — สถานะแม่พิมพ์ยังไม่เคยอัปเดต · ชิม fixture = 0 · ใบตรวจจิ๊กค้างรออนุมัติ</a:t>
+            </a:r>
+          </a:p>
+          <a:p>
+            <a:r>
+              <a:t>สิ่งที่พูดได้จริง: ระบบชี้ว่าคิวกองอยู่ที่ทีมไหน (24/09: ใบรอทีม JIG รับ 23 ใบ นานสุด 22 วัน)</a:t>
+            </a:r>
+          </a:p>
+          <a:p>
+            <a:r>
+              <a:t>Demo ใช้ได้เฉพาะถ้าทีม DIE วางหมุดบนผัง + อัปเดตสถานะจริงก่อนวันโชว์ (/equipment?tab=die) · ห้ามเปิดจอ fixture shim</a:t>
+            </a:r>
+          </a:p>
+          <a:p>
+            <a:r>
+              <a:t>ระวัง: "262 แม่พิมพ์" (นับตัว) กับ "92 ชุด" (นับชุด) คนละหน่วย ให้เลือกพูดอย่างใดอย่างหนึ่ง</a:t>
             </a:r>
           </a:p>
         </p:txBody>
@@ -5158,7 +5259,7 @@
                 </a:solidFill>
                 <a:latin typeface="Tahoma"/>
               </a:rPr>
-              <a:t>Logistic / Delivery / Warehouse</a:t>
+              <a:t>Store</a:t>
             </a:r>
           </a:p>
         </p:txBody>
@@ -5200,7 +5301,7 @@
                 </a:solidFill>
                 <a:latin typeface="Tahoma"/>
               </a:rPr>
-              <a:t>Customer mail in, delivery rounds out</a:t>
+              <a:t>From reading the LINE chat to a pull board</a:t>
             </a:r>
           </a:p>
         </p:txBody>
@@ -5575,7 +5676,7 @@
                 </a:solidFill>
                 <a:latin typeface="Tahoma"/>
               </a:rPr>
-              <a:t>•  Ford EDI 830/862 attachments saved and uploaded by hand</a:t>
+              <a:t>•  Requests read from the LINE group chat</a:t>
             </a:r>
           </a:p>
           <a:p>
@@ -5594,7 +5695,7 @@
                 </a:solidFill>
                 <a:latin typeface="Tahoma"/>
               </a:rPr>
-              <a:t>•  e-SMART downloaded every ~2 hours</a:t>
+              <a:t>•  "First to ask gets served" — no rounds, no phases</a:t>
             </a:r>
           </a:p>
           <a:p>
@@ -5613,7 +5714,26 @@
                 </a:solidFill>
                 <a:latin typeface="Tahoma"/>
               </a:rPr>
-              <a:t>•  FG stock kept separately from production</a:t>
+              <a:t>•  Child-part demand calculated by hand</a:t>
+            </a:r>
+          </a:p>
+          <a:p>
+            <a:pPr algn="l">
+              <a:spcBef>
+                <a:spcPts val="0"/>
+              </a:spcBef>
+              <a:spcAft>
+                <a:spcPts val="600"/>
+              </a:spcAft>
+            </a:pPr>
+            <a:r>
+              <a:rPr sz="1250" b="0" i="0">
+                <a:solidFill>
+                  <a:srgbClr val="2C5F2D"/>
+                </a:solidFill>
+                <a:latin typeface="Tahoma"/>
+              </a:rPr>
+              <a:t>•  Stock adjusted without approval</a:t>
             </a:r>
           </a:p>
         </p:txBody>
@@ -5794,7 +5914,7 @@
                 </a:solidFill>
                 <a:latin typeface="Tahoma"/>
               </a:rPr>
-              <a:t>•  EDI mail queued automatically every 15 min, one click to import</a:t>
+              <a:t>•  Store board: WIP calls, child parts, purchasing, raw material, FG receipts</a:t>
             </a:r>
           </a:p>
           <a:p>
@@ -5813,7 +5933,7 @@
                 </a:solidFill>
                 <a:latin typeface="Tahoma"/>
               </a:rPr>
-              <a:t>•  e-SMART upload = customer's final confirmation</a:t>
+              <a:t>•  Closing an FG order explodes the BOM into requests automatically</a:t>
             </a:r>
           </a:p>
           <a:p>
@@ -5832,7 +5952,7 @@
                 </a:solidFill>
                 <a:latin typeface="Tahoma"/>
               </a:rPr>
-              <a:t>•  Delivery countdown in 4 phases; 'shipped' deducts stock</a:t>
+              <a:t>•  Pick scan blocks the wrong part; delivery-point scan</a:t>
             </a:r>
           </a:p>
           <a:p>
@@ -5851,7 +5971,7 @@
                 </a:solidFill>
                 <a:latin typeface="Tahoma"/>
               </a:rPr>
-              <a:t>•  FG enters stock when the line closes the order</a:t>
+              <a:t>•  Goods counted before they enter stock</a:t>
             </a:r>
           </a:p>
         </p:txBody>
@@ -6032,7 +6152,7 @@
                 </a:solidFill>
                 <a:latin typeface="Tahoma"/>
               </a:rPr>
-              <a:t>•  Saving attachments by hand</a:t>
+              <a:t>•  Reading chat to know who needs what</a:t>
             </a:r>
           </a:p>
           <a:p>
@@ -6051,7 +6171,7 @@
                 </a:solidFill>
                 <a:latin typeface="Tahoma"/>
               </a:rPr>
-              <a:t>•  Re-keying FG receipts</a:t>
+              <a:t>•  Calculating child-part demand</a:t>
             </a:r>
           </a:p>
           <a:p>
@@ -6070,7 +6190,7 @@
                 </a:solidFill>
                 <a:latin typeface="Tahoma"/>
               </a:rPr>
-              <a:t>•  Missing which round has no stock (shown red)</a:t>
+              <a:t>•  Wrong-part deliveries (blocked by scan)</a:t>
             </a:r>
           </a:p>
         </p:txBody>
@@ -6165,7 +6285,7 @@
                 </a:solidFill>
                 <a:latin typeface="Tahoma"/>
               </a:rPr>
-              <a:t>receives customer demand · receives FG from Production · alerts Production when stock is short</a:t>
+              <a:t>receives WIP calls from Production · sends purchase needs to Purchasing · receives finished goods from lines</a:t>
             </a:r>
           </a:p>
         </p:txBody>
@@ -6311,7 +6431,7 @@
                 </a:solidFill>
                 <a:latin typeface="Tahoma"/>
               </a:rPr>
-              <a:t>Sales &amp; Planning</a:t>
+              <a:t>Logistic / Delivery / Warehouse</a:t>
             </a:r>
           </a:p>
         </p:txBody>
@@ -6353,7 +6473,7 @@
                 </a:solidFill>
                 <a:latin typeface="Tahoma"/>
               </a:rPr>
-              <a:t>From a 13-sheet Excel to a live board</a:t>
+              <a:t>Customer mail in, delivery rounds out</a:t>
             </a:r>
           </a:p>
         </p:txBody>
@@ -6728,7 +6848,7 @@
                 </a:solidFill>
                 <a:latin typeface="Tahoma"/>
               </a:rPr>
-              <a:t>•  13-sheet monitoring Excel updated by hand every day</a:t>
+              <a:t>•  Ford EDI 830/862 attachments saved and uploaded by hand</a:t>
             </a:r>
           </a:p>
           <a:p>
@@ -6747,7 +6867,7 @@
                 </a:solidFill>
                 <a:latin typeface="Tahoma"/>
               </a:rPr>
-              <a:t>•  Kanban calculated in Excel each month</a:t>
+              <a:t>•  e-SMART downloaded every ~2 hours</a:t>
             </a:r>
           </a:p>
           <a:p>
@@ -6766,7 +6886,7 @@
                 </a:solidFill>
                 <a:latin typeface="Tahoma"/>
               </a:rPr>
-              <a:t>•  Customer part numbers matched to MAT by hand</a:t>
+              <a:t>•  FG stock kept separately from production</a:t>
             </a:r>
           </a:p>
         </p:txBody>
@@ -6947,7 +7067,7 @@
                 </a:solidFill>
                 <a:latin typeface="Tahoma"/>
               </a:rPr>
-              <a:t>•  /monitoring: same sheets, IN / OUT / BALANCE filled from real orders and stock</a:t>
+              <a:t>•  EDI mail queued automatically every 15 min, one click to import</a:t>
             </a:r>
           </a:p>
           <a:p>
@@ -6966,7 +7086,7 @@
                 </a:solidFill>
                 <a:latin typeface="Tahoma"/>
               </a:rPr>
-              <a:t>•  Kanban calculator uses the company calendar and master data</a:t>
+              <a:t>•  e-SMART upload = customer's final confirmation</a:t>
             </a:r>
           </a:p>
           <a:p>
@@ -6985,7 +7105,7 @@
                 </a:solidFill>
                 <a:latin typeface="Tahoma"/>
               </a:rPr>
-              <a:t>•  Production plan: how many shifts, which days need OT</a:t>
+              <a:t>•  Delivery countdown in 4 phases; 'shipped' deducts stock</a:t>
             </a:r>
           </a:p>
           <a:p>
@@ -7004,7 +7124,7 @@
                 </a:solidFill>
                 <a:latin typeface="Tahoma"/>
               </a:rPr>
-              <a:t>•  Customer part → MAT matched automatically, mismatches flagged</a:t>
+              <a:t>•  FG enters stock when the line closes the order</a:t>
             </a:r>
           </a:p>
         </p:txBody>
@@ -7185,7 +7305,7 @@
                 </a:solidFill>
                 <a:latin typeface="Tahoma"/>
               </a:rPr>
-              <a:t>•  Typing production IN / OUT by hand</a:t>
+              <a:t>•  Saving attachments by hand</a:t>
             </a:r>
           </a:p>
           <a:p>
@@ -7204,7 +7324,7 @@
                 </a:solidFill>
                 <a:latin typeface="Tahoma"/>
               </a:rPr>
-              <a:t>•  Re-entering product data every month</a:t>
+              <a:t>•  Re-keying FG receipts</a:t>
             </a:r>
           </a:p>
           <a:p>
@@ -7223,7 +7343,7 @@
                 </a:solidFill>
                 <a:latin typeface="Tahoma"/>
               </a:rPr>
-              <a:t>•  Silent part-number mismatches</a:t>
+              <a:t>•  Missing which round has no stock (shown red)</a:t>
             </a:r>
           </a:p>
         </p:txBody>
@@ -7318,7 +7438,7 @@
                 </a:solidFill>
                 <a:latin typeface="Tahoma"/>
               </a:rPr>
-              <a:t>receives customer demand · gives the plan frame to Production · gives lot sizes to Store</a:t>
+              <a:t>receives customer demand · receives FG from Production · alerts Production when stock is short</a:t>
             </a:r>
           </a:p>
         </p:txBody>
@@ -7464,7 +7584,7 @@
                 </a:solidFill>
                 <a:latin typeface="Tahoma"/>
               </a:rPr>
-              <a:t>Quality (QA)</a:t>
+              <a:t>Sales &amp; Planning</a:t>
             </a:r>
           </a:p>
         </p:txBody>
@@ -7506,7 +7626,7 @@
                 </a:solidFill>
                 <a:latin typeface="Tahoma"/>
               </a:rPr>
-              <a:t>Ready in the system — adoption starts now</a:t>
+              <a:t>From a 13-sheet Excel to a live board</a:t>
             </a:r>
           </a:p>
         </p:txBody>
@@ -7634,7 +7754,7 @@
             <a:avLst/>
           </a:prstGeom>
           <a:solidFill>
-            <a:srgbClr val="C0561E"/>
+            <a:srgbClr val="C88A00"/>
           </a:solidFill>
           <a:ln>
             <a:noFill/>
@@ -7700,7 +7820,7 @@
                 </a:solidFill>
                 <a:latin typeface="Tahoma"/>
               </a:rPr>
-              <a:t>Not started</a:t>
+              <a:t>Partly live</a:t>
             </a:r>
           </a:p>
         </p:txBody>
@@ -7881,7 +8001,7 @@
                 </a:solidFill>
                 <a:latin typeface="Tahoma"/>
               </a:rPr>
-              <a:t>•  Suspect / scrap bin tags and logs on paper</a:t>
+              <a:t>•  13-sheet monitoring Excel updated by hand every day</a:t>
             </a:r>
           </a:p>
           <a:p>
@@ -7900,7 +8020,7 @@
                 </a:solidFill>
                 <a:latin typeface="Tahoma"/>
               </a:rPr>
-              <a:t>•  Writing material requests to Production for test samples</a:t>
+              <a:t>•  Kanban calculated in Excel each month</a:t>
             </a:r>
           </a:p>
           <a:p>
@@ -7919,7 +8039,7 @@
                 </a:solidFill>
                 <a:latin typeface="Tahoma"/>
               </a:rPr>
-              <a:t>•  Production writes scrap forms for parts QA took</a:t>
+              <a:t>•  Customer part numbers matched to MAT by hand</a:t>
             </a:r>
           </a:p>
         </p:txBody>
@@ -8100,7 +8220,7 @@
                 </a:solidFill>
                 <a:latin typeface="Tahoma"/>
               </a:rPr>
-              <a:t>•  Sequential inspection; out-of-spec 'pass' is blocked</a:t>
+              <a:t>•  /monitoring: same sheets, IN / OUT / BALANCE filled from real orders and stock</a:t>
             </a:r>
           </a:p>
           <a:p>
@@ -8119,7 +8239,7 @@
                 </a:solidFill>
                 <a:latin typeface="Tahoma"/>
               </a:rPr>
-              <a:t>•  Yellow / red bins with 4-way QA decision and tag age</a:t>
+              <a:t>•  Kanban calculator uses the company calendar and master data</a:t>
             </a:r>
           </a:p>
           <a:p>
@@ -8138,7 +8258,7 @@
                 </a:solidFill>
                 <a:latin typeface="Tahoma"/>
               </a:rPr>
-              <a:t>•  Material request FM-STO-003 → approve → Store issues</a:t>
+              <a:t>•  Production plan: how many shifts, which days need OT</a:t>
             </a:r>
           </a:p>
           <a:p>
@@ -8157,7 +8277,7 @@
                 </a:solidFill>
                 <a:latin typeface="Tahoma"/>
               </a:rPr>
-              <a:t>•  QA-taken parts flow into the scrap report automatically</a:t>
+              <a:t>•  Customer part → MAT matched automatically, mismatches flagged</a:t>
             </a:r>
           </a:p>
         </p:txBody>
@@ -8338,7 +8458,7 @@
                 </a:solidFill>
                 <a:latin typeface="Tahoma"/>
               </a:rPr>
-              <a:t>•  Double paperwork between QA and Production</a:t>
+              <a:t>•  Typing production IN / OUT by hand</a:t>
             </a:r>
           </a:p>
           <a:p>
@@ -8357,7 +8477,26 @@
                 </a:solidFill>
                 <a:latin typeface="Tahoma"/>
               </a:rPr>
-              <a:t>•  Lost track of bins past their tag age</a:t>
+              <a:t>•  Re-entering product data every month</a:t>
+            </a:r>
+          </a:p>
+          <a:p>
+            <a:pPr algn="l">
+              <a:spcBef>
+                <a:spcPts val="0"/>
+              </a:spcBef>
+              <a:spcAft>
+                <a:spcPts val="600"/>
+              </a:spcAft>
+            </a:pPr>
+            <a:r>
+              <a:rPr sz="1250" b="0" i="0">
+                <a:solidFill>
+                  <a:srgbClr val="2C5F2D"/>
+                </a:solidFill>
+                <a:latin typeface="Tahoma"/>
+              </a:rPr>
+              <a:t>•  Silent part-number mismatches</a:t>
             </a:r>
           </a:p>
         </p:txBody>
@@ -8452,7 +8591,7 @@
                 </a:solidFill>
                 <a:latin typeface="Tahoma"/>
               </a:rPr>
-              <a:t>receives bins and 4M from Production · checks repairs after MTN (step 5) · decisions flow back to Production</a:t>
+              <a:t>receives customer demand · gives the plan frame to Production · gives lot sizes to Store</a:t>
             </a:r>
           </a:p>
         </p:txBody>
@@ -8598,7 +8737,7 @@
                 </a:solidFill>
                 <a:latin typeface="Tahoma"/>
               </a:rPr>
-              <a:t>Process Engineering (PE)</a:t>
+              <a:t>Quality (QA)</a:t>
             </a:r>
           </a:p>
         </p:txBody>
@@ -8640,7 +8779,7 @@
                 </a:solidFill>
                 <a:latin typeface="Tahoma"/>
               </a:rPr>
-              <a:t>One data set instead of three Excel files</a:t>
+              <a:t>Ready in the system — adoption starts now</a:t>
             </a:r>
           </a:p>
         </p:txBody>
@@ -8768,7 +8907,7 @@
             <a:avLst/>
           </a:prstGeom>
           <a:solidFill>
-            <a:srgbClr val="C88A00"/>
+            <a:srgbClr val="C0561E"/>
           </a:solidFill>
           <a:ln>
             <a:noFill/>
@@ -8834,7 +8973,7 @@
                 </a:solidFill>
                 <a:latin typeface="Tahoma"/>
               </a:rPr>
-              <a:t>Partly live</a:t>
+              <a:t>Not started</a:t>
             </a:r>
           </a:p>
         </p:txBody>
@@ -9015,7 +9154,7 @@
                 </a:solidFill>
                 <a:latin typeface="Tahoma"/>
               </a:rPr>
-              <a:t>•  PFC, PFMEA and Control Plan in 3 separate Excel files</a:t>
+              <a:t>•  Suspect / scrap bin tags and logs on paper</a:t>
             </a:r>
           </a:p>
           <a:p>
@@ -9034,7 +9173,7 @@
                 </a:solidFill>
                 <a:latin typeface="Tahoma"/>
               </a:rPr>
-              <a:t>•  Keeping operations consistent across files by hand</a:t>
+              <a:t>•  Writing material requests to Production for test samples</a:t>
             </a:r>
           </a:p>
           <a:p>
@@ -9053,7 +9192,7 @@
                 </a:solidFill>
                 <a:latin typeface="Tahoma"/>
               </a:rPr>
-              <a:t>•  Revision history in file names</a:t>
+              <a:t>•  Production writes scrap forms for parts QA took</a:t>
             </a:r>
           </a:p>
         </p:txBody>
@@ -9234,7 +9373,7 @@
                 </a:solidFill>
                 <a:latin typeface="Tahoma"/>
               </a:rPr>
-              <a:t>•  /pe-docs: one data set, three views on the same operations</a:t>
+              <a:t>•  Sequential inspection; out-of-spec 'pass' is blocked</a:t>
             </a:r>
           </a:p>
           <a:p>
@@ -9253,7 +9392,7 @@
                 </a:solidFill>
                 <a:latin typeface="Tahoma"/>
               </a:rPr>
-              <a:t>•  Import existing Excel; export PFMEA / CP to Excel</a:t>
+              <a:t>•  Yellow / red bins with 4-way QA decision and tag age</a:t>
             </a:r>
           </a:p>
           <a:p>
@@ -9272,7 +9411,7 @@
                 </a:solidFill>
                 <a:latin typeface="Tahoma"/>
               </a:rPr>
-              <a:t>•  Process flow drawn from the data</a:t>
+              <a:t>•  Material request FM-STO-003 → approve → Store issues</a:t>
             </a:r>
           </a:p>
           <a:p>
@@ -9291,7 +9430,7 @@
                 </a:solidFill>
                 <a:latin typeface="Tahoma"/>
               </a:rPr>
-              <a:t>•  Revision linked to its cause (claim / NCR / defect)</a:t>
+              <a:t>•  QA-taken parts flow into the scrap report automatically</a:t>
             </a:r>
           </a:p>
         </p:txBody>
@@ -9472,7 +9611,7 @@
                 </a:solidFill>
                 <a:latin typeface="Tahoma"/>
               </a:rPr>
-              <a:t>•  Maintaining 3 files in sync</a:t>
+              <a:t>•  Double paperwork between QA and Production</a:t>
             </a:r>
           </a:p>
           <a:p>
@@ -9491,7 +9630,7 @@
                 </a:solidFill>
                 <a:latin typeface="Tahoma"/>
               </a:rPr>
-              <a:t>•  Searching which revision came from which claim</a:t>
+              <a:t>•  Lost track of bins past their tag age</a:t>
             </a:r>
           </a:p>
         </p:txBody>
@@ -9586,7 +9725,7 @@
                 </a:solidFill>
                 <a:latin typeface="Tahoma"/>
               </a:rPr>
-              <a:t>shares PFMEA / CP with QA and Production · receives cycle times and claims</a:t>
+              <a:t>receives bins and 4M from Production · checks repairs after MTN (step 5) · decisions flow back to Production</a:t>
             </a:r>
           </a:p>
         </p:txBody>
@@ -9732,7 +9871,7 @@
                 </a:solidFill>
                 <a:latin typeface="Tahoma"/>
               </a:rPr>
-              <a:t>HR &amp; Administration</a:t>
+              <a:t>Process Engineering (PE)</a:t>
             </a:r>
           </a:p>
         </p:txBody>
@@ -9774,7 +9913,7 @@
                 </a:solidFill>
                 <a:latin typeface="Tahoma"/>
               </a:rPr>
-              <a:t>Training, attendance and the calendar everyone depends on</a:t>
+              <a:t>One data set instead of three Excel files</a:t>
             </a:r>
           </a:p>
         </p:txBody>
@@ -10149,7 +10288,7 @@
                 </a:solidFill>
                 <a:latin typeface="Tahoma"/>
               </a:rPr>
-              <a:t>•  OJT form FM-HRM-004 signed on paper</a:t>
+              <a:t>•  PFC, PFMEA and Control Plan in 3 separate Excel files</a:t>
             </a:r>
           </a:p>
           <a:p>
@@ -10168,7 +10307,7 @@
                 </a:solidFill>
                 <a:latin typeface="Tahoma"/>
               </a:rPr>
-              <a:t>•  Monthly KPI pack (FM-HRM-6-022/024/025) printed and signed</a:t>
+              <a:t>•  Keeping operations consistent across files by hand</a:t>
             </a:r>
           </a:p>
           <a:p>
@@ -10187,7 +10326,7 @@
                 </a:solidFill>
                 <a:latin typeface="Tahoma"/>
               </a:rPr>
-              <a:t>•  Attendance and OT bus booking by hand</a:t>
+              <a:t>•  Revision history in file names</a:t>
             </a:r>
           </a:p>
         </p:txBody>
@@ -10368,7 +10507,7 @@
                 </a:solidFill>
                 <a:latin typeface="Tahoma"/>
               </a:rPr>
-              <a:t>•  /ojt-training: scores and signatures on screen, printable</a:t>
+              <a:t>•  /pe-docs: one data set, three views on the same operations</a:t>
             </a:r>
           </a:p>
           <a:p>
@@ -10387,7 +10526,7 @@
                 </a:solidFill>
                 <a:latin typeface="Tahoma"/>
               </a:rPr>
-              <a:t>•  KPI pack exported to Excel in the HR form layout</a:t>
+              <a:t>•  Import existing Excel; export PFMEA / CP to Excel</a:t>
             </a:r>
           </a:p>
           <a:p>
@@ -10406,7 +10545,7 @@
                 </a:solidFill>
                 <a:latin typeface="Tahoma"/>
               </a:rPr>
-              <a:t>•  Check-in: attendance, PPE and OT bus in one screen</a:t>
+              <a:t>•  Process flow drawn from the data</a:t>
             </a:r>
           </a:p>
           <a:p>
@@ -10425,7 +10564,7 @@
                 </a:solidFill>
                 <a:latin typeface="Tahoma"/>
               </a:rPr>
-              <a:t>•  Company calendar drives kanban, plan, PM and LPA</a:t>
+              <a:t>•  Revision linked to its cause (claim / NCR / defect)</a:t>
             </a:r>
           </a:p>
         </p:txBody>
@@ -10606,7 +10745,7 @@
                 </a:solidFill>
                 <a:latin typeface="Tahoma"/>
               </a:rPr>
-              <a:t>•  Printing and chasing signatures</a:t>
+              <a:t>•  Maintaining 3 files in sync</a:t>
             </a:r>
           </a:p>
           <a:p>
@@ -10625,26 +10764,7 @@
                 </a:solidFill>
                 <a:latin typeface="Tahoma"/>
               </a:rPr>
-              <a:t>•  Re-typing KPI packs</a:t>
-            </a:r>
-          </a:p>
-          <a:p>
-            <a:pPr algn="l">
-              <a:spcBef>
-                <a:spcPts val="0"/>
-              </a:spcBef>
-              <a:spcAft>
-                <a:spcPts val="600"/>
-              </a:spcAft>
-            </a:pPr>
-            <a:r>
-              <a:rPr sz="1250" b="0" i="0">
-                <a:solidFill>
-                  <a:srgbClr val="2C5F2D"/>
-                </a:solidFill>
-                <a:latin typeface="Tahoma"/>
-              </a:rPr>
-              <a:t>•  Wrong working-day counts (calendar now set to 2027)</a:t>
+              <a:t>•  Searching which revision came from which claim</a:t>
             </a:r>
           </a:p>
         </p:txBody>
@@ -10739,7 +10859,7 @@
                 </a:solidFill>
                 <a:latin typeface="Tahoma"/>
               </a:rPr>
-              <a:t>the calendar feeds every department · attendance feeds manpower and skills</a:t>
+              <a:t>shares PFMEA / CP with QA and Production · receives cycle times and claims</a:t>
             </a:r>
           </a:p>
         </p:txBody>
@@ -10885,7 +11005,7 @@
                 </a:solidFill>
                 <a:latin typeface="Tahoma"/>
               </a:rPr>
-              <a:t>Management / OBEYA</a:t>
+              <a:t>HR &amp; Administration</a:t>
             </a:r>
           </a:p>
         </p:txBody>
@@ -10927,7 +11047,7 @@
                 </a:solidFill>
                 <a:latin typeface="Tahoma"/>
               </a:rPr>
-              <a:t>From a paper wall to one scoreboard</a:t>
+              <a:t>Training, attendance and the calendar everyone depends on</a:t>
             </a:r>
           </a:p>
         </p:txBody>
@@ -11302,7 +11422,7 @@
                 </a:solidFill>
                 <a:latin typeface="Tahoma"/>
               </a:rPr>
-              <a:t>•  Paper OBEYA KPI board on the wall</a:t>
+              <a:t>•  OJT form FM-HRM-004 signed on paper</a:t>
             </a:r>
           </a:p>
           <a:p>
@@ -11321,7 +11441,7 @@
                 </a:solidFill>
                 <a:latin typeface="Tahoma"/>
               </a:rPr>
-              <a:t>•  Review deck and Excel even disagreed on targets</a:t>
+              <a:t>•  Monthly KPI pack (FM-HRM-6-022/024/025) printed and signed</a:t>
             </a:r>
           </a:p>
           <a:p>
@@ -11340,26 +11460,7 @@
                 </a:solidFill>
                 <a:latin typeface="Tahoma"/>
               </a:rPr>
-              <a:t>•  Decisions stayed in heads, chat or paper</a:t>
-            </a:r>
-          </a:p>
-          <a:p>
-            <a:pPr algn="l">
-              <a:spcBef>
-                <a:spcPts val="0"/>
-              </a:spcBef>
-              <a:spcAft>
-                <a:spcPts val="600"/>
-              </a:spcAft>
-            </a:pPr>
-            <a:r>
-              <a:rPr sz="1250" b="0" i="0">
-                <a:solidFill>
-                  <a:srgbClr val="2C5F2D"/>
-                </a:solidFill>
-                <a:latin typeface="Tahoma"/>
-              </a:rPr>
-              <a:t>•  Tracing = searching files, asking shift leaders</a:t>
+              <a:t>•  Attendance and OT bus booking by hand</a:t>
             </a:r>
           </a:p>
         </p:txBody>
@@ -11540,7 +11641,7 @@
                 </a:solidFill>
                 <a:latin typeface="Tahoma"/>
               </a:rPr>
-              <a:t>•  /obeya: monthly KPI + daily SQDCM, one scoring rule for every screen</a:t>
+              <a:t>•  /ojt-training: scores and signatures on screen, printable</a:t>
             </a:r>
           </a:p>
           <a:p>
@@ -11559,7 +11660,7 @@
                 </a:solidFill>
                 <a:latin typeface="Tahoma"/>
               </a:rPr>
-              <a:t>•  Factory map and TV Andon for every line</a:t>
+              <a:t>•  KPI pack exported to Excel in the HR form layout</a:t>
             </a:r>
           </a:p>
           <a:p>
@@ -11578,7 +11679,7 @@
                 </a:solidFill>
                 <a:latin typeface="Tahoma"/>
               </a:rPr>
-              <a:t>•  /order-trace: one order number shows the whole chain</a:t>
+              <a:t>•  Check-in: attendance, PPE and OT bus in one screen</a:t>
             </a:r>
           </a:p>
           <a:p>
@@ -11597,7 +11698,7 @@
                 </a:solidFill>
                 <a:latin typeface="Tahoma"/>
               </a:rPr>
-              <a:t>•  Action board: owner and due date for every miss</a:t>
+              <a:t>•  Company calendar drives kanban, plan, PM and LPA</a:t>
             </a:r>
           </a:p>
         </p:txBody>
@@ -11778,7 +11879,7 @@
                 </a:solidFill>
                 <a:latin typeface="Tahoma"/>
               </a:rPr>
-              <a:t>•  Arguing which number is right</a:t>
+              <a:t>•  Printing and chasing signatures</a:t>
             </a:r>
           </a:p>
           <a:p>
@@ -11797,7 +11898,7 @@
                 </a:solidFill>
                 <a:latin typeface="Tahoma"/>
               </a:rPr>
-              <a:t>•  Updating the wall board by hand</a:t>
+              <a:t>•  Re-typing KPI packs</a:t>
             </a:r>
           </a:p>
           <a:p>
@@ -11816,7 +11917,7 @@
                 </a:solidFill>
                 <a:latin typeface="Tahoma"/>
               </a:rPr>
-              <a:t>•  Hours of tracing (seconds now)</a:t>
+              <a:t>•  Wrong working-day counts (calendar now set to 2027)</a:t>
             </a:r>
           </a:p>
         </p:txBody>
@@ -11911,7 +12012,7 @@
                 </a:solidFill>
                 <a:latin typeface="Tahoma"/>
               </a:rPr>
-              <a:t>sees every department's data · assigns actions back to departments</a:t>
+              <a:t>the calendar feeds every department · attendance feeds manpower and skills</a:t>
             </a:r>
           </a:p>
         </p:txBody>
@@ -12057,7 +12158,7 @@
                 </a:solidFill>
                 <a:latin typeface="Tahoma"/>
               </a:rPr>
-              <a:t>What is still slow — and we say it openly</a:t>
+              <a:t>Management / OBEYA</a:t>
             </a:r>
           </a:p>
         </p:txBody>
@@ -12099,7 +12200,7 @@
                 </a:solidFill>
                 <a:latin typeface="Tahoma"/>
               </a:rPr>
-              <a:t>Measured from ESM database · 06 Oct 2026</a:t>
+              <a:t>From a paper wall to one scoreboard</a:t>
             </a:r>
           </a:p>
         </p:txBody>
@@ -12220,8 +12321,94 @@
         </p:nvSpPr>
         <p:spPr>
           <a:xfrm>
-            <a:off x="457200" y="1691640"/>
-            <a:ext cx="2176272" cy="1600200"/>
+            <a:off x="9646920" y="1069848"/>
+            <a:ext cx="2103120" cy="347472"/>
+          </a:xfrm>
+          <a:prstGeom prst="roundRect">
+            <a:avLst/>
+          </a:prstGeom>
+          <a:solidFill>
+            <a:srgbClr val="C88A00"/>
+          </a:solidFill>
+          <a:ln>
+            <a:noFill/>
+          </a:ln>
+          <a:effectLst/>
+        </p:spPr>
+        <p:style>
+          <a:lnRef idx="1">
+            <a:schemeClr val="accent1"/>
+          </a:lnRef>
+          <a:fillRef idx="3">
+            <a:schemeClr val="accent1"/>
+          </a:fillRef>
+          <a:effectRef idx="2">
+            <a:schemeClr val="accent1"/>
+          </a:effectRef>
+          <a:fontRef idx="minor">
+            <a:schemeClr val="lt1"/>
+          </a:fontRef>
+        </p:style>
+        <p:txBody>
+          <a:bodyPr rtlCol="0" anchor="ctr"/>
+          <a:lstStyle/>
+          <a:p>
+            <a:pPr algn="ctr"/>
+          </a:p>
+        </p:txBody>
+      </p:sp>
+      <p:sp>
+        <p:nvSpPr>
+          <p:cNvPr id="8" name="TextBox 7"/>
+          <p:cNvSpPr txBox="1"/>
+          <p:nvPr/>
+        </p:nvSpPr>
+        <p:spPr>
+          <a:xfrm>
+            <a:off x="9646920" y="1069848"/>
+            <a:ext cx="2103120" cy="347472"/>
+          </a:xfrm>
+          <a:prstGeom prst="rect">
+            <a:avLst/>
+          </a:prstGeom>
+          <a:noFill/>
+        </p:spPr>
+        <p:txBody>
+          <a:bodyPr wrap="square" anchor="ctr" lIns="27432" rIns="27432" tIns="9144" bIns="9144">
+            <a:spAutoFit/>
+          </a:bodyPr>
+          <a:lstStyle/>
+          <a:p>
+            <a:pPr algn="ctr">
+              <a:spcBef>
+                <a:spcPts val="0"/>
+              </a:spcBef>
+              <a:spcAft>
+                <a:spcPts val="200"/>
+              </a:spcAft>
+            </a:pPr>
+            <a:r>
+              <a:rPr sz="1200" b="1" i="0">
+                <a:solidFill>
+                  <a:srgbClr val="FFFFFF"/>
+                </a:solidFill>
+                <a:latin typeface="Tahoma"/>
+              </a:rPr>
+              <a:t>Partly live</a:t>
+            </a:r>
+          </a:p>
+        </p:txBody>
+      </p:sp>
+      <p:sp>
+        <p:nvSpPr>
+          <p:cNvPr id="9" name="Rounded Rectangle 8"/>
+          <p:cNvSpPr/>
+          <p:nvPr/>
+        </p:nvSpPr>
+        <p:spPr>
+          <a:xfrm>
+            <a:off x="457200" y="1600200"/>
+            <a:ext cx="3657600" cy="3383280"/>
           </a:xfrm>
           <a:prstGeom prst="roundRect">
             <a:avLst/>
@@ -12267,14 +12454,58 @@
       </p:sp>
       <p:sp>
         <p:nvSpPr>
-          <p:cNvPr id="8" name="TextBox 7"/>
-          <p:cNvSpPr txBox="1"/>
-          <p:nvPr/>
-        </p:nvSpPr>
-        <p:spPr>
-          <a:xfrm>
-            <a:off x="457200" y="1801368"/>
-            <a:ext cx="2176272" cy="685800"/>
+          <p:cNvPr id="10" name="Rectangle 9"/>
+          <p:cNvSpPr/>
+          <p:nvPr/>
+        </p:nvSpPr>
+        <p:spPr>
+          <a:xfrm>
+            <a:off x="457200" y="1600200"/>
+            <a:ext cx="3657600" cy="420624"/>
+          </a:xfrm>
+          <a:prstGeom prst="rect">
+            <a:avLst/>
+          </a:prstGeom>
+          <a:solidFill>
+            <a:srgbClr val="555555"/>
+          </a:solidFill>
+          <a:ln>
+            <a:noFill/>
+          </a:ln>
+          <a:effectLst/>
+        </p:spPr>
+        <p:style>
+          <a:lnRef idx="1">
+            <a:schemeClr val="accent1"/>
+          </a:lnRef>
+          <a:fillRef idx="3">
+            <a:schemeClr val="accent1"/>
+          </a:fillRef>
+          <a:effectRef idx="2">
+            <a:schemeClr val="accent1"/>
+          </a:effectRef>
+          <a:fontRef idx="minor">
+            <a:schemeClr val="lt1"/>
+          </a:fontRef>
+        </p:style>
+        <p:txBody>
+          <a:bodyPr rtlCol="0" anchor="ctr"/>
+          <a:lstStyle/>
+          <a:p>
+            <a:pPr algn="ctr"/>
+          </a:p>
+        </p:txBody>
+      </p:sp>
+      <p:sp>
+        <p:nvSpPr>
+          <p:cNvPr id="11" name="TextBox 10"/>
+          <p:cNvSpPr txBox="1"/>
+          <p:nvPr/>
+        </p:nvSpPr>
+        <p:spPr>
+          <a:xfrm>
+            <a:off x="457200" y="1600200"/>
+            <a:ext cx="3657600" cy="420624"/>
           </a:xfrm>
           <a:prstGeom prst="rect">
             <a:avLst/>
@@ -12296,27 +12527,27 @@
               </a:spcAft>
             </a:pPr>
             <a:r>
-              <a:rPr sz="3000" b="1" i="0">
-                <a:solidFill>
-                  <a:srgbClr val="C0561E"/>
-                </a:solidFill>
-                <a:latin typeface="Tahoma"/>
-              </a:rPr>
-              <a:t>205</a:t>
-            </a:r>
-          </a:p>
-        </p:txBody>
-      </p:sp>
-      <p:sp>
-        <p:nvSpPr>
-          <p:cNvPr id="9" name="TextBox 8"/>
-          <p:cNvSpPr txBox="1"/>
-          <p:nvPr/>
-        </p:nvSpPr>
-        <p:spPr>
-          <a:xfrm>
-            <a:off x="548640" y="2514600"/>
-            <a:ext cx="1993391" cy="411480"/>
+              <a:rPr sz="1500" b="1" i="0">
+                <a:solidFill>
+                  <a:srgbClr val="FFFFFF"/>
+                </a:solidFill>
+                <a:latin typeface="Tahoma"/>
+              </a:rPr>
+              <a:t>BEFORE  (manual)</a:t>
+            </a:r>
+          </a:p>
+        </p:txBody>
+      </p:sp>
+      <p:sp>
+        <p:nvSpPr>
+          <p:cNvPr id="12" name="TextBox 11"/>
+          <p:cNvSpPr txBox="1"/>
+          <p:nvPr/>
+        </p:nvSpPr>
+        <p:spPr>
+          <a:xfrm>
+            <a:off x="594360" y="2148840"/>
+            <a:ext cx="3383280" cy="2743200"/>
           </a:xfrm>
           <a:prstGeom prst="rect">
             <a:avLst/>
@@ -12329,78 +12560,93 @@
           </a:bodyPr>
           <a:lstStyle/>
           <a:p>
-            <a:pPr algn="ctr">
-              <a:spcBef>
-                <a:spcPts val="0"/>
-              </a:spcBef>
-              <a:spcAft>
-                <a:spcPts val="200"/>
-              </a:spcAft>
-            </a:pPr>
-            <a:r>
-              <a:rPr sz="1250" b="1" i="0">
-                <a:solidFill>
-                  <a:srgbClr val="0D3D14"/>
-                </a:solidFill>
-                <a:latin typeface="Tahoma"/>
-              </a:rPr>
-              <a:t>Repair orders waiting for QA</a:t>
-            </a:r>
-          </a:p>
-        </p:txBody>
-      </p:sp>
-      <p:sp>
-        <p:nvSpPr>
-          <p:cNvPr id="10" name="TextBox 9"/>
-          <p:cNvSpPr txBox="1"/>
-          <p:nvPr/>
-        </p:nvSpPr>
-        <p:spPr>
-          <a:xfrm>
-            <a:off x="548640" y="2880360"/>
-            <a:ext cx="1993391" cy="365760"/>
-          </a:xfrm>
-          <a:prstGeom prst="rect">
-            <a:avLst/>
-          </a:prstGeom>
-          <a:noFill/>
-        </p:spPr>
-        <p:txBody>
-          <a:bodyPr wrap="square" anchor="t" lIns="27432" rIns="27432" tIns="9144" bIns="9144">
-            <a:spAutoFit/>
-          </a:bodyPr>
-          <a:lstStyle/>
-          <a:p>
-            <a:pPr algn="ctr">
-              <a:spcBef>
-                <a:spcPts val="0"/>
-              </a:spcBef>
-              <a:spcAft>
-                <a:spcPts val="200"/>
-              </a:spcAft>
-            </a:pPr>
-            <a:r>
-              <a:rPr sz="1100" b="0" i="0">
-                <a:solidFill>
-                  <a:srgbClr val="555555"/>
-                </a:solidFill>
-                <a:latin typeface="Tahoma"/>
-              </a:rPr>
-              <a:t>median wait 13 days</a:t>
-            </a:r>
-          </a:p>
-        </p:txBody>
-      </p:sp>
-      <p:sp>
-        <p:nvSpPr>
-          <p:cNvPr id="11" name="Rounded Rectangle 10"/>
+            <a:pPr algn="l">
+              <a:spcBef>
+                <a:spcPts val="0"/>
+              </a:spcBef>
+              <a:spcAft>
+                <a:spcPts val="600"/>
+              </a:spcAft>
+            </a:pPr>
+            <a:r>
+              <a:rPr sz="1250" b="0" i="0">
+                <a:solidFill>
+                  <a:srgbClr val="2C5F2D"/>
+                </a:solidFill>
+                <a:latin typeface="Tahoma"/>
+              </a:rPr>
+              <a:t>•  Paper OBEYA KPI board on the wall</a:t>
+            </a:r>
+          </a:p>
+          <a:p>
+            <a:pPr algn="l">
+              <a:spcBef>
+                <a:spcPts val="0"/>
+              </a:spcBef>
+              <a:spcAft>
+                <a:spcPts val="600"/>
+              </a:spcAft>
+            </a:pPr>
+            <a:r>
+              <a:rPr sz="1250" b="0" i="0">
+                <a:solidFill>
+                  <a:srgbClr val="2C5F2D"/>
+                </a:solidFill>
+                <a:latin typeface="Tahoma"/>
+              </a:rPr>
+              <a:t>•  Review deck and Excel even disagreed on targets</a:t>
+            </a:r>
+          </a:p>
+          <a:p>
+            <a:pPr algn="l">
+              <a:spcBef>
+                <a:spcPts val="0"/>
+              </a:spcBef>
+              <a:spcAft>
+                <a:spcPts val="600"/>
+              </a:spcAft>
+            </a:pPr>
+            <a:r>
+              <a:rPr sz="1250" b="0" i="0">
+                <a:solidFill>
+                  <a:srgbClr val="2C5F2D"/>
+                </a:solidFill>
+                <a:latin typeface="Tahoma"/>
+              </a:rPr>
+              <a:t>•  Decisions stayed in heads, chat or paper</a:t>
+            </a:r>
+          </a:p>
+          <a:p>
+            <a:pPr algn="l">
+              <a:spcBef>
+                <a:spcPts val="0"/>
+              </a:spcBef>
+              <a:spcAft>
+                <a:spcPts val="600"/>
+              </a:spcAft>
+            </a:pPr>
+            <a:r>
+              <a:rPr sz="1250" b="0" i="0">
+                <a:solidFill>
+                  <a:srgbClr val="2C5F2D"/>
+                </a:solidFill>
+                <a:latin typeface="Tahoma"/>
+              </a:rPr>
+              <a:t>•  Tracing = searching files, asking shift leaders</a:t>
+            </a:r>
+          </a:p>
+        </p:txBody>
+      </p:sp>
+      <p:sp>
+        <p:nvSpPr>
+          <p:cNvPr id="13" name="Rounded Rectangle 12"/>
           <p:cNvSpPr/>
           <p:nvPr/>
         </p:nvSpPr>
         <p:spPr>
           <a:xfrm>
-            <a:off x="2743200" y="1691640"/>
-            <a:ext cx="2176272" cy="1600200"/>
+            <a:off x="4270248" y="1600200"/>
+            <a:ext cx="3657600" cy="3383280"/>
           </a:xfrm>
           <a:prstGeom prst="roundRect">
             <a:avLst/>
@@ -12446,14 +12692,58 @@
       </p:sp>
       <p:sp>
         <p:nvSpPr>
-          <p:cNvPr id="12" name="TextBox 11"/>
-          <p:cNvSpPr txBox="1"/>
-          <p:nvPr/>
-        </p:nvSpPr>
-        <p:spPr>
-          <a:xfrm>
-            <a:off x="2743200" y="1801368"/>
-            <a:ext cx="2176272" cy="685800"/>
+          <p:cNvPr id="14" name="Rectangle 13"/>
+          <p:cNvSpPr/>
+          <p:nvPr/>
+        </p:nvSpPr>
+        <p:spPr>
+          <a:xfrm>
+            <a:off x="4270248" y="1600200"/>
+            <a:ext cx="3657600" cy="420624"/>
+          </a:xfrm>
+          <a:prstGeom prst="rect">
+            <a:avLst/>
+          </a:prstGeom>
+          <a:solidFill>
+            <a:srgbClr val="0D3D14"/>
+          </a:solidFill>
+          <a:ln>
+            <a:noFill/>
+          </a:ln>
+          <a:effectLst/>
+        </p:spPr>
+        <p:style>
+          <a:lnRef idx="1">
+            <a:schemeClr val="accent1"/>
+          </a:lnRef>
+          <a:fillRef idx="3">
+            <a:schemeClr val="accent1"/>
+          </a:fillRef>
+          <a:effectRef idx="2">
+            <a:schemeClr val="accent1"/>
+          </a:effectRef>
+          <a:fontRef idx="minor">
+            <a:schemeClr val="lt1"/>
+          </a:fontRef>
+        </p:style>
+        <p:txBody>
+          <a:bodyPr rtlCol="0" anchor="ctr"/>
+          <a:lstStyle/>
+          <a:p>
+            <a:pPr algn="ctr"/>
+          </a:p>
+        </p:txBody>
+      </p:sp>
+      <p:sp>
+        <p:nvSpPr>
+          <p:cNvPr id="15" name="TextBox 14"/>
+          <p:cNvSpPr txBox="1"/>
+          <p:nvPr/>
+        </p:nvSpPr>
+        <p:spPr>
+          <a:xfrm>
+            <a:off x="4270248" y="1600200"/>
+            <a:ext cx="3657600" cy="420624"/>
           </a:xfrm>
           <a:prstGeom prst="rect">
             <a:avLst/>
@@ -12475,27 +12765,27 @@
               </a:spcAft>
             </a:pPr>
             <a:r>
-              <a:rPr sz="3000" b="1" i="0">
-                <a:solidFill>
-                  <a:srgbClr val="C0561E"/>
-                </a:solidFill>
-                <a:latin typeface="Tahoma"/>
-              </a:rPr>
-              <a:t>97 h</a:t>
-            </a:r>
-          </a:p>
-        </p:txBody>
-      </p:sp>
-      <p:sp>
-        <p:nvSpPr>
-          <p:cNvPr id="13" name="TextBox 12"/>
-          <p:cNvSpPr txBox="1"/>
-          <p:nvPr/>
-        </p:nvSpPr>
-        <p:spPr>
-          <a:xfrm>
-            <a:off x="2834640" y="2514600"/>
-            <a:ext cx="1993391" cy="411480"/>
+              <a:rPr sz="1500" b="1" i="0">
+                <a:solidFill>
+                  <a:srgbClr val="FFFFFF"/>
+                </a:solidFill>
+                <a:latin typeface="Tahoma"/>
+              </a:rPr>
+              <a:t>WITH ESM</a:t>
+            </a:r>
+          </a:p>
+        </p:txBody>
+      </p:sp>
+      <p:sp>
+        <p:nvSpPr>
+          <p:cNvPr id="16" name="TextBox 15"/>
+          <p:cNvSpPr txBox="1"/>
+          <p:nvPr/>
+        </p:nvSpPr>
+        <p:spPr>
+          <a:xfrm>
+            <a:off x="4407408" y="2148840"/>
+            <a:ext cx="3383280" cy="2743200"/>
           </a:xfrm>
           <a:prstGeom prst="rect">
             <a:avLst/>
@@ -12508,78 +12798,93 @@
           </a:bodyPr>
           <a:lstStyle/>
           <a:p>
-            <a:pPr algn="ctr">
-              <a:spcBef>
-                <a:spcPts val="0"/>
-              </a:spcBef>
-              <a:spcAft>
-                <a:spcPts val="200"/>
-              </a:spcAft>
-            </a:pPr>
-            <a:r>
-              <a:rPr sz="1250" b="1" i="0">
-                <a:solidFill>
-                  <a:srgbClr val="0D3D14"/>
-                </a:solidFill>
-                <a:latin typeface="Tahoma"/>
-              </a:rPr>
-              <a:t>Repair order → closed</a:t>
-            </a:r>
-          </a:p>
-        </p:txBody>
-      </p:sp>
-      <p:sp>
-        <p:nvSpPr>
-          <p:cNvPr id="14" name="TextBox 13"/>
-          <p:cNvSpPr txBox="1"/>
-          <p:nvPr/>
-        </p:nvSpPr>
-        <p:spPr>
-          <a:xfrm>
-            <a:off x="2834640" y="2880360"/>
-            <a:ext cx="1993391" cy="365760"/>
-          </a:xfrm>
-          <a:prstGeom prst="rect">
-            <a:avLst/>
-          </a:prstGeom>
-          <a:noFill/>
-        </p:spPr>
-        <p:txBody>
-          <a:bodyPr wrap="square" anchor="t" lIns="27432" rIns="27432" tIns="9144" bIns="9144">
-            <a:spAutoFit/>
-          </a:bodyPr>
-          <a:lstStyle/>
-          <a:p>
-            <a:pPr algn="ctr">
-              <a:spcBef>
-                <a:spcPts val="0"/>
-              </a:spcBef>
-              <a:spcAft>
-                <a:spcPts val="200"/>
-              </a:spcAft>
-            </a:pPr>
-            <a:r>
-              <a:rPr sz="1100" b="0" i="0">
-                <a:solidFill>
-                  <a:srgbClr val="555555"/>
-                </a:solidFill>
-                <a:latin typeface="Tahoma"/>
-              </a:rPr>
-              <a:t>median · Sep (fixed fast, closed slow)</a:t>
-            </a:r>
-          </a:p>
-        </p:txBody>
-      </p:sp>
-      <p:sp>
-        <p:nvSpPr>
-          <p:cNvPr id="15" name="Rounded Rectangle 14"/>
+            <a:pPr algn="l">
+              <a:spcBef>
+                <a:spcPts val="0"/>
+              </a:spcBef>
+              <a:spcAft>
+                <a:spcPts val="600"/>
+              </a:spcAft>
+            </a:pPr>
+            <a:r>
+              <a:rPr sz="1250" b="0" i="0">
+                <a:solidFill>
+                  <a:srgbClr val="2C5F2D"/>
+                </a:solidFill>
+                <a:latin typeface="Tahoma"/>
+              </a:rPr>
+              <a:t>•  /obeya: monthly KPI + daily SQDCM, one scoring rule for every screen</a:t>
+            </a:r>
+          </a:p>
+          <a:p>
+            <a:pPr algn="l">
+              <a:spcBef>
+                <a:spcPts val="0"/>
+              </a:spcBef>
+              <a:spcAft>
+                <a:spcPts val="600"/>
+              </a:spcAft>
+            </a:pPr>
+            <a:r>
+              <a:rPr sz="1250" b="0" i="0">
+                <a:solidFill>
+                  <a:srgbClr val="2C5F2D"/>
+                </a:solidFill>
+                <a:latin typeface="Tahoma"/>
+              </a:rPr>
+              <a:t>•  Factory map and TV Andon for every line</a:t>
+            </a:r>
+          </a:p>
+          <a:p>
+            <a:pPr algn="l">
+              <a:spcBef>
+                <a:spcPts val="0"/>
+              </a:spcBef>
+              <a:spcAft>
+                <a:spcPts val="600"/>
+              </a:spcAft>
+            </a:pPr>
+            <a:r>
+              <a:rPr sz="1250" b="0" i="0">
+                <a:solidFill>
+                  <a:srgbClr val="2C5F2D"/>
+                </a:solidFill>
+                <a:latin typeface="Tahoma"/>
+              </a:rPr>
+              <a:t>•  /order-trace: one order number shows the whole chain</a:t>
+            </a:r>
+          </a:p>
+          <a:p>
+            <a:pPr algn="l">
+              <a:spcBef>
+                <a:spcPts val="0"/>
+              </a:spcBef>
+              <a:spcAft>
+                <a:spcPts val="600"/>
+              </a:spcAft>
+            </a:pPr>
+            <a:r>
+              <a:rPr sz="1250" b="0" i="0">
+                <a:solidFill>
+                  <a:srgbClr val="2C5F2D"/>
+                </a:solidFill>
+                <a:latin typeface="Tahoma"/>
+              </a:rPr>
+              <a:t>•  Action board: owner and due date for every miss</a:t>
+            </a:r>
+          </a:p>
+        </p:txBody>
+      </p:sp>
+      <p:sp>
+        <p:nvSpPr>
+          <p:cNvPr id="17" name="Rounded Rectangle 16"/>
           <p:cNvSpPr/>
           <p:nvPr/>
         </p:nvSpPr>
         <p:spPr>
           <a:xfrm>
-            <a:off x="5029200" y="1691640"/>
-            <a:ext cx="2176272" cy="1600200"/>
+            <a:off x="8083296" y="1600200"/>
+            <a:ext cx="3657600" cy="3383280"/>
           </a:xfrm>
           <a:prstGeom prst="roundRect">
             <a:avLst/>
@@ -12625,160 +12930,25 @@
       </p:sp>
       <p:sp>
         <p:nvSpPr>
-          <p:cNvPr id="16" name="TextBox 15"/>
-          <p:cNvSpPr txBox="1"/>
-          <p:nvPr/>
-        </p:nvSpPr>
-        <p:spPr>
-          <a:xfrm>
-            <a:off x="5029200" y="1801368"/>
-            <a:ext cx="2176272" cy="685800"/>
-          </a:xfrm>
-          <a:prstGeom prst="rect">
-            <a:avLst/>
-          </a:prstGeom>
-          <a:noFill/>
-        </p:spPr>
-        <p:txBody>
-          <a:bodyPr wrap="square" anchor="ctr" lIns="27432" rIns="27432" tIns="9144" bIns="9144">
-            <a:spAutoFit/>
-          </a:bodyPr>
-          <a:lstStyle/>
-          <a:p>
-            <a:pPr algn="ctr">
-              <a:spcBef>
-                <a:spcPts val="0"/>
-              </a:spcBef>
-              <a:spcAft>
-                <a:spcPts val="200"/>
-              </a:spcAft>
-            </a:pPr>
-            <a:r>
-              <a:rPr sz="3000" b="1" i="0">
-                <a:solidFill>
-                  <a:srgbClr val="C0561E"/>
-                </a:solidFill>
-                <a:latin typeface="Tahoma"/>
-              </a:rPr>
-              <a:t>13 h</a:t>
-            </a:r>
-          </a:p>
-        </p:txBody>
-      </p:sp>
-      <p:sp>
-        <p:nvSpPr>
-          <p:cNvPr id="17" name="TextBox 16"/>
-          <p:cNvSpPr txBox="1"/>
-          <p:nvPr/>
-        </p:nvSpPr>
-        <p:spPr>
-          <a:xfrm>
-            <a:off x="5120640" y="2514600"/>
-            <a:ext cx="1993391" cy="411480"/>
-          </a:xfrm>
-          <a:prstGeom prst="rect">
-            <a:avLst/>
-          </a:prstGeom>
-          <a:noFill/>
-        </p:spPr>
-        <p:txBody>
-          <a:bodyPr wrap="square" anchor="t" lIns="27432" rIns="27432" tIns="9144" bIns="9144">
-            <a:spAutoFit/>
-          </a:bodyPr>
-          <a:lstStyle/>
-          <a:p>
-            <a:pPr algn="ctr">
-              <a:spcBef>
-                <a:spcPts val="0"/>
-              </a:spcBef>
-              <a:spcAft>
-                <a:spcPts val="200"/>
-              </a:spcAft>
-            </a:pPr>
-            <a:r>
-              <a:rPr sz="1250" b="1" i="0">
-                <a:solidFill>
-                  <a:srgbClr val="0D3D14"/>
-                </a:solidFill>
-                <a:latin typeface="Tahoma"/>
-              </a:rPr>
-              <a:t>Shift close → approved</a:t>
-            </a:r>
-          </a:p>
-        </p:txBody>
-      </p:sp>
-      <p:sp>
-        <p:nvSpPr>
-          <p:cNvPr id="18" name="TextBox 17"/>
-          <p:cNvSpPr txBox="1"/>
-          <p:nvPr/>
-        </p:nvSpPr>
-        <p:spPr>
-          <a:xfrm>
-            <a:off x="5120640" y="2880360"/>
-            <a:ext cx="1993391" cy="365760"/>
-          </a:xfrm>
-          <a:prstGeom prst="rect">
-            <a:avLst/>
-          </a:prstGeom>
-          <a:noFill/>
-        </p:spPr>
-        <p:txBody>
-          <a:bodyPr wrap="square" anchor="t" lIns="27432" rIns="27432" tIns="9144" bIns="9144">
-            <a:spAutoFit/>
-          </a:bodyPr>
-          <a:lstStyle/>
-          <a:p>
-            <a:pPr algn="ctr">
-              <a:spcBef>
-                <a:spcPts val="0"/>
-              </a:spcBef>
-              <a:spcAft>
-                <a:spcPts val="200"/>
-              </a:spcAft>
-            </a:pPr>
-            <a:r>
-              <a:rPr sz="1100" b="0" i="0">
-                <a:solidFill>
-                  <a:srgbClr val="555555"/>
-                </a:solidFill>
-                <a:latin typeface="Tahoma"/>
-              </a:rPr>
-              <a:t>median · Sep (Jul: 4.7 h)</a:t>
-            </a:r>
-          </a:p>
-        </p:txBody>
-      </p:sp>
-      <p:sp>
-        <p:nvSpPr>
-          <p:cNvPr id="19" name="Rounded Rectangle 18"/>
+          <p:cNvPr id="18" name="Rectangle 17"/>
           <p:cNvSpPr/>
           <p:nvPr/>
         </p:nvSpPr>
         <p:spPr>
           <a:xfrm>
-            <a:off x="7315200" y="1691640"/>
-            <a:ext cx="2176272" cy="1600200"/>
-          </a:xfrm>
-          <a:prstGeom prst="roundRect">
+            <a:off x="8083296" y="1600200"/>
+            <a:ext cx="3657600" cy="420624"/>
+          </a:xfrm>
+          <a:prstGeom prst="rect">
             <a:avLst/>
           </a:prstGeom>
           <a:solidFill>
-            <a:srgbClr val="FFFFFF"/>
+            <a:srgbClr val="C0561E"/>
           </a:solidFill>
-          <a:ln w="9525">
-            <a:solidFill>
-              <a:srgbClr val="D8E4D0"/>
-            </a:solidFill>
+          <a:ln>
+            <a:noFill/>
           </a:ln>
           <a:effectLst/>
-          <a:effectLst>
-            <a:outerShdw blurRad="50000" dist="20000" dir="5400000" rotWithShape="0">
-              <a:srgbClr val="8A99AD">
-                <a:alpha val="38000"/>
-              </a:srgbClr>
-            </a:outerShdw>
-          </a:effectLst>
         </p:spPr>
         <p:style>
           <a:lnRef idx="1">
@@ -12804,56 +12974,56 @@
       </p:sp>
       <p:sp>
         <p:nvSpPr>
+          <p:cNvPr id="19" name="TextBox 18"/>
+          <p:cNvSpPr txBox="1"/>
+          <p:nvPr/>
+        </p:nvSpPr>
+        <p:spPr>
+          <a:xfrm>
+            <a:off x="8083296" y="1600200"/>
+            <a:ext cx="3657600" cy="420624"/>
+          </a:xfrm>
+          <a:prstGeom prst="rect">
+            <a:avLst/>
+          </a:prstGeom>
+          <a:noFill/>
+        </p:spPr>
+        <p:txBody>
+          <a:bodyPr wrap="square" anchor="ctr" lIns="27432" rIns="27432" tIns="9144" bIns="9144">
+            <a:spAutoFit/>
+          </a:bodyPr>
+          <a:lstStyle/>
+          <a:p>
+            <a:pPr algn="ctr">
+              <a:spcBef>
+                <a:spcPts val="0"/>
+              </a:spcBef>
+              <a:spcAft>
+                <a:spcPts val="200"/>
+              </a:spcAft>
+            </a:pPr>
+            <a:r>
+              <a:rPr sz="1500" b="1" i="0">
+                <a:solidFill>
+                  <a:srgbClr val="FFFFFF"/>
+                </a:solidFill>
+                <a:latin typeface="Tahoma"/>
+              </a:rPr>
+              <a:t>WHAT WE CUT</a:t>
+            </a:r>
+          </a:p>
+        </p:txBody>
+      </p:sp>
+      <p:sp>
+        <p:nvSpPr>
           <p:cNvPr id="20" name="TextBox 19"/>
           <p:cNvSpPr txBox="1"/>
           <p:nvPr/>
         </p:nvSpPr>
         <p:spPr>
           <a:xfrm>
-            <a:off x="7315200" y="1801368"/>
-            <a:ext cx="2176272" cy="685800"/>
-          </a:xfrm>
-          <a:prstGeom prst="rect">
-            <a:avLst/>
-          </a:prstGeom>
-          <a:noFill/>
-        </p:spPr>
-        <p:txBody>
-          <a:bodyPr wrap="square" anchor="ctr" lIns="27432" rIns="27432" tIns="9144" bIns="9144">
-            <a:spAutoFit/>
-          </a:bodyPr>
-          <a:lstStyle/>
-          <a:p>
-            <a:pPr algn="ctr">
-              <a:spcBef>
-                <a:spcPts val="0"/>
-              </a:spcBef>
-              <a:spcAft>
-                <a:spcPts val="200"/>
-              </a:spcAft>
-            </a:pPr>
-            <a:r>
-              <a:rPr sz="3000" b="1" i="0">
-                <a:solidFill>
-                  <a:srgbClr val="C0561E"/>
-                </a:solidFill>
-                <a:latin typeface="Tahoma"/>
-              </a:rPr>
-              <a:t>0</a:t>
-            </a:r>
-          </a:p>
-        </p:txBody>
-      </p:sp>
-      <p:sp>
-        <p:nvSpPr>
-          <p:cNvPr id="21" name="TextBox 20"/>
-          <p:cNvSpPr txBox="1"/>
-          <p:nvPr/>
-        </p:nvSpPr>
-        <p:spPr>
-          <a:xfrm>
-            <a:off x="7406640" y="2514600"/>
-            <a:ext cx="1993391" cy="411480"/>
+            <a:off x="8220456" y="2148840"/>
+            <a:ext cx="3383280" cy="2743200"/>
           </a:xfrm>
           <a:prstGeom prst="rect">
             <a:avLst/>
@@ -12866,98 +13036,85 @@
           </a:bodyPr>
           <a:lstStyle/>
           <a:p>
-            <a:pPr algn="ctr">
-              <a:spcBef>
-                <a:spcPts val="0"/>
-              </a:spcBef>
-              <a:spcAft>
-                <a:spcPts val="200"/>
-              </a:spcAft>
-            </a:pPr>
-            <a:r>
-              <a:rPr sz="1250" b="1" i="0">
-                <a:solidFill>
-                  <a:srgbClr val="0D3D14"/>
-                </a:solidFill>
-                <a:latin typeface="Tahoma"/>
-              </a:rPr>
-              <a:t>QA decisions on scrap bins</a:t>
-            </a:r>
-          </a:p>
-        </p:txBody>
-      </p:sp>
-      <p:sp>
-        <p:nvSpPr>
-          <p:cNvPr id="22" name="TextBox 21"/>
-          <p:cNvSpPr txBox="1"/>
-          <p:nvPr/>
-        </p:nvSpPr>
-        <p:spPr>
-          <a:xfrm>
-            <a:off x="7406640" y="2880360"/>
-            <a:ext cx="1993391" cy="365760"/>
-          </a:xfrm>
-          <a:prstGeom prst="rect">
-            <a:avLst/>
-          </a:prstGeom>
-          <a:noFill/>
-        </p:spPr>
-        <p:txBody>
-          <a:bodyPr wrap="square" anchor="t" lIns="27432" rIns="27432" tIns="9144" bIns="9144">
-            <a:spAutoFit/>
-          </a:bodyPr>
-          <a:lstStyle/>
-          <a:p>
-            <a:pPr algn="ctr">
-              <a:spcBef>
-                <a:spcPts val="0"/>
-              </a:spcBef>
-              <a:spcAft>
-                <a:spcPts val="200"/>
-              </a:spcAft>
-            </a:pPr>
-            <a:r>
-              <a:rPr sz="1100" b="0" i="0">
-                <a:solidFill>
-                  <a:srgbClr val="555555"/>
-                </a:solidFill>
-                <a:latin typeface="Tahoma"/>
-              </a:rPr>
-              <a:t>33 red bins open</a:t>
-            </a:r>
-          </a:p>
-        </p:txBody>
-      </p:sp>
-      <p:sp>
-        <p:nvSpPr>
-          <p:cNvPr id="23" name="Rounded Rectangle 22"/>
+            <a:pPr algn="l">
+              <a:spcBef>
+                <a:spcPts val="0"/>
+              </a:spcBef>
+              <a:spcAft>
+                <a:spcPts val="600"/>
+              </a:spcAft>
+            </a:pPr>
+            <a:r>
+              <a:rPr sz="1250" b="0" i="0">
+                <a:solidFill>
+                  <a:srgbClr val="2C5F2D"/>
+                </a:solidFill>
+                <a:latin typeface="Tahoma"/>
+              </a:rPr>
+              <a:t>•  Arguing which number is right</a:t>
+            </a:r>
+          </a:p>
+          <a:p>
+            <a:pPr algn="l">
+              <a:spcBef>
+                <a:spcPts val="0"/>
+              </a:spcBef>
+              <a:spcAft>
+                <a:spcPts val="600"/>
+              </a:spcAft>
+            </a:pPr>
+            <a:r>
+              <a:rPr sz="1250" b="0" i="0">
+                <a:solidFill>
+                  <a:srgbClr val="2C5F2D"/>
+                </a:solidFill>
+                <a:latin typeface="Tahoma"/>
+              </a:rPr>
+              <a:t>•  Updating the wall board by hand</a:t>
+            </a:r>
+          </a:p>
+          <a:p>
+            <a:pPr algn="l">
+              <a:spcBef>
+                <a:spcPts val="0"/>
+              </a:spcBef>
+              <a:spcAft>
+                <a:spcPts val="600"/>
+              </a:spcAft>
+            </a:pPr>
+            <a:r>
+              <a:rPr sz="1250" b="0" i="0">
+                <a:solidFill>
+                  <a:srgbClr val="2C5F2D"/>
+                </a:solidFill>
+                <a:latin typeface="Tahoma"/>
+              </a:rPr>
+              <a:t>•  Hours of tracing (seconds now)</a:t>
+            </a:r>
+          </a:p>
+        </p:txBody>
+      </p:sp>
+      <p:sp>
+        <p:nvSpPr>
+          <p:cNvPr id="21" name="Rectangle 20"/>
           <p:cNvSpPr/>
           <p:nvPr/>
         </p:nvSpPr>
         <p:spPr>
           <a:xfrm>
-            <a:off x="9601200" y="1691640"/>
-            <a:ext cx="2130552" cy="1600200"/>
-          </a:xfrm>
-          <a:prstGeom prst="roundRect">
+            <a:off x="457200" y="5102352"/>
+            <a:ext cx="11283696" cy="566928"/>
+          </a:xfrm>
+          <a:prstGeom prst="rect">
             <a:avLst/>
           </a:prstGeom>
           <a:solidFill>
-            <a:srgbClr val="FFFFFF"/>
+            <a:srgbClr val="ECF1E9"/>
           </a:solidFill>
-          <a:ln w="9525">
-            <a:solidFill>
-              <a:srgbClr val="D8E4D0"/>
-            </a:solidFill>
+          <a:ln>
+            <a:noFill/>
           </a:ln>
           <a:effectLst/>
-          <a:effectLst>
-            <a:outerShdw blurRad="50000" dist="20000" dir="5400000" rotWithShape="0">
-              <a:srgbClr val="8A99AD">
-                <a:alpha val="38000"/>
-              </a:srgbClr>
-            </a:outerShdw>
-          </a:effectLst>
         </p:spPr>
         <p:style>
           <a:lnRef idx="1">
@@ -12983,14 +13140,14 @@
       </p:sp>
       <p:sp>
         <p:nvSpPr>
-          <p:cNvPr id="24" name="TextBox 23"/>
-          <p:cNvSpPr txBox="1"/>
-          <p:nvPr/>
-        </p:nvSpPr>
-        <p:spPr>
-          <a:xfrm>
-            <a:off x="9601200" y="1801368"/>
-            <a:ext cx="2130552" cy="685800"/>
+          <p:cNvPr id="22" name="TextBox 21"/>
+          <p:cNvSpPr txBox="1"/>
+          <p:nvPr/>
+        </p:nvSpPr>
+        <p:spPr>
+          <a:xfrm>
+            <a:off x="594360" y="5102352"/>
+            <a:ext cx="11064240" cy="566928"/>
           </a:xfrm>
           <a:prstGeom prst="rect">
             <a:avLst/>
@@ -13003,7 +13160,7 @@
           </a:bodyPr>
           <a:lstStyle/>
           <a:p>
-            <a:pPr algn="ctr">
+            <a:pPr algn="l">
               <a:spcBef>
                 <a:spcPts val="0"/>
               </a:spcBef>
@@ -13012,120 +13169,45 @@
               </a:spcAft>
             </a:pPr>
             <a:r>
-              <a:rPr sz="3000" b="1" i="0">
-                <a:solidFill>
-                  <a:srgbClr val="C0561E"/>
-                </a:solidFill>
-                <a:latin typeface="Tahoma"/>
-              </a:rPr>
-              <a:t>0</a:t>
-            </a:r>
-          </a:p>
-        </p:txBody>
-      </p:sp>
-      <p:sp>
-        <p:nvSpPr>
-          <p:cNvPr id="25" name="TextBox 24"/>
-          <p:cNvSpPr txBox="1"/>
-          <p:nvPr/>
-        </p:nvSpPr>
-        <p:spPr>
-          <a:xfrm>
-            <a:off x="9692640" y="2514600"/>
-            <a:ext cx="1947672" cy="411480"/>
-          </a:xfrm>
-          <a:prstGeom prst="rect">
-            <a:avLst/>
-          </a:prstGeom>
-          <a:noFill/>
-        </p:spPr>
-        <p:txBody>
-          <a:bodyPr wrap="square" anchor="t" lIns="27432" rIns="27432" tIns="9144" bIns="9144">
-            <a:spAutoFit/>
-          </a:bodyPr>
-          <a:lstStyle/>
-          <a:p>
-            <a:pPr algn="ctr">
-              <a:spcBef>
-                <a:spcPts val="0"/>
-              </a:spcBef>
-              <a:spcAft>
-                <a:spcPts val="200"/>
-              </a:spcAft>
-            </a:pPr>
-            <a:r>
               <a:rPr sz="1250" b="1" i="0">
                 <a:solidFill>
                   <a:srgbClr val="0D3D14"/>
                 </a:solidFill>
                 <a:latin typeface="Tahoma"/>
               </a:rPr>
-              <a:t>Action items from meetings</a:t>
-            </a:r>
-          </a:p>
-        </p:txBody>
-      </p:sp>
-      <p:sp>
-        <p:nvSpPr>
-          <p:cNvPr id="26" name="TextBox 25"/>
-          <p:cNvSpPr txBox="1"/>
-          <p:nvPr/>
-        </p:nvSpPr>
-        <p:spPr>
-          <a:xfrm>
-            <a:off x="9692640" y="2880360"/>
-            <a:ext cx="1947672" cy="365760"/>
-          </a:xfrm>
-          <a:prstGeom prst="rect">
-            <a:avLst/>
-          </a:prstGeom>
-          <a:noFill/>
-        </p:spPr>
-        <p:txBody>
-          <a:bodyPr wrap="square" anchor="t" lIns="27432" rIns="27432" tIns="9144" bIns="9144">
-            <a:spAutoFit/>
-          </a:bodyPr>
-          <a:lstStyle/>
-          <a:p>
-            <a:pPr algn="ctr">
-              <a:spcBef>
-                <a:spcPts val="0"/>
-              </a:spcBef>
-              <a:spcAft>
-                <a:spcPts val="200"/>
-              </a:spcAft>
-            </a:pPr>
-            <a:r>
-              <a:rPr sz="1100" b="0" i="0">
-                <a:solidFill>
-                  <a:srgbClr val="555555"/>
-                </a:solidFill>
-                <a:latin typeface="Tahoma"/>
-              </a:rPr>
-              <a:t>since 13 Jul</a:t>
-            </a:r>
-          </a:p>
-        </p:txBody>
-      </p:sp>
-      <p:sp>
-        <p:nvSpPr>
-          <p:cNvPr id="27" name="Rectangle 26"/>
+              <a:t>Works with others:  </a:t>
+            </a:r>
+            <a:r>
+              <a:rPr sz="1200" b="0" i="0">
+                <a:solidFill>
+                  <a:srgbClr val="2C5F2D"/>
+                </a:solidFill>
+                <a:latin typeface="Tahoma"/>
+              </a:rPr>
+              <a:t>sees every department's data · assigns actions back to departments</a:t>
+            </a:r>
+          </a:p>
+        </p:txBody>
+      </p:sp>
+      <p:sp>
+        <p:nvSpPr>
+          <p:cNvPr id="23" name="Rounded Rectangle 22"/>
           <p:cNvSpPr/>
           <p:nvPr/>
         </p:nvSpPr>
         <p:spPr>
           <a:xfrm>
-            <a:off x="457200" y="3566160"/>
-            <a:ext cx="11274552" cy="402336"/>
-          </a:xfrm>
-          <a:prstGeom prst="rect">
-            <a:avLst/>
-          </a:prstGeom>
-          <a:solidFill>
-            <a:srgbClr val="0D3D14"/>
-          </a:solidFill>
-          <a:ln>
-            <a:noFill/>
+            <a:off x="457200" y="5760720"/>
+            <a:ext cx="11283696" cy="457200"/>
+          </a:xfrm>
+          <a:prstGeom prst="roundRect">
+            <a:avLst/>
+          </a:prstGeom>
+          <a:noFill/>
+          <a:ln w="19050">
+            <a:solidFill>
+              <a:srgbClr val="C88A00"/>
+            </a:solidFill>
           </a:ln>
           <a:effectLst/>
         </p:spPr>
@@ -13153,14 +13235,14 @@
       </p:sp>
       <p:sp>
         <p:nvSpPr>
-          <p:cNvPr id="28" name="TextBox 27"/>
-          <p:cNvSpPr txBox="1"/>
-          <p:nvPr/>
-        </p:nvSpPr>
-        <p:spPr>
-          <a:xfrm>
-            <a:off x="457200" y="3547872"/>
-            <a:ext cx="11274552" cy="402336"/>
+          <p:cNvPr id="24" name="TextBox 23"/>
+          <p:cNvSpPr txBox="1"/>
+          <p:nvPr/>
+        </p:nvSpPr>
+        <p:spPr>
+          <a:xfrm>
+            <a:off x="594360" y="5760720"/>
+            <a:ext cx="11009376" cy="457200"/>
           </a:xfrm>
           <a:prstGeom prst="rect">
             <a:avLst/>
@@ -13173,7 +13255,7 @@
           </a:bodyPr>
           <a:lstStyle/>
           <a:p>
-            <a:pPr algn="ctr">
+            <a:pPr algn="l">
               <a:spcBef>
                 <a:spcPts val="0"/>
               </a:spcBef>
@@ -13182,139 +13264,13 @@
               </a:spcAft>
             </a:pPr>
             <a:r>
-              <a:rPr sz="1500" b="1" i="0">
-                <a:solidFill>
-                  <a:srgbClr val="FFFFFF"/>
-                </a:solidFill>
-                <a:latin typeface="Tahoma"/>
-              </a:rPr>
-              <a:t>Pattern: steps the system does by itself work — steps that need a person to press are where work waits</a:t>
-            </a:r>
-          </a:p>
-        </p:txBody>
-      </p:sp>
-      <p:sp>
-        <p:nvSpPr>
-          <p:cNvPr id="29" name="TextBox 28"/>
-          <p:cNvSpPr txBox="1"/>
-          <p:nvPr/>
-        </p:nvSpPr>
-        <p:spPr>
-          <a:xfrm>
-            <a:off x="640080" y="4069080"/>
-            <a:ext cx="10972800" cy="457200"/>
-          </a:xfrm>
-          <a:prstGeom prst="rect">
-            <a:avLst/>
-          </a:prstGeom>
-          <a:noFill/>
-        </p:spPr>
-        <p:txBody>
-          <a:bodyPr wrap="square" anchor="ctr" lIns="27432" rIns="27432" tIns="9144" bIns="9144">
-            <a:spAutoFit/>
-          </a:bodyPr>
-          <a:lstStyle/>
-          <a:p>
-            <a:pPr algn="l">
-              <a:spcBef>
-                <a:spcPts val="0"/>
-              </a:spcBef>
-              <a:spcAft>
-                <a:spcPts val="200"/>
-              </a:spcAft>
-            </a:pPr>
-            <a:r>
-              <a:rPr sz="1300" b="1" i="0">
-                <a:solidFill>
-                  <a:srgbClr val="2C5F2D"/>
-                </a:solidFill>
-                <a:latin typeface="Tahoma"/>
-              </a:rPr>
-              <a:t>➜  QA: daily session to clear repair orders at step 5 and decide every bin</a:t>
-            </a:r>
-          </a:p>
-        </p:txBody>
-      </p:sp>
-      <p:sp>
-        <p:nvSpPr>
-          <p:cNvPr id="30" name="TextBox 29"/>
-          <p:cNvSpPr txBox="1"/>
-          <p:nvPr/>
-        </p:nvSpPr>
-        <p:spPr>
-          <a:xfrm>
-            <a:off x="640080" y="4572000"/>
-            <a:ext cx="10972800" cy="457200"/>
-          </a:xfrm>
-          <a:prstGeom prst="rect">
-            <a:avLst/>
-          </a:prstGeom>
-          <a:noFill/>
-        </p:spPr>
-        <p:txBody>
-          <a:bodyPr wrap="square" anchor="ctr" lIns="27432" rIns="27432" tIns="9144" bIns="9144">
-            <a:spAutoFit/>
-          </a:bodyPr>
-          <a:lstStyle/>
-          <a:p>
-            <a:pPr algn="l">
-              <a:spcBef>
-                <a:spcPts val="0"/>
-              </a:spcBef>
-              <a:spcAft>
-                <a:spcPts val="200"/>
-              </a:spcAft>
-            </a:pPr>
-            <a:r>
-              <a:rPr sz="1300" b="1" i="0">
-                <a:solidFill>
-                  <a:srgbClr val="2C5F2D"/>
-                </a:solidFill>
-                <a:latin typeface="Tahoma"/>
-              </a:rPr>
-              <a:t>➜  Supervisors: approve shift-close requests the same day</a:t>
-            </a:r>
-          </a:p>
-        </p:txBody>
-      </p:sp>
-      <p:sp>
-        <p:nvSpPr>
-          <p:cNvPr id="31" name="TextBox 30"/>
-          <p:cNvSpPr txBox="1"/>
-          <p:nvPr/>
-        </p:nvSpPr>
-        <p:spPr>
-          <a:xfrm>
-            <a:off x="640080" y="5074920"/>
-            <a:ext cx="10972800" cy="457200"/>
-          </a:xfrm>
-          <a:prstGeom prst="rect">
-            <a:avLst/>
-          </a:prstGeom>
-          <a:noFill/>
-        </p:spPr>
-        <p:txBody>
-          <a:bodyPr wrap="square" anchor="ctr" lIns="27432" rIns="27432" tIns="9144" bIns="9144">
-            <a:spAutoFit/>
-          </a:bodyPr>
-          <a:lstStyle/>
-          <a:p>
-            <a:pPr algn="l">
-              <a:spcBef>
-                <a:spcPts val="0"/>
-              </a:spcBef>
-              <a:spcAft>
-                <a:spcPts val="200"/>
-              </a:spcAft>
-            </a:pPr>
-            <a:r>
-              <a:rPr sz="1300" b="1" i="0">
-                <a:solidFill>
-                  <a:srgbClr val="2C5F2D"/>
-                </a:solidFill>
-                <a:latin typeface="Tahoma"/>
-              </a:rPr>
-              <a:t>➜  Every morning meeting: at least one action item with an owner and a due date</a:t>
+              <a:rPr sz="1200" b="1" i="0">
+                <a:solidFill>
+                  <a:srgbClr val="C88A00"/>
+                </a:solidFill>
+                <a:latin typeface="Tahoma"/>
+              </a:rPr>
+              <a:t>Department to fill:  time per day BEFORE  ____ min   →   WITH ESM  ____ min   ·   forms per month removed  ____</a:t>
             </a:r>
           </a:p>
         </p:txBody>
@@ -13374,7 +13330,7 @@
                 </a:solidFill>
                 <a:latin typeface="Tahoma"/>
               </a:rPr>
-              <a:t>Next steps to the roadshow</a:t>
+              <a:t>What is still slow — and we say it openly</a:t>
             </a:r>
           </a:p>
         </p:txBody>
@@ -13416,7 +13372,7 @@
                 </a:solidFill>
                 <a:latin typeface="Tahoma"/>
               </a:rPr>
-              <a:t>Owner per department · 06 – 30 Oct 2026</a:t>
+              <a:t>Measured from ESM database · 06 Oct 2026</a:t>
             </a:r>
           </a:p>
         </p:txBody>
@@ -13537,10 +13493,905 @@
         </p:nvSpPr>
         <p:spPr>
           <a:xfrm>
-            <a:off x="457200" y="1737360"/>
-            <a:ext cx="3017520" cy="1051560"/>
+            <a:off x="457200" y="1691640"/>
+            <a:ext cx="2176272" cy="1600200"/>
           </a:xfrm>
           <a:prstGeom prst="roundRect">
+            <a:avLst/>
+          </a:prstGeom>
+          <a:solidFill>
+            <a:srgbClr val="FFFFFF"/>
+          </a:solidFill>
+          <a:ln w="9525">
+            <a:solidFill>
+              <a:srgbClr val="D8E4D0"/>
+            </a:solidFill>
+          </a:ln>
+          <a:effectLst/>
+          <a:effectLst>
+            <a:outerShdw blurRad="50000" dist="20000" dir="5400000" rotWithShape="0">
+              <a:srgbClr val="8A99AD">
+                <a:alpha val="38000"/>
+              </a:srgbClr>
+            </a:outerShdw>
+          </a:effectLst>
+        </p:spPr>
+        <p:style>
+          <a:lnRef idx="1">
+            <a:schemeClr val="accent1"/>
+          </a:lnRef>
+          <a:fillRef idx="3">
+            <a:schemeClr val="accent1"/>
+          </a:fillRef>
+          <a:effectRef idx="2">
+            <a:schemeClr val="accent1"/>
+          </a:effectRef>
+          <a:fontRef idx="minor">
+            <a:schemeClr val="lt1"/>
+          </a:fontRef>
+        </p:style>
+        <p:txBody>
+          <a:bodyPr rtlCol="0" anchor="ctr"/>
+          <a:lstStyle/>
+          <a:p>
+            <a:pPr algn="ctr"/>
+          </a:p>
+        </p:txBody>
+      </p:sp>
+      <p:sp>
+        <p:nvSpPr>
+          <p:cNvPr id="8" name="TextBox 7"/>
+          <p:cNvSpPr txBox="1"/>
+          <p:nvPr/>
+        </p:nvSpPr>
+        <p:spPr>
+          <a:xfrm>
+            <a:off x="457200" y="1801368"/>
+            <a:ext cx="2176272" cy="685800"/>
+          </a:xfrm>
+          <a:prstGeom prst="rect">
+            <a:avLst/>
+          </a:prstGeom>
+          <a:noFill/>
+        </p:spPr>
+        <p:txBody>
+          <a:bodyPr wrap="square" anchor="ctr" lIns="27432" rIns="27432" tIns="9144" bIns="9144">
+            <a:spAutoFit/>
+          </a:bodyPr>
+          <a:lstStyle/>
+          <a:p>
+            <a:pPr algn="ctr">
+              <a:spcBef>
+                <a:spcPts val="0"/>
+              </a:spcBef>
+              <a:spcAft>
+                <a:spcPts val="200"/>
+              </a:spcAft>
+            </a:pPr>
+            <a:r>
+              <a:rPr sz="3000" b="1" i="0">
+                <a:solidFill>
+                  <a:srgbClr val="C0561E"/>
+                </a:solidFill>
+                <a:latin typeface="Tahoma"/>
+              </a:rPr>
+              <a:t>205</a:t>
+            </a:r>
+          </a:p>
+        </p:txBody>
+      </p:sp>
+      <p:sp>
+        <p:nvSpPr>
+          <p:cNvPr id="9" name="TextBox 8"/>
+          <p:cNvSpPr txBox="1"/>
+          <p:nvPr/>
+        </p:nvSpPr>
+        <p:spPr>
+          <a:xfrm>
+            <a:off x="548640" y="2514600"/>
+            <a:ext cx="1993391" cy="411480"/>
+          </a:xfrm>
+          <a:prstGeom prst="rect">
+            <a:avLst/>
+          </a:prstGeom>
+          <a:noFill/>
+        </p:spPr>
+        <p:txBody>
+          <a:bodyPr wrap="square" anchor="t" lIns="27432" rIns="27432" tIns="9144" bIns="9144">
+            <a:spAutoFit/>
+          </a:bodyPr>
+          <a:lstStyle/>
+          <a:p>
+            <a:pPr algn="ctr">
+              <a:spcBef>
+                <a:spcPts val="0"/>
+              </a:spcBef>
+              <a:spcAft>
+                <a:spcPts val="200"/>
+              </a:spcAft>
+            </a:pPr>
+            <a:r>
+              <a:rPr sz="1250" b="1" i="0">
+                <a:solidFill>
+                  <a:srgbClr val="0D3D14"/>
+                </a:solidFill>
+                <a:latin typeface="Tahoma"/>
+              </a:rPr>
+              <a:t>Repair orders waiting for QA</a:t>
+            </a:r>
+          </a:p>
+        </p:txBody>
+      </p:sp>
+      <p:sp>
+        <p:nvSpPr>
+          <p:cNvPr id="10" name="TextBox 9"/>
+          <p:cNvSpPr txBox="1"/>
+          <p:nvPr/>
+        </p:nvSpPr>
+        <p:spPr>
+          <a:xfrm>
+            <a:off x="548640" y="2880360"/>
+            <a:ext cx="1993391" cy="365760"/>
+          </a:xfrm>
+          <a:prstGeom prst="rect">
+            <a:avLst/>
+          </a:prstGeom>
+          <a:noFill/>
+        </p:spPr>
+        <p:txBody>
+          <a:bodyPr wrap="square" anchor="t" lIns="27432" rIns="27432" tIns="9144" bIns="9144">
+            <a:spAutoFit/>
+          </a:bodyPr>
+          <a:lstStyle/>
+          <a:p>
+            <a:pPr algn="ctr">
+              <a:spcBef>
+                <a:spcPts val="0"/>
+              </a:spcBef>
+              <a:spcAft>
+                <a:spcPts val="200"/>
+              </a:spcAft>
+            </a:pPr>
+            <a:r>
+              <a:rPr sz="1100" b="0" i="0">
+                <a:solidFill>
+                  <a:srgbClr val="555555"/>
+                </a:solidFill>
+                <a:latin typeface="Tahoma"/>
+              </a:rPr>
+              <a:t>median wait 13 days</a:t>
+            </a:r>
+          </a:p>
+        </p:txBody>
+      </p:sp>
+      <p:sp>
+        <p:nvSpPr>
+          <p:cNvPr id="11" name="Rounded Rectangle 10"/>
+          <p:cNvSpPr/>
+          <p:nvPr/>
+        </p:nvSpPr>
+        <p:spPr>
+          <a:xfrm>
+            <a:off x="2743200" y="1691640"/>
+            <a:ext cx="2176272" cy="1600200"/>
+          </a:xfrm>
+          <a:prstGeom prst="roundRect">
+            <a:avLst/>
+          </a:prstGeom>
+          <a:solidFill>
+            <a:srgbClr val="FFFFFF"/>
+          </a:solidFill>
+          <a:ln w="9525">
+            <a:solidFill>
+              <a:srgbClr val="D8E4D0"/>
+            </a:solidFill>
+          </a:ln>
+          <a:effectLst/>
+          <a:effectLst>
+            <a:outerShdw blurRad="50000" dist="20000" dir="5400000" rotWithShape="0">
+              <a:srgbClr val="8A99AD">
+                <a:alpha val="38000"/>
+              </a:srgbClr>
+            </a:outerShdw>
+          </a:effectLst>
+        </p:spPr>
+        <p:style>
+          <a:lnRef idx="1">
+            <a:schemeClr val="accent1"/>
+          </a:lnRef>
+          <a:fillRef idx="3">
+            <a:schemeClr val="accent1"/>
+          </a:fillRef>
+          <a:effectRef idx="2">
+            <a:schemeClr val="accent1"/>
+          </a:effectRef>
+          <a:fontRef idx="minor">
+            <a:schemeClr val="lt1"/>
+          </a:fontRef>
+        </p:style>
+        <p:txBody>
+          <a:bodyPr rtlCol="0" anchor="ctr"/>
+          <a:lstStyle/>
+          <a:p>
+            <a:pPr algn="ctr"/>
+          </a:p>
+        </p:txBody>
+      </p:sp>
+      <p:sp>
+        <p:nvSpPr>
+          <p:cNvPr id="12" name="TextBox 11"/>
+          <p:cNvSpPr txBox="1"/>
+          <p:nvPr/>
+        </p:nvSpPr>
+        <p:spPr>
+          <a:xfrm>
+            <a:off x="2743200" y="1801368"/>
+            <a:ext cx="2176272" cy="685800"/>
+          </a:xfrm>
+          <a:prstGeom prst="rect">
+            <a:avLst/>
+          </a:prstGeom>
+          <a:noFill/>
+        </p:spPr>
+        <p:txBody>
+          <a:bodyPr wrap="square" anchor="ctr" lIns="27432" rIns="27432" tIns="9144" bIns="9144">
+            <a:spAutoFit/>
+          </a:bodyPr>
+          <a:lstStyle/>
+          <a:p>
+            <a:pPr algn="ctr">
+              <a:spcBef>
+                <a:spcPts val="0"/>
+              </a:spcBef>
+              <a:spcAft>
+                <a:spcPts val="200"/>
+              </a:spcAft>
+            </a:pPr>
+            <a:r>
+              <a:rPr sz="3000" b="1" i="0">
+                <a:solidFill>
+                  <a:srgbClr val="C0561E"/>
+                </a:solidFill>
+                <a:latin typeface="Tahoma"/>
+              </a:rPr>
+              <a:t>97 h</a:t>
+            </a:r>
+          </a:p>
+        </p:txBody>
+      </p:sp>
+      <p:sp>
+        <p:nvSpPr>
+          <p:cNvPr id="13" name="TextBox 12"/>
+          <p:cNvSpPr txBox="1"/>
+          <p:nvPr/>
+        </p:nvSpPr>
+        <p:spPr>
+          <a:xfrm>
+            <a:off x="2834640" y="2514600"/>
+            <a:ext cx="1993391" cy="411480"/>
+          </a:xfrm>
+          <a:prstGeom prst="rect">
+            <a:avLst/>
+          </a:prstGeom>
+          <a:noFill/>
+        </p:spPr>
+        <p:txBody>
+          <a:bodyPr wrap="square" anchor="t" lIns="27432" rIns="27432" tIns="9144" bIns="9144">
+            <a:spAutoFit/>
+          </a:bodyPr>
+          <a:lstStyle/>
+          <a:p>
+            <a:pPr algn="ctr">
+              <a:spcBef>
+                <a:spcPts val="0"/>
+              </a:spcBef>
+              <a:spcAft>
+                <a:spcPts val="200"/>
+              </a:spcAft>
+            </a:pPr>
+            <a:r>
+              <a:rPr sz="1250" b="1" i="0">
+                <a:solidFill>
+                  <a:srgbClr val="0D3D14"/>
+                </a:solidFill>
+                <a:latin typeface="Tahoma"/>
+              </a:rPr>
+              <a:t>Repair order → closed</a:t>
+            </a:r>
+          </a:p>
+        </p:txBody>
+      </p:sp>
+      <p:sp>
+        <p:nvSpPr>
+          <p:cNvPr id="14" name="TextBox 13"/>
+          <p:cNvSpPr txBox="1"/>
+          <p:nvPr/>
+        </p:nvSpPr>
+        <p:spPr>
+          <a:xfrm>
+            <a:off x="2834640" y="2880360"/>
+            <a:ext cx="1993391" cy="365760"/>
+          </a:xfrm>
+          <a:prstGeom prst="rect">
+            <a:avLst/>
+          </a:prstGeom>
+          <a:noFill/>
+        </p:spPr>
+        <p:txBody>
+          <a:bodyPr wrap="square" anchor="t" lIns="27432" rIns="27432" tIns="9144" bIns="9144">
+            <a:spAutoFit/>
+          </a:bodyPr>
+          <a:lstStyle/>
+          <a:p>
+            <a:pPr algn="ctr">
+              <a:spcBef>
+                <a:spcPts val="0"/>
+              </a:spcBef>
+              <a:spcAft>
+                <a:spcPts val="200"/>
+              </a:spcAft>
+            </a:pPr>
+            <a:r>
+              <a:rPr sz="1100" b="0" i="0">
+                <a:solidFill>
+                  <a:srgbClr val="555555"/>
+                </a:solidFill>
+                <a:latin typeface="Tahoma"/>
+              </a:rPr>
+              <a:t>median · Sep (fixed fast, closed slow)</a:t>
+            </a:r>
+          </a:p>
+        </p:txBody>
+      </p:sp>
+      <p:sp>
+        <p:nvSpPr>
+          <p:cNvPr id="15" name="Rounded Rectangle 14"/>
+          <p:cNvSpPr/>
+          <p:nvPr/>
+        </p:nvSpPr>
+        <p:spPr>
+          <a:xfrm>
+            <a:off x="5029200" y="1691640"/>
+            <a:ext cx="2176272" cy="1600200"/>
+          </a:xfrm>
+          <a:prstGeom prst="roundRect">
+            <a:avLst/>
+          </a:prstGeom>
+          <a:solidFill>
+            <a:srgbClr val="FFFFFF"/>
+          </a:solidFill>
+          <a:ln w="9525">
+            <a:solidFill>
+              <a:srgbClr val="D8E4D0"/>
+            </a:solidFill>
+          </a:ln>
+          <a:effectLst/>
+          <a:effectLst>
+            <a:outerShdw blurRad="50000" dist="20000" dir="5400000" rotWithShape="0">
+              <a:srgbClr val="8A99AD">
+                <a:alpha val="38000"/>
+              </a:srgbClr>
+            </a:outerShdw>
+          </a:effectLst>
+        </p:spPr>
+        <p:style>
+          <a:lnRef idx="1">
+            <a:schemeClr val="accent1"/>
+          </a:lnRef>
+          <a:fillRef idx="3">
+            <a:schemeClr val="accent1"/>
+          </a:fillRef>
+          <a:effectRef idx="2">
+            <a:schemeClr val="accent1"/>
+          </a:effectRef>
+          <a:fontRef idx="minor">
+            <a:schemeClr val="lt1"/>
+          </a:fontRef>
+        </p:style>
+        <p:txBody>
+          <a:bodyPr rtlCol="0" anchor="ctr"/>
+          <a:lstStyle/>
+          <a:p>
+            <a:pPr algn="ctr"/>
+          </a:p>
+        </p:txBody>
+      </p:sp>
+      <p:sp>
+        <p:nvSpPr>
+          <p:cNvPr id="16" name="TextBox 15"/>
+          <p:cNvSpPr txBox="1"/>
+          <p:nvPr/>
+        </p:nvSpPr>
+        <p:spPr>
+          <a:xfrm>
+            <a:off x="5029200" y="1801368"/>
+            <a:ext cx="2176272" cy="685800"/>
+          </a:xfrm>
+          <a:prstGeom prst="rect">
+            <a:avLst/>
+          </a:prstGeom>
+          <a:noFill/>
+        </p:spPr>
+        <p:txBody>
+          <a:bodyPr wrap="square" anchor="ctr" lIns="27432" rIns="27432" tIns="9144" bIns="9144">
+            <a:spAutoFit/>
+          </a:bodyPr>
+          <a:lstStyle/>
+          <a:p>
+            <a:pPr algn="ctr">
+              <a:spcBef>
+                <a:spcPts val="0"/>
+              </a:spcBef>
+              <a:spcAft>
+                <a:spcPts val="200"/>
+              </a:spcAft>
+            </a:pPr>
+            <a:r>
+              <a:rPr sz="3000" b="1" i="0">
+                <a:solidFill>
+                  <a:srgbClr val="C0561E"/>
+                </a:solidFill>
+                <a:latin typeface="Tahoma"/>
+              </a:rPr>
+              <a:t>13 h</a:t>
+            </a:r>
+          </a:p>
+        </p:txBody>
+      </p:sp>
+      <p:sp>
+        <p:nvSpPr>
+          <p:cNvPr id="17" name="TextBox 16"/>
+          <p:cNvSpPr txBox="1"/>
+          <p:nvPr/>
+        </p:nvSpPr>
+        <p:spPr>
+          <a:xfrm>
+            <a:off x="5120640" y="2514600"/>
+            <a:ext cx="1993391" cy="411480"/>
+          </a:xfrm>
+          <a:prstGeom prst="rect">
+            <a:avLst/>
+          </a:prstGeom>
+          <a:noFill/>
+        </p:spPr>
+        <p:txBody>
+          <a:bodyPr wrap="square" anchor="t" lIns="27432" rIns="27432" tIns="9144" bIns="9144">
+            <a:spAutoFit/>
+          </a:bodyPr>
+          <a:lstStyle/>
+          <a:p>
+            <a:pPr algn="ctr">
+              <a:spcBef>
+                <a:spcPts val="0"/>
+              </a:spcBef>
+              <a:spcAft>
+                <a:spcPts val="200"/>
+              </a:spcAft>
+            </a:pPr>
+            <a:r>
+              <a:rPr sz="1250" b="1" i="0">
+                <a:solidFill>
+                  <a:srgbClr val="0D3D14"/>
+                </a:solidFill>
+                <a:latin typeface="Tahoma"/>
+              </a:rPr>
+              <a:t>Shift close → approved</a:t>
+            </a:r>
+          </a:p>
+        </p:txBody>
+      </p:sp>
+      <p:sp>
+        <p:nvSpPr>
+          <p:cNvPr id="18" name="TextBox 17"/>
+          <p:cNvSpPr txBox="1"/>
+          <p:nvPr/>
+        </p:nvSpPr>
+        <p:spPr>
+          <a:xfrm>
+            <a:off x="5120640" y="2880360"/>
+            <a:ext cx="1993391" cy="365760"/>
+          </a:xfrm>
+          <a:prstGeom prst="rect">
+            <a:avLst/>
+          </a:prstGeom>
+          <a:noFill/>
+        </p:spPr>
+        <p:txBody>
+          <a:bodyPr wrap="square" anchor="t" lIns="27432" rIns="27432" tIns="9144" bIns="9144">
+            <a:spAutoFit/>
+          </a:bodyPr>
+          <a:lstStyle/>
+          <a:p>
+            <a:pPr algn="ctr">
+              <a:spcBef>
+                <a:spcPts val="0"/>
+              </a:spcBef>
+              <a:spcAft>
+                <a:spcPts val="200"/>
+              </a:spcAft>
+            </a:pPr>
+            <a:r>
+              <a:rPr sz="1100" b="0" i="0">
+                <a:solidFill>
+                  <a:srgbClr val="555555"/>
+                </a:solidFill>
+                <a:latin typeface="Tahoma"/>
+              </a:rPr>
+              <a:t>median · Sep (Jul: 4.7 h)</a:t>
+            </a:r>
+          </a:p>
+        </p:txBody>
+      </p:sp>
+      <p:sp>
+        <p:nvSpPr>
+          <p:cNvPr id="19" name="Rounded Rectangle 18"/>
+          <p:cNvSpPr/>
+          <p:nvPr/>
+        </p:nvSpPr>
+        <p:spPr>
+          <a:xfrm>
+            <a:off x="7315200" y="1691640"/>
+            <a:ext cx="2176272" cy="1600200"/>
+          </a:xfrm>
+          <a:prstGeom prst="roundRect">
+            <a:avLst/>
+          </a:prstGeom>
+          <a:solidFill>
+            <a:srgbClr val="FFFFFF"/>
+          </a:solidFill>
+          <a:ln w="9525">
+            <a:solidFill>
+              <a:srgbClr val="D8E4D0"/>
+            </a:solidFill>
+          </a:ln>
+          <a:effectLst/>
+          <a:effectLst>
+            <a:outerShdw blurRad="50000" dist="20000" dir="5400000" rotWithShape="0">
+              <a:srgbClr val="8A99AD">
+                <a:alpha val="38000"/>
+              </a:srgbClr>
+            </a:outerShdw>
+          </a:effectLst>
+        </p:spPr>
+        <p:style>
+          <a:lnRef idx="1">
+            <a:schemeClr val="accent1"/>
+          </a:lnRef>
+          <a:fillRef idx="3">
+            <a:schemeClr val="accent1"/>
+          </a:fillRef>
+          <a:effectRef idx="2">
+            <a:schemeClr val="accent1"/>
+          </a:effectRef>
+          <a:fontRef idx="minor">
+            <a:schemeClr val="lt1"/>
+          </a:fontRef>
+        </p:style>
+        <p:txBody>
+          <a:bodyPr rtlCol="0" anchor="ctr"/>
+          <a:lstStyle/>
+          <a:p>
+            <a:pPr algn="ctr"/>
+          </a:p>
+        </p:txBody>
+      </p:sp>
+      <p:sp>
+        <p:nvSpPr>
+          <p:cNvPr id="20" name="TextBox 19"/>
+          <p:cNvSpPr txBox="1"/>
+          <p:nvPr/>
+        </p:nvSpPr>
+        <p:spPr>
+          <a:xfrm>
+            <a:off x="7315200" y="1801368"/>
+            <a:ext cx="2176272" cy="685800"/>
+          </a:xfrm>
+          <a:prstGeom prst="rect">
+            <a:avLst/>
+          </a:prstGeom>
+          <a:noFill/>
+        </p:spPr>
+        <p:txBody>
+          <a:bodyPr wrap="square" anchor="ctr" lIns="27432" rIns="27432" tIns="9144" bIns="9144">
+            <a:spAutoFit/>
+          </a:bodyPr>
+          <a:lstStyle/>
+          <a:p>
+            <a:pPr algn="ctr">
+              <a:spcBef>
+                <a:spcPts val="0"/>
+              </a:spcBef>
+              <a:spcAft>
+                <a:spcPts val="200"/>
+              </a:spcAft>
+            </a:pPr>
+            <a:r>
+              <a:rPr sz="3000" b="1" i="0">
+                <a:solidFill>
+                  <a:srgbClr val="C0561E"/>
+                </a:solidFill>
+                <a:latin typeface="Tahoma"/>
+              </a:rPr>
+              <a:t>0</a:t>
+            </a:r>
+          </a:p>
+        </p:txBody>
+      </p:sp>
+      <p:sp>
+        <p:nvSpPr>
+          <p:cNvPr id="21" name="TextBox 20"/>
+          <p:cNvSpPr txBox="1"/>
+          <p:nvPr/>
+        </p:nvSpPr>
+        <p:spPr>
+          <a:xfrm>
+            <a:off x="7406640" y="2514600"/>
+            <a:ext cx="1993391" cy="411480"/>
+          </a:xfrm>
+          <a:prstGeom prst="rect">
+            <a:avLst/>
+          </a:prstGeom>
+          <a:noFill/>
+        </p:spPr>
+        <p:txBody>
+          <a:bodyPr wrap="square" anchor="t" lIns="27432" rIns="27432" tIns="9144" bIns="9144">
+            <a:spAutoFit/>
+          </a:bodyPr>
+          <a:lstStyle/>
+          <a:p>
+            <a:pPr algn="ctr">
+              <a:spcBef>
+                <a:spcPts val="0"/>
+              </a:spcBef>
+              <a:spcAft>
+                <a:spcPts val="200"/>
+              </a:spcAft>
+            </a:pPr>
+            <a:r>
+              <a:rPr sz="1250" b="1" i="0">
+                <a:solidFill>
+                  <a:srgbClr val="0D3D14"/>
+                </a:solidFill>
+                <a:latin typeface="Tahoma"/>
+              </a:rPr>
+              <a:t>QA decisions on scrap bins</a:t>
+            </a:r>
+          </a:p>
+        </p:txBody>
+      </p:sp>
+      <p:sp>
+        <p:nvSpPr>
+          <p:cNvPr id="22" name="TextBox 21"/>
+          <p:cNvSpPr txBox="1"/>
+          <p:nvPr/>
+        </p:nvSpPr>
+        <p:spPr>
+          <a:xfrm>
+            <a:off x="7406640" y="2880360"/>
+            <a:ext cx="1993391" cy="365760"/>
+          </a:xfrm>
+          <a:prstGeom prst="rect">
+            <a:avLst/>
+          </a:prstGeom>
+          <a:noFill/>
+        </p:spPr>
+        <p:txBody>
+          <a:bodyPr wrap="square" anchor="t" lIns="27432" rIns="27432" tIns="9144" bIns="9144">
+            <a:spAutoFit/>
+          </a:bodyPr>
+          <a:lstStyle/>
+          <a:p>
+            <a:pPr algn="ctr">
+              <a:spcBef>
+                <a:spcPts val="0"/>
+              </a:spcBef>
+              <a:spcAft>
+                <a:spcPts val="200"/>
+              </a:spcAft>
+            </a:pPr>
+            <a:r>
+              <a:rPr sz="1100" b="0" i="0">
+                <a:solidFill>
+                  <a:srgbClr val="555555"/>
+                </a:solidFill>
+                <a:latin typeface="Tahoma"/>
+              </a:rPr>
+              <a:t>33 red bins open</a:t>
+            </a:r>
+          </a:p>
+        </p:txBody>
+      </p:sp>
+      <p:sp>
+        <p:nvSpPr>
+          <p:cNvPr id="23" name="Rounded Rectangle 22"/>
+          <p:cNvSpPr/>
+          <p:nvPr/>
+        </p:nvSpPr>
+        <p:spPr>
+          <a:xfrm>
+            <a:off x="9601200" y="1691640"/>
+            <a:ext cx="2130552" cy="1600200"/>
+          </a:xfrm>
+          <a:prstGeom prst="roundRect">
+            <a:avLst/>
+          </a:prstGeom>
+          <a:solidFill>
+            <a:srgbClr val="FFFFFF"/>
+          </a:solidFill>
+          <a:ln w="9525">
+            <a:solidFill>
+              <a:srgbClr val="D8E4D0"/>
+            </a:solidFill>
+          </a:ln>
+          <a:effectLst/>
+          <a:effectLst>
+            <a:outerShdw blurRad="50000" dist="20000" dir="5400000" rotWithShape="0">
+              <a:srgbClr val="8A99AD">
+                <a:alpha val="38000"/>
+              </a:srgbClr>
+            </a:outerShdw>
+          </a:effectLst>
+        </p:spPr>
+        <p:style>
+          <a:lnRef idx="1">
+            <a:schemeClr val="accent1"/>
+          </a:lnRef>
+          <a:fillRef idx="3">
+            <a:schemeClr val="accent1"/>
+          </a:fillRef>
+          <a:effectRef idx="2">
+            <a:schemeClr val="accent1"/>
+          </a:effectRef>
+          <a:fontRef idx="minor">
+            <a:schemeClr val="lt1"/>
+          </a:fontRef>
+        </p:style>
+        <p:txBody>
+          <a:bodyPr rtlCol="0" anchor="ctr"/>
+          <a:lstStyle/>
+          <a:p>
+            <a:pPr algn="ctr"/>
+          </a:p>
+        </p:txBody>
+      </p:sp>
+      <p:sp>
+        <p:nvSpPr>
+          <p:cNvPr id="24" name="TextBox 23"/>
+          <p:cNvSpPr txBox="1"/>
+          <p:nvPr/>
+        </p:nvSpPr>
+        <p:spPr>
+          <a:xfrm>
+            <a:off x="9601200" y="1801368"/>
+            <a:ext cx="2130552" cy="685800"/>
+          </a:xfrm>
+          <a:prstGeom prst="rect">
+            <a:avLst/>
+          </a:prstGeom>
+          <a:noFill/>
+        </p:spPr>
+        <p:txBody>
+          <a:bodyPr wrap="square" anchor="ctr" lIns="27432" rIns="27432" tIns="9144" bIns="9144">
+            <a:spAutoFit/>
+          </a:bodyPr>
+          <a:lstStyle/>
+          <a:p>
+            <a:pPr algn="ctr">
+              <a:spcBef>
+                <a:spcPts val="0"/>
+              </a:spcBef>
+              <a:spcAft>
+                <a:spcPts val="200"/>
+              </a:spcAft>
+            </a:pPr>
+            <a:r>
+              <a:rPr sz="3000" b="1" i="0">
+                <a:solidFill>
+                  <a:srgbClr val="C0561E"/>
+                </a:solidFill>
+                <a:latin typeface="Tahoma"/>
+              </a:rPr>
+              <a:t>0</a:t>
+            </a:r>
+          </a:p>
+        </p:txBody>
+      </p:sp>
+      <p:sp>
+        <p:nvSpPr>
+          <p:cNvPr id="25" name="TextBox 24"/>
+          <p:cNvSpPr txBox="1"/>
+          <p:nvPr/>
+        </p:nvSpPr>
+        <p:spPr>
+          <a:xfrm>
+            <a:off x="9692640" y="2514600"/>
+            <a:ext cx="1947672" cy="411480"/>
+          </a:xfrm>
+          <a:prstGeom prst="rect">
+            <a:avLst/>
+          </a:prstGeom>
+          <a:noFill/>
+        </p:spPr>
+        <p:txBody>
+          <a:bodyPr wrap="square" anchor="t" lIns="27432" rIns="27432" tIns="9144" bIns="9144">
+            <a:spAutoFit/>
+          </a:bodyPr>
+          <a:lstStyle/>
+          <a:p>
+            <a:pPr algn="ctr">
+              <a:spcBef>
+                <a:spcPts val="0"/>
+              </a:spcBef>
+              <a:spcAft>
+                <a:spcPts val="200"/>
+              </a:spcAft>
+            </a:pPr>
+            <a:r>
+              <a:rPr sz="1250" b="1" i="0">
+                <a:solidFill>
+                  <a:srgbClr val="0D3D14"/>
+                </a:solidFill>
+                <a:latin typeface="Tahoma"/>
+              </a:rPr>
+              <a:t>Action items from meetings</a:t>
+            </a:r>
+          </a:p>
+        </p:txBody>
+      </p:sp>
+      <p:sp>
+        <p:nvSpPr>
+          <p:cNvPr id="26" name="TextBox 25"/>
+          <p:cNvSpPr txBox="1"/>
+          <p:nvPr/>
+        </p:nvSpPr>
+        <p:spPr>
+          <a:xfrm>
+            <a:off x="9692640" y="2880360"/>
+            <a:ext cx="1947672" cy="365760"/>
+          </a:xfrm>
+          <a:prstGeom prst="rect">
+            <a:avLst/>
+          </a:prstGeom>
+          <a:noFill/>
+        </p:spPr>
+        <p:txBody>
+          <a:bodyPr wrap="square" anchor="t" lIns="27432" rIns="27432" tIns="9144" bIns="9144">
+            <a:spAutoFit/>
+          </a:bodyPr>
+          <a:lstStyle/>
+          <a:p>
+            <a:pPr algn="ctr">
+              <a:spcBef>
+                <a:spcPts val="0"/>
+              </a:spcBef>
+              <a:spcAft>
+                <a:spcPts val="200"/>
+              </a:spcAft>
+            </a:pPr>
+            <a:r>
+              <a:rPr sz="1100" b="0" i="0">
+                <a:solidFill>
+                  <a:srgbClr val="555555"/>
+                </a:solidFill>
+                <a:latin typeface="Tahoma"/>
+              </a:rPr>
+              <a:t>since 13 Jul</a:t>
+            </a:r>
+          </a:p>
+        </p:txBody>
+      </p:sp>
+      <p:sp>
+        <p:nvSpPr>
+          <p:cNvPr id="27" name="Rectangle 26"/>
+          <p:cNvSpPr/>
+          <p:nvPr/>
+        </p:nvSpPr>
+        <p:spPr>
+          <a:xfrm>
+            <a:off x="457200" y="3566160"/>
+            <a:ext cx="11274552" cy="402336"/>
+          </a:xfrm>
+          <a:prstGeom prst="rect">
             <a:avLst/>
           </a:prstGeom>
           <a:solidFill>
@@ -13575,14 +14426,14 @@
       </p:sp>
       <p:sp>
         <p:nvSpPr>
-          <p:cNvPr id="8" name="TextBox 7"/>
-          <p:cNvSpPr txBox="1"/>
-          <p:nvPr/>
-        </p:nvSpPr>
-        <p:spPr>
-          <a:xfrm>
-            <a:off x="457200" y="1737360"/>
-            <a:ext cx="3017520" cy="1051560"/>
+          <p:cNvPr id="28" name="TextBox 27"/>
+          <p:cNvSpPr txBox="1"/>
+          <p:nvPr/>
+        </p:nvSpPr>
+        <p:spPr>
+          <a:xfrm>
+            <a:off x="457200" y="3547872"/>
+            <a:ext cx="11274552" cy="402336"/>
           </a:xfrm>
           <a:prstGeom prst="rect">
             <a:avLst/>
@@ -13604,71 +14455,27 @@
               </a:spcAft>
             </a:pPr>
             <a:r>
-              <a:rPr sz="1600" b="1" i="0">
+              <a:rPr sz="1500" b="1" i="0">
                 <a:solidFill>
                   <a:srgbClr val="FFFFFF"/>
                 </a:solidFill>
                 <a:latin typeface="Tahoma"/>
               </a:rPr>
-              <a:t>Week 2  (12–16 Oct)</a:t>
-            </a:r>
-          </a:p>
-        </p:txBody>
-      </p:sp>
-      <p:sp>
-        <p:nvSpPr>
-          <p:cNvPr id="9" name="Rounded Rectangle 8"/>
-          <p:cNvSpPr/>
-          <p:nvPr/>
-        </p:nvSpPr>
-        <p:spPr>
-          <a:xfrm>
-            <a:off x="3611880" y="1737360"/>
-            <a:ext cx="8119872" cy="1051560"/>
-          </a:xfrm>
-          <a:prstGeom prst="roundRect">
-            <a:avLst/>
-          </a:prstGeom>
-          <a:solidFill>
-            <a:srgbClr val="ECF1E9"/>
-          </a:solidFill>
-          <a:ln>
-            <a:noFill/>
-          </a:ln>
-          <a:effectLst/>
-        </p:spPr>
-        <p:style>
-          <a:lnRef idx="1">
-            <a:schemeClr val="accent1"/>
-          </a:lnRef>
-          <a:fillRef idx="3">
-            <a:schemeClr val="accent1"/>
-          </a:fillRef>
-          <a:effectRef idx="2">
-            <a:schemeClr val="accent1"/>
-          </a:effectRef>
-          <a:fontRef idx="minor">
-            <a:schemeClr val="lt1"/>
-          </a:fontRef>
-        </p:style>
-        <p:txBody>
-          <a:bodyPr rtlCol="0" anchor="ctr"/>
-          <a:lstStyle/>
-          <a:p>
-            <a:pPr algn="ctr"/>
-          </a:p>
-        </p:txBody>
-      </p:sp>
-      <p:sp>
-        <p:nvSpPr>
-          <p:cNvPr id="10" name="TextBox 9"/>
-          <p:cNvSpPr txBox="1"/>
-          <p:nvPr/>
-        </p:nvSpPr>
-        <p:spPr>
-          <a:xfrm>
-            <a:off x="3794760" y="1737360"/>
-            <a:ext cx="7772400" cy="1051560"/>
+              <a:t>Pattern: steps the system does by itself work — steps that need a person to press are where work waits</a:t>
+            </a:r>
+          </a:p>
+        </p:txBody>
+      </p:sp>
+      <p:sp>
+        <p:nvSpPr>
+          <p:cNvPr id="29" name="TextBox 28"/>
+          <p:cNvSpPr txBox="1"/>
+          <p:nvPr/>
+        </p:nvSpPr>
+        <p:spPr>
+          <a:xfrm>
+            <a:off x="640080" y="4069080"/>
+            <a:ext cx="10972800" cy="457200"/>
           </a:xfrm>
           <a:prstGeom prst="rect">
             <a:avLst/>
@@ -13690,71 +14497,27 @@
               </a:spcAft>
             </a:pPr>
             <a:r>
-              <a:rPr sz="1400" b="0" i="0">
+              <a:rPr sz="1300" b="1" i="0">
                 <a:solidFill>
                   <a:srgbClr val="2C5F2D"/>
                 </a:solidFill>
                 <a:latin typeface="Tahoma"/>
               </a:rPr>
-              <a:t>QA clears bins &amp; step-5 repairs · DIE updates die status · first real action items</a:t>
-            </a:r>
-          </a:p>
-        </p:txBody>
-      </p:sp>
-      <p:sp>
-        <p:nvSpPr>
-          <p:cNvPr id="11" name="Rounded Rectangle 10"/>
-          <p:cNvSpPr/>
-          <p:nvPr/>
-        </p:nvSpPr>
-        <p:spPr>
-          <a:xfrm>
-            <a:off x="457200" y="3063239"/>
-            <a:ext cx="3017520" cy="1051560"/>
-          </a:xfrm>
-          <a:prstGeom prst="roundRect">
-            <a:avLst/>
-          </a:prstGeom>
-          <a:solidFill>
-            <a:srgbClr val="0D3D14"/>
-          </a:solidFill>
-          <a:ln>
-            <a:noFill/>
-          </a:ln>
-          <a:effectLst/>
-        </p:spPr>
-        <p:style>
-          <a:lnRef idx="1">
-            <a:schemeClr val="accent1"/>
-          </a:lnRef>
-          <a:fillRef idx="3">
-            <a:schemeClr val="accent1"/>
-          </a:fillRef>
-          <a:effectRef idx="2">
-            <a:schemeClr val="accent1"/>
-          </a:effectRef>
-          <a:fontRef idx="minor">
-            <a:schemeClr val="lt1"/>
-          </a:fontRef>
-        </p:style>
-        <p:txBody>
-          <a:bodyPr rtlCol="0" anchor="ctr"/>
-          <a:lstStyle/>
-          <a:p>
-            <a:pPr algn="ctr"/>
-          </a:p>
-        </p:txBody>
-      </p:sp>
-      <p:sp>
-        <p:nvSpPr>
-          <p:cNvPr id="12" name="TextBox 11"/>
-          <p:cNvSpPr txBox="1"/>
-          <p:nvPr/>
-        </p:nvSpPr>
-        <p:spPr>
-          <a:xfrm>
-            <a:off x="457200" y="3063239"/>
-            <a:ext cx="3017520" cy="1051560"/>
+              <a:t>➜  QA: daily session to clear repair orders at step 5 and decide every bin</a:t>
+            </a:r>
+          </a:p>
+        </p:txBody>
+      </p:sp>
+      <p:sp>
+        <p:nvSpPr>
+          <p:cNvPr id="30" name="TextBox 29"/>
+          <p:cNvSpPr txBox="1"/>
+          <p:nvPr/>
+        </p:nvSpPr>
+        <p:spPr>
+          <a:xfrm>
+            <a:off x="640080" y="4572000"/>
+            <a:ext cx="10972800" cy="457200"/>
           </a:xfrm>
           <a:prstGeom prst="rect">
             <a:avLst/>
@@ -13767,7 +14530,7 @@
           </a:bodyPr>
           <a:lstStyle/>
           <a:p>
-            <a:pPr algn="ctr">
+            <a:pPr algn="l">
               <a:spcBef>
                 <a:spcPts val="0"/>
               </a:spcBef>
@@ -13776,71 +14539,27 @@
               </a:spcAft>
             </a:pPr>
             <a:r>
-              <a:rPr sz="1600" b="1" i="0">
-                <a:solidFill>
-                  <a:srgbClr val="FFFFFF"/>
-                </a:solidFill>
-                <a:latin typeface="Tahoma"/>
-              </a:rPr>
-              <a:t>Week 3  (19–22 Oct)</a:t>
-            </a:r>
-          </a:p>
-        </p:txBody>
-      </p:sp>
-      <p:sp>
-        <p:nvSpPr>
-          <p:cNvPr id="13" name="Rounded Rectangle 12"/>
-          <p:cNvSpPr/>
-          <p:nvPr/>
-        </p:nvSpPr>
-        <p:spPr>
-          <a:xfrm>
-            <a:off x="3611880" y="3063239"/>
-            <a:ext cx="8119872" cy="1051560"/>
-          </a:xfrm>
-          <a:prstGeom prst="roundRect">
-            <a:avLst/>
-          </a:prstGeom>
-          <a:solidFill>
-            <a:srgbClr val="ECF1E9"/>
-          </a:solidFill>
-          <a:ln>
-            <a:noFill/>
-          </a:ln>
-          <a:effectLst/>
-        </p:spPr>
-        <p:style>
-          <a:lnRef idx="1">
-            <a:schemeClr val="accent1"/>
-          </a:lnRef>
-          <a:fillRef idx="3">
-            <a:schemeClr val="accent1"/>
-          </a:fillRef>
-          <a:effectRef idx="2">
-            <a:schemeClr val="accent1"/>
-          </a:effectRef>
-          <a:fontRef idx="minor">
-            <a:schemeClr val="lt1"/>
-          </a:fontRef>
-        </p:style>
-        <p:txBody>
-          <a:bodyPr rtlCol="0" anchor="ctr"/>
-          <a:lstStyle/>
-          <a:p>
-            <a:pPr algn="ctr"/>
-          </a:p>
-        </p:txBody>
-      </p:sp>
-      <p:sp>
-        <p:nvSpPr>
-          <p:cNvPr id="14" name="TextBox 13"/>
-          <p:cNvSpPr txBox="1"/>
-          <p:nvPr/>
-        </p:nvSpPr>
-        <p:spPr>
-          <a:xfrm>
-            <a:off x="3794760" y="3063239"/>
-            <a:ext cx="7772400" cy="1051560"/>
+              <a:rPr sz="1300" b="1" i="0">
+                <a:solidFill>
+                  <a:srgbClr val="2C5F2D"/>
+                </a:solidFill>
+                <a:latin typeface="Tahoma"/>
+              </a:rPr>
+              <a:t>➜  Supervisors: approve shift-close requests the same day</a:t>
+            </a:r>
+          </a:p>
+        </p:txBody>
+      </p:sp>
+      <p:sp>
+        <p:nvSpPr>
+          <p:cNvPr id="31" name="TextBox 30"/>
+          <p:cNvSpPr txBox="1"/>
+          <p:nvPr/>
+        </p:nvSpPr>
+        <p:spPr>
+          <a:xfrm>
+            <a:off x="640080" y="5074920"/>
+            <a:ext cx="10972800" cy="457200"/>
           </a:xfrm>
           <a:prstGeom prst="rect">
             <a:avLst/>
@@ -13862,185 +14581,13 @@
               </a:spcAft>
             </a:pPr>
             <a:r>
-              <a:rPr sz="1400" b="0" i="0">
+              <a:rPr sz="1300" b="1" i="0">
                 <a:solidFill>
                   <a:srgbClr val="2C5F2D"/>
                 </a:solidFill>
                 <a:latin typeface="Tahoma"/>
               </a:rPr>
-              <a:t>Each department rehearses its own 3 minutes · fill in the 'before' numbers · collect 3 real cases</a:t>
-            </a:r>
-          </a:p>
-        </p:txBody>
-      </p:sp>
-      <p:sp>
-        <p:nvSpPr>
-          <p:cNvPr id="15" name="Rounded Rectangle 14"/>
-          <p:cNvSpPr/>
-          <p:nvPr/>
-        </p:nvSpPr>
-        <p:spPr>
-          <a:xfrm>
-            <a:off x="457200" y="4389120"/>
-            <a:ext cx="3017520" cy="1051560"/>
-          </a:xfrm>
-          <a:prstGeom prst="roundRect">
-            <a:avLst/>
-          </a:prstGeom>
-          <a:solidFill>
-            <a:srgbClr val="0D3D14"/>
-          </a:solidFill>
-          <a:ln>
-            <a:noFill/>
-          </a:ln>
-          <a:effectLst/>
-        </p:spPr>
-        <p:style>
-          <a:lnRef idx="1">
-            <a:schemeClr val="accent1"/>
-          </a:lnRef>
-          <a:fillRef idx="3">
-            <a:schemeClr val="accent1"/>
-          </a:fillRef>
-          <a:effectRef idx="2">
-            <a:schemeClr val="accent1"/>
-          </a:effectRef>
-          <a:fontRef idx="minor">
-            <a:schemeClr val="lt1"/>
-          </a:fontRef>
-        </p:style>
-        <p:txBody>
-          <a:bodyPr rtlCol="0" anchor="ctr"/>
-          <a:lstStyle/>
-          <a:p>
-            <a:pPr algn="ctr"/>
-          </a:p>
-        </p:txBody>
-      </p:sp>
-      <p:sp>
-        <p:nvSpPr>
-          <p:cNvPr id="16" name="TextBox 15"/>
-          <p:cNvSpPr txBox="1"/>
-          <p:nvPr/>
-        </p:nvSpPr>
-        <p:spPr>
-          <a:xfrm>
-            <a:off x="457200" y="4389120"/>
-            <a:ext cx="3017520" cy="1051560"/>
-          </a:xfrm>
-          <a:prstGeom prst="rect">
-            <a:avLst/>
-          </a:prstGeom>
-          <a:noFill/>
-        </p:spPr>
-        <p:txBody>
-          <a:bodyPr wrap="square" anchor="ctr" lIns="27432" rIns="27432" tIns="9144" bIns="9144">
-            <a:spAutoFit/>
-          </a:bodyPr>
-          <a:lstStyle/>
-          <a:p>
-            <a:pPr algn="ctr">
-              <a:spcBef>
-                <a:spcPts val="0"/>
-              </a:spcBef>
-              <a:spcAft>
-                <a:spcPts val="200"/>
-              </a:spcAft>
-            </a:pPr>
-            <a:r>
-              <a:rPr sz="1600" b="1" i="0">
-                <a:solidFill>
-                  <a:srgbClr val="FFFFFF"/>
-                </a:solidFill>
-                <a:latin typeface="Tahoma"/>
-              </a:rPr>
-              <a:t>Week 4  (26–30 Oct)</a:t>
-            </a:r>
-          </a:p>
-        </p:txBody>
-      </p:sp>
-      <p:sp>
-        <p:nvSpPr>
-          <p:cNvPr id="17" name="Rounded Rectangle 16"/>
-          <p:cNvSpPr/>
-          <p:nvPr/>
-        </p:nvSpPr>
-        <p:spPr>
-          <a:xfrm>
-            <a:off x="3611880" y="4389120"/>
-            <a:ext cx="8119872" cy="1051560"/>
-          </a:xfrm>
-          <a:prstGeom prst="roundRect">
-            <a:avLst/>
-          </a:prstGeom>
-          <a:solidFill>
-            <a:srgbClr val="ECF1E9"/>
-          </a:solidFill>
-          <a:ln>
-            <a:noFill/>
-          </a:ln>
-          <a:effectLst/>
-        </p:spPr>
-        <p:style>
-          <a:lnRef idx="1">
-            <a:schemeClr val="accent1"/>
-          </a:lnRef>
-          <a:fillRef idx="3">
-            <a:schemeClr val="accent1"/>
-          </a:fillRef>
-          <a:effectRef idx="2">
-            <a:schemeClr val="accent1"/>
-          </a:effectRef>
-          <a:fontRef idx="minor">
-            <a:schemeClr val="lt1"/>
-          </a:fontRef>
-        </p:style>
-        <p:txBody>
-          <a:bodyPr rtlCol="0" anchor="ctr"/>
-          <a:lstStyle/>
-          <a:p>
-            <a:pPr algn="ctr"/>
-          </a:p>
-        </p:txBody>
-      </p:sp>
-      <p:sp>
-        <p:nvSpPr>
-          <p:cNvPr id="18" name="TextBox 17"/>
-          <p:cNvSpPr txBox="1"/>
-          <p:nvPr/>
-        </p:nvSpPr>
-        <p:spPr>
-          <a:xfrm>
-            <a:off x="3794760" y="4389120"/>
-            <a:ext cx="7772400" cy="1051560"/>
-          </a:xfrm>
-          <a:prstGeom prst="rect">
-            <a:avLst/>
-          </a:prstGeom>
-          <a:noFill/>
-        </p:spPr>
-        <p:txBody>
-          <a:bodyPr wrap="square" anchor="ctr" lIns="27432" rIns="27432" tIns="9144" bIns="9144">
-            <a:spAutoFit/>
-          </a:bodyPr>
-          <a:lstStyle/>
-          <a:p>
-            <a:pPr algn="l">
-              <a:spcBef>
-                <a:spcPts val="0"/>
-              </a:spcBef>
-              <a:spcAft>
-                <a:spcPts val="200"/>
-              </a:spcAft>
-            </a:pPr>
-            <a:r>
-              <a:rPr sz="1400" b="0" i="0">
-                <a:solidFill>
-                  <a:srgbClr val="2C5F2D"/>
-                </a:solidFill>
-                <a:latin typeface="Tahoma"/>
-              </a:rPr>
-              <a:t>Feature freeze · final numbers measured the morning of the show · roadshow</a:t>
+              <a:t>➜  Every morning meeting: at least one action item with an owner and a due date</a:t>
             </a:r>
           </a:p>
         </p:txBody>
@@ -14065,6 +14612,732 @@
       <p:grpSpPr/>
       <p:sp>
         <p:nvSpPr>
+          <p:cNvPr id="2" name="TextBox 1"/>
+          <p:cNvSpPr txBox="1"/>
+          <p:nvPr/>
+        </p:nvSpPr>
+        <p:spPr>
+          <a:xfrm>
+            <a:off x="457200" y="256032"/>
+            <a:ext cx="10881360" cy="868680"/>
+          </a:xfrm>
+          <a:prstGeom prst="rect">
+            <a:avLst/>
+          </a:prstGeom>
+          <a:noFill/>
+        </p:spPr>
+        <p:txBody>
+          <a:bodyPr wrap="square" anchor="ctr" lIns="27432" rIns="27432" tIns="9144" bIns="9144">
+            <a:spAutoFit/>
+          </a:bodyPr>
+          <a:lstStyle/>
+          <a:p>
+            <a:pPr algn="l">
+              <a:spcBef>
+                <a:spcPts val="0"/>
+              </a:spcBef>
+              <a:spcAft>
+                <a:spcPts val="200"/>
+              </a:spcAft>
+            </a:pPr>
+            <a:r>
+              <a:rPr sz="3400" b="1" i="0">
+                <a:solidFill>
+                  <a:srgbClr val="0D3D14"/>
+                </a:solidFill>
+                <a:latin typeface="Tahoma"/>
+              </a:rPr>
+              <a:t>Next steps to the roadshow</a:t>
+            </a:r>
+          </a:p>
+        </p:txBody>
+      </p:sp>
+      <p:sp>
+        <p:nvSpPr>
+          <p:cNvPr id="3" name="TextBox 2"/>
+          <p:cNvSpPr txBox="1"/>
+          <p:nvPr/>
+        </p:nvSpPr>
+        <p:spPr>
+          <a:xfrm>
+            <a:off x="502920" y="1024128"/>
+            <a:ext cx="10881360" cy="457200"/>
+          </a:xfrm>
+          <a:prstGeom prst="rect">
+            <a:avLst/>
+          </a:prstGeom>
+          <a:noFill/>
+        </p:spPr>
+        <p:txBody>
+          <a:bodyPr wrap="square" anchor="t" lIns="27432" rIns="27432" tIns="9144" bIns="9144">
+            <a:spAutoFit/>
+          </a:bodyPr>
+          <a:lstStyle/>
+          <a:p>
+            <a:pPr algn="l">
+              <a:spcBef>
+                <a:spcPts val="0"/>
+              </a:spcBef>
+              <a:spcAft>
+                <a:spcPts val="200"/>
+              </a:spcAft>
+            </a:pPr>
+            <a:r>
+              <a:rPr sz="1900" b="1" i="0">
+                <a:solidFill>
+                  <a:srgbClr val="2C5F2D"/>
+                </a:solidFill>
+                <a:latin typeface="Tahoma"/>
+              </a:rPr>
+              <a:t>Owner per department · 06 – 30 Oct 2026</a:t>
+            </a:r>
+          </a:p>
+        </p:txBody>
+      </p:sp>
+      <p:pic>
+        <p:nvPicPr>
+          <p:cNvPr id="4" name="Picture 3" descr="logo_footer.png"/>
+          <p:cNvPicPr>
+            <a:picLocks noChangeAspect="1"/>
+          </p:cNvPicPr>
+          <p:nvPr/>
+        </p:nvPicPr>
+        <p:blipFill>
+          <a:blip r:embed="rId2"/>
+          <a:stretch>
+            <a:fillRect/>
+          </a:stretch>
+        </p:blipFill>
+        <p:spPr>
+          <a:xfrm>
+            <a:off x="384048" y="6327648"/>
+            <a:ext cx="365760" cy="384048"/>
+          </a:xfrm>
+          <a:prstGeom prst="rect">
+            <a:avLst/>
+          </a:prstGeom>
+        </p:spPr>
+      </p:pic>
+      <p:sp>
+        <p:nvSpPr>
+          <p:cNvPr id="5" name="TextBox 4"/>
+          <p:cNvSpPr txBox="1"/>
+          <p:nvPr/>
+        </p:nvSpPr>
+        <p:spPr>
+          <a:xfrm>
+            <a:off x="786384" y="6327648"/>
+            <a:ext cx="4114800" cy="411480"/>
+          </a:xfrm>
+          <a:prstGeom prst="rect">
+            <a:avLst/>
+          </a:prstGeom>
+          <a:noFill/>
+        </p:spPr>
+        <p:txBody>
+          <a:bodyPr wrap="square" anchor="ctr" lIns="27432" rIns="27432" tIns="9144" bIns="9144">
+            <a:spAutoFit/>
+          </a:bodyPr>
+          <a:lstStyle/>
+          <a:p>
+            <a:pPr algn="l">
+              <a:spcBef>
+                <a:spcPts val="0"/>
+              </a:spcBef>
+              <a:spcAft>
+                <a:spcPts val="200"/>
+              </a:spcAft>
+            </a:pPr>
+            <a:r>
+              <a:rPr sz="1300" b="1" i="0">
+                <a:solidFill>
+                  <a:srgbClr val="0D3D14"/>
+                </a:solidFill>
+                <a:latin typeface="Tahoma"/>
+              </a:rPr>
+              <a:t>THAI SUMMIT GROUP</a:t>
+            </a:r>
+          </a:p>
+        </p:txBody>
+      </p:sp>
+      <p:sp>
+        <p:nvSpPr>
+          <p:cNvPr id="6" name="TextBox 5"/>
+          <p:cNvSpPr txBox="1"/>
+          <p:nvPr/>
+        </p:nvSpPr>
+        <p:spPr>
+          <a:xfrm>
+            <a:off x="11430000" y="6355080"/>
+            <a:ext cx="594360" cy="365760"/>
+          </a:xfrm>
+          <a:prstGeom prst="rect">
+            <a:avLst/>
+          </a:prstGeom>
+          <a:noFill/>
+        </p:spPr>
+        <p:txBody>
+          <a:bodyPr wrap="square" anchor="ctr" lIns="27432" rIns="27432" tIns="9144" bIns="9144">
+            <a:spAutoFit/>
+          </a:bodyPr>
+          <a:lstStyle/>
+          <a:p>
+            <a:pPr algn="r">
+              <a:spcBef>
+                <a:spcPts val="0"/>
+              </a:spcBef>
+              <a:spcAft>
+                <a:spcPts val="200"/>
+              </a:spcAft>
+            </a:pPr>
+            <a:r>
+              <a:rPr sz="1200" b="0" i="0">
+                <a:solidFill>
+                  <a:srgbClr val="555555"/>
+                </a:solidFill>
+                <a:latin typeface="Tahoma"/>
+              </a:rPr>
+              <a:t>18</a:t>
+            </a:r>
+          </a:p>
+        </p:txBody>
+      </p:sp>
+      <p:sp>
+        <p:nvSpPr>
+          <p:cNvPr id="7" name="Rounded Rectangle 6"/>
+          <p:cNvSpPr/>
+          <p:nvPr/>
+        </p:nvSpPr>
+        <p:spPr>
+          <a:xfrm>
+            <a:off x="457200" y="1737360"/>
+            <a:ext cx="3017520" cy="1051560"/>
+          </a:xfrm>
+          <a:prstGeom prst="roundRect">
+            <a:avLst/>
+          </a:prstGeom>
+          <a:solidFill>
+            <a:srgbClr val="0D3D14"/>
+          </a:solidFill>
+          <a:ln>
+            <a:noFill/>
+          </a:ln>
+          <a:effectLst/>
+        </p:spPr>
+        <p:style>
+          <a:lnRef idx="1">
+            <a:schemeClr val="accent1"/>
+          </a:lnRef>
+          <a:fillRef idx="3">
+            <a:schemeClr val="accent1"/>
+          </a:fillRef>
+          <a:effectRef idx="2">
+            <a:schemeClr val="accent1"/>
+          </a:effectRef>
+          <a:fontRef idx="minor">
+            <a:schemeClr val="lt1"/>
+          </a:fontRef>
+        </p:style>
+        <p:txBody>
+          <a:bodyPr rtlCol="0" anchor="ctr"/>
+          <a:lstStyle/>
+          <a:p>
+            <a:pPr algn="ctr"/>
+          </a:p>
+        </p:txBody>
+      </p:sp>
+      <p:sp>
+        <p:nvSpPr>
+          <p:cNvPr id="8" name="TextBox 7"/>
+          <p:cNvSpPr txBox="1"/>
+          <p:nvPr/>
+        </p:nvSpPr>
+        <p:spPr>
+          <a:xfrm>
+            <a:off x="457200" y="1737360"/>
+            <a:ext cx="3017520" cy="1051560"/>
+          </a:xfrm>
+          <a:prstGeom prst="rect">
+            <a:avLst/>
+          </a:prstGeom>
+          <a:noFill/>
+        </p:spPr>
+        <p:txBody>
+          <a:bodyPr wrap="square" anchor="ctr" lIns="27432" rIns="27432" tIns="9144" bIns="9144">
+            <a:spAutoFit/>
+          </a:bodyPr>
+          <a:lstStyle/>
+          <a:p>
+            <a:pPr algn="ctr">
+              <a:spcBef>
+                <a:spcPts val="0"/>
+              </a:spcBef>
+              <a:spcAft>
+                <a:spcPts val="200"/>
+              </a:spcAft>
+            </a:pPr>
+            <a:r>
+              <a:rPr sz="1600" b="1" i="0">
+                <a:solidFill>
+                  <a:srgbClr val="FFFFFF"/>
+                </a:solidFill>
+                <a:latin typeface="Tahoma"/>
+              </a:rPr>
+              <a:t>Week 2  (12–16 Oct)</a:t>
+            </a:r>
+          </a:p>
+        </p:txBody>
+      </p:sp>
+      <p:sp>
+        <p:nvSpPr>
+          <p:cNvPr id="9" name="Rounded Rectangle 8"/>
+          <p:cNvSpPr/>
+          <p:nvPr/>
+        </p:nvSpPr>
+        <p:spPr>
+          <a:xfrm>
+            <a:off x="3611880" y="1737360"/>
+            <a:ext cx="8119872" cy="1051560"/>
+          </a:xfrm>
+          <a:prstGeom prst="roundRect">
+            <a:avLst/>
+          </a:prstGeom>
+          <a:solidFill>
+            <a:srgbClr val="ECF1E9"/>
+          </a:solidFill>
+          <a:ln>
+            <a:noFill/>
+          </a:ln>
+          <a:effectLst/>
+        </p:spPr>
+        <p:style>
+          <a:lnRef idx="1">
+            <a:schemeClr val="accent1"/>
+          </a:lnRef>
+          <a:fillRef idx="3">
+            <a:schemeClr val="accent1"/>
+          </a:fillRef>
+          <a:effectRef idx="2">
+            <a:schemeClr val="accent1"/>
+          </a:effectRef>
+          <a:fontRef idx="minor">
+            <a:schemeClr val="lt1"/>
+          </a:fontRef>
+        </p:style>
+        <p:txBody>
+          <a:bodyPr rtlCol="0" anchor="ctr"/>
+          <a:lstStyle/>
+          <a:p>
+            <a:pPr algn="ctr"/>
+          </a:p>
+        </p:txBody>
+      </p:sp>
+      <p:sp>
+        <p:nvSpPr>
+          <p:cNvPr id="10" name="TextBox 9"/>
+          <p:cNvSpPr txBox="1"/>
+          <p:nvPr/>
+        </p:nvSpPr>
+        <p:spPr>
+          <a:xfrm>
+            <a:off x="3794760" y="1737360"/>
+            <a:ext cx="7772400" cy="1051560"/>
+          </a:xfrm>
+          <a:prstGeom prst="rect">
+            <a:avLst/>
+          </a:prstGeom>
+          <a:noFill/>
+        </p:spPr>
+        <p:txBody>
+          <a:bodyPr wrap="square" anchor="ctr" lIns="27432" rIns="27432" tIns="9144" bIns="9144">
+            <a:spAutoFit/>
+          </a:bodyPr>
+          <a:lstStyle/>
+          <a:p>
+            <a:pPr algn="l">
+              <a:spcBef>
+                <a:spcPts val="0"/>
+              </a:spcBef>
+              <a:spcAft>
+                <a:spcPts val="200"/>
+              </a:spcAft>
+            </a:pPr>
+            <a:r>
+              <a:rPr sz="1400" b="0" i="0">
+                <a:solidFill>
+                  <a:srgbClr val="2C5F2D"/>
+                </a:solidFill>
+                <a:latin typeface="Tahoma"/>
+              </a:rPr>
+              <a:t>QA clears bins &amp; step-5 repairs · DIE updates die status · first real action items</a:t>
+            </a:r>
+          </a:p>
+        </p:txBody>
+      </p:sp>
+      <p:sp>
+        <p:nvSpPr>
+          <p:cNvPr id="11" name="Rounded Rectangle 10"/>
+          <p:cNvSpPr/>
+          <p:nvPr/>
+        </p:nvSpPr>
+        <p:spPr>
+          <a:xfrm>
+            <a:off x="457200" y="3063239"/>
+            <a:ext cx="3017520" cy="1051560"/>
+          </a:xfrm>
+          <a:prstGeom prst="roundRect">
+            <a:avLst/>
+          </a:prstGeom>
+          <a:solidFill>
+            <a:srgbClr val="0D3D14"/>
+          </a:solidFill>
+          <a:ln>
+            <a:noFill/>
+          </a:ln>
+          <a:effectLst/>
+        </p:spPr>
+        <p:style>
+          <a:lnRef idx="1">
+            <a:schemeClr val="accent1"/>
+          </a:lnRef>
+          <a:fillRef idx="3">
+            <a:schemeClr val="accent1"/>
+          </a:fillRef>
+          <a:effectRef idx="2">
+            <a:schemeClr val="accent1"/>
+          </a:effectRef>
+          <a:fontRef idx="minor">
+            <a:schemeClr val="lt1"/>
+          </a:fontRef>
+        </p:style>
+        <p:txBody>
+          <a:bodyPr rtlCol="0" anchor="ctr"/>
+          <a:lstStyle/>
+          <a:p>
+            <a:pPr algn="ctr"/>
+          </a:p>
+        </p:txBody>
+      </p:sp>
+      <p:sp>
+        <p:nvSpPr>
+          <p:cNvPr id="12" name="TextBox 11"/>
+          <p:cNvSpPr txBox="1"/>
+          <p:nvPr/>
+        </p:nvSpPr>
+        <p:spPr>
+          <a:xfrm>
+            <a:off x="457200" y="3063239"/>
+            <a:ext cx="3017520" cy="1051560"/>
+          </a:xfrm>
+          <a:prstGeom prst="rect">
+            <a:avLst/>
+          </a:prstGeom>
+          <a:noFill/>
+        </p:spPr>
+        <p:txBody>
+          <a:bodyPr wrap="square" anchor="ctr" lIns="27432" rIns="27432" tIns="9144" bIns="9144">
+            <a:spAutoFit/>
+          </a:bodyPr>
+          <a:lstStyle/>
+          <a:p>
+            <a:pPr algn="ctr">
+              <a:spcBef>
+                <a:spcPts val="0"/>
+              </a:spcBef>
+              <a:spcAft>
+                <a:spcPts val="200"/>
+              </a:spcAft>
+            </a:pPr>
+            <a:r>
+              <a:rPr sz="1600" b="1" i="0">
+                <a:solidFill>
+                  <a:srgbClr val="FFFFFF"/>
+                </a:solidFill>
+                <a:latin typeface="Tahoma"/>
+              </a:rPr>
+              <a:t>Week 3  (19–22 Oct)</a:t>
+            </a:r>
+          </a:p>
+        </p:txBody>
+      </p:sp>
+      <p:sp>
+        <p:nvSpPr>
+          <p:cNvPr id="13" name="Rounded Rectangle 12"/>
+          <p:cNvSpPr/>
+          <p:nvPr/>
+        </p:nvSpPr>
+        <p:spPr>
+          <a:xfrm>
+            <a:off x="3611880" y="3063239"/>
+            <a:ext cx="8119872" cy="1051560"/>
+          </a:xfrm>
+          <a:prstGeom prst="roundRect">
+            <a:avLst/>
+          </a:prstGeom>
+          <a:solidFill>
+            <a:srgbClr val="ECF1E9"/>
+          </a:solidFill>
+          <a:ln>
+            <a:noFill/>
+          </a:ln>
+          <a:effectLst/>
+        </p:spPr>
+        <p:style>
+          <a:lnRef idx="1">
+            <a:schemeClr val="accent1"/>
+          </a:lnRef>
+          <a:fillRef idx="3">
+            <a:schemeClr val="accent1"/>
+          </a:fillRef>
+          <a:effectRef idx="2">
+            <a:schemeClr val="accent1"/>
+          </a:effectRef>
+          <a:fontRef idx="minor">
+            <a:schemeClr val="lt1"/>
+          </a:fontRef>
+        </p:style>
+        <p:txBody>
+          <a:bodyPr rtlCol="0" anchor="ctr"/>
+          <a:lstStyle/>
+          <a:p>
+            <a:pPr algn="ctr"/>
+          </a:p>
+        </p:txBody>
+      </p:sp>
+      <p:sp>
+        <p:nvSpPr>
+          <p:cNvPr id="14" name="TextBox 13"/>
+          <p:cNvSpPr txBox="1"/>
+          <p:nvPr/>
+        </p:nvSpPr>
+        <p:spPr>
+          <a:xfrm>
+            <a:off x="3794760" y="3063239"/>
+            <a:ext cx="7772400" cy="1051560"/>
+          </a:xfrm>
+          <a:prstGeom prst="rect">
+            <a:avLst/>
+          </a:prstGeom>
+          <a:noFill/>
+        </p:spPr>
+        <p:txBody>
+          <a:bodyPr wrap="square" anchor="ctr" lIns="27432" rIns="27432" tIns="9144" bIns="9144">
+            <a:spAutoFit/>
+          </a:bodyPr>
+          <a:lstStyle/>
+          <a:p>
+            <a:pPr algn="l">
+              <a:spcBef>
+                <a:spcPts val="0"/>
+              </a:spcBef>
+              <a:spcAft>
+                <a:spcPts val="200"/>
+              </a:spcAft>
+            </a:pPr>
+            <a:r>
+              <a:rPr sz="1400" b="0" i="0">
+                <a:solidFill>
+                  <a:srgbClr val="2C5F2D"/>
+                </a:solidFill>
+                <a:latin typeface="Tahoma"/>
+              </a:rPr>
+              <a:t>Each department rehearses its own 3 minutes · fill in the 'before' numbers · collect 3 real cases</a:t>
+            </a:r>
+          </a:p>
+        </p:txBody>
+      </p:sp>
+      <p:sp>
+        <p:nvSpPr>
+          <p:cNvPr id="15" name="Rounded Rectangle 14"/>
+          <p:cNvSpPr/>
+          <p:nvPr/>
+        </p:nvSpPr>
+        <p:spPr>
+          <a:xfrm>
+            <a:off x="457200" y="4389120"/>
+            <a:ext cx="3017520" cy="1051560"/>
+          </a:xfrm>
+          <a:prstGeom prst="roundRect">
+            <a:avLst/>
+          </a:prstGeom>
+          <a:solidFill>
+            <a:srgbClr val="0D3D14"/>
+          </a:solidFill>
+          <a:ln>
+            <a:noFill/>
+          </a:ln>
+          <a:effectLst/>
+        </p:spPr>
+        <p:style>
+          <a:lnRef idx="1">
+            <a:schemeClr val="accent1"/>
+          </a:lnRef>
+          <a:fillRef idx="3">
+            <a:schemeClr val="accent1"/>
+          </a:fillRef>
+          <a:effectRef idx="2">
+            <a:schemeClr val="accent1"/>
+          </a:effectRef>
+          <a:fontRef idx="minor">
+            <a:schemeClr val="lt1"/>
+          </a:fontRef>
+        </p:style>
+        <p:txBody>
+          <a:bodyPr rtlCol="0" anchor="ctr"/>
+          <a:lstStyle/>
+          <a:p>
+            <a:pPr algn="ctr"/>
+          </a:p>
+        </p:txBody>
+      </p:sp>
+      <p:sp>
+        <p:nvSpPr>
+          <p:cNvPr id="16" name="TextBox 15"/>
+          <p:cNvSpPr txBox="1"/>
+          <p:nvPr/>
+        </p:nvSpPr>
+        <p:spPr>
+          <a:xfrm>
+            <a:off x="457200" y="4389120"/>
+            <a:ext cx="3017520" cy="1051560"/>
+          </a:xfrm>
+          <a:prstGeom prst="rect">
+            <a:avLst/>
+          </a:prstGeom>
+          <a:noFill/>
+        </p:spPr>
+        <p:txBody>
+          <a:bodyPr wrap="square" anchor="ctr" lIns="27432" rIns="27432" tIns="9144" bIns="9144">
+            <a:spAutoFit/>
+          </a:bodyPr>
+          <a:lstStyle/>
+          <a:p>
+            <a:pPr algn="ctr">
+              <a:spcBef>
+                <a:spcPts val="0"/>
+              </a:spcBef>
+              <a:spcAft>
+                <a:spcPts val="200"/>
+              </a:spcAft>
+            </a:pPr>
+            <a:r>
+              <a:rPr sz="1600" b="1" i="0">
+                <a:solidFill>
+                  <a:srgbClr val="FFFFFF"/>
+                </a:solidFill>
+                <a:latin typeface="Tahoma"/>
+              </a:rPr>
+              <a:t>Week 4  (26–30 Oct)</a:t>
+            </a:r>
+          </a:p>
+        </p:txBody>
+      </p:sp>
+      <p:sp>
+        <p:nvSpPr>
+          <p:cNvPr id="17" name="Rounded Rectangle 16"/>
+          <p:cNvSpPr/>
+          <p:nvPr/>
+        </p:nvSpPr>
+        <p:spPr>
+          <a:xfrm>
+            <a:off x="3611880" y="4389120"/>
+            <a:ext cx="8119872" cy="1051560"/>
+          </a:xfrm>
+          <a:prstGeom prst="roundRect">
+            <a:avLst/>
+          </a:prstGeom>
+          <a:solidFill>
+            <a:srgbClr val="ECF1E9"/>
+          </a:solidFill>
+          <a:ln>
+            <a:noFill/>
+          </a:ln>
+          <a:effectLst/>
+        </p:spPr>
+        <p:style>
+          <a:lnRef idx="1">
+            <a:schemeClr val="accent1"/>
+          </a:lnRef>
+          <a:fillRef idx="3">
+            <a:schemeClr val="accent1"/>
+          </a:fillRef>
+          <a:effectRef idx="2">
+            <a:schemeClr val="accent1"/>
+          </a:effectRef>
+          <a:fontRef idx="minor">
+            <a:schemeClr val="lt1"/>
+          </a:fontRef>
+        </p:style>
+        <p:txBody>
+          <a:bodyPr rtlCol="0" anchor="ctr"/>
+          <a:lstStyle/>
+          <a:p>
+            <a:pPr algn="ctr"/>
+          </a:p>
+        </p:txBody>
+      </p:sp>
+      <p:sp>
+        <p:nvSpPr>
+          <p:cNvPr id="18" name="TextBox 17"/>
+          <p:cNvSpPr txBox="1"/>
+          <p:nvPr/>
+        </p:nvSpPr>
+        <p:spPr>
+          <a:xfrm>
+            <a:off x="3794760" y="4389120"/>
+            <a:ext cx="7772400" cy="1051560"/>
+          </a:xfrm>
+          <a:prstGeom prst="rect">
+            <a:avLst/>
+          </a:prstGeom>
+          <a:noFill/>
+        </p:spPr>
+        <p:txBody>
+          <a:bodyPr wrap="square" anchor="ctr" lIns="27432" rIns="27432" tIns="9144" bIns="9144">
+            <a:spAutoFit/>
+          </a:bodyPr>
+          <a:lstStyle/>
+          <a:p>
+            <a:pPr algn="l">
+              <a:spcBef>
+                <a:spcPts val="0"/>
+              </a:spcBef>
+              <a:spcAft>
+                <a:spcPts val="200"/>
+              </a:spcAft>
+            </a:pPr>
+            <a:r>
+              <a:rPr sz="1400" b="0" i="0">
+                <a:solidFill>
+                  <a:srgbClr val="2C5F2D"/>
+                </a:solidFill>
+                <a:latin typeface="Tahoma"/>
+              </a:rPr>
+              <a:t>Feature freeze · final numbers measured the morning of the show · roadshow</a:t>
+            </a:r>
+          </a:p>
+        </p:txBody>
+      </p:sp>
+    </p:spTree>
+  </p:cSld>
+  <p:clrMapOvr>
+    <a:masterClrMapping/>
+  </p:clrMapOvr>
+</p:sld>
+</file>
+
+<file path=ppt/slides/slide19.xml><?xml version="1.0" encoding="utf-8"?>
+<p:sld xmlns:a="http://schemas.openxmlformats.org/drawingml/2006/main" xmlns:p="http://schemas.openxmlformats.org/presentationml/2006/main" xmlns:r="http://schemas.openxmlformats.org/officeDocument/2006/relationships">
+  <p:cSld>
+    <p:spTree>
+      <p:nvGrpSpPr>
+        <p:cNvPr id="1" name=""/>
+        <p:cNvGrpSpPr/>
+        <p:nvPr/>
+      </p:nvGrpSpPr>
+      <p:grpSpPr/>
+      <p:sp>
+        <p:nvSpPr>
           <p:cNvPr id="2" name="Rectangle 1"/>
           <p:cNvSpPr/>
           <p:nvPr/>
@@ -20630,7 +21903,7 @@
                 </a:solidFill>
                 <a:latin typeface="Tahoma"/>
               </a:rPr>
-              <a:t>Production (PD1–PD4)</a:t>
+              <a:t>Paper replaced — records per month</a:t>
             </a:r>
           </a:p>
         </p:txBody>
@@ -20672,7 +21945,7 @@
                 </a:solidFill>
                 <a:latin typeface="Tahoma"/>
               </a:rPr>
-              <a:t>From hand-written forms to live OEE</a:t>
+              <a:t>Measured from ESM database · 06 Oct 2026</a:t>
             </a:r>
           </a:p>
         </p:txBody>
@@ -20787,20 +22060,20 @@
       </p:sp>
       <p:sp>
         <p:nvSpPr>
-          <p:cNvPr id="7" name="Rounded Rectangle 6"/>
+          <p:cNvPr id="7" name="Rectangle 6"/>
           <p:cNvSpPr/>
           <p:nvPr/>
         </p:nvSpPr>
         <p:spPr>
           <a:xfrm>
-            <a:off x="9646920" y="1069848"/>
-            <a:ext cx="2103120" cy="347472"/>
-          </a:xfrm>
-          <a:prstGeom prst="roundRect">
+            <a:off x="457200" y="1600200"/>
+            <a:ext cx="2743200" cy="384048"/>
+          </a:xfrm>
+          <a:prstGeom prst="rect">
             <a:avLst/>
           </a:prstGeom>
           <a:solidFill>
-            <a:srgbClr val="2C5F2D"/>
+            <a:srgbClr val="0D3D14"/>
           </a:solidFill>
           <a:ln>
             <a:noFill/>
@@ -20837,8 +22110,8 @@
         </p:nvSpPr>
         <p:spPr>
           <a:xfrm>
-            <a:off x="9646920" y="1069848"/>
-            <a:ext cx="2103120" cy="347472"/>
+            <a:off x="530352" y="1600200"/>
+            <a:ext cx="2651760" cy="384048"/>
           </a:xfrm>
           <a:prstGeom prst="rect">
             <a:avLst/>
@@ -20851,6 +22124,178 @@
           </a:bodyPr>
           <a:lstStyle/>
           <a:p>
+            <a:pPr algn="l">
+              <a:spcBef>
+                <a:spcPts val="0"/>
+              </a:spcBef>
+              <a:spcAft>
+                <a:spcPts val="200"/>
+              </a:spcAft>
+            </a:pPr>
+            <a:r>
+              <a:rPr sz="1200" b="1" i="0">
+                <a:solidFill>
+                  <a:srgbClr val="FFFFFF"/>
+                </a:solidFill>
+                <a:latin typeface="Tahoma"/>
+              </a:rPr>
+              <a:t>Record</a:t>
+            </a:r>
+          </a:p>
+        </p:txBody>
+      </p:sp>
+      <p:sp>
+        <p:nvSpPr>
+          <p:cNvPr id="9" name="Rectangle 8"/>
+          <p:cNvSpPr/>
+          <p:nvPr/>
+        </p:nvSpPr>
+        <p:spPr>
+          <a:xfrm>
+            <a:off x="3200400" y="1600200"/>
+            <a:ext cx="3566160" cy="384048"/>
+          </a:xfrm>
+          <a:prstGeom prst="rect">
+            <a:avLst/>
+          </a:prstGeom>
+          <a:solidFill>
+            <a:srgbClr val="0D3D14"/>
+          </a:solidFill>
+          <a:ln>
+            <a:noFill/>
+          </a:ln>
+          <a:effectLst/>
+        </p:spPr>
+        <p:style>
+          <a:lnRef idx="1">
+            <a:schemeClr val="accent1"/>
+          </a:lnRef>
+          <a:fillRef idx="3">
+            <a:schemeClr val="accent1"/>
+          </a:fillRef>
+          <a:effectRef idx="2">
+            <a:schemeClr val="accent1"/>
+          </a:effectRef>
+          <a:fontRef idx="minor">
+            <a:schemeClr val="lt1"/>
+          </a:fontRef>
+        </p:style>
+        <p:txBody>
+          <a:bodyPr rtlCol="0" anchor="ctr"/>
+          <a:lstStyle/>
+          <a:p>
+            <a:pPr algn="ctr"/>
+          </a:p>
+        </p:txBody>
+      </p:sp>
+      <p:sp>
+        <p:nvSpPr>
+          <p:cNvPr id="10" name="TextBox 9"/>
+          <p:cNvSpPr txBox="1"/>
+          <p:nvPr/>
+        </p:nvSpPr>
+        <p:spPr>
+          <a:xfrm>
+            <a:off x="3273552" y="1600200"/>
+            <a:ext cx="3474720" cy="384048"/>
+          </a:xfrm>
+          <a:prstGeom prst="rect">
+            <a:avLst/>
+          </a:prstGeom>
+          <a:noFill/>
+        </p:spPr>
+        <p:txBody>
+          <a:bodyPr wrap="square" anchor="ctr" lIns="27432" rIns="27432" tIns="9144" bIns="9144">
+            <a:spAutoFit/>
+          </a:bodyPr>
+          <a:lstStyle/>
+          <a:p>
+            <a:pPr algn="l">
+              <a:spcBef>
+                <a:spcPts val="0"/>
+              </a:spcBef>
+              <a:spcAft>
+                <a:spcPts val="200"/>
+              </a:spcAft>
+            </a:pPr>
+            <a:r>
+              <a:rPr sz="1200" b="1" i="0">
+                <a:solidFill>
+                  <a:srgbClr val="FFFFFF"/>
+                </a:solidFill>
+                <a:latin typeface="Tahoma"/>
+              </a:rPr>
+              <a:t>Replaces</a:t>
+            </a:r>
+          </a:p>
+        </p:txBody>
+      </p:sp>
+      <p:sp>
+        <p:nvSpPr>
+          <p:cNvPr id="11" name="Rectangle 10"/>
+          <p:cNvSpPr/>
+          <p:nvPr/>
+        </p:nvSpPr>
+        <p:spPr>
+          <a:xfrm>
+            <a:off x="6766560" y="1600200"/>
+            <a:ext cx="1188720" cy="384048"/>
+          </a:xfrm>
+          <a:prstGeom prst="rect">
+            <a:avLst/>
+          </a:prstGeom>
+          <a:solidFill>
+            <a:srgbClr val="0D3D14"/>
+          </a:solidFill>
+          <a:ln>
+            <a:noFill/>
+          </a:ln>
+          <a:effectLst/>
+        </p:spPr>
+        <p:style>
+          <a:lnRef idx="1">
+            <a:schemeClr val="accent1"/>
+          </a:lnRef>
+          <a:fillRef idx="3">
+            <a:schemeClr val="accent1"/>
+          </a:fillRef>
+          <a:effectRef idx="2">
+            <a:schemeClr val="accent1"/>
+          </a:effectRef>
+          <a:fontRef idx="minor">
+            <a:schemeClr val="lt1"/>
+          </a:fontRef>
+        </p:style>
+        <p:txBody>
+          <a:bodyPr rtlCol="0" anchor="ctr"/>
+          <a:lstStyle/>
+          <a:p>
+            <a:pPr algn="ctr"/>
+          </a:p>
+        </p:txBody>
+      </p:sp>
+      <p:sp>
+        <p:nvSpPr>
+          <p:cNvPr id="12" name="TextBox 11"/>
+          <p:cNvSpPr txBox="1"/>
+          <p:nvPr/>
+        </p:nvSpPr>
+        <p:spPr>
+          <a:xfrm>
+            <a:off x="6839712" y="1600200"/>
+            <a:ext cx="1097280" cy="384048"/>
+          </a:xfrm>
+          <a:prstGeom prst="rect">
+            <a:avLst/>
+          </a:prstGeom>
+          <a:noFill/>
+        </p:spPr>
+        <p:txBody>
+          <a:bodyPr wrap="square" anchor="ctr" lIns="27432" rIns="27432" tIns="9144" bIns="9144">
+            <a:spAutoFit/>
+          </a:bodyPr>
+          <a:lstStyle/>
+          <a:p>
             <a:pPr algn="ctr">
               <a:spcBef>
                 <a:spcPts val="0"/>
@@ -20866,21 +22311,2515 @@
                 </a:solidFill>
                 <a:latin typeface="Tahoma"/>
               </a:rPr>
-              <a:t>Live</a:t>
-            </a:r>
-          </a:p>
-        </p:txBody>
-      </p:sp>
-      <p:sp>
-        <p:nvSpPr>
-          <p:cNvPr id="9" name="Rounded Rectangle 8"/>
+              <a:t>Aug</a:t>
+            </a:r>
+          </a:p>
+        </p:txBody>
+      </p:sp>
+      <p:sp>
+        <p:nvSpPr>
+          <p:cNvPr id="13" name="Rectangle 12"/>
           <p:cNvSpPr/>
           <p:nvPr/>
         </p:nvSpPr>
         <p:spPr>
           <a:xfrm>
-            <a:off x="457200" y="1600200"/>
-            <a:ext cx="3657600" cy="3383280"/>
+            <a:off x="7955280" y="1600200"/>
+            <a:ext cx="1188720" cy="384048"/>
+          </a:xfrm>
+          <a:prstGeom prst="rect">
+            <a:avLst/>
+          </a:prstGeom>
+          <a:solidFill>
+            <a:srgbClr val="0D3D14"/>
+          </a:solidFill>
+          <a:ln>
+            <a:noFill/>
+          </a:ln>
+          <a:effectLst/>
+        </p:spPr>
+        <p:style>
+          <a:lnRef idx="1">
+            <a:schemeClr val="accent1"/>
+          </a:lnRef>
+          <a:fillRef idx="3">
+            <a:schemeClr val="accent1"/>
+          </a:fillRef>
+          <a:effectRef idx="2">
+            <a:schemeClr val="accent1"/>
+          </a:effectRef>
+          <a:fontRef idx="minor">
+            <a:schemeClr val="lt1"/>
+          </a:fontRef>
+        </p:style>
+        <p:txBody>
+          <a:bodyPr rtlCol="0" anchor="ctr"/>
+          <a:lstStyle/>
+          <a:p>
+            <a:pPr algn="ctr"/>
+          </a:p>
+        </p:txBody>
+      </p:sp>
+      <p:sp>
+        <p:nvSpPr>
+          <p:cNvPr id="14" name="TextBox 13"/>
+          <p:cNvSpPr txBox="1"/>
+          <p:nvPr/>
+        </p:nvSpPr>
+        <p:spPr>
+          <a:xfrm>
+            <a:off x="8028432" y="1600200"/>
+            <a:ext cx="1097280" cy="384048"/>
+          </a:xfrm>
+          <a:prstGeom prst="rect">
+            <a:avLst/>
+          </a:prstGeom>
+          <a:noFill/>
+        </p:spPr>
+        <p:txBody>
+          <a:bodyPr wrap="square" anchor="ctr" lIns="27432" rIns="27432" tIns="9144" bIns="9144">
+            <a:spAutoFit/>
+          </a:bodyPr>
+          <a:lstStyle/>
+          <a:p>
+            <a:pPr algn="ctr">
+              <a:spcBef>
+                <a:spcPts val="0"/>
+              </a:spcBef>
+              <a:spcAft>
+                <a:spcPts val="200"/>
+              </a:spcAft>
+            </a:pPr>
+            <a:r>
+              <a:rPr sz="1200" b="1" i="0">
+                <a:solidFill>
+                  <a:srgbClr val="FFFFFF"/>
+                </a:solidFill>
+                <a:latin typeface="Tahoma"/>
+              </a:rPr>
+              <a:t>Sep</a:t>
+            </a:r>
+          </a:p>
+        </p:txBody>
+      </p:sp>
+      <p:sp>
+        <p:nvSpPr>
+          <p:cNvPr id="15" name="Rectangle 14"/>
+          <p:cNvSpPr/>
+          <p:nvPr/>
+        </p:nvSpPr>
+        <p:spPr>
+          <a:xfrm>
+            <a:off x="457200" y="1984248"/>
+            <a:ext cx="2743200" cy="457200"/>
+          </a:xfrm>
+          <a:prstGeom prst="rect">
+            <a:avLst/>
+          </a:prstGeom>
+          <a:solidFill>
+            <a:srgbClr val="ECF1E9"/>
+          </a:solidFill>
+          <a:ln>
+            <a:noFill/>
+          </a:ln>
+          <a:effectLst/>
+        </p:spPr>
+        <p:style>
+          <a:lnRef idx="1">
+            <a:schemeClr val="accent1"/>
+          </a:lnRef>
+          <a:fillRef idx="3">
+            <a:schemeClr val="accent1"/>
+          </a:fillRef>
+          <a:effectRef idx="2">
+            <a:schemeClr val="accent1"/>
+          </a:effectRef>
+          <a:fontRef idx="minor">
+            <a:schemeClr val="lt1"/>
+          </a:fontRef>
+        </p:style>
+        <p:txBody>
+          <a:bodyPr rtlCol="0" anchor="ctr"/>
+          <a:lstStyle/>
+          <a:p>
+            <a:pPr algn="ctr"/>
+          </a:p>
+        </p:txBody>
+      </p:sp>
+      <p:sp>
+        <p:nvSpPr>
+          <p:cNvPr id="16" name="TextBox 15"/>
+          <p:cNvSpPr txBox="1"/>
+          <p:nvPr/>
+        </p:nvSpPr>
+        <p:spPr>
+          <a:xfrm>
+            <a:off x="530352" y="1984248"/>
+            <a:ext cx="2633472" cy="457200"/>
+          </a:xfrm>
+          <a:prstGeom prst="rect">
+            <a:avLst/>
+          </a:prstGeom>
+          <a:noFill/>
+        </p:spPr>
+        <p:txBody>
+          <a:bodyPr wrap="square" anchor="ctr" lIns="27432" rIns="27432" tIns="9144" bIns="9144">
+            <a:spAutoFit/>
+          </a:bodyPr>
+          <a:lstStyle/>
+          <a:p>
+            <a:pPr algn="l">
+              <a:spcBef>
+                <a:spcPts val="0"/>
+              </a:spcBef>
+              <a:spcAft>
+                <a:spcPts val="200"/>
+              </a:spcAft>
+            </a:pPr>
+            <a:r>
+              <a:rPr sz="1200" b="1" i="0">
+                <a:solidFill>
+                  <a:srgbClr val="2C5F2D"/>
+                </a:solidFill>
+                <a:latin typeface="Tahoma"/>
+              </a:rPr>
+              <a:t>Shift reports</a:t>
+            </a:r>
+          </a:p>
+        </p:txBody>
+      </p:sp>
+      <p:sp>
+        <p:nvSpPr>
+          <p:cNvPr id="17" name="Rectangle 16"/>
+          <p:cNvSpPr/>
+          <p:nvPr/>
+        </p:nvSpPr>
+        <p:spPr>
+          <a:xfrm>
+            <a:off x="3200400" y="1984248"/>
+            <a:ext cx="3566160" cy="457200"/>
+          </a:xfrm>
+          <a:prstGeom prst="rect">
+            <a:avLst/>
+          </a:prstGeom>
+          <a:solidFill>
+            <a:srgbClr val="ECF1E9"/>
+          </a:solidFill>
+          <a:ln>
+            <a:noFill/>
+          </a:ln>
+          <a:effectLst/>
+        </p:spPr>
+        <p:style>
+          <a:lnRef idx="1">
+            <a:schemeClr val="accent1"/>
+          </a:lnRef>
+          <a:fillRef idx="3">
+            <a:schemeClr val="accent1"/>
+          </a:fillRef>
+          <a:effectRef idx="2">
+            <a:schemeClr val="accent1"/>
+          </a:effectRef>
+          <a:fontRef idx="minor">
+            <a:schemeClr val="lt1"/>
+          </a:fontRef>
+        </p:style>
+        <p:txBody>
+          <a:bodyPr rtlCol="0" anchor="ctr"/>
+          <a:lstStyle/>
+          <a:p>
+            <a:pPr algn="ctr"/>
+          </a:p>
+        </p:txBody>
+      </p:sp>
+      <p:sp>
+        <p:nvSpPr>
+          <p:cNvPr id="18" name="TextBox 17"/>
+          <p:cNvSpPr txBox="1"/>
+          <p:nvPr/>
+        </p:nvSpPr>
+        <p:spPr>
+          <a:xfrm>
+            <a:off x="3273552" y="1984248"/>
+            <a:ext cx="3456432" cy="457200"/>
+          </a:xfrm>
+          <a:prstGeom prst="rect">
+            <a:avLst/>
+          </a:prstGeom>
+          <a:noFill/>
+        </p:spPr>
+        <p:txBody>
+          <a:bodyPr wrap="square" anchor="ctr" lIns="27432" rIns="27432" tIns="9144" bIns="9144">
+            <a:spAutoFit/>
+          </a:bodyPr>
+          <a:lstStyle/>
+          <a:p>
+            <a:pPr algn="l">
+              <a:spcBef>
+                <a:spcPts val="0"/>
+              </a:spcBef>
+              <a:spcAft>
+                <a:spcPts val="200"/>
+              </a:spcAft>
+            </a:pPr>
+            <a:r>
+              <a:rPr sz="1200" b="0" i="0">
+                <a:solidFill>
+                  <a:srgbClr val="2C5F2D"/>
+                </a:solidFill>
+                <a:latin typeface="Tahoma"/>
+              </a:rPr>
+              <a:t>Daily production report (paper)</a:t>
+            </a:r>
+          </a:p>
+        </p:txBody>
+      </p:sp>
+      <p:sp>
+        <p:nvSpPr>
+          <p:cNvPr id="19" name="Rectangle 18"/>
+          <p:cNvSpPr/>
+          <p:nvPr/>
+        </p:nvSpPr>
+        <p:spPr>
+          <a:xfrm>
+            <a:off x="6766560" y="1984248"/>
+            <a:ext cx="1188720" cy="457200"/>
+          </a:xfrm>
+          <a:prstGeom prst="rect">
+            <a:avLst/>
+          </a:prstGeom>
+          <a:solidFill>
+            <a:srgbClr val="ECF1E9"/>
+          </a:solidFill>
+          <a:ln>
+            <a:noFill/>
+          </a:ln>
+          <a:effectLst/>
+        </p:spPr>
+        <p:style>
+          <a:lnRef idx="1">
+            <a:schemeClr val="accent1"/>
+          </a:lnRef>
+          <a:fillRef idx="3">
+            <a:schemeClr val="accent1"/>
+          </a:fillRef>
+          <a:effectRef idx="2">
+            <a:schemeClr val="accent1"/>
+          </a:effectRef>
+          <a:fontRef idx="minor">
+            <a:schemeClr val="lt1"/>
+          </a:fontRef>
+        </p:style>
+        <p:txBody>
+          <a:bodyPr rtlCol="0" anchor="ctr"/>
+          <a:lstStyle/>
+          <a:p>
+            <a:pPr algn="ctr"/>
+          </a:p>
+        </p:txBody>
+      </p:sp>
+      <p:sp>
+        <p:nvSpPr>
+          <p:cNvPr id="20" name="TextBox 19"/>
+          <p:cNvSpPr txBox="1"/>
+          <p:nvPr/>
+        </p:nvSpPr>
+        <p:spPr>
+          <a:xfrm>
+            <a:off x="6839712" y="1984248"/>
+            <a:ext cx="1078992" cy="457200"/>
+          </a:xfrm>
+          <a:prstGeom prst="rect">
+            <a:avLst/>
+          </a:prstGeom>
+          <a:noFill/>
+        </p:spPr>
+        <p:txBody>
+          <a:bodyPr wrap="square" anchor="ctr" lIns="27432" rIns="27432" tIns="9144" bIns="9144">
+            <a:spAutoFit/>
+          </a:bodyPr>
+          <a:lstStyle/>
+          <a:p>
+            <a:pPr algn="ctr">
+              <a:spcBef>
+                <a:spcPts val="0"/>
+              </a:spcBef>
+              <a:spcAft>
+                <a:spcPts val="200"/>
+              </a:spcAft>
+            </a:pPr>
+            <a:r>
+              <a:rPr sz="1200" b="0" i="0">
+                <a:solidFill>
+                  <a:srgbClr val="2C5F2D"/>
+                </a:solidFill>
+                <a:latin typeface="Tahoma"/>
+              </a:rPr>
+              <a:t>497</a:t>
+            </a:r>
+          </a:p>
+        </p:txBody>
+      </p:sp>
+      <p:sp>
+        <p:nvSpPr>
+          <p:cNvPr id="21" name="Rectangle 20"/>
+          <p:cNvSpPr/>
+          <p:nvPr/>
+        </p:nvSpPr>
+        <p:spPr>
+          <a:xfrm>
+            <a:off x="7955280" y="1984248"/>
+            <a:ext cx="1188720" cy="457200"/>
+          </a:xfrm>
+          <a:prstGeom prst="rect">
+            <a:avLst/>
+          </a:prstGeom>
+          <a:solidFill>
+            <a:srgbClr val="ECF1E9"/>
+          </a:solidFill>
+          <a:ln>
+            <a:noFill/>
+          </a:ln>
+          <a:effectLst/>
+        </p:spPr>
+        <p:style>
+          <a:lnRef idx="1">
+            <a:schemeClr val="accent1"/>
+          </a:lnRef>
+          <a:fillRef idx="3">
+            <a:schemeClr val="accent1"/>
+          </a:fillRef>
+          <a:effectRef idx="2">
+            <a:schemeClr val="accent1"/>
+          </a:effectRef>
+          <a:fontRef idx="minor">
+            <a:schemeClr val="lt1"/>
+          </a:fontRef>
+        </p:style>
+        <p:txBody>
+          <a:bodyPr rtlCol="0" anchor="ctr"/>
+          <a:lstStyle/>
+          <a:p>
+            <a:pPr algn="ctr"/>
+          </a:p>
+        </p:txBody>
+      </p:sp>
+      <p:sp>
+        <p:nvSpPr>
+          <p:cNvPr id="22" name="TextBox 21"/>
+          <p:cNvSpPr txBox="1"/>
+          <p:nvPr/>
+        </p:nvSpPr>
+        <p:spPr>
+          <a:xfrm>
+            <a:off x="8028432" y="1984248"/>
+            <a:ext cx="1078992" cy="457200"/>
+          </a:xfrm>
+          <a:prstGeom prst="rect">
+            <a:avLst/>
+          </a:prstGeom>
+          <a:noFill/>
+        </p:spPr>
+        <p:txBody>
+          <a:bodyPr wrap="square" anchor="ctr" lIns="27432" rIns="27432" tIns="9144" bIns="9144">
+            <a:spAutoFit/>
+          </a:bodyPr>
+          <a:lstStyle/>
+          <a:p>
+            <a:pPr algn="ctr">
+              <a:spcBef>
+                <a:spcPts val="0"/>
+              </a:spcBef>
+              <a:spcAft>
+                <a:spcPts val="200"/>
+              </a:spcAft>
+            </a:pPr>
+            <a:r>
+              <a:rPr sz="1200" b="1" i="0">
+                <a:solidFill>
+                  <a:srgbClr val="C0561E"/>
+                </a:solidFill>
+                <a:latin typeface="Tahoma"/>
+              </a:rPr>
+              <a:t>505</a:t>
+            </a:r>
+          </a:p>
+        </p:txBody>
+      </p:sp>
+      <p:sp>
+        <p:nvSpPr>
+          <p:cNvPr id="23" name="Rectangle 22"/>
+          <p:cNvSpPr/>
+          <p:nvPr/>
+        </p:nvSpPr>
+        <p:spPr>
+          <a:xfrm>
+            <a:off x="457200" y="2441448"/>
+            <a:ext cx="2743200" cy="457200"/>
+          </a:xfrm>
+          <a:prstGeom prst="rect">
+            <a:avLst/>
+          </a:prstGeom>
+          <a:solidFill>
+            <a:srgbClr val="FFFFFF"/>
+          </a:solidFill>
+          <a:ln>
+            <a:noFill/>
+          </a:ln>
+          <a:effectLst/>
+        </p:spPr>
+        <p:style>
+          <a:lnRef idx="1">
+            <a:schemeClr val="accent1"/>
+          </a:lnRef>
+          <a:fillRef idx="3">
+            <a:schemeClr val="accent1"/>
+          </a:fillRef>
+          <a:effectRef idx="2">
+            <a:schemeClr val="accent1"/>
+          </a:effectRef>
+          <a:fontRef idx="minor">
+            <a:schemeClr val="lt1"/>
+          </a:fontRef>
+        </p:style>
+        <p:txBody>
+          <a:bodyPr rtlCol="0" anchor="ctr"/>
+          <a:lstStyle/>
+          <a:p>
+            <a:pPr algn="ctr"/>
+          </a:p>
+        </p:txBody>
+      </p:sp>
+      <p:sp>
+        <p:nvSpPr>
+          <p:cNvPr id="24" name="TextBox 23"/>
+          <p:cNvSpPr txBox="1"/>
+          <p:nvPr/>
+        </p:nvSpPr>
+        <p:spPr>
+          <a:xfrm>
+            <a:off x="530352" y="2441448"/>
+            <a:ext cx="2633472" cy="457200"/>
+          </a:xfrm>
+          <a:prstGeom prst="rect">
+            <a:avLst/>
+          </a:prstGeom>
+          <a:noFill/>
+        </p:spPr>
+        <p:txBody>
+          <a:bodyPr wrap="square" anchor="ctr" lIns="27432" rIns="27432" tIns="9144" bIns="9144">
+            <a:spAutoFit/>
+          </a:bodyPr>
+          <a:lstStyle/>
+          <a:p>
+            <a:pPr algn="l">
+              <a:spcBef>
+                <a:spcPts val="0"/>
+              </a:spcBef>
+              <a:spcAft>
+                <a:spcPts val="200"/>
+              </a:spcAft>
+            </a:pPr>
+            <a:r>
+              <a:rPr sz="1200" b="1" i="0">
+                <a:solidFill>
+                  <a:srgbClr val="2C5F2D"/>
+                </a:solidFill>
+                <a:latin typeface="Tahoma"/>
+              </a:rPr>
+              <a:t>Downtime records</a:t>
+            </a:r>
+          </a:p>
+        </p:txBody>
+      </p:sp>
+      <p:sp>
+        <p:nvSpPr>
+          <p:cNvPr id="25" name="Rectangle 24"/>
+          <p:cNvSpPr/>
+          <p:nvPr/>
+        </p:nvSpPr>
+        <p:spPr>
+          <a:xfrm>
+            <a:off x="3200400" y="2441448"/>
+            <a:ext cx="3566160" cy="457200"/>
+          </a:xfrm>
+          <a:prstGeom prst="rect">
+            <a:avLst/>
+          </a:prstGeom>
+          <a:solidFill>
+            <a:srgbClr val="FFFFFF"/>
+          </a:solidFill>
+          <a:ln>
+            <a:noFill/>
+          </a:ln>
+          <a:effectLst/>
+        </p:spPr>
+        <p:style>
+          <a:lnRef idx="1">
+            <a:schemeClr val="accent1"/>
+          </a:lnRef>
+          <a:fillRef idx="3">
+            <a:schemeClr val="accent1"/>
+          </a:fillRef>
+          <a:effectRef idx="2">
+            <a:schemeClr val="accent1"/>
+          </a:effectRef>
+          <a:fontRef idx="minor">
+            <a:schemeClr val="lt1"/>
+          </a:fontRef>
+        </p:style>
+        <p:txBody>
+          <a:bodyPr rtlCol="0" anchor="ctr"/>
+          <a:lstStyle/>
+          <a:p>
+            <a:pPr algn="ctr"/>
+          </a:p>
+        </p:txBody>
+      </p:sp>
+      <p:sp>
+        <p:nvSpPr>
+          <p:cNvPr id="26" name="TextBox 25"/>
+          <p:cNvSpPr txBox="1"/>
+          <p:nvPr/>
+        </p:nvSpPr>
+        <p:spPr>
+          <a:xfrm>
+            <a:off x="3273552" y="2441448"/>
+            <a:ext cx="3456432" cy="457200"/>
+          </a:xfrm>
+          <a:prstGeom prst="rect">
+            <a:avLst/>
+          </a:prstGeom>
+          <a:noFill/>
+        </p:spPr>
+        <p:txBody>
+          <a:bodyPr wrap="square" anchor="ctr" lIns="27432" rIns="27432" tIns="9144" bIns="9144">
+            <a:spAutoFit/>
+          </a:bodyPr>
+          <a:lstStyle/>
+          <a:p>
+            <a:pPr algn="l">
+              <a:spcBef>
+                <a:spcPts val="0"/>
+              </a:spcBef>
+              <a:spcAft>
+                <a:spcPts val="200"/>
+              </a:spcAft>
+            </a:pPr>
+            <a:r>
+              <a:rPr sz="1200" b="0" i="0">
+                <a:solidFill>
+                  <a:srgbClr val="2C5F2D"/>
+                </a:solidFill>
+                <a:latin typeface="Tahoma"/>
+              </a:rPr>
+              <a:t>Downtime log book / board</a:t>
+            </a:r>
+          </a:p>
+        </p:txBody>
+      </p:sp>
+      <p:sp>
+        <p:nvSpPr>
+          <p:cNvPr id="27" name="Rectangle 26"/>
+          <p:cNvSpPr/>
+          <p:nvPr/>
+        </p:nvSpPr>
+        <p:spPr>
+          <a:xfrm>
+            <a:off x="6766560" y="2441448"/>
+            <a:ext cx="1188720" cy="457200"/>
+          </a:xfrm>
+          <a:prstGeom prst="rect">
+            <a:avLst/>
+          </a:prstGeom>
+          <a:solidFill>
+            <a:srgbClr val="FFFFFF"/>
+          </a:solidFill>
+          <a:ln>
+            <a:noFill/>
+          </a:ln>
+          <a:effectLst/>
+        </p:spPr>
+        <p:style>
+          <a:lnRef idx="1">
+            <a:schemeClr val="accent1"/>
+          </a:lnRef>
+          <a:fillRef idx="3">
+            <a:schemeClr val="accent1"/>
+          </a:fillRef>
+          <a:effectRef idx="2">
+            <a:schemeClr val="accent1"/>
+          </a:effectRef>
+          <a:fontRef idx="minor">
+            <a:schemeClr val="lt1"/>
+          </a:fontRef>
+        </p:style>
+        <p:txBody>
+          <a:bodyPr rtlCol="0" anchor="ctr"/>
+          <a:lstStyle/>
+          <a:p>
+            <a:pPr algn="ctr"/>
+          </a:p>
+        </p:txBody>
+      </p:sp>
+      <p:sp>
+        <p:nvSpPr>
+          <p:cNvPr id="28" name="TextBox 27"/>
+          <p:cNvSpPr txBox="1"/>
+          <p:nvPr/>
+        </p:nvSpPr>
+        <p:spPr>
+          <a:xfrm>
+            <a:off x="6839712" y="2441448"/>
+            <a:ext cx="1078992" cy="457200"/>
+          </a:xfrm>
+          <a:prstGeom prst="rect">
+            <a:avLst/>
+          </a:prstGeom>
+          <a:noFill/>
+        </p:spPr>
+        <p:txBody>
+          <a:bodyPr wrap="square" anchor="ctr" lIns="27432" rIns="27432" tIns="9144" bIns="9144">
+            <a:spAutoFit/>
+          </a:bodyPr>
+          <a:lstStyle/>
+          <a:p>
+            <a:pPr algn="ctr">
+              <a:spcBef>
+                <a:spcPts val="0"/>
+              </a:spcBef>
+              <a:spcAft>
+                <a:spcPts val="200"/>
+              </a:spcAft>
+            </a:pPr>
+            <a:r>
+              <a:rPr sz="1200" b="0" i="0">
+                <a:solidFill>
+                  <a:srgbClr val="2C5F2D"/>
+                </a:solidFill>
+                <a:latin typeface="Tahoma"/>
+              </a:rPr>
+              <a:t>3,688</a:t>
+            </a:r>
+          </a:p>
+        </p:txBody>
+      </p:sp>
+      <p:sp>
+        <p:nvSpPr>
+          <p:cNvPr id="29" name="Rectangle 28"/>
+          <p:cNvSpPr/>
+          <p:nvPr/>
+        </p:nvSpPr>
+        <p:spPr>
+          <a:xfrm>
+            <a:off x="7955280" y="2441448"/>
+            <a:ext cx="1188720" cy="457200"/>
+          </a:xfrm>
+          <a:prstGeom prst="rect">
+            <a:avLst/>
+          </a:prstGeom>
+          <a:solidFill>
+            <a:srgbClr val="FFFFFF"/>
+          </a:solidFill>
+          <a:ln>
+            <a:noFill/>
+          </a:ln>
+          <a:effectLst/>
+        </p:spPr>
+        <p:style>
+          <a:lnRef idx="1">
+            <a:schemeClr val="accent1"/>
+          </a:lnRef>
+          <a:fillRef idx="3">
+            <a:schemeClr val="accent1"/>
+          </a:fillRef>
+          <a:effectRef idx="2">
+            <a:schemeClr val="accent1"/>
+          </a:effectRef>
+          <a:fontRef idx="minor">
+            <a:schemeClr val="lt1"/>
+          </a:fontRef>
+        </p:style>
+        <p:txBody>
+          <a:bodyPr rtlCol="0" anchor="ctr"/>
+          <a:lstStyle/>
+          <a:p>
+            <a:pPr algn="ctr"/>
+          </a:p>
+        </p:txBody>
+      </p:sp>
+      <p:sp>
+        <p:nvSpPr>
+          <p:cNvPr id="30" name="TextBox 29"/>
+          <p:cNvSpPr txBox="1"/>
+          <p:nvPr/>
+        </p:nvSpPr>
+        <p:spPr>
+          <a:xfrm>
+            <a:off x="8028432" y="2441448"/>
+            <a:ext cx="1078992" cy="457200"/>
+          </a:xfrm>
+          <a:prstGeom prst="rect">
+            <a:avLst/>
+          </a:prstGeom>
+          <a:noFill/>
+        </p:spPr>
+        <p:txBody>
+          <a:bodyPr wrap="square" anchor="ctr" lIns="27432" rIns="27432" tIns="9144" bIns="9144">
+            <a:spAutoFit/>
+          </a:bodyPr>
+          <a:lstStyle/>
+          <a:p>
+            <a:pPr algn="ctr">
+              <a:spcBef>
+                <a:spcPts val="0"/>
+              </a:spcBef>
+              <a:spcAft>
+                <a:spcPts val="200"/>
+              </a:spcAft>
+            </a:pPr>
+            <a:r>
+              <a:rPr sz="1200" b="1" i="0">
+                <a:solidFill>
+                  <a:srgbClr val="C0561E"/>
+                </a:solidFill>
+                <a:latin typeface="Tahoma"/>
+              </a:rPr>
+              <a:t>3,792</a:t>
+            </a:r>
+          </a:p>
+        </p:txBody>
+      </p:sp>
+      <p:sp>
+        <p:nvSpPr>
+          <p:cNvPr id="31" name="Rectangle 30"/>
+          <p:cNvSpPr/>
+          <p:nvPr/>
+        </p:nvSpPr>
+        <p:spPr>
+          <a:xfrm>
+            <a:off x="457200" y="2898648"/>
+            <a:ext cx="2743200" cy="457200"/>
+          </a:xfrm>
+          <a:prstGeom prst="rect">
+            <a:avLst/>
+          </a:prstGeom>
+          <a:solidFill>
+            <a:srgbClr val="ECF1E9"/>
+          </a:solidFill>
+          <a:ln>
+            <a:noFill/>
+          </a:ln>
+          <a:effectLst/>
+        </p:spPr>
+        <p:style>
+          <a:lnRef idx="1">
+            <a:schemeClr val="accent1"/>
+          </a:lnRef>
+          <a:fillRef idx="3">
+            <a:schemeClr val="accent1"/>
+          </a:fillRef>
+          <a:effectRef idx="2">
+            <a:schemeClr val="accent1"/>
+          </a:effectRef>
+          <a:fontRef idx="minor">
+            <a:schemeClr val="lt1"/>
+          </a:fontRef>
+        </p:style>
+        <p:txBody>
+          <a:bodyPr rtlCol="0" anchor="ctr"/>
+          <a:lstStyle/>
+          <a:p>
+            <a:pPr algn="ctr"/>
+          </a:p>
+        </p:txBody>
+      </p:sp>
+      <p:sp>
+        <p:nvSpPr>
+          <p:cNvPr id="32" name="TextBox 31"/>
+          <p:cNvSpPr txBox="1"/>
+          <p:nvPr/>
+        </p:nvSpPr>
+        <p:spPr>
+          <a:xfrm>
+            <a:off x="530352" y="2898648"/>
+            <a:ext cx="2633472" cy="457200"/>
+          </a:xfrm>
+          <a:prstGeom prst="rect">
+            <a:avLst/>
+          </a:prstGeom>
+          <a:noFill/>
+        </p:spPr>
+        <p:txBody>
+          <a:bodyPr wrap="square" anchor="ctr" lIns="27432" rIns="27432" tIns="9144" bIns="9144">
+            <a:spAutoFit/>
+          </a:bodyPr>
+          <a:lstStyle/>
+          <a:p>
+            <a:pPr algn="l">
+              <a:spcBef>
+                <a:spcPts val="0"/>
+              </a:spcBef>
+              <a:spcAft>
+                <a:spcPts val="200"/>
+              </a:spcAft>
+            </a:pPr>
+            <a:r>
+              <a:rPr sz="1200" b="1" i="0">
+                <a:solidFill>
+                  <a:srgbClr val="2C5F2D"/>
+                </a:solidFill>
+                <a:latin typeface="Tahoma"/>
+              </a:rPr>
+              <a:t>Repair orders</a:t>
+            </a:r>
+          </a:p>
+        </p:txBody>
+      </p:sp>
+      <p:sp>
+        <p:nvSpPr>
+          <p:cNvPr id="33" name="Rectangle 32"/>
+          <p:cNvSpPr/>
+          <p:nvPr/>
+        </p:nvSpPr>
+        <p:spPr>
+          <a:xfrm>
+            <a:off x="3200400" y="2898648"/>
+            <a:ext cx="3566160" cy="457200"/>
+          </a:xfrm>
+          <a:prstGeom prst="rect">
+            <a:avLst/>
+          </a:prstGeom>
+          <a:solidFill>
+            <a:srgbClr val="ECF1E9"/>
+          </a:solidFill>
+          <a:ln>
+            <a:noFill/>
+          </a:ln>
+          <a:effectLst/>
+        </p:spPr>
+        <p:style>
+          <a:lnRef idx="1">
+            <a:schemeClr val="accent1"/>
+          </a:lnRef>
+          <a:fillRef idx="3">
+            <a:schemeClr val="accent1"/>
+          </a:fillRef>
+          <a:effectRef idx="2">
+            <a:schemeClr val="accent1"/>
+          </a:effectRef>
+          <a:fontRef idx="minor">
+            <a:schemeClr val="lt1"/>
+          </a:fontRef>
+        </p:style>
+        <p:txBody>
+          <a:bodyPr rtlCol="0" anchor="ctr"/>
+          <a:lstStyle/>
+          <a:p>
+            <a:pPr algn="ctr"/>
+          </a:p>
+        </p:txBody>
+      </p:sp>
+      <p:sp>
+        <p:nvSpPr>
+          <p:cNvPr id="34" name="TextBox 33"/>
+          <p:cNvSpPr txBox="1"/>
+          <p:nvPr/>
+        </p:nvSpPr>
+        <p:spPr>
+          <a:xfrm>
+            <a:off x="3273552" y="2898648"/>
+            <a:ext cx="3456432" cy="457200"/>
+          </a:xfrm>
+          <a:prstGeom prst="rect">
+            <a:avLst/>
+          </a:prstGeom>
+          <a:noFill/>
+        </p:spPr>
+        <p:txBody>
+          <a:bodyPr wrap="square" anchor="ctr" lIns="27432" rIns="27432" tIns="9144" bIns="9144">
+            <a:spAutoFit/>
+          </a:bodyPr>
+          <a:lstStyle/>
+          <a:p>
+            <a:pPr algn="l">
+              <a:spcBef>
+                <a:spcPts val="0"/>
+              </a:spcBef>
+              <a:spcAft>
+                <a:spcPts val="200"/>
+              </a:spcAft>
+            </a:pPr>
+            <a:r>
+              <a:rPr sz="1200" b="0" i="0">
+                <a:solidFill>
+                  <a:srgbClr val="2C5F2D"/>
+                </a:solidFill>
+                <a:latin typeface="Tahoma"/>
+              </a:rPr>
+              <a:t>FM-MTN-006 / FM-JIG-008</a:t>
+            </a:r>
+          </a:p>
+        </p:txBody>
+      </p:sp>
+      <p:sp>
+        <p:nvSpPr>
+          <p:cNvPr id="35" name="Rectangle 34"/>
+          <p:cNvSpPr/>
+          <p:nvPr/>
+        </p:nvSpPr>
+        <p:spPr>
+          <a:xfrm>
+            <a:off x="6766560" y="2898648"/>
+            <a:ext cx="1188720" cy="457200"/>
+          </a:xfrm>
+          <a:prstGeom prst="rect">
+            <a:avLst/>
+          </a:prstGeom>
+          <a:solidFill>
+            <a:srgbClr val="ECF1E9"/>
+          </a:solidFill>
+          <a:ln>
+            <a:noFill/>
+          </a:ln>
+          <a:effectLst/>
+        </p:spPr>
+        <p:style>
+          <a:lnRef idx="1">
+            <a:schemeClr val="accent1"/>
+          </a:lnRef>
+          <a:fillRef idx="3">
+            <a:schemeClr val="accent1"/>
+          </a:fillRef>
+          <a:effectRef idx="2">
+            <a:schemeClr val="accent1"/>
+          </a:effectRef>
+          <a:fontRef idx="minor">
+            <a:schemeClr val="lt1"/>
+          </a:fontRef>
+        </p:style>
+        <p:txBody>
+          <a:bodyPr rtlCol="0" anchor="ctr"/>
+          <a:lstStyle/>
+          <a:p>
+            <a:pPr algn="ctr"/>
+          </a:p>
+        </p:txBody>
+      </p:sp>
+      <p:sp>
+        <p:nvSpPr>
+          <p:cNvPr id="36" name="TextBox 35"/>
+          <p:cNvSpPr txBox="1"/>
+          <p:nvPr/>
+        </p:nvSpPr>
+        <p:spPr>
+          <a:xfrm>
+            <a:off x="6839712" y="2898648"/>
+            <a:ext cx="1078992" cy="457200"/>
+          </a:xfrm>
+          <a:prstGeom prst="rect">
+            <a:avLst/>
+          </a:prstGeom>
+          <a:noFill/>
+        </p:spPr>
+        <p:txBody>
+          <a:bodyPr wrap="square" anchor="ctr" lIns="27432" rIns="27432" tIns="9144" bIns="9144">
+            <a:spAutoFit/>
+          </a:bodyPr>
+          <a:lstStyle/>
+          <a:p>
+            <a:pPr algn="ctr">
+              <a:spcBef>
+                <a:spcPts val="0"/>
+              </a:spcBef>
+              <a:spcAft>
+                <a:spcPts val="200"/>
+              </a:spcAft>
+            </a:pPr>
+            <a:r>
+              <a:rPr sz="1200" b="0" i="0">
+                <a:solidFill>
+                  <a:srgbClr val="2C5F2D"/>
+                </a:solidFill>
+                <a:latin typeface="Tahoma"/>
+              </a:rPr>
+              <a:t>76</a:t>
+            </a:r>
+          </a:p>
+        </p:txBody>
+      </p:sp>
+      <p:sp>
+        <p:nvSpPr>
+          <p:cNvPr id="37" name="Rectangle 36"/>
+          <p:cNvSpPr/>
+          <p:nvPr/>
+        </p:nvSpPr>
+        <p:spPr>
+          <a:xfrm>
+            <a:off x="7955280" y="2898648"/>
+            <a:ext cx="1188720" cy="457200"/>
+          </a:xfrm>
+          <a:prstGeom prst="rect">
+            <a:avLst/>
+          </a:prstGeom>
+          <a:solidFill>
+            <a:srgbClr val="ECF1E9"/>
+          </a:solidFill>
+          <a:ln>
+            <a:noFill/>
+          </a:ln>
+          <a:effectLst/>
+        </p:spPr>
+        <p:style>
+          <a:lnRef idx="1">
+            <a:schemeClr val="accent1"/>
+          </a:lnRef>
+          <a:fillRef idx="3">
+            <a:schemeClr val="accent1"/>
+          </a:fillRef>
+          <a:effectRef idx="2">
+            <a:schemeClr val="accent1"/>
+          </a:effectRef>
+          <a:fontRef idx="minor">
+            <a:schemeClr val="lt1"/>
+          </a:fontRef>
+        </p:style>
+        <p:txBody>
+          <a:bodyPr rtlCol="0" anchor="ctr"/>
+          <a:lstStyle/>
+          <a:p>
+            <a:pPr algn="ctr"/>
+          </a:p>
+        </p:txBody>
+      </p:sp>
+      <p:sp>
+        <p:nvSpPr>
+          <p:cNvPr id="38" name="TextBox 37"/>
+          <p:cNvSpPr txBox="1"/>
+          <p:nvPr/>
+        </p:nvSpPr>
+        <p:spPr>
+          <a:xfrm>
+            <a:off x="8028432" y="2898648"/>
+            <a:ext cx="1078992" cy="457200"/>
+          </a:xfrm>
+          <a:prstGeom prst="rect">
+            <a:avLst/>
+          </a:prstGeom>
+          <a:noFill/>
+        </p:spPr>
+        <p:txBody>
+          <a:bodyPr wrap="square" anchor="ctr" lIns="27432" rIns="27432" tIns="9144" bIns="9144">
+            <a:spAutoFit/>
+          </a:bodyPr>
+          <a:lstStyle/>
+          <a:p>
+            <a:pPr algn="ctr">
+              <a:spcBef>
+                <a:spcPts val="0"/>
+              </a:spcBef>
+              <a:spcAft>
+                <a:spcPts val="200"/>
+              </a:spcAft>
+            </a:pPr>
+            <a:r>
+              <a:rPr sz="1200" b="1" i="0">
+                <a:solidFill>
+                  <a:srgbClr val="C0561E"/>
+                </a:solidFill>
+                <a:latin typeface="Tahoma"/>
+              </a:rPr>
+              <a:t>496</a:t>
+            </a:r>
+          </a:p>
+        </p:txBody>
+      </p:sp>
+      <p:sp>
+        <p:nvSpPr>
+          <p:cNvPr id="39" name="Rectangle 38"/>
+          <p:cNvSpPr/>
+          <p:nvPr/>
+        </p:nvSpPr>
+        <p:spPr>
+          <a:xfrm>
+            <a:off x="457200" y="3355848"/>
+            <a:ext cx="2743200" cy="457200"/>
+          </a:xfrm>
+          <a:prstGeom prst="rect">
+            <a:avLst/>
+          </a:prstGeom>
+          <a:solidFill>
+            <a:srgbClr val="FFFFFF"/>
+          </a:solidFill>
+          <a:ln>
+            <a:noFill/>
+          </a:ln>
+          <a:effectLst/>
+        </p:spPr>
+        <p:style>
+          <a:lnRef idx="1">
+            <a:schemeClr val="accent1"/>
+          </a:lnRef>
+          <a:fillRef idx="3">
+            <a:schemeClr val="accent1"/>
+          </a:fillRef>
+          <a:effectRef idx="2">
+            <a:schemeClr val="accent1"/>
+          </a:effectRef>
+          <a:fontRef idx="minor">
+            <a:schemeClr val="lt1"/>
+          </a:fontRef>
+        </p:style>
+        <p:txBody>
+          <a:bodyPr rtlCol="0" anchor="ctr"/>
+          <a:lstStyle/>
+          <a:p>
+            <a:pPr algn="ctr"/>
+          </a:p>
+        </p:txBody>
+      </p:sp>
+      <p:sp>
+        <p:nvSpPr>
+          <p:cNvPr id="40" name="TextBox 39"/>
+          <p:cNvSpPr txBox="1"/>
+          <p:nvPr/>
+        </p:nvSpPr>
+        <p:spPr>
+          <a:xfrm>
+            <a:off x="530352" y="3355848"/>
+            <a:ext cx="2633472" cy="457200"/>
+          </a:xfrm>
+          <a:prstGeom prst="rect">
+            <a:avLst/>
+          </a:prstGeom>
+          <a:noFill/>
+        </p:spPr>
+        <p:txBody>
+          <a:bodyPr wrap="square" anchor="ctr" lIns="27432" rIns="27432" tIns="9144" bIns="9144">
+            <a:spAutoFit/>
+          </a:bodyPr>
+          <a:lstStyle/>
+          <a:p>
+            <a:pPr algn="l">
+              <a:spcBef>
+                <a:spcPts val="0"/>
+              </a:spcBef>
+              <a:spcAft>
+                <a:spcPts val="200"/>
+              </a:spcAft>
+            </a:pPr>
+            <a:r>
+              <a:rPr sz="1200" b="1" i="0">
+                <a:solidFill>
+                  <a:srgbClr val="2C5F2D"/>
+                </a:solidFill>
+                <a:latin typeface="Tahoma"/>
+              </a:rPr>
+              <a:t>LPA audits</a:t>
+            </a:r>
+          </a:p>
+        </p:txBody>
+      </p:sp>
+      <p:sp>
+        <p:nvSpPr>
+          <p:cNvPr id="41" name="Rectangle 40"/>
+          <p:cNvSpPr/>
+          <p:nvPr/>
+        </p:nvSpPr>
+        <p:spPr>
+          <a:xfrm>
+            <a:off x="3200400" y="3355848"/>
+            <a:ext cx="3566160" cy="457200"/>
+          </a:xfrm>
+          <a:prstGeom prst="rect">
+            <a:avLst/>
+          </a:prstGeom>
+          <a:solidFill>
+            <a:srgbClr val="FFFFFF"/>
+          </a:solidFill>
+          <a:ln>
+            <a:noFill/>
+          </a:ln>
+          <a:effectLst/>
+        </p:spPr>
+        <p:style>
+          <a:lnRef idx="1">
+            <a:schemeClr val="accent1"/>
+          </a:lnRef>
+          <a:fillRef idx="3">
+            <a:schemeClr val="accent1"/>
+          </a:fillRef>
+          <a:effectRef idx="2">
+            <a:schemeClr val="accent1"/>
+          </a:effectRef>
+          <a:fontRef idx="minor">
+            <a:schemeClr val="lt1"/>
+          </a:fontRef>
+        </p:style>
+        <p:txBody>
+          <a:bodyPr rtlCol="0" anchor="ctr"/>
+          <a:lstStyle/>
+          <a:p>
+            <a:pPr algn="ctr"/>
+          </a:p>
+        </p:txBody>
+      </p:sp>
+      <p:sp>
+        <p:nvSpPr>
+          <p:cNvPr id="42" name="TextBox 41"/>
+          <p:cNvSpPr txBox="1"/>
+          <p:nvPr/>
+        </p:nvSpPr>
+        <p:spPr>
+          <a:xfrm>
+            <a:off x="3273552" y="3355848"/>
+            <a:ext cx="3456432" cy="457200"/>
+          </a:xfrm>
+          <a:prstGeom prst="rect">
+            <a:avLst/>
+          </a:prstGeom>
+          <a:noFill/>
+        </p:spPr>
+        <p:txBody>
+          <a:bodyPr wrap="square" anchor="ctr" lIns="27432" rIns="27432" tIns="9144" bIns="9144">
+            <a:spAutoFit/>
+          </a:bodyPr>
+          <a:lstStyle/>
+          <a:p>
+            <a:pPr algn="l">
+              <a:spcBef>
+                <a:spcPts val="0"/>
+              </a:spcBef>
+              <a:spcAft>
+                <a:spcPts val="200"/>
+              </a:spcAft>
+            </a:pPr>
+            <a:r>
+              <a:rPr sz="1200" b="0" i="0">
+                <a:solidFill>
+                  <a:srgbClr val="2C5F2D"/>
+                </a:solidFill>
+                <a:latin typeface="Tahoma"/>
+              </a:rPr>
+              <a:t>FM-QMR-008</a:t>
+            </a:r>
+          </a:p>
+        </p:txBody>
+      </p:sp>
+      <p:sp>
+        <p:nvSpPr>
+          <p:cNvPr id="43" name="Rectangle 42"/>
+          <p:cNvSpPr/>
+          <p:nvPr/>
+        </p:nvSpPr>
+        <p:spPr>
+          <a:xfrm>
+            <a:off x="6766560" y="3355848"/>
+            <a:ext cx="1188720" cy="457200"/>
+          </a:xfrm>
+          <a:prstGeom prst="rect">
+            <a:avLst/>
+          </a:prstGeom>
+          <a:solidFill>
+            <a:srgbClr val="FFFFFF"/>
+          </a:solidFill>
+          <a:ln>
+            <a:noFill/>
+          </a:ln>
+          <a:effectLst/>
+        </p:spPr>
+        <p:style>
+          <a:lnRef idx="1">
+            <a:schemeClr val="accent1"/>
+          </a:lnRef>
+          <a:fillRef idx="3">
+            <a:schemeClr val="accent1"/>
+          </a:fillRef>
+          <a:effectRef idx="2">
+            <a:schemeClr val="accent1"/>
+          </a:effectRef>
+          <a:fontRef idx="minor">
+            <a:schemeClr val="lt1"/>
+          </a:fontRef>
+        </p:style>
+        <p:txBody>
+          <a:bodyPr rtlCol="0" anchor="ctr"/>
+          <a:lstStyle/>
+          <a:p>
+            <a:pPr algn="ctr"/>
+          </a:p>
+        </p:txBody>
+      </p:sp>
+      <p:sp>
+        <p:nvSpPr>
+          <p:cNvPr id="44" name="TextBox 43"/>
+          <p:cNvSpPr txBox="1"/>
+          <p:nvPr/>
+        </p:nvSpPr>
+        <p:spPr>
+          <a:xfrm>
+            <a:off x="6839712" y="3355848"/>
+            <a:ext cx="1078992" cy="457200"/>
+          </a:xfrm>
+          <a:prstGeom prst="rect">
+            <a:avLst/>
+          </a:prstGeom>
+          <a:noFill/>
+        </p:spPr>
+        <p:txBody>
+          <a:bodyPr wrap="square" anchor="ctr" lIns="27432" rIns="27432" tIns="9144" bIns="9144">
+            <a:spAutoFit/>
+          </a:bodyPr>
+          <a:lstStyle/>
+          <a:p>
+            <a:pPr algn="ctr">
+              <a:spcBef>
+                <a:spcPts val="0"/>
+              </a:spcBef>
+              <a:spcAft>
+                <a:spcPts val="200"/>
+              </a:spcAft>
+            </a:pPr>
+            <a:r>
+              <a:rPr sz="1200" b="0" i="0">
+                <a:solidFill>
+                  <a:srgbClr val="2C5F2D"/>
+                </a:solidFill>
+                <a:latin typeface="Tahoma"/>
+              </a:rPr>
+              <a:t>289</a:t>
+            </a:r>
+          </a:p>
+        </p:txBody>
+      </p:sp>
+      <p:sp>
+        <p:nvSpPr>
+          <p:cNvPr id="45" name="Rectangle 44"/>
+          <p:cNvSpPr/>
+          <p:nvPr/>
+        </p:nvSpPr>
+        <p:spPr>
+          <a:xfrm>
+            <a:off x="7955280" y="3355848"/>
+            <a:ext cx="1188720" cy="457200"/>
+          </a:xfrm>
+          <a:prstGeom prst="rect">
+            <a:avLst/>
+          </a:prstGeom>
+          <a:solidFill>
+            <a:srgbClr val="FFFFFF"/>
+          </a:solidFill>
+          <a:ln>
+            <a:noFill/>
+          </a:ln>
+          <a:effectLst/>
+        </p:spPr>
+        <p:style>
+          <a:lnRef idx="1">
+            <a:schemeClr val="accent1"/>
+          </a:lnRef>
+          <a:fillRef idx="3">
+            <a:schemeClr val="accent1"/>
+          </a:fillRef>
+          <a:effectRef idx="2">
+            <a:schemeClr val="accent1"/>
+          </a:effectRef>
+          <a:fontRef idx="minor">
+            <a:schemeClr val="lt1"/>
+          </a:fontRef>
+        </p:style>
+        <p:txBody>
+          <a:bodyPr rtlCol="0" anchor="ctr"/>
+          <a:lstStyle/>
+          <a:p>
+            <a:pPr algn="ctr"/>
+          </a:p>
+        </p:txBody>
+      </p:sp>
+      <p:sp>
+        <p:nvSpPr>
+          <p:cNvPr id="46" name="TextBox 45"/>
+          <p:cNvSpPr txBox="1"/>
+          <p:nvPr/>
+        </p:nvSpPr>
+        <p:spPr>
+          <a:xfrm>
+            <a:off x="8028432" y="3355848"/>
+            <a:ext cx="1078992" cy="457200"/>
+          </a:xfrm>
+          <a:prstGeom prst="rect">
+            <a:avLst/>
+          </a:prstGeom>
+          <a:noFill/>
+        </p:spPr>
+        <p:txBody>
+          <a:bodyPr wrap="square" anchor="ctr" lIns="27432" rIns="27432" tIns="9144" bIns="9144">
+            <a:spAutoFit/>
+          </a:bodyPr>
+          <a:lstStyle/>
+          <a:p>
+            <a:pPr algn="ctr">
+              <a:spcBef>
+                <a:spcPts val="0"/>
+              </a:spcBef>
+              <a:spcAft>
+                <a:spcPts val="200"/>
+              </a:spcAft>
+            </a:pPr>
+            <a:r>
+              <a:rPr sz="1200" b="1" i="0">
+                <a:solidFill>
+                  <a:srgbClr val="C0561E"/>
+                </a:solidFill>
+                <a:latin typeface="Tahoma"/>
+              </a:rPr>
+              <a:t>222</a:t>
+            </a:r>
+          </a:p>
+        </p:txBody>
+      </p:sp>
+      <p:sp>
+        <p:nvSpPr>
+          <p:cNvPr id="47" name="Rectangle 46"/>
+          <p:cNvSpPr/>
+          <p:nvPr/>
+        </p:nvSpPr>
+        <p:spPr>
+          <a:xfrm>
+            <a:off x="457200" y="3813048"/>
+            <a:ext cx="2743200" cy="457200"/>
+          </a:xfrm>
+          <a:prstGeom prst="rect">
+            <a:avLst/>
+          </a:prstGeom>
+          <a:solidFill>
+            <a:srgbClr val="ECF1E9"/>
+          </a:solidFill>
+          <a:ln>
+            <a:noFill/>
+          </a:ln>
+          <a:effectLst/>
+        </p:spPr>
+        <p:style>
+          <a:lnRef idx="1">
+            <a:schemeClr val="accent1"/>
+          </a:lnRef>
+          <a:fillRef idx="3">
+            <a:schemeClr val="accent1"/>
+          </a:fillRef>
+          <a:effectRef idx="2">
+            <a:schemeClr val="accent1"/>
+          </a:effectRef>
+          <a:fontRef idx="minor">
+            <a:schemeClr val="lt1"/>
+          </a:fontRef>
+        </p:style>
+        <p:txBody>
+          <a:bodyPr rtlCol="0" anchor="ctr"/>
+          <a:lstStyle/>
+          <a:p>
+            <a:pPr algn="ctr"/>
+          </a:p>
+        </p:txBody>
+      </p:sp>
+      <p:sp>
+        <p:nvSpPr>
+          <p:cNvPr id="48" name="TextBox 47"/>
+          <p:cNvSpPr txBox="1"/>
+          <p:nvPr/>
+        </p:nvSpPr>
+        <p:spPr>
+          <a:xfrm>
+            <a:off x="530352" y="3813048"/>
+            <a:ext cx="2633472" cy="457200"/>
+          </a:xfrm>
+          <a:prstGeom prst="rect">
+            <a:avLst/>
+          </a:prstGeom>
+          <a:noFill/>
+        </p:spPr>
+        <p:txBody>
+          <a:bodyPr wrap="square" anchor="ctr" lIns="27432" rIns="27432" tIns="9144" bIns="9144">
+            <a:spAutoFit/>
+          </a:bodyPr>
+          <a:lstStyle/>
+          <a:p>
+            <a:pPr algn="l">
+              <a:spcBef>
+                <a:spcPts val="0"/>
+              </a:spcBef>
+              <a:spcAft>
+                <a:spcPts val="200"/>
+              </a:spcAft>
+            </a:pPr>
+            <a:r>
+              <a:rPr sz="1200" b="1" i="0">
+                <a:solidFill>
+                  <a:srgbClr val="2C5F2D"/>
+                </a:solidFill>
+                <a:latin typeface="Tahoma"/>
+              </a:rPr>
+              <a:t>Attendance rows</a:t>
+            </a:r>
+          </a:p>
+        </p:txBody>
+      </p:sp>
+      <p:sp>
+        <p:nvSpPr>
+          <p:cNvPr id="49" name="Rectangle 48"/>
+          <p:cNvSpPr/>
+          <p:nvPr/>
+        </p:nvSpPr>
+        <p:spPr>
+          <a:xfrm>
+            <a:off x="3200400" y="3813048"/>
+            <a:ext cx="3566160" cy="457200"/>
+          </a:xfrm>
+          <a:prstGeom prst="rect">
+            <a:avLst/>
+          </a:prstGeom>
+          <a:solidFill>
+            <a:srgbClr val="ECF1E9"/>
+          </a:solidFill>
+          <a:ln>
+            <a:noFill/>
+          </a:ln>
+          <a:effectLst/>
+        </p:spPr>
+        <p:style>
+          <a:lnRef idx="1">
+            <a:schemeClr val="accent1"/>
+          </a:lnRef>
+          <a:fillRef idx="3">
+            <a:schemeClr val="accent1"/>
+          </a:fillRef>
+          <a:effectRef idx="2">
+            <a:schemeClr val="accent1"/>
+          </a:effectRef>
+          <a:fontRef idx="minor">
+            <a:schemeClr val="lt1"/>
+          </a:fontRef>
+        </p:style>
+        <p:txBody>
+          <a:bodyPr rtlCol="0" anchor="ctr"/>
+          <a:lstStyle/>
+          <a:p>
+            <a:pPr algn="ctr"/>
+          </a:p>
+        </p:txBody>
+      </p:sp>
+      <p:sp>
+        <p:nvSpPr>
+          <p:cNvPr id="50" name="TextBox 49"/>
+          <p:cNvSpPr txBox="1"/>
+          <p:nvPr/>
+        </p:nvSpPr>
+        <p:spPr>
+          <a:xfrm>
+            <a:off x="3273552" y="3813048"/>
+            <a:ext cx="3456432" cy="457200"/>
+          </a:xfrm>
+          <a:prstGeom prst="rect">
+            <a:avLst/>
+          </a:prstGeom>
+          <a:noFill/>
+        </p:spPr>
+        <p:txBody>
+          <a:bodyPr wrap="square" anchor="ctr" lIns="27432" rIns="27432" tIns="9144" bIns="9144">
+            <a:spAutoFit/>
+          </a:bodyPr>
+          <a:lstStyle/>
+          <a:p>
+            <a:pPr algn="l">
+              <a:spcBef>
+                <a:spcPts val="0"/>
+              </a:spcBef>
+              <a:spcAft>
+                <a:spcPts val="200"/>
+              </a:spcAft>
+            </a:pPr>
+            <a:r>
+              <a:rPr sz="1200" b="0" i="0">
+                <a:solidFill>
+                  <a:srgbClr val="2C5F2D"/>
+                </a:solidFill>
+                <a:latin typeface="Tahoma"/>
+              </a:rPr>
+              <a:t>Check-in sheet / manpower board</a:t>
+            </a:r>
+          </a:p>
+        </p:txBody>
+      </p:sp>
+      <p:sp>
+        <p:nvSpPr>
+          <p:cNvPr id="51" name="Rectangle 50"/>
+          <p:cNvSpPr/>
+          <p:nvPr/>
+        </p:nvSpPr>
+        <p:spPr>
+          <a:xfrm>
+            <a:off x="6766560" y="3813048"/>
+            <a:ext cx="1188720" cy="457200"/>
+          </a:xfrm>
+          <a:prstGeom prst="rect">
+            <a:avLst/>
+          </a:prstGeom>
+          <a:solidFill>
+            <a:srgbClr val="ECF1E9"/>
+          </a:solidFill>
+          <a:ln>
+            <a:noFill/>
+          </a:ln>
+          <a:effectLst/>
+        </p:spPr>
+        <p:style>
+          <a:lnRef idx="1">
+            <a:schemeClr val="accent1"/>
+          </a:lnRef>
+          <a:fillRef idx="3">
+            <a:schemeClr val="accent1"/>
+          </a:fillRef>
+          <a:effectRef idx="2">
+            <a:schemeClr val="accent1"/>
+          </a:effectRef>
+          <a:fontRef idx="minor">
+            <a:schemeClr val="lt1"/>
+          </a:fontRef>
+        </p:style>
+        <p:txBody>
+          <a:bodyPr rtlCol="0" anchor="ctr"/>
+          <a:lstStyle/>
+          <a:p>
+            <a:pPr algn="ctr"/>
+          </a:p>
+        </p:txBody>
+      </p:sp>
+      <p:sp>
+        <p:nvSpPr>
+          <p:cNvPr id="52" name="TextBox 51"/>
+          <p:cNvSpPr txBox="1"/>
+          <p:nvPr/>
+        </p:nvSpPr>
+        <p:spPr>
+          <a:xfrm>
+            <a:off x="6839712" y="3813048"/>
+            <a:ext cx="1078992" cy="457200"/>
+          </a:xfrm>
+          <a:prstGeom prst="rect">
+            <a:avLst/>
+          </a:prstGeom>
+          <a:noFill/>
+        </p:spPr>
+        <p:txBody>
+          <a:bodyPr wrap="square" anchor="ctr" lIns="27432" rIns="27432" tIns="9144" bIns="9144">
+            <a:spAutoFit/>
+          </a:bodyPr>
+          <a:lstStyle/>
+          <a:p>
+            <a:pPr algn="ctr">
+              <a:spcBef>
+                <a:spcPts val="0"/>
+              </a:spcBef>
+              <a:spcAft>
+                <a:spcPts val="200"/>
+              </a:spcAft>
+            </a:pPr>
+            <a:r>
+              <a:rPr sz="1200" b="0" i="0">
+                <a:solidFill>
+                  <a:srgbClr val="2C5F2D"/>
+                </a:solidFill>
+                <a:latin typeface="Tahoma"/>
+              </a:rPr>
+              <a:t>2,897</a:t>
+            </a:r>
+          </a:p>
+        </p:txBody>
+      </p:sp>
+      <p:sp>
+        <p:nvSpPr>
+          <p:cNvPr id="53" name="Rectangle 52"/>
+          <p:cNvSpPr/>
+          <p:nvPr/>
+        </p:nvSpPr>
+        <p:spPr>
+          <a:xfrm>
+            <a:off x="7955280" y="3813048"/>
+            <a:ext cx="1188720" cy="457200"/>
+          </a:xfrm>
+          <a:prstGeom prst="rect">
+            <a:avLst/>
+          </a:prstGeom>
+          <a:solidFill>
+            <a:srgbClr val="ECF1E9"/>
+          </a:solidFill>
+          <a:ln>
+            <a:noFill/>
+          </a:ln>
+          <a:effectLst/>
+        </p:spPr>
+        <p:style>
+          <a:lnRef idx="1">
+            <a:schemeClr val="accent1"/>
+          </a:lnRef>
+          <a:fillRef idx="3">
+            <a:schemeClr val="accent1"/>
+          </a:fillRef>
+          <a:effectRef idx="2">
+            <a:schemeClr val="accent1"/>
+          </a:effectRef>
+          <a:fontRef idx="minor">
+            <a:schemeClr val="lt1"/>
+          </a:fontRef>
+        </p:style>
+        <p:txBody>
+          <a:bodyPr rtlCol="0" anchor="ctr"/>
+          <a:lstStyle/>
+          <a:p>
+            <a:pPr algn="ctr"/>
+          </a:p>
+        </p:txBody>
+      </p:sp>
+      <p:sp>
+        <p:nvSpPr>
+          <p:cNvPr id="54" name="TextBox 53"/>
+          <p:cNvSpPr txBox="1"/>
+          <p:nvPr/>
+        </p:nvSpPr>
+        <p:spPr>
+          <a:xfrm>
+            <a:off x="8028432" y="3813048"/>
+            <a:ext cx="1078992" cy="457200"/>
+          </a:xfrm>
+          <a:prstGeom prst="rect">
+            <a:avLst/>
+          </a:prstGeom>
+          <a:noFill/>
+        </p:spPr>
+        <p:txBody>
+          <a:bodyPr wrap="square" anchor="ctr" lIns="27432" rIns="27432" tIns="9144" bIns="9144">
+            <a:spAutoFit/>
+          </a:bodyPr>
+          <a:lstStyle/>
+          <a:p>
+            <a:pPr algn="ctr">
+              <a:spcBef>
+                <a:spcPts val="0"/>
+              </a:spcBef>
+              <a:spcAft>
+                <a:spcPts val="200"/>
+              </a:spcAft>
+            </a:pPr>
+            <a:r>
+              <a:rPr sz="1200" b="1" i="0">
+                <a:solidFill>
+                  <a:srgbClr val="C0561E"/>
+                </a:solidFill>
+                <a:latin typeface="Tahoma"/>
+              </a:rPr>
+              <a:t>3,489</a:t>
+            </a:r>
+          </a:p>
+        </p:txBody>
+      </p:sp>
+      <p:sp>
+        <p:nvSpPr>
+          <p:cNvPr id="55" name="Rectangle 54"/>
+          <p:cNvSpPr/>
+          <p:nvPr/>
+        </p:nvSpPr>
+        <p:spPr>
+          <a:xfrm>
+            <a:off x="457200" y="4270248"/>
+            <a:ext cx="2743200" cy="457200"/>
+          </a:xfrm>
+          <a:prstGeom prst="rect">
+            <a:avLst/>
+          </a:prstGeom>
+          <a:solidFill>
+            <a:srgbClr val="FFFFFF"/>
+          </a:solidFill>
+          <a:ln>
+            <a:noFill/>
+          </a:ln>
+          <a:effectLst/>
+        </p:spPr>
+        <p:style>
+          <a:lnRef idx="1">
+            <a:schemeClr val="accent1"/>
+          </a:lnRef>
+          <a:fillRef idx="3">
+            <a:schemeClr val="accent1"/>
+          </a:fillRef>
+          <a:effectRef idx="2">
+            <a:schemeClr val="accent1"/>
+          </a:effectRef>
+          <a:fontRef idx="minor">
+            <a:schemeClr val="lt1"/>
+          </a:fontRef>
+        </p:style>
+        <p:txBody>
+          <a:bodyPr rtlCol="0" anchor="ctr"/>
+          <a:lstStyle/>
+          <a:p>
+            <a:pPr algn="ctr"/>
+          </a:p>
+        </p:txBody>
+      </p:sp>
+      <p:sp>
+        <p:nvSpPr>
+          <p:cNvPr id="56" name="TextBox 55"/>
+          <p:cNvSpPr txBox="1"/>
+          <p:nvPr/>
+        </p:nvSpPr>
+        <p:spPr>
+          <a:xfrm>
+            <a:off x="530352" y="4270248"/>
+            <a:ext cx="2633472" cy="457200"/>
+          </a:xfrm>
+          <a:prstGeom prst="rect">
+            <a:avLst/>
+          </a:prstGeom>
+          <a:noFill/>
+        </p:spPr>
+        <p:txBody>
+          <a:bodyPr wrap="square" anchor="ctr" lIns="27432" rIns="27432" tIns="9144" bIns="9144">
+            <a:spAutoFit/>
+          </a:bodyPr>
+          <a:lstStyle/>
+          <a:p>
+            <a:pPr algn="l">
+              <a:spcBef>
+                <a:spcPts val="0"/>
+              </a:spcBef>
+              <a:spcAft>
+                <a:spcPts val="200"/>
+              </a:spcAft>
+            </a:pPr>
+            <a:r>
+              <a:rPr sz="1200" b="1" i="0">
+                <a:solidFill>
+                  <a:srgbClr val="2C5F2D"/>
+                </a:solidFill>
+                <a:latin typeface="Tahoma"/>
+              </a:rPr>
+              <a:t>PM inspection sheets</a:t>
+            </a:r>
+          </a:p>
+        </p:txBody>
+      </p:sp>
+      <p:sp>
+        <p:nvSpPr>
+          <p:cNvPr id="57" name="Rectangle 56"/>
+          <p:cNvSpPr/>
+          <p:nvPr/>
+        </p:nvSpPr>
+        <p:spPr>
+          <a:xfrm>
+            <a:off x="3200400" y="4270248"/>
+            <a:ext cx="3566160" cy="457200"/>
+          </a:xfrm>
+          <a:prstGeom prst="rect">
+            <a:avLst/>
+          </a:prstGeom>
+          <a:solidFill>
+            <a:srgbClr val="FFFFFF"/>
+          </a:solidFill>
+          <a:ln>
+            <a:noFill/>
+          </a:ln>
+          <a:effectLst/>
+        </p:spPr>
+        <p:style>
+          <a:lnRef idx="1">
+            <a:schemeClr val="accent1"/>
+          </a:lnRef>
+          <a:fillRef idx="3">
+            <a:schemeClr val="accent1"/>
+          </a:fillRef>
+          <a:effectRef idx="2">
+            <a:schemeClr val="accent1"/>
+          </a:effectRef>
+          <a:fontRef idx="minor">
+            <a:schemeClr val="lt1"/>
+          </a:fontRef>
+        </p:style>
+        <p:txBody>
+          <a:bodyPr rtlCol="0" anchor="ctr"/>
+          <a:lstStyle/>
+          <a:p>
+            <a:pPr algn="ctr"/>
+          </a:p>
+        </p:txBody>
+      </p:sp>
+      <p:sp>
+        <p:nvSpPr>
+          <p:cNvPr id="58" name="TextBox 57"/>
+          <p:cNvSpPr txBox="1"/>
+          <p:nvPr/>
+        </p:nvSpPr>
+        <p:spPr>
+          <a:xfrm>
+            <a:off x="3273552" y="4270248"/>
+            <a:ext cx="3456432" cy="457200"/>
+          </a:xfrm>
+          <a:prstGeom prst="rect">
+            <a:avLst/>
+          </a:prstGeom>
+          <a:noFill/>
+        </p:spPr>
+        <p:txBody>
+          <a:bodyPr wrap="square" anchor="ctr" lIns="27432" rIns="27432" tIns="9144" bIns="9144">
+            <a:spAutoFit/>
+          </a:bodyPr>
+          <a:lstStyle/>
+          <a:p>
+            <a:pPr algn="l">
+              <a:spcBef>
+                <a:spcPts val="0"/>
+              </a:spcBef>
+              <a:spcAft>
+                <a:spcPts val="200"/>
+              </a:spcAft>
+            </a:pPr>
+            <a:r>
+              <a:rPr sz="1200" b="0" i="0">
+                <a:solidFill>
+                  <a:srgbClr val="2C5F2D"/>
+                </a:solidFill>
+                <a:latin typeface="Tahoma"/>
+              </a:rPr>
+              <a:t>Paper PM check sheet</a:t>
+            </a:r>
+          </a:p>
+        </p:txBody>
+      </p:sp>
+      <p:sp>
+        <p:nvSpPr>
+          <p:cNvPr id="59" name="Rectangle 58"/>
+          <p:cNvSpPr/>
+          <p:nvPr/>
+        </p:nvSpPr>
+        <p:spPr>
+          <a:xfrm>
+            <a:off x="6766560" y="4270248"/>
+            <a:ext cx="1188720" cy="457200"/>
+          </a:xfrm>
+          <a:prstGeom prst="rect">
+            <a:avLst/>
+          </a:prstGeom>
+          <a:solidFill>
+            <a:srgbClr val="FFFFFF"/>
+          </a:solidFill>
+          <a:ln>
+            <a:noFill/>
+          </a:ln>
+          <a:effectLst/>
+        </p:spPr>
+        <p:style>
+          <a:lnRef idx="1">
+            <a:schemeClr val="accent1"/>
+          </a:lnRef>
+          <a:fillRef idx="3">
+            <a:schemeClr val="accent1"/>
+          </a:fillRef>
+          <a:effectRef idx="2">
+            <a:schemeClr val="accent1"/>
+          </a:effectRef>
+          <a:fontRef idx="minor">
+            <a:schemeClr val="lt1"/>
+          </a:fontRef>
+        </p:style>
+        <p:txBody>
+          <a:bodyPr rtlCol="0" anchor="ctr"/>
+          <a:lstStyle/>
+          <a:p>
+            <a:pPr algn="ctr"/>
+          </a:p>
+        </p:txBody>
+      </p:sp>
+      <p:sp>
+        <p:nvSpPr>
+          <p:cNvPr id="60" name="TextBox 59"/>
+          <p:cNvSpPr txBox="1"/>
+          <p:nvPr/>
+        </p:nvSpPr>
+        <p:spPr>
+          <a:xfrm>
+            <a:off x="6839712" y="4270248"/>
+            <a:ext cx="1078992" cy="457200"/>
+          </a:xfrm>
+          <a:prstGeom prst="rect">
+            <a:avLst/>
+          </a:prstGeom>
+          <a:noFill/>
+        </p:spPr>
+        <p:txBody>
+          <a:bodyPr wrap="square" anchor="ctr" lIns="27432" rIns="27432" tIns="9144" bIns="9144">
+            <a:spAutoFit/>
+          </a:bodyPr>
+          <a:lstStyle/>
+          <a:p>
+            <a:pPr algn="ctr">
+              <a:spcBef>
+                <a:spcPts val="0"/>
+              </a:spcBef>
+              <a:spcAft>
+                <a:spcPts val="200"/>
+              </a:spcAft>
+            </a:pPr>
+            <a:r>
+              <a:rPr sz="1200" b="0" i="0">
+                <a:solidFill>
+                  <a:srgbClr val="2C5F2D"/>
+                </a:solidFill>
+                <a:latin typeface="Tahoma"/>
+              </a:rPr>
+              <a:t>6</a:t>
+            </a:r>
+          </a:p>
+        </p:txBody>
+      </p:sp>
+      <p:sp>
+        <p:nvSpPr>
+          <p:cNvPr id="61" name="Rectangle 60"/>
+          <p:cNvSpPr/>
+          <p:nvPr/>
+        </p:nvSpPr>
+        <p:spPr>
+          <a:xfrm>
+            <a:off x="7955280" y="4270248"/>
+            <a:ext cx="1188720" cy="457200"/>
+          </a:xfrm>
+          <a:prstGeom prst="rect">
+            <a:avLst/>
+          </a:prstGeom>
+          <a:solidFill>
+            <a:srgbClr val="FFFFFF"/>
+          </a:solidFill>
+          <a:ln>
+            <a:noFill/>
+          </a:ln>
+          <a:effectLst/>
+        </p:spPr>
+        <p:style>
+          <a:lnRef idx="1">
+            <a:schemeClr val="accent1"/>
+          </a:lnRef>
+          <a:fillRef idx="3">
+            <a:schemeClr val="accent1"/>
+          </a:fillRef>
+          <a:effectRef idx="2">
+            <a:schemeClr val="accent1"/>
+          </a:effectRef>
+          <a:fontRef idx="minor">
+            <a:schemeClr val="lt1"/>
+          </a:fontRef>
+        </p:style>
+        <p:txBody>
+          <a:bodyPr rtlCol="0" anchor="ctr"/>
+          <a:lstStyle/>
+          <a:p>
+            <a:pPr algn="ctr"/>
+          </a:p>
+        </p:txBody>
+      </p:sp>
+      <p:sp>
+        <p:nvSpPr>
+          <p:cNvPr id="62" name="TextBox 61"/>
+          <p:cNvSpPr txBox="1"/>
+          <p:nvPr/>
+        </p:nvSpPr>
+        <p:spPr>
+          <a:xfrm>
+            <a:off x="8028432" y="4270248"/>
+            <a:ext cx="1078992" cy="457200"/>
+          </a:xfrm>
+          <a:prstGeom prst="rect">
+            <a:avLst/>
+          </a:prstGeom>
+          <a:noFill/>
+        </p:spPr>
+        <p:txBody>
+          <a:bodyPr wrap="square" anchor="ctr" lIns="27432" rIns="27432" tIns="9144" bIns="9144">
+            <a:spAutoFit/>
+          </a:bodyPr>
+          <a:lstStyle/>
+          <a:p>
+            <a:pPr algn="ctr">
+              <a:spcBef>
+                <a:spcPts val="0"/>
+              </a:spcBef>
+              <a:spcAft>
+                <a:spcPts val="200"/>
+              </a:spcAft>
+            </a:pPr>
+            <a:r>
+              <a:rPr sz="1200" b="1" i="0">
+                <a:solidFill>
+                  <a:srgbClr val="C0561E"/>
+                </a:solidFill>
+                <a:latin typeface="Tahoma"/>
+              </a:rPr>
+              <a:t>88</a:t>
+            </a:r>
+          </a:p>
+        </p:txBody>
+      </p:sp>
+      <p:sp>
+        <p:nvSpPr>
+          <p:cNvPr id="63" name="Rectangle 62"/>
+          <p:cNvSpPr/>
+          <p:nvPr/>
+        </p:nvSpPr>
+        <p:spPr>
+          <a:xfrm>
+            <a:off x="457200" y="4727448"/>
+            <a:ext cx="2743200" cy="457200"/>
+          </a:xfrm>
+          <a:prstGeom prst="rect">
+            <a:avLst/>
+          </a:prstGeom>
+          <a:solidFill>
+            <a:srgbClr val="ECF1E9"/>
+          </a:solidFill>
+          <a:ln>
+            <a:noFill/>
+          </a:ln>
+          <a:effectLst/>
+        </p:spPr>
+        <p:style>
+          <a:lnRef idx="1">
+            <a:schemeClr val="accent1"/>
+          </a:lnRef>
+          <a:fillRef idx="3">
+            <a:schemeClr val="accent1"/>
+          </a:fillRef>
+          <a:effectRef idx="2">
+            <a:schemeClr val="accent1"/>
+          </a:effectRef>
+          <a:fontRef idx="minor">
+            <a:schemeClr val="lt1"/>
+          </a:fontRef>
+        </p:style>
+        <p:txBody>
+          <a:bodyPr rtlCol="0" anchor="ctr"/>
+          <a:lstStyle/>
+          <a:p>
+            <a:pPr algn="ctr"/>
+          </a:p>
+        </p:txBody>
+      </p:sp>
+      <p:sp>
+        <p:nvSpPr>
+          <p:cNvPr id="64" name="TextBox 63"/>
+          <p:cNvSpPr txBox="1"/>
+          <p:nvPr/>
+        </p:nvSpPr>
+        <p:spPr>
+          <a:xfrm>
+            <a:off x="530352" y="4727448"/>
+            <a:ext cx="2633472" cy="457200"/>
+          </a:xfrm>
+          <a:prstGeom prst="rect">
+            <a:avLst/>
+          </a:prstGeom>
+          <a:noFill/>
+        </p:spPr>
+        <p:txBody>
+          <a:bodyPr wrap="square" anchor="ctr" lIns="27432" rIns="27432" tIns="9144" bIns="9144">
+            <a:spAutoFit/>
+          </a:bodyPr>
+          <a:lstStyle/>
+          <a:p>
+            <a:pPr algn="l">
+              <a:spcBef>
+                <a:spcPts val="0"/>
+              </a:spcBef>
+              <a:spcAft>
+                <a:spcPts val="200"/>
+              </a:spcAft>
+            </a:pPr>
+            <a:r>
+              <a:rPr sz="1200" b="1" i="0">
+                <a:solidFill>
+                  <a:srgbClr val="2C5F2D"/>
+                </a:solidFill>
+                <a:latin typeface="Tahoma"/>
+              </a:rPr>
+              <a:t>BBS / OJT / quality bins</a:t>
+            </a:r>
+          </a:p>
+        </p:txBody>
+      </p:sp>
+      <p:sp>
+        <p:nvSpPr>
+          <p:cNvPr id="65" name="Rectangle 64"/>
+          <p:cNvSpPr/>
+          <p:nvPr/>
+        </p:nvSpPr>
+        <p:spPr>
+          <a:xfrm>
+            <a:off x="3200400" y="4727448"/>
+            <a:ext cx="3566160" cy="457200"/>
+          </a:xfrm>
+          <a:prstGeom prst="rect">
+            <a:avLst/>
+          </a:prstGeom>
+          <a:solidFill>
+            <a:srgbClr val="ECF1E9"/>
+          </a:solidFill>
+          <a:ln>
+            <a:noFill/>
+          </a:ln>
+          <a:effectLst/>
+        </p:spPr>
+        <p:style>
+          <a:lnRef idx="1">
+            <a:schemeClr val="accent1"/>
+          </a:lnRef>
+          <a:fillRef idx="3">
+            <a:schemeClr val="accent1"/>
+          </a:fillRef>
+          <a:effectRef idx="2">
+            <a:schemeClr val="accent1"/>
+          </a:effectRef>
+          <a:fontRef idx="minor">
+            <a:schemeClr val="lt1"/>
+          </a:fontRef>
+        </p:style>
+        <p:txBody>
+          <a:bodyPr rtlCol="0" anchor="ctr"/>
+          <a:lstStyle/>
+          <a:p>
+            <a:pPr algn="ctr"/>
+          </a:p>
+        </p:txBody>
+      </p:sp>
+      <p:sp>
+        <p:nvSpPr>
+          <p:cNvPr id="66" name="TextBox 65"/>
+          <p:cNvSpPr txBox="1"/>
+          <p:nvPr/>
+        </p:nvSpPr>
+        <p:spPr>
+          <a:xfrm>
+            <a:off x="3273552" y="4727448"/>
+            <a:ext cx="3456432" cy="457200"/>
+          </a:xfrm>
+          <a:prstGeom prst="rect">
+            <a:avLst/>
+          </a:prstGeom>
+          <a:noFill/>
+        </p:spPr>
+        <p:txBody>
+          <a:bodyPr wrap="square" anchor="ctr" lIns="27432" rIns="27432" tIns="9144" bIns="9144">
+            <a:spAutoFit/>
+          </a:bodyPr>
+          <a:lstStyle/>
+          <a:p>
+            <a:pPr algn="l">
+              <a:spcBef>
+                <a:spcPts val="0"/>
+              </a:spcBef>
+              <a:spcAft>
+                <a:spcPts val="200"/>
+              </a:spcAft>
+            </a:pPr>
+            <a:r>
+              <a:rPr sz="1200" b="0" i="0">
+                <a:solidFill>
+                  <a:srgbClr val="2C5F2D"/>
+                </a:solidFill>
+                <a:latin typeface="Tahoma"/>
+              </a:rPr>
+              <a:t>Excel BBS · FM-HRM-004 · bin tags</a:t>
+            </a:r>
+          </a:p>
+        </p:txBody>
+      </p:sp>
+      <p:sp>
+        <p:nvSpPr>
+          <p:cNvPr id="67" name="Rectangle 66"/>
+          <p:cNvSpPr/>
+          <p:nvPr/>
+        </p:nvSpPr>
+        <p:spPr>
+          <a:xfrm>
+            <a:off x="6766560" y="4727448"/>
+            <a:ext cx="1188720" cy="457200"/>
+          </a:xfrm>
+          <a:prstGeom prst="rect">
+            <a:avLst/>
+          </a:prstGeom>
+          <a:solidFill>
+            <a:srgbClr val="ECF1E9"/>
+          </a:solidFill>
+          <a:ln>
+            <a:noFill/>
+          </a:ln>
+          <a:effectLst/>
+        </p:spPr>
+        <p:style>
+          <a:lnRef idx="1">
+            <a:schemeClr val="accent1"/>
+          </a:lnRef>
+          <a:fillRef idx="3">
+            <a:schemeClr val="accent1"/>
+          </a:fillRef>
+          <a:effectRef idx="2">
+            <a:schemeClr val="accent1"/>
+          </a:effectRef>
+          <a:fontRef idx="minor">
+            <a:schemeClr val="lt1"/>
+          </a:fontRef>
+        </p:style>
+        <p:txBody>
+          <a:bodyPr rtlCol="0" anchor="ctr"/>
+          <a:lstStyle/>
+          <a:p>
+            <a:pPr algn="ctr"/>
+          </a:p>
+        </p:txBody>
+      </p:sp>
+      <p:sp>
+        <p:nvSpPr>
+          <p:cNvPr id="68" name="TextBox 67"/>
+          <p:cNvSpPr txBox="1"/>
+          <p:nvPr/>
+        </p:nvSpPr>
+        <p:spPr>
+          <a:xfrm>
+            <a:off x="6839712" y="4727448"/>
+            <a:ext cx="1078992" cy="457200"/>
+          </a:xfrm>
+          <a:prstGeom prst="rect">
+            <a:avLst/>
+          </a:prstGeom>
+          <a:noFill/>
+        </p:spPr>
+        <p:txBody>
+          <a:bodyPr wrap="square" anchor="ctr" lIns="27432" rIns="27432" tIns="9144" bIns="9144">
+            <a:spAutoFit/>
+          </a:bodyPr>
+          <a:lstStyle/>
+          <a:p>
+            <a:pPr algn="ctr">
+              <a:spcBef>
+                <a:spcPts val="0"/>
+              </a:spcBef>
+              <a:spcAft>
+                <a:spcPts val="200"/>
+              </a:spcAft>
+            </a:pPr>
+            <a:r>
+              <a:rPr sz="1200" b="0" i="0">
+                <a:solidFill>
+                  <a:srgbClr val="2C5F2D"/>
+                </a:solidFill>
+                <a:latin typeface="Tahoma"/>
+              </a:rPr>
+              <a:t>32</a:t>
+            </a:r>
+          </a:p>
+        </p:txBody>
+      </p:sp>
+      <p:sp>
+        <p:nvSpPr>
+          <p:cNvPr id="69" name="Rectangle 68"/>
+          <p:cNvSpPr/>
+          <p:nvPr/>
+        </p:nvSpPr>
+        <p:spPr>
+          <a:xfrm>
+            <a:off x="7955280" y="4727448"/>
+            <a:ext cx="1188720" cy="457200"/>
+          </a:xfrm>
+          <a:prstGeom prst="rect">
+            <a:avLst/>
+          </a:prstGeom>
+          <a:solidFill>
+            <a:srgbClr val="ECF1E9"/>
+          </a:solidFill>
+          <a:ln>
+            <a:noFill/>
+          </a:ln>
+          <a:effectLst/>
+        </p:spPr>
+        <p:style>
+          <a:lnRef idx="1">
+            <a:schemeClr val="accent1"/>
+          </a:lnRef>
+          <a:fillRef idx="3">
+            <a:schemeClr val="accent1"/>
+          </a:fillRef>
+          <a:effectRef idx="2">
+            <a:schemeClr val="accent1"/>
+          </a:effectRef>
+          <a:fontRef idx="minor">
+            <a:schemeClr val="lt1"/>
+          </a:fontRef>
+        </p:style>
+        <p:txBody>
+          <a:bodyPr rtlCol="0" anchor="ctr"/>
+          <a:lstStyle/>
+          <a:p>
+            <a:pPr algn="ctr"/>
+          </a:p>
+        </p:txBody>
+      </p:sp>
+      <p:sp>
+        <p:nvSpPr>
+          <p:cNvPr id="70" name="TextBox 69"/>
+          <p:cNvSpPr txBox="1"/>
+          <p:nvPr/>
+        </p:nvSpPr>
+        <p:spPr>
+          <a:xfrm>
+            <a:off x="8028432" y="4727448"/>
+            <a:ext cx="1078992" cy="457200"/>
+          </a:xfrm>
+          <a:prstGeom prst="rect">
+            <a:avLst/>
+          </a:prstGeom>
+          <a:noFill/>
+        </p:spPr>
+        <p:txBody>
+          <a:bodyPr wrap="square" anchor="ctr" lIns="27432" rIns="27432" tIns="9144" bIns="9144">
+            <a:spAutoFit/>
+          </a:bodyPr>
+          <a:lstStyle/>
+          <a:p>
+            <a:pPr algn="ctr">
+              <a:spcBef>
+                <a:spcPts val="0"/>
+              </a:spcBef>
+              <a:spcAft>
+                <a:spcPts val="200"/>
+              </a:spcAft>
+            </a:pPr>
+            <a:r>
+              <a:rPr sz="1200" b="1" i="0">
+                <a:solidFill>
+                  <a:srgbClr val="C0561E"/>
+                </a:solidFill>
+                <a:latin typeface="Tahoma"/>
+              </a:rPr>
+              <a:t>26</a:t>
+            </a:r>
+          </a:p>
+        </p:txBody>
+      </p:sp>
+      <p:sp>
+        <p:nvSpPr>
+          <p:cNvPr id="71" name="Rounded Rectangle 70"/>
+          <p:cNvSpPr/>
+          <p:nvPr/>
+        </p:nvSpPr>
+        <p:spPr>
+          <a:xfrm>
+            <a:off x="9418320" y="1600200"/>
+            <a:ext cx="2331720" cy="1600200"/>
           </a:xfrm>
           <a:prstGeom prst="roundRect">
             <a:avLst/>
@@ -20926,199 +24865,140 @@
       </p:sp>
       <p:sp>
         <p:nvSpPr>
-          <p:cNvPr id="10" name="Rectangle 9"/>
+          <p:cNvPr id="72" name="TextBox 71"/>
+          <p:cNvSpPr txBox="1"/>
+          <p:nvPr/>
+        </p:nvSpPr>
+        <p:spPr>
+          <a:xfrm>
+            <a:off x="9418320" y="1709928"/>
+            <a:ext cx="2331720" cy="685800"/>
+          </a:xfrm>
+          <a:prstGeom prst="rect">
+            <a:avLst/>
+          </a:prstGeom>
+          <a:noFill/>
+        </p:spPr>
+        <p:txBody>
+          <a:bodyPr wrap="square" anchor="ctr" lIns="27432" rIns="27432" tIns="9144" bIns="9144">
+            <a:spAutoFit/>
+          </a:bodyPr>
+          <a:lstStyle/>
+          <a:p>
+            <a:pPr algn="ctr">
+              <a:spcBef>
+                <a:spcPts val="0"/>
+              </a:spcBef>
+              <a:spcAft>
+                <a:spcPts val="200"/>
+              </a:spcAft>
+            </a:pPr>
+            <a:r>
+              <a:rPr sz="3000" b="1" i="0">
+                <a:solidFill>
+                  <a:srgbClr val="C0561E"/>
+                </a:solidFill>
+                <a:latin typeface="Tahoma"/>
+              </a:rPr>
+              <a:t>71 / 100</a:t>
+            </a:r>
+          </a:p>
+        </p:txBody>
+      </p:sp>
+      <p:sp>
+        <p:nvSpPr>
+          <p:cNvPr id="73" name="TextBox 72"/>
+          <p:cNvSpPr txBox="1"/>
+          <p:nvPr/>
+        </p:nvSpPr>
+        <p:spPr>
+          <a:xfrm>
+            <a:off x="9509760" y="2423160"/>
+            <a:ext cx="2148839" cy="411480"/>
+          </a:xfrm>
+          <a:prstGeom prst="rect">
+            <a:avLst/>
+          </a:prstGeom>
+          <a:noFill/>
+        </p:spPr>
+        <p:txBody>
+          <a:bodyPr wrap="square" anchor="t" lIns="27432" rIns="27432" tIns="9144" bIns="9144">
+            <a:spAutoFit/>
+          </a:bodyPr>
+          <a:lstStyle/>
+          <a:p>
+            <a:pPr algn="ctr">
+              <a:spcBef>
+                <a:spcPts val="0"/>
+              </a:spcBef>
+              <a:spcAft>
+                <a:spcPts val="200"/>
+              </a:spcAft>
+            </a:pPr>
+            <a:r>
+              <a:rPr sz="1250" b="1" i="0">
+                <a:solidFill>
+                  <a:srgbClr val="0D3D14"/>
+                </a:solidFill>
+                <a:latin typeface="Tahoma"/>
+              </a:rPr>
+              <a:t>Accounts active in 30 days</a:t>
+            </a:r>
+          </a:p>
+        </p:txBody>
+      </p:sp>
+      <p:sp>
+        <p:nvSpPr>
+          <p:cNvPr id="74" name="TextBox 73"/>
+          <p:cNvSpPr txBox="1"/>
+          <p:nvPr/>
+        </p:nvSpPr>
+        <p:spPr>
+          <a:xfrm>
+            <a:off x="9509760" y="2788920"/>
+            <a:ext cx="2148839" cy="365760"/>
+          </a:xfrm>
+          <a:prstGeom prst="rect">
+            <a:avLst/>
+          </a:prstGeom>
+          <a:noFill/>
+        </p:spPr>
+        <p:txBody>
+          <a:bodyPr wrap="square" anchor="t" lIns="27432" rIns="27432" tIns="9144" bIns="9144">
+            <a:spAutoFit/>
+          </a:bodyPr>
+          <a:lstStyle/>
+          <a:p>
+            <a:pPr algn="ctr">
+              <a:spcBef>
+                <a:spcPts val="0"/>
+              </a:spcBef>
+              <a:spcAft>
+                <a:spcPts val="200"/>
+              </a:spcAft>
+            </a:pPr>
+            <a:r>
+              <a:rPr sz="1100" b="0" i="0">
+                <a:solidFill>
+                  <a:srgbClr val="555555"/>
+                </a:solidFill>
+                <a:latin typeface="Tahoma"/>
+              </a:rPr>
+              <a:t>47 in the last 7 days</a:t>
+            </a:r>
+          </a:p>
+        </p:txBody>
+      </p:sp>
+      <p:sp>
+        <p:nvSpPr>
+          <p:cNvPr id="75" name="Rounded Rectangle 74"/>
           <p:cNvSpPr/>
           <p:nvPr/>
         </p:nvSpPr>
         <p:spPr>
           <a:xfrm>
-            <a:off x="457200" y="1600200"/>
-            <a:ext cx="3657600" cy="420624"/>
-          </a:xfrm>
-          <a:prstGeom prst="rect">
-            <a:avLst/>
-          </a:prstGeom>
-          <a:solidFill>
-            <a:srgbClr val="555555"/>
-          </a:solidFill>
-          <a:ln>
-            <a:noFill/>
-          </a:ln>
-          <a:effectLst/>
-        </p:spPr>
-        <p:style>
-          <a:lnRef idx="1">
-            <a:schemeClr val="accent1"/>
-          </a:lnRef>
-          <a:fillRef idx="3">
-            <a:schemeClr val="accent1"/>
-          </a:fillRef>
-          <a:effectRef idx="2">
-            <a:schemeClr val="accent1"/>
-          </a:effectRef>
-          <a:fontRef idx="minor">
-            <a:schemeClr val="lt1"/>
-          </a:fontRef>
-        </p:style>
-        <p:txBody>
-          <a:bodyPr rtlCol="0" anchor="ctr"/>
-          <a:lstStyle/>
-          <a:p>
-            <a:pPr algn="ctr"/>
-          </a:p>
-        </p:txBody>
-      </p:sp>
-      <p:sp>
-        <p:nvSpPr>
-          <p:cNvPr id="11" name="TextBox 10"/>
-          <p:cNvSpPr txBox="1"/>
-          <p:nvPr/>
-        </p:nvSpPr>
-        <p:spPr>
-          <a:xfrm>
-            <a:off x="457200" y="1600200"/>
-            <a:ext cx="3657600" cy="420624"/>
-          </a:xfrm>
-          <a:prstGeom prst="rect">
-            <a:avLst/>
-          </a:prstGeom>
-          <a:noFill/>
-        </p:spPr>
-        <p:txBody>
-          <a:bodyPr wrap="square" anchor="ctr" lIns="27432" rIns="27432" tIns="9144" bIns="9144">
-            <a:spAutoFit/>
-          </a:bodyPr>
-          <a:lstStyle/>
-          <a:p>
-            <a:pPr algn="ctr">
-              <a:spcBef>
-                <a:spcPts val="0"/>
-              </a:spcBef>
-              <a:spcAft>
-                <a:spcPts val="200"/>
-              </a:spcAft>
-            </a:pPr>
-            <a:r>
-              <a:rPr sz="1500" b="1" i="0">
-                <a:solidFill>
-                  <a:srgbClr val="FFFFFF"/>
-                </a:solidFill>
-                <a:latin typeface="Tahoma"/>
-              </a:rPr>
-              <a:t>BEFORE  (manual)</a:t>
-            </a:r>
-          </a:p>
-        </p:txBody>
-      </p:sp>
-      <p:sp>
-        <p:nvSpPr>
-          <p:cNvPr id="12" name="TextBox 11"/>
-          <p:cNvSpPr txBox="1"/>
-          <p:nvPr/>
-        </p:nvSpPr>
-        <p:spPr>
-          <a:xfrm>
-            <a:off x="594360" y="2148840"/>
-            <a:ext cx="3383280" cy="2743200"/>
-          </a:xfrm>
-          <a:prstGeom prst="rect">
-            <a:avLst/>
-          </a:prstGeom>
-          <a:noFill/>
-        </p:spPr>
-        <p:txBody>
-          <a:bodyPr wrap="square" anchor="t" lIns="27432" rIns="27432" tIns="9144" bIns="9144">
-            <a:spAutoFit/>
-          </a:bodyPr>
-          <a:lstStyle/>
-          <a:p>
-            <a:pPr algn="l">
-              <a:spcBef>
-                <a:spcPts val="0"/>
-              </a:spcBef>
-              <a:spcAft>
-                <a:spcPts val="600"/>
-              </a:spcAft>
-            </a:pPr>
-            <a:r>
-              <a:rPr sz="1250" b="0" i="0">
-                <a:solidFill>
-                  <a:srgbClr val="2C5F2D"/>
-                </a:solidFill>
-                <a:latin typeface="Tahoma"/>
-              </a:rPr>
-              <a:t>•  Group leader hand-writes problem report, bin tag and scrap report (3 forms)</a:t>
-            </a:r>
-          </a:p>
-          <a:p>
-            <a:pPr algn="l">
-              <a:spcBef>
-                <a:spcPts val="0"/>
-              </a:spcBef>
-              <a:spcAft>
-                <a:spcPts val="600"/>
-              </a:spcAft>
-            </a:pPr>
-            <a:r>
-              <a:rPr sz="1250" b="0" i="0">
-                <a:solidFill>
-                  <a:srgbClr val="2C5F2D"/>
-                </a:solidFill>
-                <a:latin typeface="Tahoma"/>
-              </a:rPr>
-              <a:t>•  Morning meeting needs someone to make slides</a:t>
-            </a:r>
-          </a:p>
-          <a:p>
-            <a:pPr algn="l">
-              <a:spcBef>
-                <a:spcPts val="0"/>
-              </a:spcBef>
-              <a:spcAft>
-                <a:spcPts val="600"/>
-              </a:spcAft>
-            </a:pPr>
-            <a:r>
-              <a:rPr sz="1250" b="0" i="0">
-                <a:solidFill>
-                  <a:srgbClr val="2C5F2D"/>
-                </a:solidFill>
-                <a:latin typeface="Tahoma"/>
-              </a:rPr>
-              <a:t>•  LPA plan and BBS on paper / Excel</a:t>
-            </a:r>
-          </a:p>
-          <a:p>
-            <a:pPr algn="l">
-              <a:spcBef>
-                <a:spcPts val="0"/>
-              </a:spcBef>
-              <a:spcAft>
-                <a:spcPts val="600"/>
-              </a:spcAft>
-            </a:pPr>
-            <a:r>
-              <a:rPr sz="1250" b="0" i="0">
-                <a:solidFill>
-                  <a:srgbClr val="2C5F2D"/>
-                </a:solidFill>
-                <a:latin typeface="Tahoma"/>
-              </a:rPr>
-              <a:t>•  OEE not known until month-end</a:t>
-            </a:r>
-          </a:p>
-        </p:txBody>
-      </p:sp>
-      <p:sp>
-        <p:nvSpPr>
-          <p:cNvPr id="13" name="Rounded Rectangle 12"/>
-          <p:cNvSpPr/>
-          <p:nvPr/>
-        </p:nvSpPr>
-        <p:spPr>
-          <a:xfrm>
-            <a:off x="4270248" y="1600200"/>
-            <a:ext cx="3657600" cy="3383280"/>
+            <a:off x="9418320" y="3383280"/>
+            <a:ext cx="2331720" cy="1600200"/>
           </a:xfrm>
           <a:prstGeom prst="roundRect">
             <a:avLst/>
@@ -21164,58 +25044,14 @@
       </p:sp>
       <p:sp>
         <p:nvSpPr>
-          <p:cNvPr id="14" name="Rectangle 13"/>
-          <p:cNvSpPr/>
-          <p:nvPr/>
-        </p:nvSpPr>
-        <p:spPr>
-          <a:xfrm>
-            <a:off x="4270248" y="1600200"/>
-            <a:ext cx="3657600" cy="420624"/>
-          </a:xfrm>
-          <a:prstGeom prst="rect">
-            <a:avLst/>
-          </a:prstGeom>
-          <a:solidFill>
-            <a:srgbClr val="0D3D14"/>
-          </a:solidFill>
-          <a:ln>
-            <a:noFill/>
-          </a:ln>
-          <a:effectLst/>
-        </p:spPr>
-        <p:style>
-          <a:lnRef idx="1">
-            <a:schemeClr val="accent1"/>
-          </a:lnRef>
-          <a:fillRef idx="3">
-            <a:schemeClr val="accent1"/>
-          </a:fillRef>
-          <a:effectRef idx="2">
-            <a:schemeClr val="accent1"/>
-          </a:effectRef>
-          <a:fontRef idx="minor">
-            <a:schemeClr val="lt1"/>
-          </a:fontRef>
-        </p:style>
-        <p:txBody>
-          <a:bodyPr rtlCol="0" anchor="ctr"/>
-          <a:lstStyle/>
-          <a:p>
-            <a:pPr algn="ctr"/>
-          </a:p>
-        </p:txBody>
-      </p:sp>
-      <p:sp>
-        <p:nvSpPr>
-          <p:cNvPr id="15" name="TextBox 14"/>
-          <p:cNvSpPr txBox="1"/>
-          <p:nvPr/>
-        </p:nvSpPr>
-        <p:spPr>
-          <a:xfrm>
-            <a:off x="4270248" y="1600200"/>
-            <a:ext cx="3657600" cy="420624"/>
+          <p:cNvPr id="76" name="TextBox 75"/>
+          <p:cNvSpPr txBox="1"/>
+          <p:nvPr/>
+        </p:nvSpPr>
+        <p:spPr>
+          <a:xfrm>
+            <a:off x="9418320" y="3493008"/>
+            <a:ext cx="2331720" cy="685800"/>
           </a:xfrm>
           <a:prstGeom prst="rect">
             <a:avLst/>
@@ -21237,27 +25073,27 @@
               </a:spcAft>
             </a:pPr>
             <a:r>
-              <a:rPr sz="1500" b="1" i="0">
-                <a:solidFill>
-                  <a:srgbClr val="FFFFFF"/>
-                </a:solidFill>
-                <a:latin typeface="Tahoma"/>
-              </a:rPr>
-              <a:t>WITH ESM</a:t>
-            </a:r>
-          </a:p>
-        </p:txBody>
-      </p:sp>
-      <p:sp>
-        <p:nvSpPr>
-          <p:cNvPr id="16" name="TextBox 15"/>
-          <p:cNvSpPr txBox="1"/>
-          <p:nvPr/>
-        </p:nvSpPr>
-        <p:spPr>
-          <a:xfrm>
-            <a:off x="4407408" y="2148840"/>
-            <a:ext cx="3383280" cy="2743200"/>
+              <a:rPr sz="3000" b="1" i="0">
+                <a:solidFill>
+                  <a:srgbClr val="C0561E"/>
+                </a:solidFill>
+                <a:latin typeface="Tahoma"/>
+              </a:rPr>
+              <a:t>1</a:t>
+            </a:r>
+          </a:p>
+        </p:txBody>
+      </p:sp>
+      <p:sp>
+        <p:nvSpPr>
+          <p:cNvPr id="77" name="TextBox 76"/>
+          <p:cNvSpPr txBox="1"/>
+          <p:nvPr/>
+        </p:nvSpPr>
+        <p:spPr>
+          <a:xfrm>
+            <a:off x="9509760" y="4206240"/>
+            <a:ext cx="2148839" cy="411480"/>
           </a:xfrm>
           <a:prstGeom prst="rect">
             <a:avLst/>
@@ -21270,202 +25106,6 @@
           </a:bodyPr>
           <a:lstStyle/>
           <a:p>
-            <a:pPr algn="l">
-              <a:spcBef>
-                <a:spcPts val="0"/>
-              </a:spcBef>
-              <a:spcAft>
-                <a:spcPts val="600"/>
-              </a:spcAft>
-            </a:pPr>
-            <a:r>
-              <a:rPr sz="1250" b="0" i="0">
-                <a:solidFill>
-                  <a:srgbClr val="2C5F2D"/>
-                </a:solidFill>
-                <a:latin typeface="Tahoma"/>
-              </a:rPr>
-              <a:t>•  Scan kanban to open/close orders; RH/LH pairs open together</a:t>
-            </a:r>
-          </a:p>
-          <a:p>
-            <a:pPr algn="l">
-              <a:spcBef>
-                <a:spcPts val="0"/>
-              </a:spcBef>
-              <a:spcAft>
-                <a:spcPts val="600"/>
-              </a:spcAft>
-            </a:pPr>
-            <a:r>
-              <a:rPr sz="1250" b="0" i="0">
-                <a:solidFill>
-                  <a:srgbClr val="2C5F2D"/>
-                </a:solidFill>
-                <a:latin typeface="Tahoma"/>
-              </a:rPr>
-              <a:t>•  Live OEE during the shift, locked after approval</a:t>
-            </a:r>
-          </a:p>
-          <a:p>
-            <a:pPr algn="l">
-              <a:spcBef>
-                <a:spcPts val="0"/>
-              </a:spcBef>
-              <a:spcAft>
-                <a:spcPts val="600"/>
-              </a:spcAft>
-            </a:pPr>
-            <a:r>
-              <a:rPr sz="1250" b="0" i="0">
-                <a:solidFill>
-                  <a:srgbClr val="2C5F2D"/>
-                </a:solidFill>
-                <a:latin typeface="Tahoma"/>
-              </a:rPr>
-              <a:t>•  Problem report &amp; scrap report (FM-PD2-002) built from the shift data</a:t>
-            </a:r>
-          </a:p>
-          <a:p>
-            <a:pPr algn="l">
-              <a:spcBef>
-                <a:spcPts val="0"/>
-              </a:spcBef>
-              <a:spcAft>
-                <a:spcPts val="600"/>
-              </a:spcAft>
-            </a:pPr>
-            <a:r>
-              <a:rPr sz="1250" b="0" i="0">
-                <a:solidFill>
-                  <a:srgbClr val="2C5F2D"/>
-                </a:solidFill>
-                <a:latin typeface="Tahoma"/>
-              </a:rPr>
-              <a:t>•  Morning meeting agenda generated automatically</a:t>
-            </a:r>
-          </a:p>
-        </p:txBody>
-      </p:sp>
-      <p:sp>
-        <p:nvSpPr>
-          <p:cNvPr id="17" name="Rounded Rectangle 16"/>
-          <p:cNvSpPr/>
-          <p:nvPr/>
-        </p:nvSpPr>
-        <p:spPr>
-          <a:xfrm>
-            <a:off x="8083296" y="1600200"/>
-            <a:ext cx="3657600" cy="3383280"/>
-          </a:xfrm>
-          <a:prstGeom prst="roundRect">
-            <a:avLst/>
-          </a:prstGeom>
-          <a:solidFill>
-            <a:srgbClr val="FFFFFF"/>
-          </a:solidFill>
-          <a:ln w="9525">
-            <a:solidFill>
-              <a:srgbClr val="D8E4D0"/>
-            </a:solidFill>
-          </a:ln>
-          <a:effectLst/>
-          <a:effectLst>
-            <a:outerShdw blurRad="50000" dist="20000" dir="5400000" rotWithShape="0">
-              <a:srgbClr val="8A99AD">
-                <a:alpha val="38000"/>
-              </a:srgbClr>
-            </a:outerShdw>
-          </a:effectLst>
-        </p:spPr>
-        <p:style>
-          <a:lnRef idx="1">
-            <a:schemeClr val="accent1"/>
-          </a:lnRef>
-          <a:fillRef idx="3">
-            <a:schemeClr val="accent1"/>
-          </a:fillRef>
-          <a:effectRef idx="2">
-            <a:schemeClr val="accent1"/>
-          </a:effectRef>
-          <a:fontRef idx="minor">
-            <a:schemeClr val="lt1"/>
-          </a:fontRef>
-        </p:style>
-        <p:txBody>
-          <a:bodyPr rtlCol="0" anchor="ctr"/>
-          <a:lstStyle/>
-          <a:p>
-            <a:pPr algn="ctr"/>
-          </a:p>
-        </p:txBody>
-      </p:sp>
-      <p:sp>
-        <p:nvSpPr>
-          <p:cNvPr id="18" name="Rectangle 17"/>
-          <p:cNvSpPr/>
-          <p:nvPr/>
-        </p:nvSpPr>
-        <p:spPr>
-          <a:xfrm>
-            <a:off x="8083296" y="1600200"/>
-            <a:ext cx="3657600" cy="420624"/>
-          </a:xfrm>
-          <a:prstGeom prst="rect">
-            <a:avLst/>
-          </a:prstGeom>
-          <a:solidFill>
-            <a:srgbClr val="C0561E"/>
-          </a:solidFill>
-          <a:ln>
-            <a:noFill/>
-          </a:ln>
-          <a:effectLst/>
-        </p:spPr>
-        <p:style>
-          <a:lnRef idx="1">
-            <a:schemeClr val="accent1"/>
-          </a:lnRef>
-          <a:fillRef idx="3">
-            <a:schemeClr val="accent1"/>
-          </a:fillRef>
-          <a:effectRef idx="2">
-            <a:schemeClr val="accent1"/>
-          </a:effectRef>
-          <a:fontRef idx="minor">
-            <a:schemeClr val="lt1"/>
-          </a:fontRef>
-        </p:style>
-        <p:txBody>
-          <a:bodyPr rtlCol="0" anchor="ctr"/>
-          <a:lstStyle/>
-          <a:p>
-            <a:pPr algn="ctr"/>
-          </a:p>
-        </p:txBody>
-      </p:sp>
-      <p:sp>
-        <p:nvSpPr>
-          <p:cNvPr id="19" name="TextBox 18"/>
-          <p:cNvSpPr txBox="1"/>
-          <p:nvPr/>
-        </p:nvSpPr>
-        <p:spPr>
-          <a:xfrm>
-            <a:off x="8083296" y="1600200"/>
-            <a:ext cx="3657600" cy="420624"/>
-          </a:xfrm>
-          <a:prstGeom prst="rect">
-            <a:avLst/>
-          </a:prstGeom>
-          <a:noFill/>
-        </p:spPr>
-        <p:txBody>
-          <a:bodyPr wrap="square" anchor="ctr" lIns="27432" rIns="27432" tIns="9144" bIns="9144">
-            <a:spAutoFit/>
-          </a:bodyPr>
-          <a:lstStyle/>
-          <a:p>
             <a:pPr algn="ctr">
               <a:spcBef>
                 <a:spcPts val="0"/>
@@ -21475,27 +25115,27 @@
               </a:spcAft>
             </a:pPr>
             <a:r>
-              <a:rPr sz="1500" b="1" i="0">
-                <a:solidFill>
-                  <a:srgbClr val="FFFFFF"/>
-                </a:solidFill>
-                <a:latin typeface="Tahoma"/>
-              </a:rPr>
-              <a:t>WHAT WE CUT</a:t>
-            </a:r>
-          </a:p>
-        </p:txBody>
-      </p:sp>
-      <p:sp>
-        <p:nvSpPr>
-          <p:cNvPr id="20" name="TextBox 19"/>
-          <p:cNvSpPr txBox="1"/>
-          <p:nvPr/>
-        </p:nvSpPr>
-        <p:spPr>
-          <a:xfrm>
-            <a:off x="8220456" y="2148840"/>
-            <a:ext cx="3383280" cy="2743200"/>
+              <a:rPr sz="1250" b="1" i="0">
+                <a:solidFill>
+                  <a:srgbClr val="0D3D14"/>
+                </a:solidFill>
+                <a:latin typeface="Tahoma"/>
+              </a:rPr>
+              <a:t>PM plans overdue today</a:t>
+            </a:r>
+          </a:p>
+        </p:txBody>
+      </p:sp>
+      <p:sp>
+        <p:nvSpPr>
+          <p:cNvPr id="78" name="TextBox 77"/>
+          <p:cNvSpPr txBox="1"/>
+          <p:nvPr/>
+        </p:nvSpPr>
+        <p:spPr>
+          <a:xfrm>
+            <a:off x="9509760" y="4572000"/>
+            <a:ext cx="2148839" cy="365760"/>
           </a:xfrm>
           <a:prstGeom prst="rect">
             <a:avLst/>
@@ -21508,150 +25148,7 @@
           </a:bodyPr>
           <a:lstStyle/>
           <a:p>
-            <a:pPr algn="l">
-              <a:spcBef>
-                <a:spcPts val="0"/>
-              </a:spcBef>
-              <a:spcAft>
-                <a:spcPts val="600"/>
-              </a:spcAft>
-            </a:pPr>
-            <a:r>
-              <a:rPr sz="1250" b="0" i="0">
-                <a:solidFill>
-                  <a:srgbClr val="2C5F2D"/>
-                </a:solidFill>
-                <a:latin typeface="Tahoma"/>
-              </a:rPr>
-              <a:t>•  Re-typing the same data into 3 forms</a:t>
-            </a:r>
-          </a:p>
-          <a:p>
-            <a:pPr algn="l">
-              <a:spcBef>
-                <a:spcPts val="0"/>
-              </a:spcBef>
-              <a:spcAft>
-                <a:spcPts val="600"/>
-              </a:spcAft>
-            </a:pPr>
-            <a:r>
-              <a:rPr sz="1250" b="0" i="0">
-                <a:solidFill>
-                  <a:srgbClr val="2C5F2D"/>
-                </a:solidFill>
-                <a:latin typeface="Tahoma"/>
-              </a:rPr>
-              <a:t>•  Meeting slide preparation</a:t>
-            </a:r>
-          </a:p>
-          <a:p>
-            <a:pPr algn="l">
-              <a:spcBef>
-                <a:spcPts val="0"/>
-              </a:spcBef>
-              <a:spcAft>
-                <a:spcPts val="600"/>
-              </a:spcAft>
-            </a:pPr>
-            <a:r>
-              <a:rPr sz="1250" b="0" i="0">
-                <a:solidFill>
-                  <a:srgbClr val="2C5F2D"/>
-                </a:solidFill>
-                <a:latin typeface="Tahoma"/>
-              </a:rPr>
-              <a:t>•  Daily LPA planning by hand (fills a whole quarter)</a:t>
-            </a:r>
-          </a:p>
-          <a:p>
-            <a:pPr algn="l">
-              <a:spcBef>
-                <a:spcPts val="0"/>
-              </a:spcBef>
-              <a:spcAft>
-                <a:spcPts val="600"/>
-              </a:spcAft>
-            </a:pPr>
-            <a:r>
-              <a:rPr sz="1250" b="0" i="0">
-                <a:solidFill>
-                  <a:srgbClr val="2C5F2D"/>
-                </a:solidFill>
-                <a:latin typeface="Tahoma"/>
-              </a:rPr>
-              <a:t>•  Arguing which OEE number is right</a:t>
-            </a:r>
-          </a:p>
-        </p:txBody>
-      </p:sp>
-      <p:sp>
-        <p:nvSpPr>
-          <p:cNvPr id="21" name="Rectangle 20"/>
-          <p:cNvSpPr/>
-          <p:nvPr/>
-        </p:nvSpPr>
-        <p:spPr>
-          <a:xfrm>
-            <a:off x="457200" y="5102352"/>
-            <a:ext cx="11283696" cy="566928"/>
-          </a:xfrm>
-          <a:prstGeom prst="rect">
-            <a:avLst/>
-          </a:prstGeom>
-          <a:solidFill>
-            <a:srgbClr val="ECF1E9"/>
-          </a:solidFill>
-          <a:ln>
-            <a:noFill/>
-          </a:ln>
-          <a:effectLst/>
-        </p:spPr>
-        <p:style>
-          <a:lnRef idx="1">
-            <a:schemeClr val="accent1"/>
-          </a:lnRef>
-          <a:fillRef idx="3">
-            <a:schemeClr val="accent1"/>
-          </a:fillRef>
-          <a:effectRef idx="2">
-            <a:schemeClr val="accent1"/>
-          </a:effectRef>
-          <a:fontRef idx="minor">
-            <a:schemeClr val="lt1"/>
-          </a:fontRef>
-        </p:style>
-        <p:txBody>
-          <a:bodyPr rtlCol="0" anchor="ctr"/>
-          <a:lstStyle/>
-          <a:p>
-            <a:pPr algn="ctr"/>
-          </a:p>
-        </p:txBody>
-      </p:sp>
-      <p:sp>
-        <p:nvSpPr>
-          <p:cNvPr id="22" name="TextBox 21"/>
-          <p:cNvSpPr txBox="1"/>
-          <p:nvPr/>
-        </p:nvSpPr>
-        <p:spPr>
-          <a:xfrm>
-            <a:off x="594360" y="5102352"/>
-            <a:ext cx="11064240" cy="566928"/>
-          </a:xfrm>
-          <a:prstGeom prst="rect">
-            <a:avLst/>
-          </a:prstGeom>
-          <a:noFill/>
-        </p:spPr>
-        <p:txBody>
-          <a:bodyPr wrap="square" anchor="ctr" lIns="27432" rIns="27432" tIns="9144" bIns="9144">
-            <a:spAutoFit/>
-          </a:bodyPr>
-          <a:lstStyle/>
-          <a:p>
-            <a:pPr algn="l">
+            <a:pPr algn="ctr">
               <a:spcBef>
                 <a:spcPts val="0"/>
               </a:spcBef>
@@ -21660,108 +25157,13 @@
               </a:spcAft>
             </a:pPr>
             <a:r>
-              <a:rPr sz="1250" b="1" i="0">
-                <a:solidFill>
-                  <a:srgbClr val="0D3D14"/>
-                </a:solidFill>
-                <a:latin typeface="Tahoma"/>
-              </a:rPr>
-              <a:t>Works with others:  </a:t>
-            </a:r>
-            <a:r>
-              <a:rPr sz="1200" b="0" i="0">
-                <a:solidFill>
-                  <a:srgbClr val="2C5F2D"/>
-                </a:solidFill>
-                <a:latin typeface="Tahoma"/>
-              </a:rPr>
-              <a:t>calls MTN by team · requests parts from Store · sends bins to QA · receives PM plan from MTN</a:t>
-            </a:r>
-          </a:p>
-        </p:txBody>
-      </p:sp>
-      <p:sp>
-        <p:nvSpPr>
-          <p:cNvPr id="23" name="Rounded Rectangle 22"/>
-          <p:cNvSpPr/>
-          <p:nvPr/>
-        </p:nvSpPr>
-        <p:spPr>
-          <a:xfrm>
-            <a:off x="457200" y="5760720"/>
-            <a:ext cx="11283696" cy="457200"/>
-          </a:xfrm>
-          <a:prstGeom prst="roundRect">
-            <a:avLst/>
-          </a:prstGeom>
-          <a:noFill/>
-          <a:ln w="19050">
-            <a:solidFill>
-              <a:srgbClr val="C88A00"/>
-            </a:solidFill>
-          </a:ln>
-          <a:effectLst/>
-        </p:spPr>
-        <p:style>
-          <a:lnRef idx="1">
-            <a:schemeClr val="accent1"/>
-          </a:lnRef>
-          <a:fillRef idx="3">
-            <a:schemeClr val="accent1"/>
-          </a:fillRef>
-          <a:effectRef idx="2">
-            <a:schemeClr val="accent1"/>
-          </a:effectRef>
-          <a:fontRef idx="minor">
-            <a:schemeClr val="lt1"/>
-          </a:fontRef>
-        </p:style>
-        <p:txBody>
-          <a:bodyPr rtlCol="0" anchor="ctr"/>
-          <a:lstStyle/>
-          <a:p>
-            <a:pPr algn="ctr"/>
-          </a:p>
-        </p:txBody>
-      </p:sp>
-      <p:sp>
-        <p:nvSpPr>
-          <p:cNvPr id="24" name="TextBox 23"/>
-          <p:cNvSpPr txBox="1"/>
-          <p:nvPr/>
-        </p:nvSpPr>
-        <p:spPr>
-          <a:xfrm>
-            <a:off x="594360" y="5760720"/>
-            <a:ext cx="11009376" cy="457200"/>
-          </a:xfrm>
-          <a:prstGeom prst="rect">
-            <a:avLst/>
-          </a:prstGeom>
-          <a:noFill/>
-        </p:spPr>
-        <p:txBody>
-          <a:bodyPr wrap="square" anchor="ctr" lIns="27432" rIns="27432" tIns="9144" bIns="9144">
-            <a:spAutoFit/>
-          </a:bodyPr>
-          <a:lstStyle/>
-          <a:p>
-            <a:pPr algn="l">
-              <a:spcBef>
-                <a:spcPts val="0"/>
-              </a:spcBef>
-              <a:spcAft>
-                <a:spcPts val="200"/>
-              </a:spcAft>
-            </a:pPr>
-            <a:r>
-              <a:rPr sz="1200" b="1" i="0">
-                <a:solidFill>
-                  <a:srgbClr val="C88A00"/>
-                </a:solidFill>
-                <a:latin typeface="Tahoma"/>
-              </a:rPr>
-              <a:t>Department to fill:  time per day BEFORE  ____ min   →   WITH ESM  ____ min   ·   forms per month removed  ____</a:t>
+              <a:rPr sz="1100" b="0" i="0">
+                <a:solidFill>
+                  <a:srgbClr val="555555"/>
+                </a:solidFill>
+                <a:latin typeface="Tahoma"/>
+              </a:rPr>
+              <a:t>of 147 active plans</a:t>
             </a:r>
           </a:p>
         </p:txBody>
@@ -21821,7 +25223,7 @@
                 </a:solidFill>
                 <a:latin typeface="Tahoma"/>
               </a:rPr>
-              <a:t>Maintenance (MTN)</a:t>
+              <a:t>Production (PD1–PD4)</a:t>
             </a:r>
           </a:p>
         </p:txBody>
@@ -21863,7 +25265,7 @@
                 </a:solidFill>
                 <a:latin typeface="Tahoma"/>
               </a:rPr>
-              <a:t>Repair orders that move by themselves</a:t>
+              <a:t>From hand-written forms to live OEE</a:t>
             </a:r>
           </a:p>
         </p:txBody>
@@ -22238,7 +25640,7 @@
                 </a:solidFill>
                 <a:latin typeface="Tahoma"/>
               </a:rPr>
-              <a:t>•  Paper repair form FM-MTN-006 passed by hand</a:t>
+              <a:t>•  Group leader hand-writes problem report, bin tag and scrap report (3 forms)</a:t>
             </a:r>
           </a:p>
           <a:p>
@@ -22257,7 +25659,7 @@
                 </a:solidFill>
                 <a:latin typeface="Tahoma"/>
               </a:rPr>
-              <a:t>•  Spare-part list in Excel, rank decided by hand</a:t>
+              <a:t>•  Morning meeting needs someone to make slides</a:t>
             </a:r>
           </a:p>
           <a:p>
@@ -22276,7 +25678,7 @@
                 </a:solidFill>
                 <a:latin typeface="Tahoma"/>
               </a:rPr>
-              <a:t>•  Monthly summary = add up printed forms</a:t>
+              <a:t>•  LPA plan and BBS on paper / Excel</a:t>
             </a:r>
           </a:p>
           <a:p>
@@ -22295,7 +25697,7 @@
                 </a:solidFill>
                 <a:latin typeface="Tahoma"/>
               </a:rPr>
-              <a:t>•  Every call reached all 13 technicians</a:t>
+              <a:t>•  OEE not known until month-end</a:t>
             </a:r>
           </a:p>
         </p:txBody>
@@ -22476,7 +25878,7 @@
                 </a:solidFill>
                 <a:latin typeface="Tahoma"/>
               </a:rPr>
-              <a:t>•  Scan machine QR → line, section, cost center filled in</a:t>
+              <a:t>•  Scan kanban to open/close orders; RH/LH pairs open together</a:t>
             </a:r>
           </a:p>
           <a:p>
@@ -22495,7 +25897,7 @@
                 </a:solidFill>
                 <a:latin typeface="Tahoma"/>
               </a:rPr>
-              <a:t>•  Repair can start at once; manager signs after (line does not wait)</a:t>
+              <a:t>•  Live OEE during the shift, locked after approval</a:t>
             </a:r>
           </a:p>
           <a:p>
@@ -22514,7 +25916,7 @@
                 </a:solidFill>
                 <a:latin typeface="Tahoma"/>
               </a:rPr>
-              <a:t>•  Response / repair-time clocks start automatically</a:t>
+              <a:t>•  Problem report &amp; scrap report (FM-PD2-002) built from the shift data</a:t>
             </a:r>
           </a:p>
           <a:p>
@@ -22533,7 +25935,7 @@
                 </a:solidFill>
                 <a:latin typeface="Tahoma"/>
               </a:rPr>
-              <a:t>•  Spare parts deducted in the MO, A/B/C rank automatic</a:t>
+              <a:t>•  Morning meeting agenda generated automatically</a:t>
             </a:r>
           </a:p>
         </p:txBody>
@@ -22714,7 +26116,7 @@
                 </a:solidFill>
                 <a:latin typeface="Tahoma"/>
               </a:rPr>
-              <a:t>•  Waiting for approval before repairing</a:t>
+              <a:t>•  Re-typing the same data into 3 forms</a:t>
             </a:r>
           </a:p>
           <a:p>
@@ -22733,7 +26135,7 @@
                 </a:solidFill>
                 <a:latin typeface="Tahoma"/>
               </a:rPr>
-              <a:t>•  Calls to the wrong team</a:t>
+              <a:t>•  Meeting slide preparation</a:t>
             </a:r>
           </a:p>
           <a:p>
@@ -22752,7 +26154,7 @@
                 </a:solidFill>
                 <a:latin typeface="Tahoma"/>
               </a:rPr>
-              <a:t>•  Building the monthly report by hand (Excel export, 3 sheets)</a:t>
+              <a:t>•  Daily LPA planning by hand (fills a whole quarter)</a:t>
             </a:r>
           </a:p>
           <a:p>
@@ -22771,7 +26173,7 @@
                 </a:solidFill>
                 <a:latin typeface="Tahoma"/>
               </a:rPr>
-              <a:t>•  Ranking spare parts by hand</a:t>
+              <a:t>•  Arguing which OEE number is right</a:t>
             </a:r>
           </a:p>
         </p:txBody>
@@ -22866,7 +26268,7 @@
                 </a:solidFill>
                 <a:latin typeface="Tahoma"/>
               </a:rPr>
-              <a:t>receives calls from Production · hands over to QA and the requester · sends PM plan to Production</a:t>
+              <a:t>calls MTN by team · requests parts from Store · sends bins to QA · receives PM plan from MTN</a:t>
             </a:r>
           </a:p>
         </p:txBody>
@@ -23012,7 +26414,7 @@
                 </a:solidFill>
                 <a:latin typeface="Tahoma"/>
               </a:rPr>
-              <a:t>JIG &amp; DIE Maintenance</a:t>
+              <a:t>Maintenance (MTN)</a:t>
             </a:r>
           </a:p>
         </p:txBody>
@@ -23054,7 +26456,7 @@
                 </a:solidFill>
                 <a:latin typeface="Tahoma"/>
               </a:rPr>
-              <a:t>Equipment records that answer 'where is it, what state?'</a:t>
+              <a:t>Repair orders that move by themselves</a:t>
             </a:r>
           </a:p>
         </p:txBody>
@@ -23182,7 +26584,7 @@
             <a:avLst/>
           </a:prstGeom>
           <a:solidFill>
-            <a:srgbClr val="C0561E"/>
+            <a:srgbClr val="2C5F2D"/>
           </a:solidFill>
           <a:ln>
             <a:noFill/>
@@ -23248,7 +26650,7 @@
                 </a:solidFill>
                 <a:latin typeface="Tahoma"/>
               </a:rPr>
-              <a:t>Not started</a:t>
+              <a:t>Live</a:t>
             </a:r>
           </a:p>
         </p:txBody>
@@ -23429,7 +26831,7 @@
                 </a:solidFill>
                 <a:latin typeface="Tahoma"/>
               </a:rPr>
-              <a:t>•  JIG repair form FM-JIG-008 on paper</a:t>
+              <a:t>•  Paper repair form FM-MTN-006 passed by hand</a:t>
             </a:r>
           </a:p>
           <a:p>
@@ -23448,7 +26850,7 @@
                 </a:solidFill>
                 <a:latin typeface="Tahoma"/>
               </a:rPr>
-              <a:t>•  Shim records not kept (customer request)</a:t>
+              <a:t>•  Spare-part list in Excel, rank decided by hand</a:t>
             </a:r>
           </a:p>
           <a:p>
@@ -23467,7 +26869,7 @@
                 </a:solidFill>
                 <a:latin typeface="Tahoma"/>
               </a:rPr>
-              <a:t>•  Die location and state known by memory</a:t>
+              <a:t>•  Monthly summary = add up printed forms</a:t>
             </a:r>
           </a:p>
           <a:p>
@@ -23486,7 +26888,7 @@
                 </a:solidFill>
                 <a:latin typeface="Tahoma"/>
               </a:rPr>
-              <a:t>•  JIG team was called to DIE jobs</a:t>
+              <a:t>•  Every call reached all 13 technicians</a:t>
             </a:r>
           </a:p>
         </p:txBody>
@@ -23667,7 +27069,7 @@
                 </a:solidFill>
                 <a:latin typeface="Tahoma"/>
               </a:rPr>
-              <a:t>•  Repair orders routed to the JIG or DIE team only</a:t>
+              <a:t>•  Scan machine QR → line, section, cost center filled in</a:t>
             </a:r>
           </a:p>
           <a:p>
@@ -23686,7 +27088,7 @@
                 </a:solidFill>
                 <a:latin typeface="Tahoma"/>
               </a:rPr>
-              <a:t>•  Die register + storage map with pins + live status</a:t>
+              <a:t>•  Repair can start at once; manager signs after (line does not wait)</a:t>
             </a:r>
           </a:p>
           <a:p>
@@ -23705,7 +27107,7 @@
                 </a:solidFill>
                 <a:latin typeface="Tahoma"/>
               </a:rPr>
-              <a:t>•  Open repair order turns the die red automatically</a:t>
+              <a:t>•  Response / repair-time clocks start automatically</a:t>
             </a:r>
           </a:p>
           <a:p>
@@ -23724,7 +27126,7 @@
                 </a:solidFill>
                 <a:latin typeface="Tahoma"/>
               </a:rPr>
-              <a:t>•  Fixture shim record per point (customer requirement)</a:t>
+              <a:t>•  Spare parts deducted in the MO, A/B/C rank automatic</a:t>
             </a:r>
           </a:p>
         </p:txBody>
@@ -23905,6 +27307,25 @@
                 </a:solidFill>
                 <a:latin typeface="Tahoma"/>
               </a:rPr>
+              <a:t>•  Waiting for approval before repairing</a:t>
+            </a:r>
+          </a:p>
+          <a:p>
+            <a:pPr algn="l">
+              <a:spcBef>
+                <a:spcPts val="0"/>
+              </a:spcBef>
+              <a:spcAft>
+                <a:spcPts val="600"/>
+              </a:spcAft>
+            </a:pPr>
+            <a:r>
+              <a:rPr sz="1250" b="0" i="0">
+                <a:solidFill>
+                  <a:srgbClr val="2C5F2D"/>
+                </a:solidFill>
+                <a:latin typeface="Tahoma"/>
+              </a:rPr>
               <a:t>•  Calls to the wrong team</a:t>
             </a:r>
           </a:p>
@@ -23924,7 +27345,7 @@
                 </a:solidFill>
                 <a:latin typeface="Tahoma"/>
               </a:rPr>
-              <a:t>•  Searching for dies on the floor</a:t>
+              <a:t>•  Building the monthly report by hand (Excel export, 3 sheets)</a:t>
             </a:r>
           </a:p>
           <a:p>
@@ -23943,7 +27364,7 @@
                 </a:solidFill>
                 <a:latin typeface="Tahoma"/>
               </a:rPr>
-              <a:t>•  Separate paper shim log</a:t>
+              <a:t>•  Ranking spare parts by hand</a:t>
             </a:r>
           </a:p>
         </p:txBody>
@@ -24038,7 +27459,7 @@
                 </a:solidFill>
                 <a:latin typeface="Tahoma"/>
               </a:rPr>
-              <a:t>receive calls from Production · report die / jig readiness back to Production</a:t>
+              <a:t>receives calls from Production · hands over to QA and the requester · sends PM plan to Production</a:t>
             </a:r>
           </a:p>
         </p:txBody>
@@ -24184,7 +27605,7 @@
                 </a:solidFill>
                 <a:latin typeface="Tahoma"/>
               </a:rPr>
-              <a:t>Store</a:t>
+              <a:t>JIG &amp; DIE Maintenance</a:t>
             </a:r>
           </a:p>
         </p:txBody>
@@ -24226,7 +27647,7 @@
                 </a:solidFill>
                 <a:latin typeface="Tahoma"/>
               </a:rPr>
-              <a:t>From reading the LINE chat to a pull board</a:t>
+              <a:t>Equipment records that answer 'where is it, what state?'</a:t>
             </a:r>
           </a:p>
         </p:txBody>
@@ -24354,7 +27775,7 @@
             <a:avLst/>
           </a:prstGeom>
           <a:solidFill>
-            <a:srgbClr val="C88A00"/>
+            <a:srgbClr val="C0561E"/>
           </a:solidFill>
           <a:ln>
             <a:noFill/>
@@ -24420,7 +27841,7 @@
                 </a:solidFill>
                 <a:latin typeface="Tahoma"/>
               </a:rPr>
-              <a:t>Partly live</a:t>
+              <a:t>Not started</a:t>
             </a:r>
           </a:p>
         </p:txBody>
@@ -24601,7 +28022,7 @@
                 </a:solidFill>
                 <a:latin typeface="Tahoma"/>
               </a:rPr>
-              <a:t>•  Requests read from the LINE group chat</a:t>
+              <a:t>•  JIG repair form FM-JIG-008 on paper</a:t>
             </a:r>
           </a:p>
           <a:p>
@@ -24620,7 +28041,7 @@
                 </a:solidFill>
                 <a:latin typeface="Tahoma"/>
               </a:rPr>
-              <a:t>•  "First to ask gets served" — no rounds, no phases</a:t>
+              <a:t>•  Shim records not kept (customer request)</a:t>
             </a:r>
           </a:p>
           <a:p>
@@ -24639,7 +28060,7 @@
                 </a:solidFill>
                 <a:latin typeface="Tahoma"/>
               </a:rPr>
-              <a:t>•  Child-part demand calculated by hand</a:t>
+              <a:t>•  Die location and state known by memory</a:t>
             </a:r>
           </a:p>
           <a:p>
@@ -24658,7 +28079,7 @@
                 </a:solidFill>
                 <a:latin typeface="Tahoma"/>
               </a:rPr>
-              <a:t>•  Stock adjusted without approval</a:t>
+              <a:t>•  JIG team was called to DIE jobs</a:t>
             </a:r>
           </a:p>
         </p:txBody>
@@ -24839,7 +28260,7 @@
                 </a:solidFill>
                 <a:latin typeface="Tahoma"/>
               </a:rPr>
-              <a:t>•  Store board: WIP calls, child parts, purchasing, raw material, FG receipts</a:t>
+              <a:t>•  Repair orders routed to the JIG or DIE team only</a:t>
             </a:r>
           </a:p>
           <a:p>
@@ -24858,7 +28279,7 @@
                 </a:solidFill>
                 <a:latin typeface="Tahoma"/>
               </a:rPr>
-              <a:t>•  Closing an FG order explodes the BOM into requests automatically</a:t>
+              <a:t>•  Die register + storage map with pins + live status</a:t>
             </a:r>
           </a:p>
           <a:p>
@@ -24877,7 +28298,7 @@
                 </a:solidFill>
                 <a:latin typeface="Tahoma"/>
               </a:rPr>
-              <a:t>•  Pick scan blocks the wrong part; delivery-point scan</a:t>
+              <a:t>•  Open repair order turns the die red automatically</a:t>
             </a:r>
           </a:p>
           <a:p>
@@ -24896,7 +28317,7 @@
                 </a:solidFill>
                 <a:latin typeface="Tahoma"/>
               </a:rPr>
-              <a:t>•  Goods counted before they enter stock</a:t>
+              <a:t>•  Fixture shim record per point (customer requirement)</a:t>
             </a:r>
           </a:p>
         </p:txBody>
@@ -25077,7 +28498,7 @@
                 </a:solidFill>
                 <a:latin typeface="Tahoma"/>
               </a:rPr>
-              <a:t>•  Reading chat to know who needs what</a:t>
+              <a:t>•  Calls to the wrong team</a:t>
             </a:r>
           </a:p>
           <a:p>
@@ -25096,7 +28517,7 @@
                 </a:solidFill>
                 <a:latin typeface="Tahoma"/>
               </a:rPr>
-              <a:t>•  Calculating child-part demand</a:t>
+              <a:t>•  Searching for dies on the floor</a:t>
             </a:r>
           </a:p>
           <a:p>
@@ -25115,7 +28536,7 @@
                 </a:solidFill>
                 <a:latin typeface="Tahoma"/>
               </a:rPr>
-              <a:t>•  Wrong-part deliveries (blocked by scan)</a:t>
+              <a:t>•  Separate paper shim log</a:t>
             </a:r>
           </a:p>
         </p:txBody>
@@ -25210,7 +28631,7 @@
                 </a:solidFill>
                 <a:latin typeface="Tahoma"/>
               </a:rPr>
-              <a:t>receives WIP calls from Production · sends purchase needs to Purchasing · receives finished goods from lines</a:t>
+              <a:t>receive calls from Production · report die / jig readiness back to Production</a:t>
             </a:r>
           </a:p>
         </p:txBody>

--- a/docs/meetings/TSAT_ESM_Department_Roadshow_2026-10.pptx
+++ b/docs/meetings/TSAT_ESM_Department_Roadshow_2026-10.pptx
@@ -4948,7 +4948,7 @@
       <p:grpSpPr/>
       <p:pic>
         <p:nvPicPr>
-          <p:cNvPr id="2" name="Picture 1" descr="bg_title.png"/>
+          <p:cNvPr id="2" name="Picture 1" descr="logo_r01.png"/>
           <p:cNvPicPr>
             <a:picLocks noChangeAspect="1"/>
           </p:cNvPicPr>
@@ -4962,17 +4962,288 @@
         </p:blipFill>
         <p:spPr>
           <a:xfrm>
-            <a:off x="0" y="0"/>
-            <a:ext cx="12191695" cy="6858000"/>
+            <a:off x="5413248" y="256032"/>
+            <a:ext cx="1143000" cy="1143000"/>
           </a:xfrm>
           <a:prstGeom prst="rect">
             <a:avLst/>
           </a:prstGeom>
         </p:spPr>
       </p:pic>
+      <p:sp>
+        <p:nvSpPr>
+          <p:cNvPr id="3" name="TextBox 2"/>
+          <p:cNvSpPr txBox="1"/>
+          <p:nvPr/>
+        </p:nvSpPr>
+        <p:spPr>
+          <a:xfrm>
+            <a:off x="548640" y="1517904"/>
+            <a:ext cx="11091672" cy="640080"/>
+          </a:xfrm>
+          <a:prstGeom prst="rect">
+            <a:avLst/>
+          </a:prstGeom>
+          <a:noFill/>
+        </p:spPr>
+        <p:txBody>
+          <a:bodyPr wrap="square" anchor="ctr" lIns="27432" rIns="27432" tIns="9144" bIns="9144">
+            <a:spAutoFit/>
+          </a:bodyPr>
+          <a:lstStyle/>
+          <a:p>
+            <a:pPr algn="ctr">
+              <a:spcBef>
+                <a:spcPts val="0"/>
+              </a:spcBef>
+              <a:spcAft>
+                <a:spcPts val="200"/>
+              </a:spcAft>
+            </a:pPr>
+            <a:r>
+              <a:rPr sz="4000" b="1" i="0">
+                <a:solidFill>
+                  <a:srgbClr val="068734"/>
+                </a:solidFill>
+                <a:latin typeface="Tahoma"/>
+              </a:rPr>
+              <a:t>ESM Department Roadshow</a:t>
+            </a:r>
+          </a:p>
+        </p:txBody>
+      </p:sp>
+      <p:sp>
+        <p:nvSpPr>
+          <p:cNvPr id="4" name="TextBox 3"/>
+          <p:cNvSpPr txBox="1"/>
+          <p:nvPr/>
+        </p:nvSpPr>
+        <p:spPr>
+          <a:xfrm>
+            <a:off x="548640" y="2194560"/>
+            <a:ext cx="11091672" cy="329184"/>
+          </a:xfrm>
+          <a:prstGeom prst="rect">
+            <a:avLst/>
+          </a:prstGeom>
+          <a:noFill/>
+        </p:spPr>
+        <p:txBody>
+          <a:bodyPr wrap="square" anchor="ctr" lIns="27432" rIns="27432" tIns="9144" bIns="9144">
+            <a:spAutoFit/>
+          </a:bodyPr>
+          <a:lstStyle/>
+          <a:p>
+            <a:pPr algn="ctr">
+              <a:spcBef>
+                <a:spcPts val="0"/>
+              </a:spcBef>
+              <a:spcAft>
+                <a:spcPts val="200"/>
+              </a:spcAft>
+            </a:pPr>
+            <a:r>
+              <a:rPr sz="1800" b="1" i="0">
+                <a:solidFill>
+                  <a:srgbClr val="D95323"/>
+                </a:solidFill>
+                <a:latin typeface="Tahoma"/>
+              </a:rPr>
+              <a:t>From paper to a connected shopfloor</a:t>
+            </a:r>
+          </a:p>
+        </p:txBody>
+      </p:sp>
+      <p:sp>
+        <p:nvSpPr>
+          <p:cNvPr id="5" name="TextBox 4"/>
+          <p:cNvSpPr txBox="1"/>
+          <p:nvPr/>
+        </p:nvSpPr>
+        <p:spPr>
+          <a:xfrm>
+            <a:off x="1828800" y="2670048"/>
+            <a:ext cx="8531352" cy="868680"/>
+          </a:xfrm>
+          <a:prstGeom prst="rect">
+            <a:avLst/>
+          </a:prstGeom>
+          <a:noFill/>
+        </p:spPr>
+        <p:txBody>
+          <a:bodyPr wrap="square" anchor="t" lIns="27432" rIns="27432" tIns="9144" bIns="9144">
+            <a:spAutoFit/>
+          </a:bodyPr>
+          <a:lstStyle/>
+          <a:p>
+            <a:pPr algn="ctr">
+              <a:spcBef>
+                <a:spcPts val="0"/>
+              </a:spcBef>
+              <a:spcAft>
+                <a:spcPts val="400"/>
+              </a:spcAft>
+            </a:pPr>
+            <a:r>
+              <a:rPr sz="1600" b="0" i="0">
+                <a:solidFill>
+                  <a:srgbClr val="068734"/>
+                </a:solidFill>
+                <a:latin typeface="Tahoma"/>
+              </a:rPr>
+              <a:t>Department roadshow · each department presents its own floor</a:t>
+            </a:r>
+          </a:p>
+          <a:p>
+            <a:pPr algn="ctr">
+              <a:spcBef>
+                <a:spcPts val="0"/>
+              </a:spcBef>
+              <a:spcAft>
+                <a:spcPts val="400"/>
+              </a:spcAft>
+            </a:pPr>
+            <a:r>
+              <a:rPr sz="1600" b="0" i="0">
+                <a:solidFill>
+                  <a:srgbClr val="068734"/>
+                </a:solidFill>
+                <a:latin typeface="Tahoma"/>
+              </a:rPr>
+              <a:t>TSAT · Thai Summit Group · October 2026</a:t>
+            </a:r>
+          </a:p>
+        </p:txBody>
+      </p:sp>
+      <p:sp>
+        <p:nvSpPr>
+          <p:cNvPr id="6" name="TextBox 5"/>
+          <p:cNvSpPr txBox="1"/>
+          <p:nvPr/>
+        </p:nvSpPr>
+        <p:spPr>
+          <a:xfrm>
+            <a:off x="3200400" y="3959352"/>
+            <a:ext cx="5788152" cy="365760"/>
+          </a:xfrm>
+          <a:prstGeom prst="rect">
+            <a:avLst/>
+          </a:prstGeom>
+          <a:noFill/>
+        </p:spPr>
+        <p:txBody>
+          <a:bodyPr wrap="square" anchor="t" lIns="27432" rIns="27432" tIns="9144" bIns="9144">
+            <a:spAutoFit/>
+          </a:bodyPr>
+          <a:lstStyle/>
+          <a:p>
+            <a:pPr algn="ctr">
+              <a:spcBef>
+                <a:spcPts val="0"/>
+              </a:spcBef>
+              <a:spcAft>
+                <a:spcPts val="200"/>
+              </a:spcAft>
+            </a:pPr>
+            <a:r>
+              <a:rPr sz="1800" b="1" i="1">
+                <a:solidFill>
+                  <a:srgbClr val="068734"/>
+                </a:solidFill>
+                <a:latin typeface="Tahoma"/>
+              </a:rPr>
+              <a:t>My Quality Declaration</a:t>
+            </a:r>
+          </a:p>
+        </p:txBody>
+      </p:sp>
+      <p:sp>
+        <p:nvSpPr>
+          <p:cNvPr id="7" name="TextBox 6"/>
+          <p:cNvSpPr txBox="1"/>
+          <p:nvPr/>
+        </p:nvSpPr>
+        <p:spPr>
+          <a:xfrm>
+            <a:off x="1920240" y="4434840"/>
+            <a:ext cx="8348472" cy="365760"/>
+          </a:xfrm>
+          <a:prstGeom prst="rect">
+            <a:avLst/>
+          </a:prstGeom>
+          <a:noFill/>
+        </p:spPr>
+        <p:txBody>
+          <a:bodyPr wrap="square" anchor="t" lIns="27432" rIns="27432" tIns="9144" bIns="9144">
+            <a:spAutoFit/>
+          </a:bodyPr>
+          <a:lstStyle/>
+          <a:p>
+            <a:pPr algn="ctr">
+              <a:spcBef>
+                <a:spcPts val="0"/>
+              </a:spcBef>
+              <a:spcAft>
+                <a:spcPts val="200"/>
+              </a:spcAft>
+            </a:pPr>
+            <a:r>
+              <a:rPr sz="1700" b="0" i="0">
+                <a:solidFill>
+                  <a:srgbClr val="068734"/>
+                </a:solidFill>
+                <a:latin typeface="Tahoma"/>
+              </a:rPr>
+              <a:t>“I will not accept, produce and deliver non-quality work”</a:t>
+            </a:r>
+          </a:p>
+        </p:txBody>
+      </p:sp>
+      <p:sp>
+        <p:nvSpPr>
+          <p:cNvPr id="8" name="TextBox 7"/>
+          <p:cNvSpPr txBox="1"/>
+          <p:nvPr/>
+        </p:nvSpPr>
+        <p:spPr>
+          <a:xfrm>
+            <a:off x="1920240" y="4846320"/>
+            <a:ext cx="8348472" cy="365760"/>
+          </a:xfrm>
+          <a:prstGeom prst="rect">
+            <a:avLst/>
+          </a:prstGeom>
+          <a:noFill/>
+        </p:spPr>
+        <p:txBody>
+          <a:bodyPr wrap="square" anchor="t" lIns="27432" rIns="27432" tIns="9144" bIns="9144">
+            <a:spAutoFit/>
+          </a:bodyPr>
+          <a:lstStyle/>
+          <a:p>
+            <a:pPr algn="ctr">
+              <a:spcBef>
+                <a:spcPts val="0"/>
+              </a:spcBef>
+              <a:spcAft>
+                <a:spcPts val="200"/>
+              </a:spcAft>
+            </a:pPr>
+            <a:r>
+              <a:rPr sz="1700" b="0" i="0">
+                <a:solidFill>
+                  <a:srgbClr val="068734"/>
+                </a:solidFill>
+                <a:latin typeface="Tahoma"/>
+              </a:rPr>
+              <a:t>“ผมจะไม่รับ, ไม่ทำและไม่ส่งมอบงานที่ไม่มีคุณภาพ”</a:t>
+            </a:r>
+          </a:p>
+        </p:txBody>
+      </p:sp>
       <p:pic>
         <p:nvPicPr>
-          <p:cNvPr id="3" name="Picture 2" descr="logo_big.png"/>
+          <p:cNvPr id="9" name="Picture 8" descr="title_a.jpg"/>
           <p:cNvPicPr>
             <a:picLocks noChangeAspect="1"/>
           </p:cNvPicPr>
@@ -4980,230 +5251,96 @@
         </p:nvPicPr>
         <p:blipFill>
           <a:blip r:embed="rId3"/>
+          <a:srcRect l="118" r="118"/>
           <a:stretch>
             <a:fillRect/>
           </a:stretch>
         </p:blipFill>
         <p:spPr>
           <a:xfrm>
-            <a:off x="5486400" y="502920"/>
-            <a:ext cx="1481328" cy="1554480"/>
+            <a:off x="4434840" y="5577840"/>
+            <a:ext cx="1920240" cy="1161288"/>
           </a:xfrm>
           <a:prstGeom prst="rect">
             <a:avLst/>
           </a:prstGeom>
         </p:spPr>
       </p:pic>
-      <p:sp>
-        <p:nvSpPr>
-          <p:cNvPr id="4" name="TextBox 3"/>
-          <p:cNvSpPr txBox="1"/>
-          <p:nvPr/>
-        </p:nvSpPr>
-        <p:spPr>
-          <a:xfrm>
-            <a:off x="914400" y="2514600"/>
-            <a:ext cx="10332720" cy="1005840"/>
-          </a:xfrm>
-          <a:prstGeom prst="rect">
-            <a:avLst/>
-          </a:prstGeom>
-          <a:noFill/>
-        </p:spPr>
-        <p:txBody>
-          <a:bodyPr wrap="square" anchor="t" lIns="27432" rIns="27432" tIns="9144" bIns="9144">
-            <a:spAutoFit/>
-          </a:bodyPr>
-          <a:lstStyle/>
-          <a:p>
-            <a:pPr algn="l">
-              <a:spcBef>
-                <a:spcPts val="0"/>
-              </a:spcBef>
-              <a:spcAft>
-                <a:spcPts val="200"/>
-              </a:spcAft>
-            </a:pPr>
-            <a:r>
-              <a:rPr sz="4400" b="1" i="0">
-                <a:solidFill>
-                  <a:srgbClr val="FFFFFF"/>
-                </a:solidFill>
-                <a:latin typeface="Tahoma"/>
-              </a:rPr>
-              <a:t>ESM Department Roadshow</a:t>
-            </a:r>
-          </a:p>
-        </p:txBody>
-      </p:sp>
-      <p:sp>
-        <p:nvSpPr>
-          <p:cNvPr id="5" name="TextBox 4"/>
-          <p:cNvSpPr txBox="1"/>
-          <p:nvPr/>
-        </p:nvSpPr>
-        <p:spPr>
-          <a:xfrm>
-            <a:off x="914400" y="3566160"/>
-            <a:ext cx="10332720" cy="640080"/>
-          </a:xfrm>
-          <a:prstGeom prst="rect">
-            <a:avLst/>
-          </a:prstGeom>
-          <a:noFill/>
-        </p:spPr>
-        <p:txBody>
-          <a:bodyPr wrap="square" anchor="t" lIns="27432" rIns="27432" tIns="9144" bIns="9144">
-            <a:spAutoFit/>
-          </a:bodyPr>
-          <a:lstStyle/>
-          <a:p>
-            <a:pPr algn="l">
-              <a:spcBef>
-                <a:spcPts val="0"/>
-              </a:spcBef>
-              <a:spcAft>
-                <a:spcPts val="200"/>
-              </a:spcAft>
-            </a:pPr>
-            <a:r>
-              <a:rPr sz="2400" b="1" i="0">
-                <a:solidFill>
-                  <a:srgbClr val="EBD9B0"/>
-                </a:solidFill>
-                <a:latin typeface="Tahoma"/>
-              </a:rPr>
-              <a:t>From paper to a connected shopfloor</a:t>
-            </a:r>
-          </a:p>
-        </p:txBody>
-      </p:sp>
-      <p:sp>
-        <p:nvSpPr>
-          <p:cNvPr id="6" name="TextBox 5"/>
-          <p:cNvSpPr txBox="1"/>
-          <p:nvPr/>
-        </p:nvSpPr>
-        <p:spPr>
-          <a:xfrm>
-            <a:off x="914400" y="4526280"/>
-            <a:ext cx="10332720" cy="457200"/>
-          </a:xfrm>
-          <a:prstGeom prst="rect">
-            <a:avLst/>
-          </a:prstGeom>
-          <a:noFill/>
-        </p:spPr>
-        <p:txBody>
-          <a:bodyPr wrap="square" anchor="t" lIns="27432" rIns="27432" tIns="9144" bIns="9144">
-            <a:spAutoFit/>
-          </a:bodyPr>
-          <a:lstStyle/>
-          <a:p>
-            <a:pPr algn="l">
-              <a:spcBef>
-                <a:spcPts val="0"/>
-              </a:spcBef>
-              <a:spcAft>
-                <a:spcPts val="200"/>
-              </a:spcAft>
-            </a:pPr>
-            <a:r>
-              <a:rPr sz="1600" b="0" i="0">
-                <a:solidFill>
-                  <a:srgbClr val="FFFFFF"/>
-                </a:solidFill>
-                <a:latin typeface="Tahoma"/>
-              </a:rPr>
-              <a:t>Department roadshow · each department presents its own floor</a:t>
-            </a:r>
-          </a:p>
-        </p:txBody>
-      </p:sp>
-      <p:sp>
-        <p:nvSpPr>
-          <p:cNvPr id="7" name="TextBox 6"/>
-          <p:cNvSpPr txBox="1"/>
-          <p:nvPr/>
-        </p:nvSpPr>
-        <p:spPr>
-          <a:xfrm>
-            <a:off x="914400" y="4892040"/>
-            <a:ext cx="10332720" cy="457200"/>
-          </a:xfrm>
-          <a:prstGeom prst="rect">
-            <a:avLst/>
-          </a:prstGeom>
-          <a:noFill/>
-        </p:spPr>
-        <p:txBody>
-          <a:bodyPr wrap="square" anchor="t" lIns="27432" rIns="27432" tIns="9144" bIns="9144">
-            <a:spAutoFit/>
-          </a:bodyPr>
-          <a:lstStyle/>
-          <a:p>
-            <a:pPr algn="l">
-              <a:spcBef>
-                <a:spcPts val="0"/>
-              </a:spcBef>
-              <a:spcAft>
-                <a:spcPts val="200"/>
-              </a:spcAft>
-            </a:pPr>
-            <a:r>
-              <a:rPr sz="1400" b="0" i="0">
-                <a:solidFill>
-                  <a:srgbClr val="CFE0C8"/>
-                </a:solidFill>
-                <a:latin typeface="Tahoma"/>
-              </a:rPr>
-              <a:t>TSAT · Thai Summit Group · October 2026</a:t>
-            </a:r>
-          </a:p>
-        </p:txBody>
-      </p:sp>
-      <p:sp>
-        <p:nvSpPr>
-          <p:cNvPr id="8" name="TextBox 7"/>
-          <p:cNvSpPr txBox="1"/>
-          <p:nvPr/>
-        </p:nvSpPr>
-        <p:spPr>
-          <a:xfrm>
-            <a:off x="914400" y="5532120"/>
-            <a:ext cx="10332720" cy="548640"/>
-          </a:xfrm>
-          <a:prstGeom prst="rect">
-            <a:avLst/>
-          </a:prstGeom>
-          <a:noFill/>
-        </p:spPr>
-        <p:txBody>
-          <a:bodyPr wrap="square" anchor="t" lIns="27432" rIns="27432" tIns="9144" bIns="9144">
-            <a:spAutoFit/>
-          </a:bodyPr>
-          <a:lstStyle/>
-          <a:p>
-            <a:pPr algn="l">
-              <a:spcBef>
-                <a:spcPts val="0"/>
-              </a:spcBef>
-              <a:spcAft>
-                <a:spcPts val="200"/>
-              </a:spcAft>
-            </a:pPr>
-            <a:r>
-              <a:rPr sz="1500" b="1" i="1">
-                <a:solidFill>
-                  <a:srgbClr val="EBD9B0"/>
-                </a:solidFill>
-                <a:latin typeface="Tahoma"/>
-              </a:rPr>
-              <a:t>Zero defect is possible</a:t>
-            </a:r>
-          </a:p>
-        </p:txBody>
-      </p:sp>
+      <p:pic>
+        <p:nvPicPr>
+          <p:cNvPr id="10" name="Picture 9" descr="title_b.jpg"/>
+          <p:cNvPicPr>
+            <a:picLocks noChangeAspect="1"/>
+          </p:cNvPicPr>
+          <p:nvPr/>
+        </p:nvPicPr>
+        <p:blipFill>
+          <a:blip r:embed="rId4"/>
+          <a:srcRect l="4710" r="4710"/>
+          <a:stretch>
+            <a:fillRect/>
+          </a:stretch>
+        </p:blipFill>
+        <p:spPr>
+          <a:xfrm>
+            <a:off x="6473952" y="5577840"/>
+            <a:ext cx="1856231" cy="1152144"/>
+          </a:xfrm>
+          <a:prstGeom prst="rect">
+            <a:avLst/>
+          </a:prstGeom>
+        </p:spPr>
+      </p:pic>
+      <p:pic>
+        <p:nvPicPr>
+          <p:cNvPr id="11" name="Picture 10" descr="title_c.jpg"/>
+          <p:cNvPicPr>
+            <a:picLocks noChangeAspect="1"/>
+          </p:cNvPicPr>
+          <p:nvPr/>
+        </p:nvPicPr>
+        <p:blipFill>
+          <a:blip r:embed="rId5"/>
+          <a:srcRect l="15297" r="15297"/>
+          <a:stretch>
+            <a:fillRect/>
+          </a:stretch>
+        </p:blipFill>
+        <p:spPr>
+          <a:xfrm>
+            <a:off x="8439912" y="5550408"/>
+            <a:ext cx="1847088" cy="1188720"/>
+          </a:xfrm>
+          <a:prstGeom prst="rect">
+            <a:avLst/>
+          </a:prstGeom>
+        </p:spPr>
+      </p:pic>
+      <p:pic>
+        <p:nvPicPr>
+          <p:cNvPr id="12" name="Picture 11" descr="title_d.jpg"/>
+          <p:cNvPicPr>
+            <a:picLocks noChangeAspect="1"/>
+          </p:cNvPicPr>
+          <p:nvPr/>
+        </p:nvPicPr>
+        <p:blipFill>
+          <a:blip r:embed="rId6"/>
+          <a:srcRect t="8086" b="8086"/>
+          <a:stretch>
+            <a:fillRect/>
+          </a:stretch>
+        </p:blipFill>
+        <p:spPr>
+          <a:xfrm>
+            <a:off x="10405872" y="5577840"/>
+            <a:ext cx="1847088" cy="1161288"/>
+          </a:xfrm>
+          <a:prstGeom prst="rect">
+            <a:avLst/>
+          </a:prstGeom>
+        </p:spPr>
+      </p:pic>
     </p:spTree>
   </p:cSld>
   <p:clrMapOvr>
@@ -5230,16 +5367,16 @@
         </p:nvSpPr>
         <p:spPr>
           <a:xfrm>
-            <a:off x="457200" y="256032"/>
-            <a:ext cx="10881360" cy="868680"/>
-          </a:xfrm>
-          <a:prstGeom prst="rect">
-            <a:avLst/>
-          </a:prstGeom>
-          <a:noFill/>
-        </p:spPr>
-        <p:txBody>
-          <a:bodyPr wrap="square" anchor="ctr" lIns="27432" rIns="27432" tIns="9144" bIns="9144">
+            <a:off x="256032" y="256032"/>
+            <a:ext cx="11430000" cy="649224"/>
+          </a:xfrm>
+          <a:prstGeom prst="rect">
+            <a:avLst/>
+          </a:prstGeom>
+          <a:noFill/>
+        </p:spPr>
+        <p:txBody>
+          <a:bodyPr wrap="square" anchor="t" lIns="27432" rIns="27432" tIns="9144" bIns="9144">
             <a:spAutoFit/>
           </a:bodyPr>
           <a:lstStyle/>
@@ -5253,9 +5390,9 @@
               </a:spcAft>
             </a:pPr>
             <a:r>
-              <a:rPr sz="3400" b="1" i="0">
-                <a:solidFill>
-                  <a:srgbClr val="0D3D14"/>
+              <a:rPr sz="3600" b="1" i="0">
+                <a:solidFill>
+                  <a:srgbClr val="068734"/>
                 </a:solidFill>
                 <a:latin typeface="Tahoma"/>
               </a:rPr>
@@ -5272,8 +5409,8 @@
         </p:nvSpPr>
         <p:spPr>
           <a:xfrm>
-            <a:off x="502920" y="1024128"/>
-            <a:ext cx="10881360" cy="457200"/>
+            <a:off x="384048" y="960120"/>
+            <a:ext cx="11247120" cy="402336"/>
           </a:xfrm>
           <a:prstGeom prst="rect">
             <a:avLst/>
@@ -5295,9 +5432,9 @@
               </a:spcAft>
             </a:pPr>
             <a:r>
-              <a:rPr sz="1900" b="1" i="0">
-                <a:solidFill>
-                  <a:srgbClr val="2C5F2D"/>
+              <a:rPr sz="2000" b="1" i="0">
+                <a:solidFill>
+                  <a:srgbClr val="068734"/>
                 </a:solidFill>
                 <a:latin typeface="Tahoma"/>
               </a:rPr>
@@ -5308,7 +5445,7 @@
       </p:sp>
       <p:pic>
         <p:nvPicPr>
-          <p:cNvPr id="4" name="Picture 3" descr="logo_footer.png"/>
+          <p:cNvPr id="4" name="Picture 3" descr="logo_r01.png"/>
           <p:cNvPicPr>
             <a:picLocks noChangeAspect="1"/>
           </p:cNvPicPr>
@@ -5322,8 +5459,8 @@
         </p:blipFill>
         <p:spPr>
           <a:xfrm>
-            <a:off x="384048" y="6327648"/>
-            <a:ext cx="365760" cy="384048"/>
+            <a:off x="249631" y="6448348"/>
+            <a:ext cx="237744" cy="237744"/>
           </a:xfrm>
           <a:prstGeom prst="rect">
             <a:avLst/>
@@ -5338,8 +5475,8 @@
         </p:nvSpPr>
         <p:spPr>
           <a:xfrm>
-            <a:off x="786384" y="6327648"/>
-            <a:ext cx="4114800" cy="411480"/>
+            <a:off x="566928" y="6353251"/>
+            <a:ext cx="3246120" cy="400507"/>
           </a:xfrm>
           <a:prstGeom prst="rect">
             <a:avLst/>
@@ -5361,9 +5498,9 @@
               </a:spcAft>
             </a:pPr>
             <a:r>
-              <a:rPr sz="1300" b="1" i="0">
-                <a:solidFill>
-                  <a:srgbClr val="0D3D14"/>
+              <a:rPr sz="2000" b="1" i="0">
+                <a:solidFill>
+                  <a:srgbClr val="068734"/>
                 </a:solidFill>
                 <a:latin typeface="Tahoma"/>
               </a:rPr>
@@ -5380,16 +5517,16 @@
         </p:nvSpPr>
         <p:spPr>
           <a:xfrm>
-            <a:off x="11430000" y="6355080"/>
-            <a:ext cx="594360" cy="365760"/>
-          </a:xfrm>
-          <a:prstGeom prst="rect">
-            <a:avLst/>
-          </a:prstGeom>
-          <a:noFill/>
-        </p:spPr>
-        <p:txBody>
-          <a:bodyPr wrap="square" anchor="ctr" lIns="27432" rIns="27432" tIns="9144" bIns="9144">
+            <a:off x="9400032" y="6510528"/>
+            <a:ext cx="2514600" cy="292608"/>
+          </a:xfrm>
+          <a:prstGeom prst="rect">
+            <a:avLst/>
+          </a:prstGeom>
+          <a:noFill/>
+        </p:spPr>
+        <p:txBody>
+          <a:bodyPr wrap="square" anchor="t" lIns="27432" rIns="27432" tIns="9144" bIns="9144">
             <a:spAutoFit/>
           </a:bodyPr>
           <a:lstStyle/>
@@ -5405,7 +5542,7 @@
             <a:r>
               <a:rPr sz="1200" b="0" i="0">
                 <a:solidFill>
-                  <a:srgbClr val="555555"/>
+                  <a:srgbClr val="068734"/>
                 </a:solidFill>
                 <a:latin typeface="Tahoma"/>
               </a:rPr>
@@ -5519,14 +5656,14 @@
           </a:solidFill>
           <a:ln w="9525">
             <a:solidFill>
-              <a:srgbClr val="D8E4D0"/>
+              <a:srgbClr val="D9D9D9"/>
             </a:solidFill>
           </a:ln>
           <a:effectLst/>
           <a:effectLst>
             <a:outerShdw blurRad="50000" dist="20000" dir="5400000" rotWithShape="0">
               <a:srgbClr val="8A99AD">
-                <a:alpha val="38000"/>
+                <a:alpha val="30000"/>
               </a:srgbClr>
             </a:outerShdw>
           </a:effectLst>
@@ -5672,7 +5809,7 @@
             <a:r>
               <a:rPr sz="1250" b="0" i="0">
                 <a:solidFill>
-                  <a:srgbClr val="2C5F2D"/>
+                  <a:srgbClr val="068734"/>
                 </a:solidFill>
                 <a:latin typeface="Tahoma"/>
               </a:rPr>
@@ -5691,7 +5828,7 @@
             <a:r>
               <a:rPr sz="1250" b="0" i="0">
                 <a:solidFill>
-                  <a:srgbClr val="2C5F2D"/>
+                  <a:srgbClr val="068734"/>
                 </a:solidFill>
                 <a:latin typeface="Tahoma"/>
               </a:rPr>
@@ -5710,7 +5847,7 @@
             <a:r>
               <a:rPr sz="1250" b="0" i="0">
                 <a:solidFill>
-                  <a:srgbClr val="2C5F2D"/>
+                  <a:srgbClr val="068734"/>
                 </a:solidFill>
                 <a:latin typeface="Tahoma"/>
               </a:rPr>
@@ -5729,7 +5866,7 @@
             <a:r>
               <a:rPr sz="1250" b="0" i="0">
                 <a:solidFill>
-                  <a:srgbClr val="2C5F2D"/>
+                  <a:srgbClr val="068734"/>
                 </a:solidFill>
                 <a:latin typeface="Tahoma"/>
               </a:rPr>
@@ -5757,14 +5894,14 @@
           </a:solidFill>
           <a:ln w="9525">
             <a:solidFill>
-              <a:srgbClr val="D8E4D0"/>
+              <a:srgbClr val="D9D9D9"/>
             </a:solidFill>
           </a:ln>
           <a:effectLst/>
           <a:effectLst>
             <a:outerShdw blurRad="50000" dist="20000" dir="5400000" rotWithShape="0">
               <a:srgbClr val="8A99AD">
-                <a:alpha val="38000"/>
+                <a:alpha val="30000"/>
               </a:srgbClr>
             </a:outerShdw>
           </a:effectLst>
@@ -5910,7 +6047,7 @@
             <a:r>
               <a:rPr sz="1250" b="0" i="0">
                 <a:solidFill>
-                  <a:srgbClr val="2C5F2D"/>
+                  <a:srgbClr val="068734"/>
                 </a:solidFill>
                 <a:latin typeface="Tahoma"/>
               </a:rPr>
@@ -5929,7 +6066,7 @@
             <a:r>
               <a:rPr sz="1250" b="0" i="0">
                 <a:solidFill>
-                  <a:srgbClr val="2C5F2D"/>
+                  <a:srgbClr val="068734"/>
                 </a:solidFill>
                 <a:latin typeface="Tahoma"/>
               </a:rPr>
@@ -5948,7 +6085,7 @@
             <a:r>
               <a:rPr sz="1250" b="0" i="0">
                 <a:solidFill>
-                  <a:srgbClr val="2C5F2D"/>
+                  <a:srgbClr val="068734"/>
                 </a:solidFill>
                 <a:latin typeface="Tahoma"/>
               </a:rPr>
@@ -5967,7 +6104,7 @@
             <a:r>
               <a:rPr sz="1250" b="0" i="0">
                 <a:solidFill>
-                  <a:srgbClr val="2C5F2D"/>
+                  <a:srgbClr val="068734"/>
                 </a:solidFill>
                 <a:latin typeface="Tahoma"/>
               </a:rPr>
@@ -5995,14 +6132,14 @@
           </a:solidFill>
           <a:ln w="9525">
             <a:solidFill>
-              <a:srgbClr val="D8E4D0"/>
+              <a:srgbClr val="D9D9D9"/>
             </a:solidFill>
           </a:ln>
           <a:effectLst/>
           <a:effectLst>
             <a:outerShdw blurRad="50000" dist="20000" dir="5400000" rotWithShape="0">
               <a:srgbClr val="8A99AD">
-                <a:alpha val="38000"/>
+                <a:alpha val="30000"/>
               </a:srgbClr>
             </a:outerShdw>
           </a:effectLst>
@@ -6044,7 +6181,7 @@
             <a:avLst/>
           </a:prstGeom>
           <a:solidFill>
-            <a:srgbClr val="C0561E"/>
+            <a:srgbClr val="D95323"/>
           </a:solidFill>
           <a:ln>
             <a:noFill/>
@@ -6148,7 +6285,7 @@
             <a:r>
               <a:rPr sz="1250" b="0" i="0">
                 <a:solidFill>
-                  <a:srgbClr val="2C5F2D"/>
+                  <a:srgbClr val="068734"/>
                 </a:solidFill>
                 <a:latin typeface="Tahoma"/>
               </a:rPr>
@@ -6167,7 +6304,7 @@
             <a:r>
               <a:rPr sz="1250" b="0" i="0">
                 <a:solidFill>
-                  <a:srgbClr val="2C5F2D"/>
+                  <a:srgbClr val="068734"/>
                 </a:solidFill>
                 <a:latin typeface="Tahoma"/>
               </a:rPr>
@@ -6186,7 +6323,7 @@
             <a:r>
               <a:rPr sz="1250" b="0" i="0">
                 <a:solidFill>
-                  <a:srgbClr val="2C5F2D"/>
+                  <a:srgbClr val="068734"/>
                 </a:solidFill>
                 <a:latin typeface="Tahoma"/>
               </a:rPr>
@@ -6210,7 +6347,7 @@
             <a:avLst/>
           </a:prstGeom>
           <a:solidFill>
-            <a:srgbClr val="ECF1E9"/>
+            <a:srgbClr val="F2F2F2"/>
           </a:solidFill>
           <a:ln>
             <a:noFill/>
@@ -6281,7 +6418,7 @@
             <a:r>
               <a:rPr sz="1200" b="0" i="0">
                 <a:solidFill>
-                  <a:srgbClr val="2C5F2D"/>
+                  <a:srgbClr val="068734"/>
                 </a:solidFill>
                 <a:latin typeface="Tahoma"/>
               </a:rPr>
@@ -6402,16 +6539,16 @@
         </p:nvSpPr>
         <p:spPr>
           <a:xfrm>
-            <a:off x="457200" y="256032"/>
-            <a:ext cx="10881360" cy="868680"/>
-          </a:xfrm>
-          <a:prstGeom prst="rect">
-            <a:avLst/>
-          </a:prstGeom>
-          <a:noFill/>
-        </p:spPr>
-        <p:txBody>
-          <a:bodyPr wrap="square" anchor="ctr" lIns="27432" rIns="27432" tIns="9144" bIns="9144">
+            <a:off x="256032" y="256032"/>
+            <a:ext cx="11430000" cy="649224"/>
+          </a:xfrm>
+          <a:prstGeom prst="rect">
+            <a:avLst/>
+          </a:prstGeom>
+          <a:noFill/>
+        </p:spPr>
+        <p:txBody>
+          <a:bodyPr wrap="square" anchor="t" lIns="27432" rIns="27432" tIns="9144" bIns="9144">
             <a:spAutoFit/>
           </a:bodyPr>
           <a:lstStyle/>
@@ -6425,9 +6562,9 @@
               </a:spcAft>
             </a:pPr>
             <a:r>
-              <a:rPr sz="3400" b="1" i="0">
-                <a:solidFill>
-                  <a:srgbClr val="0D3D14"/>
+              <a:rPr sz="3600" b="1" i="0">
+                <a:solidFill>
+                  <a:srgbClr val="068734"/>
                 </a:solidFill>
                 <a:latin typeface="Tahoma"/>
               </a:rPr>
@@ -6444,8 +6581,8 @@
         </p:nvSpPr>
         <p:spPr>
           <a:xfrm>
-            <a:off x="502920" y="1024128"/>
-            <a:ext cx="10881360" cy="457200"/>
+            <a:off x="384048" y="960120"/>
+            <a:ext cx="11247120" cy="402336"/>
           </a:xfrm>
           <a:prstGeom prst="rect">
             <a:avLst/>
@@ -6467,9 +6604,9 @@
               </a:spcAft>
             </a:pPr>
             <a:r>
-              <a:rPr sz="1900" b="1" i="0">
-                <a:solidFill>
-                  <a:srgbClr val="2C5F2D"/>
+              <a:rPr sz="2000" b="1" i="0">
+                <a:solidFill>
+                  <a:srgbClr val="068734"/>
                 </a:solidFill>
                 <a:latin typeface="Tahoma"/>
               </a:rPr>
@@ -6480,7 +6617,7 @@
       </p:sp>
       <p:pic>
         <p:nvPicPr>
-          <p:cNvPr id="4" name="Picture 3" descr="logo_footer.png"/>
+          <p:cNvPr id="4" name="Picture 3" descr="logo_r01.png"/>
           <p:cNvPicPr>
             <a:picLocks noChangeAspect="1"/>
           </p:cNvPicPr>
@@ -6494,8 +6631,8 @@
         </p:blipFill>
         <p:spPr>
           <a:xfrm>
-            <a:off x="384048" y="6327648"/>
-            <a:ext cx="365760" cy="384048"/>
+            <a:off x="249631" y="6448348"/>
+            <a:ext cx="237744" cy="237744"/>
           </a:xfrm>
           <a:prstGeom prst="rect">
             <a:avLst/>
@@ -6510,8 +6647,8 @@
         </p:nvSpPr>
         <p:spPr>
           <a:xfrm>
-            <a:off x="786384" y="6327648"/>
-            <a:ext cx="4114800" cy="411480"/>
+            <a:off x="566928" y="6353251"/>
+            <a:ext cx="3246120" cy="400507"/>
           </a:xfrm>
           <a:prstGeom prst="rect">
             <a:avLst/>
@@ -6533,9 +6670,9 @@
               </a:spcAft>
             </a:pPr>
             <a:r>
-              <a:rPr sz="1300" b="1" i="0">
-                <a:solidFill>
-                  <a:srgbClr val="0D3D14"/>
+              <a:rPr sz="2000" b="1" i="0">
+                <a:solidFill>
+                  <a:srgbClr val="068734"/>
                 </a:solidFill>
                 <a:latin typeface="Tahoma"/>
               </a:rPr>
@@ -6552,16 +6689,16 @@
         </p:nvSpPr>
         <p:spPr>
           <a:xfrm>
-            <a:off x="11430000" y="6355080"/>
-            <a:ext cx="594360" cy="365760"/>
-          </a:xfrm>
-          <a:prstGeom prst="rect">
-            <a:avLst/>
-          </a:prstGeom>
-          <a:noFill/>
-        </p:spPr>
-        <p:txBody>
-          <a:bodyPr wrap="square" anchor="ctr" lIns="27432" rIns="27432" tIns="9144" bIns="9144">
+            <a:off x="9400032" y="6510528"/>
+            <a:ext cx="2514600" cy="292608"/>
+          </a:xfrm>
+          <a:prstGeom prst="rect">
+            <a:avLst/>
+          </a:prstGeom>
+          <a:noFill/>
+        </p:spPr>
+        <p:txBody>
+          <a:bodyPr wrap="square" anchor="t" lIns="27432" rIns="27432" tIns="9144" bIns="9144">
             <a:spAutoFit/>
           </a:bodyPr>
           <a:lstStyle/>
@@ -6577,7 +6714,7 @@
             <a:r>
               <a:rPr sz="1200" b="0" i="0">
                 <a:solidFill>
-                  <a:srgbClr val="555555"/>
+                  <a:srgbClr val="068734"/>
                 </a:solidFill>
                 <a:latin typeface="Tahoma"/>
               </a:rPr>
@@ -6691,14 +6828,14 @@
           </a:solidFill>
           <a:ln w="9525">
             <a:solidFill>
-              <a:srgbClr val="D8E4D0"/>
+              <a:srgbClr val="D9D9D9"/>
             </a:solidFill>
           </a:ln>
           <a:effectLst/>
           <a:effectLst>
             <a:outerShdw blurRad="50000" dist="20000" dir="5400000" rotWithShape="0">
               <a:srgbClr val="8A99AD">
-                <a:alpha val="38000"/>
+                <a:alpha val="30000"/>
               </a:srgbClr>
             </a:outerShdw>
           </a:effectLst>
@@ -6844,7 +6981,7 @@
             <a:r>
               <a:rPr sz="1250" b="0" i="0">
                 <a:solidFill>
-                  <a:srgbClr val="2C5F2D"/>
+                  <a:srgbClr val="068734"/>
                 </a:solidFill>
                 <a:latin typeface="Tahoma"/>
               </a:rPr>
@@ -6863,7 +7000,7 @@
             <a:r>
               <a:rPr sz="1250" b="0" i="0">
                 <a:solidFill>
-                  <a:srgbClr val="2C5F2D"/>
+                  <a:srgbClr val="068734"/>
                 </a:solidFill>
                 <a:latin typeface="Tahoma"/>
               </a:rPr>
@@ -6882,7 +7019,7 @@
             <a:r>
               <a:rPr sz="1250" b="0" i="0">
                 <a:solidFill>
-                  <a:srgbClr val="2C5F2D"/>
+                  <a:srgbClr val="068734"/>
                 </a:solidFill>
                 <a:latin typeface="Tahoma"/>
               </a:rPr>
@@ -6910,14 +7047,14 @@
           </a:solidFill>
           <a:ln w="9525">
             <a:solidFill>
-              <a:srgbClr val="D8E4D0"/>
+              <a:srgbClr val="D9D9D9"/>
             </a:solidFill>
           </a:ln>
           <a:effectLst/>
           <a:effectLst>
             <a:outerShdw blurRad="50000" dist="20000" dir="5400000" rotWithShape="0">
               <a:srgbClr val="8A99AD">
-                <a:alpha val="38000"/>
+                <a:alpha val="30000"/>
               </a:srgbClr>
             </a:outerShdw>
           </a:effectLst>
@@ -7063,7 +7200,7 @@
             <a:r>
               <a:rPr sz="1250" b="0" i="0">
                 <a:solidFill>
-                  <a:srgbClr val="2C5F2D"/>
+                  <a:srgbClr val="068734"/>
                 </a:solidFill>
                 <a:latin typeface="Tahoma"/>
               </a:rPr>
@@ -7082,7 +7219,7 @@
             <a:r>
               <a:rPr sz="1250" b="0" i="0">
                 <a:solidFill>
-                  <a:srgbClr val="2C5F2D"/>
+                  <a:srgbClr val="068734"/>
                 </a:solidFill>
                 <a:latin typeface="Tahoma"/>
               </a:rPr>
@@ -7101,7 +7238,7 @@
             <a:r>
               <a:rPr sz="1250" b="0" i="0">
                 <a:solidFill>
-                  <a:srgbClr val="2C5F2D"/>
+                  <a:srgbClr val="068734"/>
                 </a:solidFill>
                 <a:latin typeface="Tahoma"/>
               </a:rPr>
@@ -7120,7 +7257,7 @@
             <a:r>
               <a:rPr sz="1250" b="0" i="0">
                 <a:solidFill>
-                  <a:srgbClr val="2C5F2D"/>
+                  <a:srgbClr val="068734"/>
                 </a:solidFill>
                 <a:latin typeface="Tahoma"/>
               </a:rPr>
@@ -7148,14 +7285,14 @@
           </a:solidFill>
           <a:ln w="9525">
             <a:solidFill>
-              <a:srgbClr val="D8E4D0"/>
+              <a:srgbClr val="D9D9D9"/>
             </a:solidFill>
           </a:ln>
           <a:effectLst/>
           <a:effectLst>
             <a:outerShdw blurRad="50000" dist="20000" dir="5400000" rotWithShape="0">
               <a:srgbClr val="8A99AD">
-                <a:alpha val="38000"/>
+                <a:alpha val="30000"/>
               </a:srgbClr>
             </a:outerShdw>
           </a:effectLst>
@@ -7197,7 +7334,7 @@
             <a:avLst/>
           </a:prstGeom>
           <a:solidFill>
-            <a:srgbClr val="C0561E"/>
+            <a:srgbClr val="D95323"/>
           </a:solidFill>
           <a:ln>
             <a:noFill/>
@@ -7301,7 +7438,7 @@
             <a:r>
               <a:rPr sz="1250" b="0" i="0">
                 <a:solidFill>
-                  <a:srgbClr val="2C5F2D"/>
+                  <a:srgbClr val="068734"/>
                 </a:solidFill>
                 <a:latin typeface="Tahoma"/>
               </a:rPr>
@@ -7320,7 +7457,7 @@
             <a:r>
               <a:rPr sz="1250" b="0" i="0">
                 <a:solidFill>
-                  <a:srgbClr val="2C5F2D"/>
+                  <a:srgbClr val="068734"/>
                 </a:solidFill>
                 <a:latin typeface="Tahoma"/>
               </a:rPr>
@@ -7339,7 +7476,7 @@
             <a:r>
               <a:rPr sz="1250" b="0" i="0">
                 <a:solidFill>
-                  <a:srgbClr val="2C5F2D"/>
+                  <a:srgbClr val="068734"/>
                 </a:solidFill>
                 <a:latin typeface="Tahoma"/>
               </a:rPr>
@@ -7363,7 +7500,7 @@
             <a:avLst/>
           </a:prstGeom>
           <a:solidFill>
-            <a:srgbClr val="ECF1E9"/>
+            <a:srgbClr val="F2F2F2"/>
           </a:solidFill>
           <a:ln>
             <a:noFill/>
@@ -7434,7 +7571,7 @@
             <a:r>
               <a:rPr sz="1200" b="0" i="0">
                 <a:solidFill>
-                  <a:srgbClr val="2C5F2D"/>
+                  <a:srgbClr val="068734"/>
                 </a:solidFill>
                 <a:latin typeface="Tahoma"/>
               </a:rPr>
@@ -7555,16 +7692,16 @@
         </p:nvSpPr>
         <p:spPr>
           <a:xfrm>
-            <a:off x="457200" y="256032"/>
-            <a:ext cx="10881360" cy="868680"/>
-          </a:xfrm>
-          <a:prstGeom prst="rect">
-            <a:avLst/>
-          </a:prstGeom>
-          <a:noFill/>
-        </p:spPr>
-        <p:txBody>
-          <a:bodyPr wrap="square" anchor="ctr" lIns="27432" rIns="27432" tIns="9144" bIns="9144">
+            <a:off x="256032" y="256032"/>
+            <a:ext cx="11430000" cy="649224"/>
+          </a:xfrm>
+          <a:prstGeom prst="rect">
+            <a:avLst/>
+          </a:prstGeom>
+          <a:noFill/>
+        </p:spPr>
+        <p:txBody>
+          <a:bodyPr wrap="square" anchor="t" lIns="27432" rIns="27432" tIns="9144" bIns="9144">
             <a:spAutoFit/>
           </a:bodyPr>
           <a:lstStyle/>
@@ -7578,9 +7715,9 @@
               </a:spcAft>
             </a:pPr>
             <a:r>
-              <a:rPr sz="3400" b="1" i="0">
-                <a:solidFill>
-                  <a:srgbClr val="0D3D14"/>
+              <a:rPr sz="3600" b="1" i="0">
+                <a:solidFill>
+                  <a:srgbClr val="068734"/>
                 </a:solidFill>
                 <a:latin typeface="Tahoma"/>
               </a:rPr>
@@ -7597,8 +7734,8 @@
         </p:nvSpPr>
         <p:spPr>
           <a:xfrm>
-            <a:off x="502920" y="1024128"/>
-            <a:ext cx="10881360" cy="457200"/>
+            <a:off x="384048" y="960120"/>
+            <a:ext cx="11247120" cy="402336"/>
           </a:xfrm>
           <a:prstGeom prst="rect">
             <a:avLst/>
@@ -7620,9 +7757,9 @@
               </a:spcAft>
             </a:pPr>
             <a:r>
-              <a:rPr sz="1900" b="1" i="0">
-                <a:solidFill>
-                  <a:srgbClr val="2C5F2D"/>
+              <a:rPr sz="2000" b="1" i="0">
+                <a:solidFill>
+                  <a:srgbClr val="068734"/>
                 </a:solidFill>
                 <a:latin typeface="Tahoma"/>
               </a:rPr>
@@ -7633,7 +7770,7 @@
       </p:sp>
       <p:pic>
         <p:nvPicPr>
-          <p:cNvPr id="4" name="Picture 3" descr="logo_footer.png"/>
+          <p:cNvPr id="4" name="Picture 3" descr="logo_r01.png"/>
           <p:cNvPicPr>
             <a:picLocks noChangeAspect="1"/>
           </p:cNvPicPr>
@@ -7647,8 +7784,8 @@
         </p:blipFill>
         <p:spPr>
           <a:xfrm>
-            <a:off x="384048" y="6327648"/>
-            <a:ext cx="365760" cy="384048"/>
+            <a:off x="249631" y="6448348"/>
+            <a:ext cx="237744" cy="237744"/>
           </a:xfrm>
           <a:prstGeom prst="rect">
             <a:avLst/>
@@ -7663,8 +7800,8 @@
         </p:nvSpPr>
         <p:spPr>
           <a:xfrm>
-            <a:off x="786384" y="6327648"/>
-            <a:ext cx="4114800" cy="411480"/>
+            <a:off x="566928" y="6353251"/>
+            <a:ext cx="3246120" cy="400507"/>
           </a:xfrm>
           <a:prstGeom prst="rect">
             <a:avLst/>
@@ -7686,9 +7823,9 @@
               </a:spcAft>
             </a:pPr>
             <a:r>
-              <a:rPr sz="1300" b="1" i="0">
-                <a:solidFill>
-                  <a:srgbClr val="0D3D14"/>
+              <a:rPr sz="2000" b="1" i="0">
+                <a:solidFill>
+                  <a:srgbClr val="068734"/>
                 </a:solidFill>
                 <a:latin typeface="Tahoma"/>
               </a:rPr>
@@ -7705,16 +7842,16 @@
         </p:nvSpPr>
         <p:spPr>
           <a:xfrm>
-            <a:off x="11430000" y="6355080"/>
-            <a:ext cx="594360" cy="365760"/>
-          </a:xfrm>
-          <a:prstGeom prst="rect">
-            <a:avLst/>
-          </a:prstGeom>
-          <a:noFill/>
-        </p:spPr>
-        <p:txBody>
-          <a:bodyPr wrap="square" anchor="ctr" lIns="27432" rIns="27432" tIns="9144" bIns="9144">
+            <a:off x="9400032" y="6510528"/>
+            <a:ext cx="2514600" cy="292608"/>
+          </a:xfrm>
+          <a:prstGeom prst="rect">
+            <a:avLst/>
+          </a:prstGeom>
+          <a:noFill/>
+        </p:spPr>
+        <p:txBody>
+          <a:bodyPr wrap="square" anchor="t" lIns="27432" rIns="27432" tIns="9144" bIns="9144">
             <a:spAutoFit/>
           </a:bodyPr>
           <a:lstStyle/>
@@ -7730,7 +7867,7 @@
             <a:r>
               <a:rPr sz="1200" b="0" i="0">
                 <a:solidFill>
-                  <a:srgbClr val="555555"/>
+                  <a:srgbClr val="068734"/>
                 </a:solidFill>
                 <a:latin typeface="Tahoma"/>
               </a:rPr>
@@ -7844,14 +7981,14 @@
           </a:solidFill>
           <a:ln w="9525">
             <a:solidFill>
-              <a:srgbClr val="D8E4D0"/>
+              <a:srgbClr val="D9D9D9"/>
             </a:solidFill>
           </a:ln>
           <a:effectLst/>
           <a:effectLst>
             <a:outerShdw blurRad="50000" dist="20000" dir="5400000" rotWithShape="0">
               <a:srgbClr val="8A99AD">
-                <a:alpha val="38000"/>
+                <a:alpha val="30000"/>
               </a:srgbClr>
             </a:outerShdw>
           </a:effectLst>
@@ -7997,7 +8134,7 @@
             <a:r>
               <a:rPr sz="1250" b="0" i="0">
                 <a:solidFill>
-                  <a:srgbClr val="2C5F2D"/>
+                  <a:srgbClr val="068734"/>
                 </a:solidFill>
                 <a:latin typeface="Tahoma"/>
               </a:rPr>
@@ -8016,7 +8153,7 @@
             <a:r>
               <a:rPr sz="1250" b="0" i="0">
                 <a:solidFill>
-                  <a:srgbClr val="2C5F2D"/>
+                  <a:srgbClr val="068734"/>
                 </a:solidFill>
                 <a:latin typeface="Tahoma"/>
               </a:rPr>
@@ -8035,7 +8172,7 @@
             <a:r>
               <a:rPr sz="1250" b="0" i="0">
                 <a:solidFill>
-                  <a:srgbClr val="2C5F2D"/>
+                  <a:srgbClr val="068734"/>
                 </a:solidFill>
                 <a:latin typeface="Tahoma"/>
               </a:rPr>
@@ -8063,14 +8200,14 @@
           </a:solidFill>
           <a:ln w="9525">
             <a:solidFill>
-              <a:srgbClr val="D8E4D0"/>
+              <a:srgbClr val="D9D9D9"/>
             </a:solidFill>
           </a:ln>
           <a:effectLst/>
           <a:effectLst>
             <a:outerShdw blurRad="50000" dist="20000" dir="5400000" rotWithShape="0">
               <a:srgbClr val="8A99AD">
-                <a:alpha val="38000"/>
+                <a:alpha val="30000"/>
               </a:srgbClr>
             </a:outerShdw>
           </a:effectLst>
@@ -8216,7 +8353,7 @@
             <a:r>
               <a:rPr sz="1250" b="0" i="0">
                 <a:solidFill>
-                  <a:srgbClr val="2C5F2D"/>
+                  <a:srgbClr val="068734"/>
                 </a:solidFill>
                 <a:latin typeface="Tahoma"/>
               </a:rPr>
@@ -8235,7 +8372,7 @@
             <a:r>
               <a:rPr sz="1250" b="0" i="0">
                 <a:solidFill>
-                  <a:srgbClr val="2C5F2D"/>
+                  <a:srgbClr val="068734"/>
                 </a:solidFill>
                 <a:latin typeface="Tahoma"/>
               </a:rPr>
@@ -8254,7 +8391,7 @@
             <a:r>
               <a:rPr sz="1250" b="0" i="0">
                 <a:solidFill>
-                  <a:srgbClr val="2C5F2D"/>
+                  <a:srgbClr val="068734"/>
                 </a:solidFill>
                 <a:latin typeface="Tahoma"/>
               </a:rPr>
@@ -8273,7 +8410,7 @@
             <a:r>
               <a:rPr sz="1250" b="0" i="0">
                 <a:solidFill>
-                  <a:srgbClr val="2C5F2D"/>
+                  <a:srgbClr val="068734"/>
                 </a:solidFill>
                 <a:latin typeface="Tahoma"/>
               </a:rPr>
@@ -8301,14 +8438,14 @@
           </a:solidFill>
           <a:ln w="9525">
             <a:solidFill>
-              <a:srgbClr val="D8E4D0"/>
+              <a:srgbClr val="D9D9D9"/>
             </a:solidFill>
           </a:ln>
           <a:effectLst/>
           <a:effectLst>
             <a:outerShdw blurRad="50000" dist="20000" dir="5400000" rotWithShape="0">
               <a:srgbClr val="8A99AD">
-                <a:alpha val="38000"/>
+                <a:alpha val="30000"/>
               </a:srgbClr>
             </a:outerShdw>
           </a:effectLst>
@@ -8350,7 +8487,7 @@
             <a:avLst/>
           </a:prstGeom>
           <a:solidFill>
-            <a:srgbClr val="C0561E"/>
+            <a:srgbClr val="D95323"/>
           </a:solidFill>
           <a:ln>
             <a:noFill/>
@@ -8454,7 +8591,7 @@
             <a:r>
               <a:rPr sz="1250" b="0" i="0">
                 <a:solidFill>
-                  <a:srgbClr val="2C5F2D"/>
+                  <a:srgbClr val="068734"/>
                 </a:solidFill>
                 <a:latin typeface="Tahoma"/>
               </a:rPr>
@@ -8473,7 +8610,7 @@
             <a:r>
               <a:rPr sz="1250" b="0" i="0">
                 <a:solidFill>
-                  <a:srgbClr val="2C5F2D"/>
+                  <a:srgbClr val="068734"/>
                 </a:solidFill>
                 <a:latin typeface="Tahoma"/>
               </a:rPr>
@@ -8492,7 +8629,7 @@
             <a:r>
               <a:rPr sz="1250" b="0" i="0">
                 <a:solidFill>
-                  <a:srgbClr val="2C5F2D"/>
+                  <a:srgbClr val="068734"/>
                 </a:solidFill>
                 <a:latin typeface="Tahoma"/>
               </a:rPr>
@@ -8516,7 +8653,7 @@
             <a:avLst/>
           </a:prstGeom>
           <a:solidFill>
-            <a:srgbClr val="ECF1E9"/>
+            <a:srgbClr val="F2F2F2"/>
           </a:solidFill>
           <a:ln>
             <a:noFill/>
@@ -8587,7 +8724,7 @@
             <a:r>
               <a:rPr sz="1200" b="0" i="0">
                 <a:solidFill>
-                  <a:srgbClr val="2C5F2D"/>
+                  <a:srgbClr val="068734"/>
                 </a:solidFill>
                 <a:latin typeface="Tahoma"/>
               </a:rPr>
@@ -8708,16 +8845,16 @@
         </p:nvSpPr>
         <p:spPr>
           <a:xfrm>
-            <a:off x="457200" y="256032"/>
-            <a:ext cx="10881360" cy="868680"/>
-          </a:xfrm>
-          <a:prstGeom prst="rect">
-            <a:avLst/>
-          </a:prstGeom>
-          <a:noFill/>
-        </p:spPr>
-        <p:txBody>
-          <a:bodyPr wrap="square" anchor="ctr" lIns="27432" rIns="27432" tIns="9144" bIns="9144">
+            <a:off x="256032" y="256032"/>
+            <a:ext cx="11430000" cy="649224"/>
+          </a:xfrm>
+          <a:prstGeom prst="rect">
+            <a:avLst/>
+          </a:prstGeom>
+          <a:noFill/>
+        </p:spPr>
+        <p:txBody>
+          <a:bodyPr wrap="square" anchor="t" lIns="27432" rIns="27432" tIns="9144" bIns="9144">
             <a:spAutoFit/>
           </a:bodyPr>
           <a:lstStyle/>
@@ -8731,9 +8868,9 @@
               </a:spcAft>
             </a:pPr>
             <a:r>
-              <a:rPr sz="3400" b="1" i="0">
-                <a:solidFill>
-                  <a:srgbClr val="0D3D14"/>
+              <a:rPr sz="3600" b="1" i="0">
+                <a:solidFill>
+                  <a:srgbClr val="068734"/>
                 </a:solidFill>
                 <a:latin typeface="Tahoma"/>
               </a:rPr>
@@ -8750,8 +8887,8 @@
         </p:nvSpPr>
         <p:spPr>
           <a:xfrm>
-            <a:off x="502920" y="1024128"/>
-            <a:ext cx="10881360" cy="457200"/>
+            <a:off x="384048" y="960120"/>
+            <a:ext cx="11247120" cy="402336"/>
           </a:xfrm>
           <a:prstGeom prst="rect">
             <a:avLst/>
@@ -8773,9 +8910,9 @@
               </a:spcAft>
             </a:pPr>
             <a:r>
-              <a:rPr sz="1900" b="1" i="0">
-                <a:solidFill>
-                  <a:srgbClr val="2C5F2D"/>
+              <a:rPr sz="2000" b="1" i="0">
+                <a:solidFill>
+                  <a:srgbClr val="068734"/>
                 </a:solidFill>
                 <a:latin typeface="Tahoma"/>
               </a:rPr>
@@ -8786,7 +8923,7 @@
       </p:sp>
       <p:pic>
         <p:nvPicPr>
-          <p:cNvPr id="4" name="Picture 3" descr="logo_footer.png"/>
+          <p:cNvPr id="4" name="Picture 3" descr="logo_r01.png"/>
           <p:cNvPicPr>
             <a:picLocks noChangeAspect="1"/>
           </p:cNvPicPr>
@@ -8800,8 +8937,8 @@
         </p:blipFill>
         <p:spPr>
           <a:xfrm>
-            <a:off x="384048" y="6327648"/>
-            <a:ext cx="365760" cy="384048"/>
+            <a:off x="249631" y="6448348"/>
+            <a:ext cx="237744" cy="237744"/>
           </a:xfrm>
           <a:prstGeom prst="rect">
             <a:avLst/>
@@ -8816,8 +8953,8 @@
         </p:nvSpPr>
         <p:spPr>
           <a:xfrm>
-            <a:off x="786384" y="6327648"/>
-            <a:ext cx="4114800" cy="411480"/>
+            <a:off x="566928" y="6353251"/>
+            <a:ext cx="3246120" cy="400507"/>
           </a:xfrm>
           <a:prstGeom prst="rect">
             <a:avLst/>
@@ -8839,9 +8976,9 @@
               </a:spcAft>
             </a:pPr>
             <a:r>
-              <a:rPr sz="1300" b="1" i="0">
-                <a:solidFill>
-                  <a:srgbClr val="0D3D14"/>
+              <a:rPr sz="2000" b="1" i="0">
+                <a:solidFill>
+                  <a:srgbClr val="068734"/>
                 </a:solidFill>
                 <a:latin typeface="Tahoma"/>
               </a:rPr>
@@ -8858,16 +8995,16 @@
         </p:nvSpPr>
         <p:spPr>
           <a:xfrm>
-            <a:off x="11430000" y="6355080"/>
-            <a:ext cx="594360" cy="365760"/>
-          </a:xfrm>
-          <a:prstGeom prst="rect">
-            <a:avLst/>
-          </a:prstGeom>
-          <a:noFill/>
-        </p:spPr>
-        <p:txBody>
-          <a:bodyPr wrap="square" anchor="ctr" lIns="27432" rIns="27432" tIns="9144" bIns="9144">
+            <a:off x="9400032" y="6510528"/>
+            <a:ext cx="2514600" cy="292608"/>
+          </a:xfrm>
+          <a:prstGeom prst="rect">
+            <a:avLst/>
+          </a:prstGeom>
+          <a:noFill/>
+        </p:spPr>
+        <p:txBody>
+          <a:bodyPr wrap="square" anchor="t" lIns="27432" rIns="27432" tIns="9144" bIns="9144">
             <a:spAutoFit/>
           </a:bodyPr>
           <a:lstStyle/>
@@ -8883,7 +9020,7 @@
             <a:r>
               <a:rPr sz="1200" b="0" i="0">
                 <a:solidFill>
-                  <a:srgbClr val="555555"/>
+                  <a:srgbClr val="068734"/>
                 </a:solidFill>
                 <a:latin typeface="Tahoma"/>
               </a:rPr>
@@ -8907,7 +9044,7 @@
             <a:avLst/>
           </a:prstGeom>
           <a:solidFill>
-            <a:srgbClr val="C0561E"/>
+            <a:srgbClr val="D95323"/>
           </a:solidFill>
           <a:ln>
             <a:noFill/>
@@ -8997,14 +9134,14 @@
           </a:solidFill>
           <a:ln w="9525">
             <a:solidFill>
-              <a:srgbClr val="D8E4D0"/>
+              <a:srgbClr val="D9D9D9"/>
             </a:solidFill>
           </a:ln>
           <a:effectLst/>
           <a:effectLst>
             <a:outerShdw blurRad="50000" dist="20000" dir="5400000" rotWithShape="0">
               <a:srgbClr val="8A99AD">
-                <a:alpha val="38000"/>
+                <a:alpha val="30000"/>
               </a:srgbClr>
             </a:outerShdw>
           </a:effectLst>
@@ -9150,7 +9287,7 @@
             <a:r>
               <a:rPr sz="1250" b="0" i="0">
                 <a:solidFill>
-                  <a:srgbClr val="2C5F2D"/>
+                  <a:srgbClr val="068734"/>
                 </a:solidFill>
                 <a:latin typeface="Tahoma"/>
               </a:rPr>
@@ -9169,7 +9306,7 @@
             <a:r>
               <a:rPr sz="1250" b="0" i="0">
                 <a:solidFill>
-                  <a:srgbClr val="2C5F2D"/>
+                  <a:srgbClr val="068734"/>
                 </a:solidFill>
                 <a:latin typeface="Tahoma"/>
               </a:rPr>
@@ -9188,7 +9325,7 @@
             <a:r>
               <a:rPr sz="1250" b="0" i="0">
                 <a:solidFill>
-                  <a:srgbClr val="2C5F2D"/>
+                  <a:srgbClr val="068734"/>
                 </a:solidFill>
                 <a:latin typeface="Tahoma"/>
               </a:rPr>
@@ -9216,14 +9353,14 @@
           </a:solidFill>
           <a:ln w="9525">
             <a:solidFill>
-              <a:srgbClr val="D8E4D0"/>
+              <a:srgbClr val="D9D9D9"/>
             </a:solidFill>
           </a:ln>
           <a:effectLst/>
           <a:effectLst>
             <a:outerShdw blurRad="50000" dist="20000" dir="5400000" rotWithShape="0">
               <a:srgbClr val="8A99AD">
-                <a:alpha val="38000"/>
+                <a:alpha val="30000"/>
               </a:srgbClr>
             </a:outerShdw>
           </a:effectLst>
@@ -9369,7 +9506,7 @@
             <a:r>
               <a:rPr sz="1250" b="0" i="0">
                 <a:solidFill>
-                  <a:srgbClr val="2C5F2D"/>
+                  <a:srgbClr val="068734"/>
                 </a:solidFill>
                 <a:latin typeface="Tahoma"/>
               </a:rPr>
@@ -9388,7 +9525,7 @@
             <a:r>
               <a:rPr sz="1250" b="0" i="0">
                 <a:solidFill>
-                  <a:srgbClr val="2C5F2D"/>
+                  <a:srgbClr val="068734"/>
                 </a:solidFill>
                 <a:latin typeface="Tahoma"/>
               </a:rPr>
@@ -9407,7 +9544,7 @@
             <a:r>
               <a:rPr sz="1250" b="0" i="0">
                 <a:solidFill>
-                  <a:srgbClr val="2C5F2D"/>
+                  <a:srgbClr val="068734"/>
                 </a:solidFill>
                 <a:latin typeface="Tahoma"/>
               </a:rPr>
@@ -9426,7 +9563,7 @@
             <a:r>
               <a:rPr sz="1250" b="0" i="0">
                 <a:solidFill>
-                  <a:srgbClr val="2C5F2D"/>
+                  <a:srgbClr val="068734"/>
                 </a:solidFill>
                 <a:latin typeface="Tahoma"/>
               </a:rPr>
@@ -9454,14 +9591,14 @@
           </a:solidFill>
           <a:ln w="9525">
             <a:solidFill>
-              <a:srgbClr val="D8E4D0"/>
+              <a:srgbClr val="D9D9D9"/>
             </a:solidFill>
           </a:ln>
           <a:effectLst/>
           <a:effectLst>
             <a:outerShdw blurRad="50000" dist="20000" dir="5400000" rotWithShape="0">
               <a:srgbClr val="8A99AD">
-                <a:alpha val="38000"/>
+                <a:alpha val="30000"/>
               </a:srgbClr>
             </a:outerShdw>
           </a:effectLst>
@@ -9503,7 +9640,7 @@
             <a:avLst/>
           </a:prstGeom>
           <a:solidFill>
-            <a:srgbClr val="C0561E"/>
+            <a:srgbClr val="D95323"/>
           </a:solidFill>
           <a:ln>
             <a:noFill/>
@@ -9607,7 +9744,7 @@
             <a:r>
               <a:rPr sz="1250" b="0" i="0">
                 <a:solidFill>
-                  <a:srgbClr val="2C5F2D"/>
+                  <a:srgbClr val="068734"/>
                 </a:solidFill>
                 <a:latin typeface="Tahoma"/>
               </a:rPr>
@@ -9626,7 +9763,7 @@
             <a:r>
               <a:rPr sz="1250" b="0" i="0">
                 <a:solidFill>
-                  <a:srgbClr val="2C5F2D"/>
+                  <a:srgbClr val="068734"/>
                 </a:solidFill>
                 <a:latin typeface="Tahoma"/>
               </a:rPr>
@@ -9650,7 +9787,7 @@
             <a:avLst/>
           </a:prstGeom>
           <a:solidFill>
-            <a:srgbClr val="ECF1E9"/>
+            <a:srgbClr val="F2F2F2"/>
           </a:solidFill>
           <a:ln>
             <a:noFill/>
@@ -9721,7 +9858,7 @@
             <a:r>
               <a:rPr sz="1200" b="0" i="0">
                 <a:solidFill>
-                  <a:srgbClr val="2C5F2D"/>
+                  <a:srgbClr val="068734"/>
                 </a:solidFill>
                 <a:latin typeface="Tahoma"/>
               </a:rPr>
@@ -9842,16 +9979,16 @@
         </p:nvSpPr>
         <p:spPr>
           <a:xfrm>
-            <a:off x="457200" y="256032"/>
-            <a:ext cx="10881360" cy="868680"/>
-          </a:xfrm>
-          <a:prstGeom prst="rect">
-            <a:avLst/>
-          </a:prstGeom>
-          <a:noFill/>
-        </p:spPr>
-        <p:txBody>
-          <a:bodyPr wrap="square" anchor="ctr" lIns="27432" rIns="27432" tIns="9144" bIns="9144">
+            <a:off x="256032" y="256032"/>
+            <a:ext cx="11430000" cy="649224"/>
+          </a:xfrm>
+          <a:prstGeom prst="rect">
+            <a:avLst/>
+          </a:prstGeom>
+          <a:noFill/>
+        </p:spPr>
+        <p:txBody>
+          <a:bodyPr wrap="square" anchor="t" lIns="27432" rIns="27432" tIns="9144" bIns="9144">
             <a:spAutoFit/>
           </a:bodyPr>
           <a:lstStyle/>
@@ -9865,9 +10002,9 @@
               </a:spcAft>
             </a:pPr>
             <a:r>
-              <a:rPr sz="3400" b="1" i="0">
-                <a:solidFill>
-                  <a:srgbClr val="0D3D14"/>
+              <a:rPr sz="3600" b="1" i="0">
+                <a:solidFill>
+                  <a:srgbClr val="068734"/>
                 </a:solidFill>
                 <a:latin typeface="Tahoma"/>
               </a:rPr>
@@ -9884,8 +10021,8 @@
         </p:nvSpPr>
         <p:spPr>
           <a:xfrm>
-            <a:off x="502920" y="1024128"/>
-            <a:ext cx="10881360" cy="457200"/>
+            <a:off x="384048" y="960120"/>
+            <a:ext cx="11247120" cy="402336"/>
           </a:xfrm>
           <a:prstGeom prst="rect">
             <a:avLst/>
@@ -9907,9 +10044,9 @@
               </a:spcAft>
             </a:pPr>
             <a:r>
-              <a:rPr sz="1900" b="1" i="0">
-                <a:solidFill>
-                  <a:srgbClr val="2C5F2D"/>
+              <a:rPr sz="2000" b="1" i="0">
+                <a:solidFill>
+                  <a:srgbClr val="068734"/>
                 </a:solidFill>
                 <a:latin typeface="Tahoma"/>
               </a:rPr>
@@ -9920,7 +10057,7 @@
       </p:sp>
       <p:pic>
         <p:nvPicPr>
-          <p:cNvPr id="4" name="Picture 3" descr="logo_footer.png"/>
+          <p:cNvPr id="4" name="Picture 3" descr="logo_r01.png"/>
           <p:cNvPicPr>
             <a:picLocks noChangeAspect="1"/>
           </p:cNvPicPr>
@@ -9934,8 +10071,8 @@
         </p:blipFill>
         <p:spPr>
           <a:xfrm>
-            <a:off x="384048" y="6327648"/>
-            <a:ext cx="365760" cy="384048"/>
+            <a:off x="249631" y="6448348"/>
+            <a:ext cx="237744" cy="237744"/>
           </a:xfrm>
           <a:prstGeom prst="rect">
             <a:avLst/>
@@ -9950,8 +10087,8 @@
         </p:nvSpPr>
         <p:spPr>
           <a:xfrm>
-            <a:off x="786384" y="6327648"/>
-            <a:ext cx="4114800" cy="411480"/>
+            <a:off x="566928" y="6353251"/>
+            <a:ext cx="3246120" cy="400507"/>
           </a:xfrm>
           <a:prstGeom prst="rect">
             <a:avLst/>
@@ -9973,9 +10110,9 @@
               </a:spcAft>
             </a:pPr>
             <a:r>
-              <a:rPr sz="1300" b="1" i="0">
-                <a:solidFill>
-                  <a:srgbClr val="0D3D14"/>
+              <a:rPr sz="2000" b="1" i="0">
+                <a:solidFill>
+                  <a:srgbClr val="068734"/>
                 </a:solidFill>
                 <a:latin typeface="Tahoma"/>
               </a:rPr>
@@ -9992,16 +10129,16 @@
         </p:nvSpPr>
         <p:spPr>
           <a:xfrm>
-            <a:off x="11430000" y="6355080"/>
-            <a:ext cx="594360" cy="365760"/>
-          </a:xfrm>
-          <a:prstGeom prst="rect">
-            <a:avLst/>
-          </a:prstGeom>
-          <a:noFill/>
-        </p:spPr>
-        <p:txBody>
-          <a:bodyPr wrap="square" anchor="ctr" lIns="27432" rIns="27432" tIns="9144" bIns="9144">
+            <a:off x="9400032" y="6510528"/>
+            <a:ext cx="2514600" cy="292608"/>
+          </a:xfrm>
+          <a:prstGeom prst="rect">
+            <a:avLst/>
+          </a:prstGeom>
+          <a:noFill/>
+        </p:spPr>
+        <p:txBody>
+          <a:bodyPr wrap="square" anchor="t" lIns="27432" rIns="27432" tIns="9144" bIns="9144">
             <a:spAutoFit/>
           </a:bodyPr>
           <a:lstStyle/>
@@ -10017,7 +10154,7 @@
             <a:r>
               <a:rPr sz="1200" b="0" i="0">
                 <a:solidFill>
-                  <a:srgbClr val="555555"/>
+                  <a:srgbClr val="068734"/>
                 </a:solidFill>
                 <a:latin typeface="Tahoma"/>
               </a:rPr>
@@ -10131,14 +10268,14 @@
           </a:solidFill>
           <a:ln w="9525">
             <a:solidFill>
-              <a:srgbClr val="D8E4D0"/>
+              <a:srgbClr val="D9D9D9"/>
             </a:solidFill>
           </a:ln>
           <a:effectLst/>
           <a:effectLst>
             <a:outerShdw blurRad="50000" dist="20000" dir="5400000" rotWithShape="0">
               <a:srgbClr val="8A99AD">
-                <a:alpha val="38000"/>
+                <a:alpha val="30000"/>
               </a:srgbClr>
             </a:outerShdw>
           </a:effectLst>
@@ -10284,7 +10421,7 @@
             <a:r>
               <a:rPr sz="1250" b="0" i="0">
                 <a:solidFill>
-                  <a:srgbClr val="2C5F2D"/>
+                  <a:srgbClr val="068734"/>
                 </a:solidFill>
                 <a:latin typeface="Tahoma"/>
               </a:rPr>
@@ -10303,7 +10440,7 @@
             <a:r>
               <a:rPr sz="1250" b="0" i="0">
                 <a:solidFill>
-                  <a:srgbClr val="2C5F2D"/>
+                  <a:srgbClr val="068734"/>
                 </a:solidFill>
                 <a:latin typeface="Tahoma"/>
               </a:rPr>
@@ -10322,7 +10459,7 @@
             <a:r>
               <a:rPr sz="1250" b="0" i="0">
                 <a:solidFill>
-                  <a:srgbClr val="2C5F2D"/>
+                  <a:srgbClr val="068734"/>
                 </a:solidFill>
                 <a:latin typeface="Tahoma"/>
               </a:rPr>
@@ -10350,14 +10487,14 @@
           </a:solidFill>
           <a:ln w="9525">
             <a:solidFill>
-              <a:srgbClr val="D8E4D0"/>
+              <a:srgbClr val="D9D9D9"/>
             </a:solidFill>
           </a:ln>
           <a:effectLst/>
           <a:effectLst>
             <a:outerShdw blurRad="50000" dist="20000" dir="5400000" rotWithShape="0">
               <a:srgbClr val="8A99AD">
-                <a:alpha val="38000"/>
+                <a:alpha val="30000"/>
               </a:srgbClr>
             </a:outerShdw>
           </a:effectLst>
@@ -10503,7 +10640,7 @@
             <a:r>
               <a:rPr sz="1250" b="0" i="0">
                 <a:solidFill>
-                  <a:srgbClr val="2C5F2D"/>
+                  <a:srgbClr val="068734"/>
                 </a:solidFill>
                 <a:latin typeface="Tahoma"/>
               </a:rPr>
@@ -10522,7 +10659,7 @@
             <a:r>
               <a:rPr sz="1250" b="0" i="0">
                 <a:solidFill>
-                  <a:srgbClr val="2C5F2D"/>
+                  <a:srgbClr val="068734"/>
                 </a:solidFill>
                 <a:latin typeface="Tahoma"/>
               </a:rPr>
@@ -10541,7 +10678,7 @@
             <a:r>
               <a:rPr sz="1250" b="0" i="0">
                 <a:solidFill>
-                  <a:srgbClr val="2C5F2D"/>
+                  <a:srgbClr val="068734"/>
                 </a:solidFill>
                 <a:latin typeface="Tahoma"/>
               </a:rPr>
@@ -10560,7 +10697,7 @@
             <a:r>
               <a:rPr sz="1250" b="0" i="0">
                 <a:solidFill>
-                  <a:srgbClr val="2C5F2D"/>
+                  <a:srgbClr val="068734"/>
                 </a:solidFill>
                 <a:latin typeface="Tahoma"/>
               </a:rPr>
@@ -10588,14 +10725,14 @@
           </a:solidFill>
           <a:ln w="9525">
             <a:solidFill>
-              <a:srgbClr val="D8E4D0"/>
+              <a:srgbClr val="D9D9D9"/>
             </a:solidFill>
           </a:ln>
           <a:effectLst/>
           <a:effectLst>
             <a:outerShdw blurRad="50000" dist="20000" dir="5400000" rotWithShape="0">
               <a:srgbClr val="8A99AD">
-                <a:alpha val="38000"/>
+                <a:alpha val="30000"/>
               </a:srgbClr>
             </a:outerShdw>
           </a:effectLst>
@@ -10637,7 +10774,7 @@
             <a:avLst/>
           </a:prstGeom>
           <a:solidFill>
-            <a:srgbClr val="C0561E"/>
+            <a:srgbClr val="D95323"/>
           </a:solidFill>
           <a:ln>
             <a:noFill/>
@@ -10741,7 +10878,7 @@
             <a:r>
               <a:rPr sz="1250" b="0" i="0">
                 <a:solidFill>
-                  <a:srgbClr val="2C5F2D"/>
+                  <a:srgbClr val="068734"/>
                 </a:solidFill>
                 <a:latin typeface="Tahoma"/>
               </a:rPr>
@@ -10760,7 +10897,7 @@
             <a:r>
               <a:rPr sz="1250" b="0" i="0">
                 <a:solidFill>
-                  <a:srgbClr val="2C5F2D"/>
+                  <a:srgbClr val="068734"/>
                 </a:solidFill>
                 <a:latin typeface="Tahoma"/>
               </a:rPr>
@@ -10784,7 +10921,7 @@
             <a:avLst/>
           </a:prstGeom>
           <a:solidFill>
-            <a:srgbClr val="ECF1E9"/>
+            <a:srgbClr val="F2F2F2"/>
           </a:solidFill>
           <a:ln>
             <a:noFill/>
@@ -10855,7 +10992,7 @@
             <a:r>
               <a:rPr sz="1200" b="0" i="0">
                 <a:solidFill>
-                  <a:srgbClr val="2C5F2D"/>
+                  <a:srgbClr val="068734"/>
                 </a:solidFill>
                 <a:latin typeface="Tahoma"/>
               </a:rPr>
@@ -10976,16 +11113,16 @@
         </p:nvSpPr>
         <p:spPr>
           <a:xfrm>
-            <a:off x="457200" y="256032"/>
-            <a:ext cx="10881360" cy="868680"/>
-          </a:xfrm>
-          <a:prstGeom prst="rect">
-            <a:avLst/>
-          </a:prstGeom>
-          <a:noFill/>
-        </p:spPr>
-        <p:txBody>
-          <a:bodyPr wrap="square" anchor="ctr" lIns="27432" rIns="27432" tIns="9144" bIns="9144">
+            <a:off x="256032" y="256032"/>
+            <a:ext cx="11430000" cy="649224"/>
+          </a:xfrm>
+          <a:prstGeom prst="rect">
+            <a:avLst/>
+          </a:prstGeom>
+          <a:noFill/>
+        </p:spPr>
+        <p:txBody>
+          <a:bodyPr wrap="square" anchor="t" lIns="27432" rIns="27432" tIns="9144" bIns="9144">
             <a:spAutoFit/>
           </a:bodyPr>
           <a:lstStyle/>
@@ -10999,9 +11136,9 @@
               </a:spcAft>
             </a:pPr>
             <a:r>
-              <a:rPr sz="3400" b="1" i="0">
-                <a:solidFill>
-                  <a:srgbClr val="0D3D14"/>
+              <a:rPr sz="3600" b="1" i="0">
+                <a:solidFill>
+                  <a:srgbClr val="068734"/>
                 </a:solidFill>
                 <a:latin typeface="Tahoma"/>
               </a:rPr>
@@ -11018,8 +11155,8 @@
         </p:nvSpPr>
         <p:spPr>
           <a:xfrm>
-            <a:off x="502920" y="1024128"/>
-            <a:ext cx="10881360" cy="457200"/>
+            <a:off x="384048" y="960120"/>
+            <a:ext cx="11247120" cy="402336"/>
           </a:xfrm>
           <a:prstGeom prst="rect">
             <a:avLst/>
@@ -11041,9 +11178,9 @@
               </a:spcAft>
             </a:pPr>
             <a:r>
-              <a:rPr sz="1900" b="1" i="0">
-                <a:solidFill>
-                  <a:srgbClr val="2C5F2D"/>
+              <a:rPr sz="2000" b="1" i="0">
+                <a:solidFill>
+                  <a:srgbClr val="068734"/>
                 </a:solidFill>
                 <a:latin typeface="Tahoma"/>
               </a:rPr>
@@ -11054,7 +11191,7 @@
       </p:sp>
       <p:pic>
         <p:nvPicPr>
-          <p:cNvPr id="4" name="Picture 3" descr="logo_footer.png"/>
+          <p:cNvPr id="4" name="Picture 3" descr="logo_r01.png"/>
           <p:cNvPicPr>
             <a:picLocks noChangeAspect="1"/>
           </p:cNvPicPr>
@@ -11068,8 +11205,8 @@
         </p:blipFill>
         <p:spPr>
           <a:xfrm>
-            <a:off x="384048" y="6327648"/>
-            <a:ext cx="365760" cy="384048"/>
+            <a:off x="249631" y="6448348"/>
+            <a:ext cx="237744" cy="237744"/>
           </a:xfrm>
           <a:prstGeom prst="rect">
             <a:avLst/>
@@ -11084,8 +11221,8 @@
         </p:nvSpPr>
         <p:spPr>
           <a:xfrm>
-            <a:off x="786384" y="6327648"/>
-            <a:ext cx="4114800" cy="411480"/>
+            <a:off x="566928" y="6353251"/>
+            <a:ext cx="3246120" cy="400507"/>
           </a:xfrm>
           <a:prstGeom prst="rect">
             <a:avLst/>
@@ -11107,9 +11244,9 @@
               </a:spcAft>
             </a:pPr>
             <a:r>
-              <a:rPr sz="1300" b="1" i="0">
-                <a:solidFill>
-                  <a:srgbClr val="0D3D14"/>
+              <a:rPr sz="2000" b="1" i="0">
+                <a:solidFill>
+                  <a:srgbClr val="068734"/>
                 </a:solidFill>
                 <a:latin typeface="Tahoma"/>
               </a:rPr>
@@ -11126,16 +11263,16 @@
         </p:nvSpPr>
         <p:spPr>
           <a:xfrm>
-            <a:off x="11430000" y="6355080"/>
-            <a:ext cx="594360" cy="365760"/>
-          </a:xfrm>
-          <a:prstGeom prst="rect">
-            <a:avLst/>
-          </a:prstGeom>
-          <a:noFill/>
-        </p:spPr>
-        <p:txBody>
-          <a:bodyPr wrap="square" anchor="ctr" lIns="27432" rIns="27432" tIns="9144" bIns="9144">
+            <a:off x="9400032" y="6510528"/>
+            <a:ext cx="2514600" cy="292608"/>
+          </a:xfrm>
+          <a:prstGeom prst="rect">
+            <a:avLst/>
+          </a:prstGeom>
+          <a:noFill/>
+        </p:spPr>
+        <p:txBody>
+          <a:bodyPr wrap="square" anchor="t" lIns="27432" rIns="27432" tIns="9144" bIns="9144">
             <a:spAutoFit/>
           </a:bodyPr>
           <a:lstStyle/>
@@ -11151,7 +11288,7 @@
             <a:r>
               <a:rPr sz="1200" b="0" i="0">
                 <a:solidFill>
-                  <a:srgbClr val="555555"/>
+                  <a:srgbClr val="068734"/>
                 </a:solidFill>
                 <a:latin typeface="Tahoma"/>
               </a:rPr>
@@ -11265,14 +11402,14 @@
           </a:solidFill>
           <a:ln w="9525">
             <a:solidFill>
-              <a:srgbClr val="D8E4D0"/>
+              <a:srgbClr val="D9D9D9"/>
             </a:solidFill>
           </a:ln>
           <a:effectLst/>
           <a:effectLst>
             <a:outerShdw blurRad="50000" dist="20000" dir="5400000" rotWithShape="0">
               <a:srgbClr val="8A99AD">
-                <a:alpha val="38000"/>
+                <a:alpha val="30000"/>
               </a:srgbClr>
             </a:outerShdw>
           </a:effectLst>
@@ -11418,7 +11555,7 @@
             <a:r>
               <a:rPr sz="1250" b="0" i="0">
                 <a:solidFill>
-                  <a:srgbClr val="2C5F2D"/>
+                  <a:srgbClr val="068734"/>
                 </a:solidFill>
                 <a:latin typeface="Tahoma"/>
               </a:rPr>
@@ -11437,7 +11574,7 @@
             <a:r>
               <a:rPr sz="1250" b="0" i="0">
                 <a:solidFill>
-                  <a:srgbClr val="2C5F2D"/>
+                  <a:srgbClr val="068734"/>
                 </a:solidFill>
                 <a:latin typeface="Tahoma"/>
               </a:rPr>
@@ -11456,7 +11593,7 @@
             <a:r>
               <a:rPr sz="1250" b="0" i="0">
                 <a:solidFill>
-                  <a:srgbClr val="2C5F2D"/>
+                  <a:srgbClr val="068734"/>
                 </a:solidFill>
                 <a:latin typeface="Tahoma"/>
               </a:rPr>
@@ -11484,14 +11621,14 @@
           </a:solidFill>
           <a:ln w="9525">
             <a:solidFill>
-              <a:srgbClr val="D8E4D0"/>
+              <a:srgbClr val="D9D9D9"/>
             </a:solidFill>
           </a:ln>
           <a:effectLst/>
           <a:effectLst>
             <a:outerShdw blurRad="50000" dist="20000" dir="5400000" rotWithShape="0">
               <a:srgbClr val="8A99AD">
-                <a:alpha val="38000"/>
+                <a:alpha val="30000"/>
               </a:srgbClr>
             </a:outerShdw>
           </a:effectLst>
@@ -11637,7 +11774,7 @@
             <a:r>
               <a:rPr sz="1250" b="0" i="0">
                 <a:solidFill>
-                  <a:srgbClr val="2C5F2D"/>
+                  <a:srgbClr val="068734"/>
                 </a:solidFill>
                 <a:latin typeface="Tahoma"/>
               </a:rPr>
@@ -11656,7 +11793,7 @@
             <a:r>
               <a:rPr sz="1250" b="0" i="0">
                 <a:solidFill>
-                  <a:srgbClr val="2C5F2D"/>
+                  <a:srgbClr val="068734"/>
                 </a:solidFill>
                 <a:latin typeface="Tahoma"/>
               </a:rPr>
@@ -11675,7 +11812,7 @@
             <a:r>
               <a:rPr sz="1250" b="0" i="0">
                 <a:solidFill>
-                  <a:srgbClr val="2C5F2D"/>
+                  <a:srgbClr val="068734"/>
                 </a:solidFill>
                 <a:latin typeface="Tahoma"/>
               </a:rPr>
@@ -11694,7 +11831,7 @@
             <a:r>
               <a:rPr sz="1250" b="0" i="0">
                 <a:solidFill>
-                  <a:srgbClr val="2C5F2D"/>
+                  <a:srgbClr val="068734"/>
                 </a:solidFill>
                 <a:latin typeface="Tahoma"/>
               </a:rPr>
@@ -11722,14 +11859,14 @@
           </a:solidFill>
           <a:ln w="9525">
             <a:solidFill>
-              <a:srgbClr val="D8E4D0"/>
+              <a:srgbClr val="D9D9D9"/>
             </a:solidFill>
           </a:ln>
           <a:effectLst/>
           <a:effectLst>
             <a:outerShdw blurRad="50000" dist="20000" dir="5400000" rotWithShape="0">
               <a:srgbClr val="8A99AD">
-                <a:alpha val="38000"/>
+                <a:alpha val="30000"/>
               </a:srgbClr>
             </a:outerShdw>
           </a:effectLst>
@@ -11771,7 +11908,7 @@
             <a:avLst/>
           </a:prstGeom>
           <a:solidFill>
-            <a:srgbClr val="C0561E"/>
+            <a:srgbClr val="D95323"/>
           </a:solidFill>
           <a:ln>
             <a:noFill/>
@@ -11875,7 +12012,7 @@
             <a:r>
               <a:rPr sz="1250" b="0" i="0">
                 <a:solidFill>
-                  <a:srgbClr val="2C5F2D"/>
+                  <a:srgbClr val="068734"/>
                 </a:solidFill>
                 <a:latin typeface="Tahoma"/>
               </a:rPr>
@@ -11894,7 +12031,7 @@
             <a:r>
               <a:rPr sz="1250" b="0" i="0">
                 <a:solidFill>
-                  <a:srgbClr val="2C5F2D"/>
+                  <a:srgbClr val="068734"/>
                 </a:solidFill>
                 <a:latin typeface="Tahoma"/>
               </a:rPr>
@@ -11913,7 +12050,7 @@
             <a:r>
               <a:rPr sz="1250" b="0" i="0">
                 <a:solidFill>
-                  <a:srgbClr val="2C5F2D"/>
+                  <a:srgbClr val="068734"/>
                 </a:solidFill>
                 <a:latin typeface="Tahoma"/>
               </a:rPr>
@@ -11937,7 +12074,7 @@
             <a:avLst/>
           </a:prstGeom>
           <a:solidFill>
-            <a:srgbClr val="ECF1E9"/>
+            <a:srgbClr val="F2F2F2"/>
           </a:solidFill>
           <a:ln>
             <a:noFill/>
@@ -12008,7 +12145,7 @@
             <a:r>
               <a:rPr sz="1200" b="0" i="0">
                 <a:solidFill>
-                  <a:srgbClr val="2C5F2D"/>
+                  <a:srgbClr val="068734"/>
                 </a:solidFill>
                 <a:latin typeface="Tahoma"/>
               </a:rPr>
@@ -12129,16 +12266,16 @@
         </p:nvSpPr>
         <p:spPr>
           <a:xfrm>
-            <a:off x="457200" y="256032"/>
-            <a:ext cx="10881360" cy="868680"/>
-          </a:xfrm>
-          <a:prstGeom prst="rect">
-            <a:avLst/>
-          </a:prstGeom>
-          <a:noFill/>
-        </p:spPr>
-        <p:txBody>
-          <a:bodyPr wrap="square" anchor="ctr" lIns="27432" rIns="27432" tIns="9144" bIns="9144">
+            <a:off x="256032" y="256032"/>
+            <a:ext cx="11430000" cy="649224"/>
+          </a:xfrm>
+          <a:prstGeom prst="rect">
+            <a:avLst/>
+          </a:prstGeom>
+          <a:noFill/>
+        </p:spPr>
+        <p:txBody>
+          <a:bodyPr wrap="square" anchor="t" lIns="27432" rIns="27432" tIns="9144" bIns="9144">
             <a:spAutoFit/>
           </a:bodyPr>
           <a:lstStyle/>
@@ -12152,9 +12289,9 @@
               </a:spcAft>
             </a:pPr>
             <a:r>
-              <a:rPr sz="3400" b="1" i="0">
-                <a:solidFill>
-                  <a:srgbClr val="0D3D14"/>
+              <a:rPr sz="3600" b="1" i="0">
+                <a:solidFill>
+                  <a:srgbClr val="068734"/>
                 </a:solidFill>
                 <a:latin typeface="Tahoma"/>
               </a:rPr>
@@ -12171,8 +12308,8 @@
         </p:nvSpPr>
         <p:spPr>
           <a:xfrm>
-            <a:off x="502920" y="1024128"/>
-            <a:ext cx="10881360" cy="457200"/>
+            <a:off x="384048" y="960120"/>
+            <a:ext cx="11247120" cy="402336"/>
           </a:xfrm>
           <a:prstGeom prst="rect">
             <a:avLst/>
@@ -12194,9 +12331,9 @@
               </a:spcAft>
             </a:pPr>
             <a:r>
-              <a:rPr sz="1900" b="1" i="0">
-                <a:solidFill>
-                  <a:srgbClr val="2C5F2D"/>
+              <a:rPr sz="2000" b="1" i="0">
+                <a:solidFill>
+                  <a:srgbClr val="068734"/>
                 </a:solidFill>
                 <a:latin typeface="Tahoma"/>
               </a:rPr>
@@ -12207,7 +12344,7 @@
       </p:sp>
       <p:pic>
         <p:nvPicPr>
-          <p:cNvPr id="4" name="Picture 3" descr="logo_footer.png"/>
+          <p:cNvPr id="4" name="Picture 3" descr="logo_r01.png"/>
           <p:cNvPicPr>
             <a:picLocks noChangeAspect="1"/>
           </p:cNvPicPr>
@@ -12221,8 +12358,8 @@
         </p:blipFill>
         <p:spPr>
           <a:xfrm>
-            <a:off x="384048" y="6327648"/>
-            <a:ext cx="365760" cy="384048"/>
+            <a:off x="249631" y="6448348"/>
+            <a:ext cx="237744" cy="237744"/>
           </a:xfrm>
           <a:prstGeom prst="rect">
             <a:avLst/>
@@ -12237,8 +12374,8 @@
         </p:nvSpPr>
         <p:spPr>
           <a:xfrm>
-            <a:off x="786384" y="6327648"/>
-            <a:ext cx="4114800" cy="411480"/>
+            <a:off x="566928" y="6353251"/>
+            <a:ext cx="3246120" cy="400507"/>
           </a:xfrm>
           <a:prstGeom prst="rect">
             <a:avLst/>
@@ -12260,9 +12397,9 @@
               </a:spcAft>
             </a:pPr>
             <a:r>
-              <a:rPr sz="1300" b="1" i="0">
-                <a:solidFill>
-                  <a:srgbClr val="0D3D14"/>
+              <a:rPr sz="2000" b="1" i="0">
+                <a:solidFill>
+                  <a:srgbClr val="068734"/>
                 </a:solidFill>
                 <a:latin typeface="Tahoma"/>
               </a:rPr>
@@ -12279,16 +12416,16 @@
         </p:nvSpPr>
         <p:spPr>
           <a:xfrm>
-            <a:off x="11430000" y="6355080"/>
-            <a:ext cx="594360" cy="365760"/>
-          </a:xfrm>
-          <a:prstGeom prst="rect">
-            <a:avLst/>
-          </a:prstGeom>
-          <a:noFill/>
-        </p:spPr>
-        <p:txBody>
-          <a:bodyPr wrap="square" anchor="ctr" lIns="27432" rIns="27432" tIns="9144" bIns="9144">
+            <a:off x="9400032" y="6510528"/>
+            <a:ext cx="2514600" cy="292608"/>
+          </a:xfrm>
+          <a:prstGeom prst="rect">
+            <a:avLst/>
+          </a:prstGeom>
+          <a:noFill/>
+        </p:spPr>
+        <p:txBody>
+          <a:bodyPr wrap="square" anchor="t" lIns="27432" rIns="27432" tIns="9144" bIns="9144">
             <a:spAutoFit/>
           </a:bodyPr>
           <a:lstStyle/>
@@ -12304,7 +12441,7 @@
             <a:r>
               <a:rPr sz="1200" b="0" i="0">
                 <a:solidFill>
-                  <a:srgbClr val="555555"/>
+                  <a:srgbClr val="068734"/>
                 </a:solidFill>
                 <a:latin typeface="Tahoma"/>
               </a:rPr>
@@ -12418,14 +12555,14 @@
           </a:solidFill>
           <a:ln w="9525">
             <a:solidFill>
-              <a:srgbClr val="D8E4D0"/>
+              <a:srgbClr val="D9D9D9"/>
             </a:solidFill>
           </a:ln>
           <a:effectLst/>
           <a:effectLst>
             <a:outerShdw blurRad="50000" dist="20000" dir="5400000" rotWithShape="0">
               <a:srgbClr val="8A99AD">
-                <a:alpha val="38000"/>
+                <a:alpha val="30000"/>
               </a:srgbClr>
             </a:outerShdw>
           </a:effectLst>
@@ -12571,7 +12708,7 @@
             <a:r>
               <a:rPr sz="1250" b="0" i="0">
                 <a:solidFill>
-                  <a:srgbClr val="2C5F2D"/>
+                  <a:srgbClr val="068734"/>
                 </a:solidFill>
                 <a:latin typeface="Tahoma"/>
               </a:rPr>
@@ -12590,7 +12727,7 @@
             <a:r>
               <a:rPr sz="1250" b="0" i="0">
                 <a:solidFill>
-                  <a:srgbClr val="2C5F2D"/>
+                  <a:srgbClr val="068734"/>
                 </a:solidFill>
                 <a:latin typeface="Tahoma"/>
               </a:rPr>
@@ -12609,7 +12746,7 @@
             <a:r>
               <a:rPr sz="1250" b="0" i="0">
                 <a:solidFill>
-                  <a:srgbClr val="2C5F2D"/>
+                  <a:srgbClr val="068734"/>
                 </a:solidFill>
                 <a:latin typeface="Tahoma"/>
               </a:rPr>
@@ -12628,7 +12765,7 @@
             <a:r>
               <a:rPr sz="1250" b="0" i="0">
                 <a:solidFill>
-                  <a:srgbClr val="2C5F2D"/>
+                  <a:srgbClr val="068734"/>
                 </a:solidFill>
                 <a:latin typeface="Tahoma"/>
               </a:rPr>
@@ -12656,14 +12793,14 @@
           </a:solidFill>
           <a:ln w="9525">
             <a:solidFill>
-              <a:srgbClr val="D8E4D0"/>
+              <a:srgbClr val="D9D9D9"/>
             </a:solidFill>
           </a:ln>
           <a:effectLst/>
           <a:effectLst>
             <a:outerShdw blurRad="50000" dist="20000" dir="5400000" rotWithShape="0">
               <a:srgbClr val="8A99AD">
-                <a:alpha val="38000"/>
+                <a:alpha val="30000"/>
               </a:srgbClr>
             </a:outerShdw>
           </a:effectLst>
@@ -12809,7 +12946,7 @@
             <a:r>
               <a:rPr sz="1250" b="0" i="0">
                 <a:solidFill>
-                  <a:srgbClr val="2C5F2D"/>
+                  <a:srgbClr val="068734"/>
                 </a:solidFill>
                 <a:latin typeface="Tahoma"/>
               </a:rPr>
@@ -12828,7 +12965,7 @@
             <a:r>
               <a:rPr sz="1250" b="0" i="0">
                 <a:solidFill>
-                  <a:srgbClr val="2C5F2D"/>
+                  <a:srgbClr val="068734"/>
                 </a:solidFill>
                 <a:latin typeface="Tahoma"/>
               </a:rPr>
@@ -12847,7 +12984,7 @@
             <a:r>
               <a:rPr sz="1250" b="0" i="0">
                 <a:solidFill>
-                  <a:srgbClr val="2C5F2D"/>
+                  <a:srgbClr val="068734"/>
                 </a:solidFill>
                 <a:latin typeface="Tahoma"/>
               </a:rPr>
@@ -12866,7 +13003,7 @@
             <a:r>
               <a:rPr sz="1250" b="0" i="0">
                 <a:solidFill>
-                  <a:srgbClr val="2C5F2D"/>
+                  <a:srgbClr val="068734"/>
                 </a:solidFill>
                 <a:latin typeface="Tahoma"/>
               </a:rPr>
@@ -12894,14 +13031,14 @@
           </a:solidFill>
           <a:ln w="9525">
             <a:solidFill>
-              <a:srgbClr val="D8E4D0"/>
+              <a:srgbClr val="D9D9D9"/>
             </a:solidFill>
           </a:ln>
           <a:effectLst/>
           <a:effectLst>
             <a:outerShdw blurRad="50000" dist="20000" dir="5400000" rotWithShape="0">
               <a:srgbClr val="8A99AD">
-                <a:alpha val="38000"/>
+                <a:alpha val="30000"/>
               </a:srgbClr>
             </a:outerShdw>
           </a:effectLst>
@@ -12943,7 +13080,7 @@
             <a:avLst/>
           </a:prstGeom>
           <a:solidFill>
-            <a:srgbClr val="C0561E"/>
+            <a:srgbClr val="D95323"/>
           </a:solidFill>
           <a:ln>
             <a:noFill/>
@@ -13047,7 +13184,7 @@
             <a:r>
               <a:rPr sz="1250" b="0" i="0">
                 <a:solidFill>
-                  <a:srgbClr val="2C5F2D"/>
+                  <a:srgbClr val="068734"/>
                 </a:solidFill>
                 <a:latin typeface="Tahoma"/>
               </a:rPr>
@@ -13066,7 +13203,7 @@
             <a:r>
               <a:rPr sz="1250" b="0" i="0">
                 <a:solidFill>
-                  <a:srgbClr val="2C5F2D"/>
+                  <a:srgbClr val="068734"/>
                 </a:solidFill>
                 <a:latin typeface="Tahoma"/>
               </a:rPr>
@@ -13085,7 +13222,7 @@
             <a:r>
               <a:rPr sz="1250" b="0" i="0">
                 <a:solidFill>
-                  <a:srgbClr val="2C5F2D"/>
+                  <a:srgbClr val="068734"/>
                 </a:solidFill>
                 <a:latin typeface="Tahoma"/>
               </a:rPr>
@@ -13109,7 +13246,7 @@
             <a:avLst/>
           </a:prstGeom>
           <a:solidFill>
-            <a:srgbClr val="ECF1E9"/>
+            <a:srgbClr val="F2F2F2"/>
           </a:solidFill>
           <a:ln>
             <a:noFill/>
@@ -13180,7 +13317,7 @@
             <a:r>
               <a:rPr sz="1200" b="0" i="0">
                 <a:solidFill>
-                  <a:srgbClr val="2C5F2D"/>
+                  <a:srgbClr val="068734"/>
                 </a:solidFill>
                 <a:latin typeface="Tahoma"/>
               </a:rPr>
@@ -13301,16 +13438,16 @@
         </p:nvSpPr>
         <p:spPr>
           <a:xfrm>
-            <a:off x="457200" y="256032"/>
-            <a:ext cx="10881360" cy="868680"/>
-          </a:xfrm>
-          <a:prstGeom prst="rect">
-            <a:avLst/>
-          </a:prstGeom>
-          <a:noFill/>
-        </p:spPr>
-        <p:txBody>
-          <a:bodyPr wrap="square" anchor="ctr" lIns="27432" rIns="27432" tIns="9144" bIns="9144">
+            <a:off x="256032" y="256032"/>
+            <a:ext cx="11430000" cy="649224"/>
+          </a:xfrm>
+          <a:prstGeom prst="rect">
+            <a:avLst/>
+          </a:prstGeom>
+          <a:noFill/>
+        </p:spPr>
+        <p:txBody>
+          <a:bodyPr wrap="square" anchor="t" lIns="27432" rIns="27432" tIns="9144" bIns="9144">
             <a:spAutoFit/>
           </a:bodyPr>
           <a:lstStyle/>
@@ -13324,9 +13461,9 @@
               </a:spcAft>
             </a:pPr>
             <a:r>
-              <a:rPr sz="3400" b="1" i="0">
-                <a:solidFill>
-                  <a:srgbClr val="0D3D14"/>
+              <a:rPr sz="3600" b="1" i="0">
+                <a:solidFill>
+                  <a:srgbClr val="068734"/>
                 </a:solidFill>
                 <a:latin typeface="Tahoma"/>
               </a:rPr>
@@ -13343,8 +13480,8 @@
         </p:nvSpPr>
         <p:spPr>
           <a:xfrm>
-            <a:off x="502920" y="1024128"/>
-            <a:ext cx="10881360" cy="457200"/>
+            <a:off x="384048" y="960120"/>
+            <a:ext cx="11247120" cy="402336"/>
           </a:xfrm>
           <a:prstGeom prst="rect">
             <a:avLst/>
@@ -13366,9 +13503,9 @@
               </a:spcAft>
             </a:pPr>
             <a:r>
-              <a:rPr sz="1900" b="1" i="0">
-                <a:solidFill>
-                  <a:srgbClr val="2C5F2D"/>
+              <a:rPr sz="2000" b="1" i="0">
+                <a:solidFill>
+                  <a:srgbClr val="068734"/>
                 </a:solidFill>
                 <a:latin typeface="Tahoma"/>
               </a:rPr>
@@ -13379,7 +13516,7 @@
       </p:sp>
       <p:pic>
         <p:nvPicPr>
-          <p:cNvPr id="4" name="Picture 3" descr="logo_footer.png"/>
+          <p:cNvPr id="4" name="Picture 3" descr="logo_r01.png"/>
           <p:cNvPicPr>
             <a:picLocks noChangeAspect="1"/>
           </p:cNvPicPr>
@@ -13393,8 +13530,8 @@
         </p:blipFill>
         <p:spPr>
           <a:xfrm>
-            <a:off x="384048" y="6327648"/>
-            <a:ext cx="365760" cy="384048"/>
+            <a:off x="249631" y="6448348"/>
+            <a:ext cx="237744" cy="237744"/>
           </a:xfrm>
           <a:prstGeom prst="rect">
             <a:avLst/>
@@ -13409,8 +13546,8 @@
         </p:nvSpPr>
         <p:spPr>
           <a:xfrm>
-            <a:off x="786384" y="6327648"/>
-            <a:ext cx="4114800" cy="411480"/>
+            <a:off x="566928" y="6353251"/>
+            <a:ext cx="3246120" cy="400507"/>
           </a:xfrm>
           <a:prstGeom prst="rect">
             <a:avLst/>
@@ -13432,9 +13569,9 @@
               </a:spcAft>
             </a:pPr>
             <a:r>
-              <a:rPr sz="1300" b="1" i="0">
-                <a:solidFill>
-                  <a:srgbClr val="0D3D14"/>
+              <a:rPr sz="2000" b="1" i="0">
+                <a:solidFill>
+                  <a:srgbClr val="068734"/>
                 </a:solidFill>
                 <a:latin typeface="Tahoma"/>
               </a:rPr>
@@ -13451,16 +13588,16 @@
         </p:nvSpPr>
         <p:spPr>
           <a:xfrm>
-            <a:off x="11430000" y="6355080"/>
-            <a:ext cx="594360" cy="365760"/>
-          </a:xfrm>
-          <a:prstGeom prst="rect">
-            <a:avLst/>
-          </a:prstGeom>
-          <a:noFill/>
-        </p:spPr>
-        <p:txBody>
-          <a:bodyPr wrap="square" anchor="ctr" lIns="27432" rIns="27432" tIns="9144" bIns="9144">
+            <a:off x="9400032" y="6510528"/>
+            <a:ext cx="2514600" cy="292608"/>
+          </a:xfrm>
+          <a:prstGeom prst="rect">
+            <a:avLst/>
+          </a:prstGeom>
+          <a:noFill/>
+        </p:spPr>
+        <p:txBody>
+          <a:bodyPr wrap="square" anchor="t" lIns="27432" rIns="27432" tIns="9144" bIns="9144">
             <a:spAutoFit/>
           </a:bodyPr>
           <a:lstStyle/>
@@ -13476,7 +13613,7 @@
             <a:r>
               <a:rPr sz="1200" b="0" i="0">
                 <a:solidFill>
-                  <a:srgbClr val="555555"/>
+                  <a:srgbClr val="068734"/>
                 </a:solidFill>
                 <a:latin typeface="Tahoma"/>
               </a:rPr>
@@ -13504,14 +13641,14 @@
           </a:solidFill>
           <a:ln w="9525">
             <a:solidFill>
-              <a:srgbClr val="D8E4D0"/>
+              <a:srgbClr val="D9D9D9"/>
             </a:solidFill>
           </a:ln>
           <a:effectLst/>
           <a:effectLst>
             <a:outerShdw blurRad="50000" dist="20000" dir="5400000" rotWithShape="0">
               <a:srgbClr val="8A99AD">
-                <a:alpha val="38000"/>
+                <a:alpha val="30000"/>
               </a:srgbClr>
             </a:outerShdw>
           </a:effectLst>
@@ -13571,7 +13708,7 @@
             <a:r>
               <a:rPr sz="3000" b="1" i="0">
                 <a:solidFill>
-                  <a:srgbClr val="C0561E"/>
+                  <a:srgbClr val="D95323"/>
                 </a:solidFill>
                 <a:latin typeface="Tahoma"/>
               </a:rPr>
@@ -13683,14 +13820,14 @@
           </a:solidFill>
           <a:ln w="9525">
             <a:solidFill>
-              <a:srgbClr val="D8E4D0"/>
+              <a:srgbClr val="D9D9D9"/>
             </a:solidFill>
           </a:ln>
           <a:effectLst/>
           <a:effectLst>
             <a:outerShdw blurRad="50000" dist="20000" dir="5400000" rotWithShape="0">
               <a:srgbClr val="8A99AD">
-                <a:alpha val="38000"/>
+                <a:alpha val="30000"/>
               </a:srgbClr>
             </a:outerShdw>
           </a:effectLst>
@@ -13750,7 +13887,7 @@
             <a:r>
               <a:rPr sz="3000" b="1" i="0">
                 <a:solidFill>
-                  <a:srgbClr val="C0561E"/>
+                  <a:srgbClr val="D95323"/>
                 </a:solidFill>
                 <a:latin typeface="Tahoma"/>
               </a:rPr>
@@ -13862,14 +13999,14 @@
           </a:solidFill>
           <a:ln w="9525">
             <a:solidFill>
-              <a:srgbClr val="D8E4D0"/>
+              <a:srgbClr val="D9D9D9"/>
             </a:solidFill>
           </a:ln>
           <a:effectLst/>
           <a:effectLst>
             <a:outerShdw blurRad="50000" dist="20000" dir="5400000" rotWithShape="0">
               <a:srgbClr val="8A99AD">
-                <a:alpha val="38000"/>
+                <a:alpha val="30000"/>
               </a:srgbClr>
             </a:outerShdw>
           </a:effectLst>
@@ -13929,7 +14066,7 @@
             <a:r>
               <a:rPr sz="3000" b="1" i="0">
                 <a:solidFill>
-                  <a:srgbClr val="C0561E"/>
+                  <a:srgbClr val="D95323"/>
                 </a:solidFill>
                 <a:latin typeface="Tahoma"/>
               </a:rPr>
@@ -14041,14 +14178,14 @@
           </a:solidFill>
           <a:ln w="9525">
             <a:solidFill>
-              <a:srgbClr val="D8E4D0"/>
+              <a:srgbClr val="D9D9D9"/>
             </a:solidFill>
           </a:ln>
           <a:effectLst/>
           <a:effectLst>
             <a:outerShdw blurRad="50000" dist="20000" dir="5400000" rotWithShape="0">
               <a:srgbClr val="8A99AD">
-                <a:alpha val="38000"/>
+                <a:alpha val="30000"/>
               </a:srgbClr>
             </a:outerShdw>
           </a:effectLst>
@@ -14108,7 +14245,7 @@
             <a:r>
               <a:rPr sz="3000" b="1" i="0">
                 <a:solidFill>
-                  <a:srgbClr val="C0561E"/>
+                  <a:srgbClr val="D95323"/>
                 </a:solidFill>
                 <a:latin typeface="Tahoma"/>
               </a:rPr>
@@ -14220,14 +14357,14 @@
           </a:solidFill>
           <a:ln w="9525">
             <a:solidFill>
-              <a:srgbClr val="D8E4D0"/>
+              <a:srgbClr val="D9D9D9"/>
             </a:solidFill>
           </a:ln>
           <a:effectLst/>
           <a:effectLst>
             <a:outerShdw blurRad="50000" dist="20000" dir="5400000" rotWithShape="0">
               <a:srgbClr val="8A99AD">
-                <a:alpha val="38000"/>
+                <a:alpha val="30000"/>
               </a:srgbClr>
             </a:outerShdw>
           </a:effectLst>
@@ -14287,7 +14424,7 @@
             <a:r>
               <a:rPr sz="3000" b="1" i="0">
                 <a:solidFill>
-                  <a:srgbClr val="C0561E"/>
+                  <a:srgbClr val="D95323"/>
                 </a:solidFill>
                 <a:latin typeface="Tahoma"/>
               </a:rPr>
@@ -14432,7 +14569,7 @@
         </p:nvSpPr>
         <p:spPr>
           <a:xfrm>
-            <a:off x="457200" y="3547872"/>
+            <a:off x="457200" y="3566160"/>
             <a:ext cx="11274552" cy="402336"/>
           </a:xfrm>
           <a:prstGeom prst="rect">
@@ -14455,7 +14592,7 @@
               </a:spcAft>
             </a:pPr>
             <a:r>
-              <a:rPr sz="1500" b="1" i="0">
+              <a:rPr sz="1400" b="1" i="0">
                 <a:solidFill>
                   <a:srgbClr val="FFFFFF"/>
                 </a:solidFill>
@@ -14499,7 +14636,7 @@
             <a:r>
               <a:rPr sz="1300" b="1" i="0">
                 <a:solidFill>
-                  <a:srgbClr val="2C5F2D"/>
+                  <a:srgbClr val="068734"/>
                 </a:solidFill>
                 <a:latin typeface="Tahoma"/>
               </a:rPr>
@@ -14541,7 +14678,7 @@
             <a:r>
               <a:rPr sz="1300" b="1" i="0">
                 <a:solidFill>
-                  <a:srgbClr val="2C5F2D"/>
+                  <a:srgbClr val="068734"/>
                 </a:solidFill>
                 <a:latin typeface="Tahoma"/>
               </a:rPr>
@@ -14583,7 +14720,7 @@
             <a:r>
               <a:rPr sz="1300" b="1" i="0">
                 <a:solidFill>
-                  <a:srgbClr val="2C5F2D"/>
+                  <a:srgbClr val="068734"/>
                 </a:solidFill>
                 <a:latin typeface="Tahoma"/>
               </a:rPr>
@@ -14618,16 +14755,16 @@
         </p:nvSpPr>
         <p:spPr>
           <a:xfrm>
-            <a:off x="457200" y="256032"/>
-            <a:ext cx="10881360" cy="868680"/>
-          </a:xfrm>
-          <a:prstGeom prst="rect">
-            <a:avLst/>
-          </a:prstGeom>
-          <a:noFill/>
-        </p:spPr>
-        <p:txBody>
-          <a:bodyPr wrap="square" anchor="ctr" lIns="27432" rIns="27432" tIns="9144" bIns="9144">
+            <a:off x="256032" y="256032"/>
+            <a:ext cx="11430000" cy="649224"/>
+          </a:xfrm>
+          <a:prstGeom prst="rect">
+            <a:avLst/>
+          </a:prstGeom>
+          <a:noFill/>
+        </p:spPr>
+        <p:txBody>
+          <a:bodyPr wrap="square" anchor="t" lIns="27432" rIns="27432" tIns="9144" bIns="9144">
             <a:spAutoFit/>
           </a:bodyPr>
           <a:lstStyle/>
@@ -14641,9 +14778,9 @@
               </a:spcAft>
             </a:pPr>
             <a:r>
-              <a:rPr sz="3400" b="1" i="0">
-                <a:solidFill>
-                  <a:srgbClr val="0D3D14"/>
+              <a:rPr sz="3600" b="1" i="0">
+                <a:solidFill>
+                  <a:srgbClr val="068734"/>
                 </a:solidFill>
                 <a:latin typeface="Tahoma"/>
               </a:rPr>
@@ -14660,8 +14797,8 @@
         </p:nvSpPr>
         <p:spPr>
           <a:xfrm>
-            <a:off x="502920" y="1024128"/>
-            <a:ext cx="10881360" cy="457200"/>
+            <a:off x="384048" y="960120"/>
+            <a:ext cx="11247120" cy="402336"/>
           </a:xfrm>
           <a:prstGeom prst="rect">
             <a:avLst/>
@@ -14683,9 +14820,9 @@
               </a:spcAft>
             </a:pPr>
             <a:r>
-              <a:rPr sz="1900" b="1" i="0">
-                <a:solidFill>
-                  <a:srgbClr val="2C5F2D"/>
+              <a:rPr sz="2000" b="1" i="0">
+                <a:solidFill>
+                  <a:srgbClr val="068734"/>
                 </a:solidFill>
                 <a:latin typeface="Tahoma"/>
               </a:rPr>
@@ -14696,7 +14833,7 @@
       </p:sp>
       <p:pic>
         <p:nvPicPr>
-          <p:cNvPr id="4" name="Picture 3" descr="logo_footer.png"/>
+          <p:cNvPr id="4" name="Picture 3" descr="logo_r01.png"/>
           <p:cNvPicPr>
             <a:picLocks noChangeAspect="1"/>
           </p:cNvPicPr>
@@ -14710,8 +14847,8 @@
         </p:blipFill>
         <p:spPr>
           <a:xfrm>
-            <a:off x="384048" y="6327648"/>
-            <a:ext cx="365760" cy="384048"/>
+            <a:off x="249631" y="6448348"/>
+            <a:ext cx="237744" cy="237744"/>
           </a:xfrm>
           <a:prstGeom prst="rect">
             <a:avLst/>
@@ -14726,8 +14863,8 @@
         </p:nvSpPr>
         <p:spPr>
           <a:xfrm>
-            <a:off x="786384" y="6327648"/>
-            <a:ext cx="4114800" cy="411480"/>
+            <a:off x="566928" y="6353251"/>
+            <a:ext cx="3246120" cy="400507"/>
           </a:xfrm>
           <a:prstGeom prst="rect">
             <a:avLst/>
@@ -14749,9 +14886,9 @@
               </a:spcAft>
             </a:pPr>
             <a:r>
-              <a:rPr sz="1300" b="1" i="0">
-                <a:solidFill>
-                  <a:srgbClr val="0D3D14"/>
+              <a:rPr sz="2000" b="1" i="0">
+                <a:solidFill>
+                  <a:srgbClr val="068734"/>
                 </a:solidFill>
                 <a:latin typeface="Tahoma"/>
               </a:rPr>
@@ -14768,16 +14905,16 @@
         </p:nvSpPr>
         <p:spPr>
           <a:xfrm>
-            <a:off x="11430000" y="6355080"/>
-            <a:ext cx="594360" cy="365760"/>
-          </a:xfrm>
-          <a:prstGeom prst="rect">
-            <a:avLst/>
-          </a:prstGeom>
-          <a:noFill/>
-        </p:spPr>
-        <p:txBody>
-          <a:bodyPr wrap="square" anchor="ctr" lIns="27432" rIns="27432" tIns="9144" bIns="9144">
+            <a:off x="9400032" y="6510528"/>
+            <a:ext cx="2514600" cy="292608"/>
+          </a:xfrm>
+          <a:prstGeom prst="rect">
+            <a:avLst/>
+          </a:prstGeom>
+          <a:noFill/>
+        </p:spPr>
+        <p:txBody>
+          <a:bodyPr wrap="square" anchor="t" lIns="27432" rIns="27432" tIns="9144" bIns="9144">
             <a:spAutoFit/>
           </a:bodyPr>
           <a:lstStyle/>
@@ -14793,7 +14930,7 @@
             <a:r>
               <a:rPr sz="1200" b="0" i="0">
                 <a:solidFill>
-                  <a:srgbClr val="555555"/>
+                  <a:srgbClr val="068734"/>
                 </a:solidFill>
                 <a:latin typeface="Tahoma"/>
               </a:rPr>
@@ -14903,7 +15040,7 @@
             <a:avLst/>
           </a:prstGeom>
           <a:solidFill>
-            <a:srgbClr val="ECF1E9"/>
+            <a:srgbClr val="F2F2F2"/>
           </a:solidFill>
           <a:ln>
             <a:noFill/>
@@ -14965,7 +15102,7 @@
             <a:r>
               <a:rPr sz="1400" b="0" i="0">
                 <a:solidFill>
-                  <a:srgbClr val="2C5F2D"/>
+                  <a:srgbClr val="068734"/>
                 </a:solidFill>
                 <a:latin typeface="Tahoma"/>
               </a:rPr>
@@ -15075,7 +15212,7 @@
             <a:avLst/>
           </a:prstGeom>
           <a:solidFill>
-            <a:srgbClr val="ECF1E9"/>
+            <a:srgbClr val="F2F2F2"/>
           </a:solidFill>
           <a:ln>
             <a:noFill/>
@@ -15137,7 +15274,7 @@
             <a:r>
               <a:rPr sz="1400" b="0" i="0">
                 <a:solidFill>
-                  <a:srgbClr val="2C5F2D"/>
+                  <a:srgbClr val="068734"/>
                 </a:solidFill>
                 <a:latin typeface="Tahoma"/>
               </a:rPr>
@@ -15247,7 +15384,7 @@
             <a:avLst/>
           </a:prstGeom>
           <a:solidFill>
-            <a:srgbClr val="ECF1E9"/>
+            <a:srgbClr val="F2F2F2"/>
           </a:solidFill>
           <a:ln>
             <a:noFill/>
@@ -15309,7 +15446,7 @@
             <a:r>
               <a:rPr sz="1400" b="0" i="0">
                 <a:solidFill>
-                  <a:srgbClr val="2C5F2D"/>
+                  <a:srgbClr val="068734"/>
                 </a:solidFill>
                 <a:latin typeface="Tahoma"/>
               </a:rPr>
@@ -15338,45 +15475,43 @@
       <p:grpSpPr/>
       <p:sp>
         <p:nvSpPr>
-          <p:cNvPr id="2" name="Rectangle 1"/>
-          <p:cNvSpPr/>
-          <p:nvPr/>
-        </p:nvSpPr>
-        <p:spPr>
-          <a:xfrm>
-            <a:off x="0" y="0"/>
-            <a:ext cx="12191695" cy="6858000"/>
-          </a:xfrm>
-          <a:prstGeom prst="rect">
-            <a:avLst/>
-          </a:prstGeom>
-          <a:solidFill>
-            <a:srgbClr val="0D3D14"/>
-          </a:solidFill>
-          <a:ln>
-            <a:noFill/>
-          </a:ln>
-          <a:effectLst/>
-        </p:spPr>
-        <p:style>
-          <a:lnRef idx="1">
-            <a:schemeClr val="accent1"/>
-          </a:lnRef>
-          <a:fillRef idx="3">
-            <a:schemeClr val="accent1"/>
-          </a:fillRef>
-          <a:effectRef idx="2">
-            <a:schemeClr val="accent1"/>
-          </a:effectRef>
-          <a:fontRef idx="minor">
-            <a:schemeClr val="lt1"/>
-          </a:fontRef>
-        </p:style>
-        <p:txBody>
-          <a:bodyPr rtlCol="0" anchor="ctr"/>
-          <a:lstStyle/>
-          <a:p>
-            <a:pPr algn="ctr"/>
+          <p:cNvPr id="2" name="TextBox 1"/>
+          <p:cNvSpPr txBox="1"/>
+          <p:nvPr/>
+        </p:nvSpPr>
+        <p:spPr>
+          <a:xfrm>
+            <a:off x="822960" y="2779776"/>
+            <a:ext cx="10552176" cy="649224"/>
+          </a:xfrm>
+          <a:prstGeom prst="rect">
+            <a:avLst/>
+          </a:prstGeom>
+          <a:noFill/>
+        </p:spPr>
+        <p:txBody>
+          <a:bodyPr wrap="square" anchor="ctr" lIns="27432" rIns="27432" tIns="9144" bIns="9144">
+            <a:spAutoFit/>
+          </a:bodyPr>
+          <a:lstStyle/>
+          <a:p>
+            <a:pPr algn="ctr">
+              <a:spcBef>
+                <a:spcPts val="0"/>
+              </a:spcBef>
+              <a:spcAft>
+                <a:spcPts val="200"/>
+              </a:spcAft>
+            </a:pPr>
+            <a:r>
+              <a:rPr sz="3500" b="1" i="0">
+                <a:solidFill>
+                  <a:srgbClr val="068734"/>
+                </a:solidFill>
+                <a:latin typeface="Tahoma"/>
+              </a:rPr>
+              <a:t>Before We Build Parts, We Build People</a:t>
+            </a:r>
           </a:p>
         </p:txBody>
       </p:sp>
@@ -15388,8 +15523,8 @@
         </p:nvSpPr>
         <p:spPr>
           <a:xfrm>
-            <a:off x="914400" y="2377440"/>
-            <a:ext cx="10332720" cy="914400"/>
+            <a:off x="822960" y="3611880"/>
+            <a:ext cx="10552176" cy="457200"/>
           </a:xfrm>
           <a:prstGeom prst="rect">
             <a:avLst/>
@@ -15411,27 +15546,51 @@
               </a:spcAft>
             </a:pPr>
             <a:r>
-              <a:rPr sz="3400" b="1" i="0">
-                <a:solidFill>
-                  <a:srgbClr val="FFFFFF"/>
-                </a:solidFill>
-                <a:latin typeface="Tahoma"/>
-              </a:rPr>
-              <a:t>Before We Build Parts, We Build People</a:t>
-            </a:r>
-          </a:p>
-        </p:txBody>
-      </p:sp>
-      <p:sp>
-        <p:nvSpPr>
-          <p:cNvPr id="4" name="TextBox 3"/>
-          <p:cNvSpPr txBox="1"/>
-          <p:nvPr/>
-        </p:nvSpPr>
-        <p:spPr>
-          <a:xfrm>
-            <a:off x="914400" y="3474720"/>
-            <a:ext cx="10332720" cy="731520"/>
+              <a:rPr sz="2200" b="1" i="0">
+                <a:solidFill>
+                  <a:srgbClr val="068734"/>
+                </a:solidFill>
+                <a:latin typeface="Tahoma"/>
+              </a:rPr>
+              <a:t>Thank you</a:t>
+            </a:r>
+          </a:p>
+        </p:txBody>
+      </p:sp>
+      <p:pic>
+        <p:nvPicPr>
+          <p:cNvPr id="4" name="Picture 3" descr="logo_r01.png"/>
+          <p:cNvPicPr>
+            <a:picLocks noChangeAspect="1"/>
+          </p:cNvPicPr>
+          <p:nvPr/>
+        </p:nvPicPr>
+        <p:blipFill>
+          <a:blip r:embed="rId2"/>
+          <a:stretch>
+            <a:fillRect/>
+          </a:stretch>
+        </p:blipFill>
+        <p:spPr>
+          <a:xfrm>
+            <a:off x="249631" y="6448348"/>
+            <a:ext cx="237744" cy="237744"/>
+          </a:xfrm>
+          <a:prstGeom prst="rect">
+            <a:avLst/>
+          </a:prstGeom>
+        </p:spPr>
+      </p:pic>
+      <p:sp>
+        <p:nvSpPr>
+          <p:cNvPr id="5" name="TextBox 4"/>
+          <p:cNvSpPr txBox="1"/>
+          <p:nvPr/>
+        </p:nvSpPr>
+        <p:spPr>
+          <a:xfrm>
+            <a:off x="566928" y="6353251"/>
+            <a:ext cx="3246120" cy="400507"/>
           </a:xfrm>
           <a:prstGeom prst="rect">
             <a:avLst/>
@@ -15444,7 +15603,7 @@
           </a:bodyPr>
           <a:lstStyle/>
           <a:p>
-            <a:pPr algn="ctr">
+            <a:pPr algn="l">
               <a:spcBef>
                 <a:spcPts val="0"/>
               </a:spcBef>
@@ -15453,13 +15612,55 @@
               </a:spcAft>
             </a:pPr>
             <a:r>
-              <a:rPr sz="2800" b="1" i="0">
-                <a:solidFill>
-                  <a:srgbClr val="EBD9B0"/>
-                </a:solidFill>
-                <a:latin typeface="Tahoma"/>
-              </a:rPr>
-              <a:t>Thank you</a:t>
+              <a:rPr sz="2000" b="1" i="0">
+                <a:solidFill>
+                  <a:srgbClr val="068734"/>
+                </a:solidFill>
+                <a:latin typeface="Tahoma"/>
+              </a:rPr>
+              <a:t>THAI SUMMIT GROUP</a:t>
+            </a:r>
+          </a:p>
+        </p:txBody>
+      </p:sp>
+      <p:sp>
+        <p:nvSpPr>
+          <p:cNvPr id="6" name="TextBox 5"/>
+          <p:cNvSpPr txBox="1"/>
+          <p:nvPr/>
+        </p:nvSpPr>
+        <p:spPr>
+          <a:xfrm>
+            <a:off x="9400032" y="6510528"/>
+            <a:ext cx="2514600" cy="292608"/>
+          </a:xfrm>
+          <a:prstGeom prst="rect">
+            <a:avLst/>
+          </a:prstGeom>
+          <a:noFill/>
+        </p:spPr>
+        <p:txBody>
+          <a:bodyPr wrap="square" anchor="t" lIns="27432" rIns="27432" tIns="9144" bIns="9144">
+            <a:spAutoFit/>
+          </a:bodyPr>
+          <a:lstStyle/>
+          <a:p>
+            <a:pPr algn="r">
+              <a:spcBef>
+                <a:spcPts val="0"/>
+              </a:spcBef>
+              <a:spcAft>
+                <a:spcPts val="200"/>
+              </a:spcAft>
+            </a:pPr>
+            <a:r>
+              <a:rPr sz="1200" b="0" i="0">
+                <a:solidFill>
+                  <a:srgbClr val="068734"/>
+                </a:solidFill>
+                <a:latin typeface="Tahoma"/>
+              </a:rPr>
+              <a:t>19</a:t>
             </a:r>
           </a:p>
         </p:txBody>
@@ -15490,16 +15691,16 @@
         </p:nvSpPr>
         <p:spPr>
           <a:xfrm>
-            <a:off x="457200" y="256032"/>
-            <a:ext cx="7315200" cy="868680"/>
-          </a:xfrm>
-          <a:prstGeom prst="rect">
-            <a:avLst/>
-          </a:prstGeom>
-          <a:noFill/>
-        </p:spPr>
-        <p:txBody>
-          <a:bodyPr wrap="square" anchor="ctr" lIns="27432" rIns="27432" tIns="9144" bIns="9144">
+            <a:off x="256032" y="256032"/>
+            <a:ext cx="11430000" cy="649224"/>
+          </a:xfrm>
+          <a:prstGeom prst="rect">
+            <a:avLst/>
+          </a:prstGeom>
+          <a:noFill/>
+        </p:spPr>
+        <p:txBody>
+          <a:bodyPr wrap="square" anchor="t" lIns="27432" rIns="27432" tIns="9144" bIns="9144">
             <a:spAutoFit/>
           </a:bodyPr>
           <a:lstStyle/>
@@ -15513,20 +15714,398 @@
               </a:spcAft>
             </a:pPr>
             <a:r>
-              <a:rPr sz="3400" b="1" i="0">
-                <a:solidFill>
-                  <a:srgbClr val="0D3D14"/>
+              <a:rPr sz="3600" b="1" i="0">
+                <a:solidFill>
+                  <a:srgbClr val="068734"/>
+                </a:solidFill>
+                <a:latin typeface="Tahoma"/>
+              </a:rPr>
+              <a:t>ESM DEPARTMENT ROADSHOW</a:t>
+            </a:r>
+          </a:p>
+        </p:txBody>
+      </p:sp>
+      <p:sp>
+        <p:nvSpPr>
+          <p:cNvPr id="3" name="TextBox 2"/>
+          <p:cNvSpPr txBox="1"/>
+          <p:nvPr/>
+        </p:nvSpPr>
+        <p:spPr>
+          <a:xfrm>
+            <a:off x="384048" y="960120"/>
+            <a:ext cx="11247120" cy="402336"/>
+          </a:xfrm>
+          <a:prstGeom prst="rect">
+            <a:avLst/>
+          </a:prstGeom>
+          <a:noFill/>
+        </p:spPr>
+        <p:txBody>
+          <a:bodyPr wrap="square" anchor="t" lIns="27432" rIns="27432" tIns="9144" bIns="9144">
+            <a:spAutoFit/>
+          </a:bodyPr>
+          <a:lstStyle/>
+          <a:p>
+            <a:pPr algn="l">
+              <a:spcBef>
+                <a:spcPts val="0"/>
+              </a:spcBef>
+              <a:spcAft>
+                <a:spcPts val="200"/>
+              </a:spcAft>
+            </a:pPr>
+            <a:r>
+              <a:rPr sz="2000" b="1" i="0">
+                <a:solidFill>
+                  <a:srgbClr val="068734"/>
                 </a:solidFill>
                 <a:latin typeface="Tahoma"/>
               </a:rPr>
               <a:t>Agenda</a:t>
+            </a:r>
+          </a:p>
+        </p:txBody>
+      </p:sp>
+      <p:sp>
+        <p:nvSpPr>
+          <p:cNvPr id="4" name="TextBox 3"/>
+          <p:cNvSpPr txBox="1"/>
+          <p:nvPr/>
+        </p:nvSpPr>
+        <p:spPr>
+          <a:xfrm>
+            <a:off x="1426464" y="1764792"/>
+            <a:ext cx="10058400" cy="384048"/>
+          </a:xfrm>
+          <a:prstGeom prst="rect">
+            <a:avLst/>
+          </a:prstGeom>
+          <a:noFill/>
+        </p:spPr>
+        <p:txBody>
+          <a:bodyPr wrap="square" anchor="t" lIns="27432" rIns="27432" tIns="9144" bIns="9144">
+            <a:spAutoFit/>
+          </a:bodyPr>
+          <a:lstStyle/>
+          <a:p>
+            <a:pPr algn="l">
+              <a:spcBef>
+                <a:spcPts val="0"/>
+              </a:spcBef>
+              <a:spcAft>
+                <a:spcPts val="200"/>
+              </a:spcAft>
+            </a:pPr>
+            <a:r>
+              <a:rPr sz="1800" b="1" i="0">
+                <a:solidFill>
+                  <a:srgbClr val="068734"/>
+                </a:solidFill>
+                <a:latin typeface="Tahoma"/>
+              </a:rPr>
+              <a:t>1.   Why ESM</a:t>
+            </a:r>
+          </a:p>
+        </p:txBody>
+      </p:sp>
+      <p:sp>
+        <p:nvSpPr>
+          <p:cNvPr id="5" name="TextBox 4"/>
+          <p:cNvSpPr txBox="1"/>
+          <p:nvPr/>
+        </p:nvSpPr>
+        <p:spPr>
+          <a:xfrm>
+            <a:off x="1874519" y="2148840"/>
+            <a:ext cx="9601200" cy="329184"/>
+          </a:xfrm>
+          <a:prstGeom prst="rect">
+            <a:avLst/>
+          </a:prstGeom>
+          <a:noFill/>
+        </p:spPr>
+        <p:txBody>
+          <a:bodyPr wrap="square" anchor="t" lIns="27432" rIns="27432" tIns="9144" bIns="9144">
+            <a:spAutoFit/>
+          </a:bodyPr>
+          <a:lstStyle/>
+          <a:p>
+            <a:pPr algn="l">
+              <a:spcBef>
+                <a:spcPts val="0"/>
+              </a:spcBef>
+              <a:spcAft>
+                <a:spcPts val="200"/>
+              </a:spcAft>
+            </a:pPr>
+            <a:r>
+              <a:rPr sz="1300" b="0" i="0">
+                <a:solidFill>
+                  <a:srgbClr val="555555"/>
+                </a:solidFill>
+                <a:latin typeface="Tahoma"/>
+              </a:rPr>
+              <a:t>One shopfloor record instead of paper, Excel and chat groups</a:t>
+            </a:r>
+          </a:p>
+        </p:txBody>
+      </p:sp>
+      <p:sp>
+        <p:nvSpPr>
+          <p:cNvPr id="6" name="TextBox 5"/>
+          <p:cNvSpPr txBox="1"/>
+          <p:nvPr/>
+        </p:nvSpPr>
+        <p:spPr>
+          <a:xfrm>
+            <a:off x="1426464" y="2606040"/>
+            <a:ext cx="10058400" cy="384048"/>
+          </a:xfrm>
+          <a:prstGeom prst="rect">
+            <a:avLst/>
+          </a:prstGeom>
+          <a:noFill/>
+        </p:spPr>
+        <p:txBody>
+          <a:bodyPr wrap="square" anchor="t" lIns="27432" rIns="27432" tIns="9144" bIns="9144">
+            <a:spAutoFit/>
+          </a:bodyPr>
+          <a:lstStyle/>
+          <a:p>
+            <a:pPr algn="l">
+              <a:spcBef>
+                <a:spcPts val="0"/>
+              </a:spcBef>
+              <a:spcAft>
+                <a:spcPts val="200"/>
+              </a:spcAft>
+            </a:pPr>
+            <a:r>
+              <a:rPr sz="1800" b="1" i="0">
+                <a:solidFill>
+                  <a:srgbClr val="068734"/>
+                </a:solidFill>
+                <a:latin typeface="Tahoma"/>
+              </a:rPr>
+              <a:t>2.   Cross-department speed</a:t>
+            </a:r>
+          </a:p>
+        </p:txBody>
+      </p:sp>
+      <p:sp>
+        <p:nvSpPr>
+          <p:cNvPr id="7" name="TextBox 6"/>
+          <p:cNvSpPr txBox="1"/>
+          <p:nvPr/>
+        </p:nvSpPr>
+        <p:spPr>
+          <a:xfrm>
+            <a:off x="1874519" y="2990088"/>
+            <a:ext cx="9601200" cy="329184"/>
+          </a:xfrm>
+          <a:prstGeom prst="rect">
+            <a:avLst/>
+          </a:prstGeom>
+          <a:noFill/>
+        </p:spPr>
+        <p:txBody>
+          <a:bodyPr wrap="square" anchor="t" lIns="27432" rIns="27432" tIns="9144" bIns="9144">
+            <a:spAutoFit/>
+          </a:bodyPr>
+          <a:lstStyle/>
+          <a:p>
+            <a:pPr algn="l">
+              <a:spcBef>
+                <a:spcPts val="0"/>
+              </a:spcBef>
+              <a:spcAft>
+                <a:spcPts val="200"/>
+              </a:spcAft>
+            </a:pPr>
+            <a:r>
+              <a:rPr sz="1300" b="0" i="0">
+                <a:solidFill>
+                  <a:srgbClr val="555555"/>
+                </a:solidFill>
+                <a:latin typeface="Tahoma"/>
+              </a:rPr>
+              <a:t>Measured hand-offs: calls, repairs, approvals</a:t>
+            </a:r>
+          </a:p>
+        </p:txBody>
+      </p:sp>
+      <p:sp>
+        <p:nvSpPr>
+          <p:cNvPr id="8" name="TextBox 7"/>
+          <p:cNvSpPr txBox="1"/>
+          <p:nvPr/>
+        </p:nvSpPr>
+        <p:spPr>
+          <a:xfrm>
+            <a:off x="1426464" y="3447288"/>
+            <a:ext cx="10058400" cy="384048"/>
+          </a:xfrm>
+          <a:prstGeom prst="rect">
+            <a:avLst/>
+          </a:prstGeom>
+          <a:noFill/>
+        </p:spPr>
+        <p:txBody>
+          <a:bodyPr wrap="square" anchor="t" lIns="27432" rIns="27432" tIns="9144" bIns="9144">
+            <a:spAutoFit/>
+          </a:bodyPr>
+          <a:lstStyle/>
+          <a:p>
+            <a:pPr algn="l">
+              <a:spcBef>
+                <a:spcPts val="0"/>
+              </a:spcBef>
+              <a:spcAft>
+                <a:spcPts val="200"/>
+              </a:spcAft>
+            </a:pPr>
+            <a:r>
+              <a:rPr sz="1800" b="1" i="0">
+                <a:solidFill>
+                  <a:srgbClr val="068734"/>
+                </a:solidFill>
+                <a:latin typeface="Tahoma"/>
+              </a:rPr>
+              <a:t>3.   Department stories</a:t>
+            </a:r>
+          </a:p>
+        </p:txBody>
+      </p:sp>
+      <p:sp>
+        <p:nvSpPr>
+          <p:cNvPr id="9" name="TextBox 8"/>
+          <p:cNvSpPr txBox="1"/>
+          <p:nvPr/>
+        </p:nvSpPr>
+        <p:spPr>
+          <a:xfrm>
+            <a:off x="1874519" y="3831336"/>
+            <a:ext cx="9601200" cy="329184"/>
+          </a:xfrm>
+          <a:prstGeom prst="rect">
+            <a:avLst/>
+          </a:prstGeom>
+          <a:noFill/>
+        </p:spPr>
+        <p:txBody>
+          <a:bodyPr wrap="square" anchor="t" lIns="27432" rIns="27432" tIns="9144" bIns="9144">
+            <a:spAutoFit/>
+          </a:bodyPr>
+          <a:lstStyle/>
+          <a:p>
+            <a:pPr algn="l">
+              <a:spcBef>
+                <a:spcPts val="0"/>
+              </a:spcBef>
+              <a:spcAft>
+                <a:spcPts val="200"/>
+              </a:spcAft>
+            </a:pPr>
+            <a:r>
+              <a:rPr sz="1300" b="0" i="0">
+                <a:solidFill>
+                  <a:srgbClr val="555555"/>
+                </a:solidFill>
+                <a:latin typeface="Tahoma"/>
+              </a:rPr>
+              <a:t>Production · MTN · JIG/DIE · Store · Logistic · Planning · QA · PE · HR · Management</a:t>
+            </a:r>
+          </a:p>
+        </p:txBody>
+      </p:sp>
+      <p:sp>
+        <p:nvSpPr>
+          <p:cNvPr id="10" name="TextBox 9"/>
+          <p:cNvSpPr txBox="1"/>
+          <p:nvPr/>
+        </p:nvSpPr>
+        <p:spPr>
+          <a:xfrm>
+            <a:off x="1426464" y="4288536"/>
+            <a:ext cx="10058400" cy="384048"/>
+          </a:xfrm>
+          <a:prstGeom prst="rect">
+            <a:avLst/>
+          </a:prstGeom>
+          <a:noFill/>
+        </p:spPr>
+        <p:txBody>
+          <a:bodyPr wrap="square" anchor="t" lIns="27432" rIns="27432" tIns="9144" bIns="9144">
+            <a:spAutoFit/>
+          </a:bodyPr>
+          <a:lstStyle/>
+          <a:p>
+            <a:pPr algn="l">
+              <a:spcBef>
+                <a:spcPts val="0"/>
+              </a:spcBef>
+              <a:spcAft>
+                <a:spcPts val="200"/>
+              </a:spcAft>
+            </a:pPr>
+            <a:r>
+              <a:rPr sz="1800" b="1" i="0">
+                <a:solidFill>
+                  <a:srgbClr val="068734"/>
+                </a:solidFill>
+                <a:latin typeface="Tahoma"/>
+              </a:rPr>
+              <a:t>4.   Honest status &amp; next steps</a:t>
+            </a:r>
+          </a:p>
+        </p:txBody>
+      </p:sp>
+      <p:sp>
+        <p:nvSpPr>
+          <p:cNvPr id="11" name="TextBox 10"/>
+          <p:cNvSpPr txBox="1"/>
+          <p:nvPr/>
+        </p:nvSpPr>
+        <p:spPr>
+          <a:xfrm>
+            <a:off x="1874519" y="4672584"/>
+            <a:ext cx="9601200" cy="329184"/>
+          </a:xfrm>
+          <a:prstGeom prst="rect">
+            <a:avLst/>
+          </a:prstGeom>
+          <a:noFill/>
+        </p:spPr>
+        <p:txBody>
+          <a:bodyPr wrap="square" anchor="t" lIns="27432" rIns="27432" tIns="9144" bIns="9144">
+            <a:spAutoFit/>
+          </a:bodyPr>
+          <a:lstStyle/>
+          <a:p>
+            <a:pPr algn="l">
+              <a:spcBef>
+                <a:spcPts val="0"/>
+              </a:spcBef>
+              <a:spcAft>
+                <a:spcPts val="200"/>
+              </a:spcAft>
+            </a:pPr>
+            <a:r>
+              <a:rPr sz="1300" b="0" i="0">
+                <a:solidFill>
+                  <a:srgbClr val="555555"/>
+                </a:solidFill>
+                <a:latin typeface="Tahoma"/>
+              </a:rPr>
+              <a:t>What is still slow and what each department commits to</a:t>
             </a:r>
           </a:p>
         </p:txBody>
       </p:sp>
       <p:pic>
         <p:nvPicPr>
-          <p:cNvPr id="3" name="Picture 2" descr="logo_big.png"/>
+          <p:cNvPr id="12" name="Picture 11" descr="logo_r01.png"/>
           <p:cNvPicPr>
             <a:picLocks noChangeAspect="1"/>
           </p:cNvPicPr>
@@ -15540,8 +16119,8 @@
         </p:blipFill>
         <p:spPr>
           <a:xfrm>
-            <a:off x="8412480" y="1463040"/>
-            <a:ext cx="3108960" cy="3291840"/>
+            <a:off x="249631" y="6448348"/>
+            <a:ext cx="237744" cy="237744"/>
           </a:xfrm>
           <a:prstGeom prst="rect">
             <a:avLst/>
@@ -15550,58 +16129,14 @@
       </p:pic>
       <p:sp>
         <p:nvSpPr>
-          <p:cNvPr id="4" name="Oval 3"/>
-          <p:cNvSpPr/>
-          <p:nvPr/>
-        </p:nvSpPr>
-        <p:spPr>
-          <a:xfrm>
-            <a:off x="640080" y="1417320"/>
-            <a:ext cx="566928" cy="566928"/>
-          </a:xfrm>
-          <a:prstGeom prst="ellipse">
-            <a:avLst/>
-          </a:prstGeom>
-          <a:solidFill>
-            <a:srgbClr val="C0561E"/>
-          </a:solidFill>
-          <a:ln>
-            <a:noFill/>
-          </a:ln>
-          <a:effectLst/>
-        </p:spPr>
-        <p:style>
-          <a:lnRef idx="1">
-            <a:schemeClr val="accent1"/>
-          </a:lnRef>
-          <a:fillRef idx="3">
-            <a:schemeClr val="accent1"/>
-          </a:fillRef>
-          <a:effectRef idx="2">
-            <a:schemeClr val="accent1"/>
-          </a:effectRef>
-          <a:fontRef idx="minor">
-            <a:schemeClr val="lt1"/>
-          </a:fontRef>
-        </p:style>
-        <p:txBody>
-          <a:bodyPr rtlCol="0" anchor="ctr"/>
-          <a:lstStyle/>
-          <a:p>
-            <a:pPr algn="ctr"/>
-          </a:p>
-        </p:txBody>
-      </p:sp>
-      <p:sp>
-        <p:nvSpPr>
-          <p:cNvPr id="5" name="TextBox 4"/>
-          <p:cNvSpPr txBox="1"/>
-          <p:nvPr/>
-        </p:nvSpPr>
-        <p:spPr>
-          <a:xfrm>
-            <a:off x="640080" y="1417320"/>
-            <a:ext cx="566928" cy="566928"/>
+          <p:cNvPr id="13" name="TextBox 12"/>
+          <p:cNvSpPr txBox="1"/>
+          <p:nvPr/>
+        </p:nvSpPr>
+        <p:spPr>
+          <a:xfrm>
+            <a:off x="566928" y="6353251"/>
+            <a:ext cx="3246120" cy="400507"/>
           </a:xfrm>
           <a:prstGeom prst="rect">
             <a:avLst/>
@@ -15614,7 +16149,7 @@
           </a:bodyPr>
           <a:lstStyle/>
           <a:p>
-            <a:pPr algn="ctr">
+            <a:pPr algn="l">
               <a:spcBef>
                 <a:spcPts val="0"/>
               </a:spcBef>
@@ -15625,25 +16160,25 @@
             <a:r>
               <a:rPr sz="2000" b="1" i="0">
                 <a:solidFill>
-                  <a:srgbClr val="FFFFFF"/>
-                </a:solidFill>
-                <a:latin typeface="Tahoma"/>
-              </a:rPr>
-              <a:t>1</a:t>
-            </a:r>
-          </a:p>
-        </p:txBody>
-      </p:sp>
-      <p:sp>
-        <p:nvSpPr>
-          <p:cNvPr id="6" name="TextBox 5"/>
-          <p:cNvSpPr txBox="1"/>
-          <p:nvPr/>
-        </p:nvSpPr>
-        <p:spPr>
-          <a:xfrm>
-            <a:off x="1417320" y="1371600"/>
-            <a:ext cx="6766560" cy="411480"/>
+                  <a:srgbClr val="068734"/>
+                </a:solidFill>
+                <a:latin typeface="Tahoma"/>
+              </a:rPr>
+              <a:t>THAI SUMMIT GROUP</a:t>
+            </a:r>
+          </a:p>
+        </p:txBody>
+      </p:sp>
+      <p:sp>
+        <p:nvSpPr>
+          <p:cNvPr id="14" name="TextBox 13"/>
+          <p:cNvSpPr txBox="1"/>
+          <p:nvPr/>
+        </p:nvSpPr>
+        <p:spPr>
+          <a:xfrm>
+            <a:off x="9400032" y="6510528"/>
+            <a:ext cx="2514600" cy="292608"/>
           </a:xfrm>
           <a:prstGeom prst="rect">
             <a:avLst/>
@@ -15656,7 +16191,7 @@
           </a:bodyPr>
           <a:lstStyle/>
           <a:p>
-            <a:pPr algn="l">
+            <a:pPr algn="r">
               <a:spcBef>
                 <a:spcPts val="0"/>
               </a:spcBef>
@@ -15665,669 +16200,9 @@
               </a:spcAft>
             </a:pPr>
             <a:r>
-              <a:rPr sz="1800" b="1" i="0">
-                <a:solidFill>
-                  <a:srgbClr val="0D3D14"/>
-                </a:solidFill>
-                <a:latin typeface="Tahoma"/>
-              </a:rPr>
-              <a:t>Why ESM</a:t>
-            </a:r>
-          </a:p>
-        </p:txBody>
-      </p:sp>
-      <p:sp>
-        <p:nvSpPr>
-          <p:cNvPr id="7" name="TextBox 6"/>
-          <p:cNvSpPr txBox="1"/>
-          <p:nvPr/>
-        </p:nvSpPr>
-        <p:spPr>
-          <a:xfrm>
-            <a:off x="1417320" y="1764792"/>
-            <a:ext cx="6766560" cy="365760"/>
-          </a:xfrm>
-          <a:prstGeom prst="rect">
-            <a:avLst/>
-          </a:prstGeom>
-          <a:noFill/>
-        </p:spPr>
-        <p:txBody>
-          <a:bodyPr wrap="square" anchor="t" lIns="27432" rIns="27432" tIns="9144" bIns="9144">
-            <a:spAutoFit/>
-          </a:bodyPr>
-          <a:lstStyle/>
-          <a:p>
-            <a:pPr algn="l">
-              <a:spcBef>
-                <a:spcPts val="0"/>
-              </a:spcBef>
-              <a:spcAft>
-                <a:spcPts val="200"/>
-              </a:spcAft>
-            </a:pPr>
-            <a:r>
               <a:rPr sz="1200" b="0" i="0">
                 <a:solidFill>
-                  <a:srgbClr val="555555"/>
-                </a:solidFill>
-                <a:latin typeface="Tahoma"/>
-              </a:rPr>
-              <a:t>One shopfloor record instead of paper, Excel and chat groups</a:t>
-            </a:r>
-          </a:p>
-        </p:txBody>
-      </p:sp>
-      <p:sp>
-        <p:nvSpPr>
-          <p:cNvPr id="8" name="Oval 7"/>
-          <p:cNvSpPr/>
-          <p:nvPr/>
-        </p:nvSpPr>
-        <p:spPr>
-          <a:xfrm>
-            <a:off x="640080" y="2496312"/>
-            <a:ext cx="566928" cy="566928"/>
-          </a:xfrm>
-          <a:prstGeom prst="ellipse">
-            <a:avLst/>
-          </a:prstGeom>
-          <a:solidFill>
-            <a:srgbClr val="C0561E"/>
-          </a:solidFill>
-          <a:ln>
-            <a:noFill/>
-          </a:ln>
-          <a:effectLst/>
-        </p:spPr>
-        <p:style>
-          <a:lnRef idx="1">
-            <a:schemeClr val="accent1"/>
-          </a:lnRef>
-          <a:fillRef idx="3">
-            <a:schemeClr val="accent1"/>
-          </a:fillRef>
-          <a:effectRef idx="2">
-            <a:schemeClr val="accent1"/>
-          </a:effectRef>
-          <a:fontRef idx="minor">
-            <a:schemeClr val="lt1"/>
-          </a:fontRef>
-        </p:style>
-        <p:txBody>
-          <a:bodyPr rtlCol="0" anchor="ctr"/>
-          <a:lstStyle/>
-          <a:p>
-            <a:pPr algn="ctr"/>
-          </a:p>
-        </p:txBody>
-      </p:sp>
-      <p:sp>
-        <p:nvSpPr>
-          <p:cNvPr id="9" name="TextBox 8"/>
-          <p:cNvSpPr txBox="1"/>
-          <p:nvPr/>
-        </p:nvSpPr>
-        <p:spPr>
-          <a:xfrm>
-            <a:off x="640080" y="2496312"/>
-            <a:ext cx="566928" cy="566928"/>
-          </a:xfrm>
-          <a:prstGeom prst="rect">
-            <a:avLst/>
-          </a:prstGeom>
-          <a:noFill/>
-        </p:spPr>
-        <p:txBody>
-          <a:bodyPr wrap="square" anchor="ctr" lIns="27432" rIns="27432" tIns="9144" bIns="9144">
-            <a:spAutoFit/>
-          </a:bodyPr>
-          <a:lstStyle/>
-          <a:p>
-            <a:pPr algn="ctr">
-              <a:spcBef>
-                <a:spcPts val="0"/>
-              </a:spcBef>
-              <a:spcAft>
-                <a:spcPts val="200"/>
-              </a:spcAft>
-            </a:pPr>
-            <a:r>
-              <a:rPr sz="2000" b="1" i="0">
-                <a:solidFill>
-                  <a:srgbClr val="FFFFFF"/>
-                </a:solidFill>
-                <a:latin typeface="Tahoma"/>
-              </a:rPr>
-              <a:t>2</a:t>
-            </a:r>
-          </a:p>
-        </p:txBody>
-      </p:sp>
-      <p:sp>
-        <p:nvSpPr>
-          <p:cNvPr id="10" name="TextBox 9"/>
-          <p:cNvSpPr txBox="1"/>
-          <p:nvPr/>
-        </p:nvSpPr>
-        <p:spPr>
-          <a:xfrm>
-            <a:off x="1417320" y="2450592"/>
-            <a:ext cx="6766560" cy="411480"/>
-          </a:xfrm>
-          <a:prstGeom prst="rect">
-            <a:avLst/>
-          </a:prstGeom>
-          <a:noFill/>
-        </p:spPr>
-        <p:txBody>
-          <a:bodyPr wrap="square" anchor="t" lIns="27432" rIns="27432" tIns="9144" bIns="9144">
-            <a:spAutoFit/>
-          </a:bodyPr>
-          <a:lstStyle/>
-          <a:p>
-            <a:pPr algn="l">
-              <a:spcBef>
-                <a:spcPts val="0"/>
-              </a:spcBef>
-              <a:spcAft>
-                <a:spcPts val="200"/>
-              </a:spcAft>
-            </a:pPr>
-            <a:r>
-              <a:rPr sz="1800" b="1" i="0">
-                <a:solidFill>
-                  <a:srgbClr val="0D3D14"/>
-                </a:solidFill>
-                <a:latin typeface="Tahoma"/>
-              </a:rPr>
-              <a:t>Cross-department speed</a:t>
-            </a:r>
-          </a:p>
-        </p:txBody>
-      </p:sp>
-      <p:sp>
-        <p:nvSpPr>
-          <p:cNvPr id="11" name="TextBox 10"/>
-          <p:cNvSpPr txBox="1"/>
-          <p:nvPr/>
-        </p:nvSpPr>
-        <p:spPr>
-          <a:xfrm>
-            <a:off x="1417320" y="2843784"/>
-            <a:ext cx="6766560" cy="365760"/>
-          </a:xfrm>
-          <a:prstGeom prst="rect">
-            <a:avLst/>
-          </a:prstGeom>
-          <a:noFill/>
-        </p:spPr>
-        <p:txBody>
-          <a:bodyPr wrap="square" anchor="t" lIns="27432" rIns="27432" tIns="9144" bIns="9144">
-            <a:spAutoFit/>
-          </a:bodyPr>
-          <a:lstStyle/>
-          <a:p>
-            <a:pPr algn="l">
-              <a:spcBef>
-                <a:spcPts val="0"/>
-              </a:spcBef>
-              <a:spcAft>
-                <a:spcPts val="200"/>
-              </a:spcAft>
-            </a:pPr>
-            <a:r>
-              <a:rPr sz="1200" b="0" i="0">
-                <a:solidFill>
-                  <a:srgbClr val="555555"/>
-                </a:solidFill>
-                <a:latin typeface="Tahoma"/>
-              </a:rPr>
-              <a:t>Measured hand-offs: calls, repairs, approvals</a:t>
-            </a:r>
-          </a:p>
-        </p:txBody>
-      </p:sp>
-      <p:sp>
-        <p:nvSpPr>
-          <p:cNvPr id="12" name="Oval 11"/>
-          <p:cNvSpPr/>
-          <p:nvPr/>
-        </p:nvSpPr>
-        <p:spPr>
-          <a:xfrm>
-            <a:off x="640080" y="3575304"/>
-            <a:ext cx="566928" cy="566928"/>
-          </a:xfrm>
-          <a:prstGeom prst="ellipse">
-            <a:avLst/>
-          </a:prstGeom>
-          <a:solidFill>
-            <a:srgbClr val="C0561E"/>
-          </a:solidFill>
-          <a:ln>
-            <a:noFill/>
-          </a:ln>
-          <a:effectLst/>
-        </p:spPr>
-        <p:style>
-          <a:lnRef idx="1">
-            <a:schemeClr val="accent1"/>
-          </a:lnRef>
-          <a:fillRef idx="3">
-            <a:schemeClr val="accent1"/>
-          </a:fillRef>
-          <a:effectRef idx="2">
-            <a:schemeClr val="accent1"/>
-          </a:effectRef>
-          <a:fontRef idx="minor">
-            <a:schemeClr val="lt1"/>
-          </a:fontRef>
-        </p:style>
-        <p:txBody>
-          <a:bodyPr rtlCol="0" anchor="ctr"/>
-          <a:lstStyle/>
-          <a:p>
-            <a:pPr algn="ctr"/>
-          </a:p>
-        </p:txBody>
-      </p:sp>
-      <p:sp>
-        <p:nvSpPr>
-          <p:cNvPr id="13" name="TextBox 12"/>
-          <p:cNvSpPr txBox="1"/>
-          <p:nvPr/>
-        </p:nvSpPr>
-        <p:spPr>
-          <a:xfrm>
-            <a:off x="640080" y="3575304"/>
-            <a:ext cx="566928" cy="566928"/>
-          </a:xfrm>
-          <a:prstGeom prst="rect">
-            <a:avLst/>
-          </a:prstGeom>
-          <a:noFill/>
-        </p:spPr>
-        <p:txBody>
-          <a:bodyPr wrap="square" anchor="ctr" lIns="27432" rIns="27432" tIns="9144" bIns="9144">
-            <a:spAutoFit/>
-          </a:bodyPr>
-          <a:lstStyle/>
-          <a:p>
-            <a:pPr algn="ctr">
-              <a:spcBef>
-                <a:spcPts val="0"/>
-              </a:spcBef>
-              <a:spcAft>
-                <a:spcPts val="200"/>
-              </a:spcAft>
-            </a:pPr>
-            <a:r>
-              <a:rPr sz="2000" b="1" i="0">
-                <a:solidFill>
-                  <a:srgbClr val="FFFFFF"/>
-                </a:solidFill>
-                <a:latin typeface="Tahoma"/>
-              </a:rPr>
-              <a:t>3</a:t>
-            </a:r>
-          </a:p>
-        </p:txBody>
-      </p:sp>
-      <p:sp>
-        <p:nvSpPr>
-          <p:cNvPr id="14" name="TextBox 13"/>
-          <p:cNvSpPr txBox="1"/>
-          <p:nvPr/>
-        </p:nvSpPr>
-        <p:spPr>
-          <a:xfrm>
-            <a:off x="1417320" y="3529584"/>
-            <a:ext cx="6766560" cy="411480"/>
-          </a:xfrm>
-          <a:prstGeom prst="rect">
-            <a:avLst/>
-          </a:prstGeom>
-          <a:noFill/>
-        </p:spPr>
-        <p:txBody>
-          <a:bodyPr wrap="square" anchor="t" lIns="27432" rIns="27432" tIns="9144" bIns="9144">
-            <a:spAutoFit/>
-          </a:bodyPr>
-          <a:lstStyle/>
-          <a:p>
-            <a:pPr algn="l">
-              <a:spcBef>
-                <a:spcPts val="0"/>
-              </a:spcBef>
-              <a:spcAft>
-                <a:spcPts val="200"/>
-              </a:spcAft>
-            </a:pPr>
-            <a:r>
-              <a:rPr sz="1800" b="1" i="0">
-                <a:solidFill>
-                  <a:srgbClr val="0D3D14"/>
-                </a:solidFill>
-                <a:latin typeface="Tahoma"/>
-              </a:rPr>
-              <a:t>Department stories</a:t>
-            </a:r>
-          </a:p>
-        </p:txBody>
-      </p:sp>
-      <p:sp>
-        <p:nvSpPr>
-          <p:cNvPr id="15" name="TextBox 14"/>
-          <p:cNvSpPr txBox="1"/>
-          <p:nvPr/>
-        </p:nvSpPr>
-        <p:spPr>
-          <a:xfrm>
-            <a:off x="1417320" y="3922776"/>
-            <a:ext cx="6766560" cy="365760"/>
-          </a:xfrm>
-          <a:prstGeom prst="rect">
-            <a:avLst/>
-          </a:prstGeom>
-          <a:noFill/>
-        </p:spPr>
-        <p:txBody>
-          <a:bodyPr wrap="square" anchor="t" lIns="27432" rIns="27432" tIns="9144" bIns="9144">
-            <a:spAutoFit/>
-          </a:bodyPr>
-          <a:lstStyle/>
-          <a:p>
-            <a:pPr algn="l">
-              <a:spcBef>
-                <a:spcPts val="0"/>
-              </a:spcBef>
-              <a:spcAft>
-                <a:spcPts val="200"/>
-              </a:spcAft>
-            </a:pPr>
-            <a:r>
-              <a:rPr sz="1200" b="0" i="0">
-                <a:solidFill>
-                  <a:srgbClr val="555555"/>
-                </a:solidFill>
-                <a:latin typeface="Tahoma"/>
-              </a:rPr>
-              <a:t>Production · MTN · JIG/DIE · Store · Logistic · Planning · QA · PE · HR · Management</a:t>
-            </a:r>
-          </a:p>
-        </p:txBody>
-      </p:sp>
-      <p:sp>
-        <p:nvSpPr>
-          <p:cNvPr id="16" name="Oval 15"/>
-          <p:cNvSpPr/>
-          <p:nvPr/>
-        </p:nvSpPr>
-        <p:spPr>
-          <a:xfrm>
-            <a:off x="640080" y="4654296"/>
-            <a:ext cx="566928" cy="566928"/>
-          </a:xfrm>
-          <a:prstGeom prst="ellipse">
-            <a:avLst/>
-          </a:prstGeom>
-          <a:solidFill>
-            <a:srgbClr val="C0561E"/>
-          </a:solidFill>
-          <a:ln>
-            <a:noFill/>
-          </a:ln>
-          <a:effectLst/>
-        </p:spPr>
-        <p:style>
-          <a:lnRef idx="1">
-            <a:schemeClr val="accent1"/>
-          </a:lnRef>
-          <a:fillRef idx="3">
-            <a:schemeClr val="accent1"/>
-          </a:fillRef>
-          <a:effectRef idx="2">
-            <a:schemeClr val="accent1"/>
-          </a:effectRef>
-          <a:fontRef idx="minor">
-            <a:schemeClr val="lt1"/>
-          </a:fontRef>
-        </p:style>
-        <p:txBody>
-          <a:bodyPr rtlCol="0" anchor="ctr"/>
-          <a:lstStyle/>
-          <a:p>
-            <a:pPr algn="ctr"/>
-          </a:p>
-        </p:txBody>
-      </p:sp>
-      <p:sp>
-        <p:nvSpPr>
-          <p:cNvPr id="17" name="TextBox 16"/>
-          <p:cNvSpPr txBox="1"/>
-          <p:nvPr/>
-        </p:nvSpPr>
-        <p:spPr>
-          <a:xfrm>
-            <a:off x="640080" y="4654296"/>
-            <a:ext cx="566928" cy="566928"/>
-          </a:xfrm>
-          <a:prstGeom prst="rect">
-            <a:avLst/>
-          </a:prstGeom>
-          <a:noFill/>
-        </p:spPr>
-        <p:txBody>
-          <a:bodyPr wrap="square" anchor="ctr" lIns="27432" rIns="27432" tIns="9144" bIns="9144">
-            <a:spAutoFit/>
-          </a:bodyPr>
-          <a:lstStyle/>
-          <a:p>
-            <a:pPr algn="ctr">
-              <a:spcBef>
-                <a:spcPts val="0"/>
-              </a:spcBef>
-              <a:spcAft>
-                <a:spcPts val="200"/>
-              </a:spcAft>
-            </a:pPr>
-            <a:r>
-              <a:rPr sz="2000" b="1" i="0">
-                <a:solidFill>
-                  <a:srgbClr val="FFFFFF"/>
-                </a:solidFill>
-                <a:latin typeface="Tahoma"/>
-              </a:rPr>
-              <a:t>4</a:t>
-            </a:r>
-          </a:p>
-        </p:txBody>
-      </p:sp>
-      <p:sp>
-        <p:nvSpPr>
-          <p:cNvPr id="18" name="TextBox 17"/>
-          <p:cNvSpPr txBox="1"/>
-          <p:nvPr/>
-        </p:nvSpPr>
-        <p:spPr>
-          <a:xfrm>
-            <a:off x="1417320" y="4608576"/>
-            <a:ext cx="6766560" cy="411480"/>
-          </a:xfrm>
-          <a:prstGeom prst="rect">
-            <a:avLst/>
-          </a:prstGeom>
-          <a:noFill/>
-        </p:spPr>
-        <p:txBody>
-          <a:bodyPr wrap="square" anchor="t" lIns="27432" rIns="27432" tIns="9144" bIns="9144">
-            <a:spAutoFit/>
-          </a:bodyPr>
-          <a:lstStyle/>
-          <a:p>
-            <a:pPr algn="l">
-              <a:spcBef>
-                <a:spcPts val="0"/>
-              </a:spcBef>
-              <a:spcAft>
-                <a:spcPts val="200"/>
-              </a:spcAft>
-            </a:pPr>
-            <a:r>
-              <a:rPr sz="1800" b="1" i="0">
-                <a:solidFill>
-                  <a:srgbClr val="0D3D14"/>
-                </a:solidFill>
-                <a:latin typeface="Tahoma"/>
-              </a:rPr>
-              <a:t>Honest status &amp; next steps</a:t>
-            </a:r>
-          </a:p>
-        </p:txBody>
-      </p:sp>
-      <p:sp>
-        <p:nvSpPr>
-          <p:cNvPr id="19" name="TextBox 18"/>
-          <p:cNvSpPr txBox="1"/>
-          <p:nvPr/>
-        </p:nvSpPr>
-        <p:spPr>
-          <a:xfrm>
-            <a:off x="1417320" y="5001768"/>
-            <a:ext cx="6766560" cy="365760"/>
-          </a:xfrm>
-          <a:prstGeom prst="rect">
-            <a:avLst/>
-          </a:prstGeom>
-          <a:noFill/>
-        </p:spPr>
-        <p:txBody>
-          <a:bodyPr wrap="square" anchor="t" lIns="27432" rIns="27432" tIns="9144" bIns="9144">
-            <a:spAutoFit/>
-          </a:bodyPr>
-          <a:lstStyle/>
-          <a:p>
-            <a:pPr algn="l">
-              <a:spcBef>
-                <a:spcPts val="0"/>
-              </a:spcBef>
-              <a:spcAft>
-                <a:spcPts val="200"/>
-              </a:spcAft>
-            </a:pPr>
-            <a:r>
-              <a:rPr sz="1200" b="0" i="0">
-                <a:solidFill>
-                  <a:srgbClr val="555555"/>
-                </a:solidFill>
-                <a:latin typeface="Tahoma"/>
-              </a:rPr>
-              <a:t>What is still slow and what each department commits to</a:t>
-            </a:r>
-          </a:p>
-        </p:txBody>
-      </p:sp>
-      <p:pic>
-        <p:nvPicPr>
-          <p:cNvPr id="20" name="Picture 19" descr="logo_footer.png"/>
-          <p:cNvPicPr>
-            <a:picLocks noChangeAspect="1"/>
-          </p:cNvPicPr>
-          <p:nvPr/>
-        </p:nvPicPr>
-        <p:blipFill>
-          <a:blip r:embed="rId3"/>
-          <a:stretch>
-            <a:fillRect/>
-          </a:stretch>
-        </p:blipFill>
-        <p:spPr>
-          <a:xfrm>
-            <a:off x="384048" y="6327648"/>
-            <a:ext cx="365760" cy="384048"/>
-          </a:xfrm>
-          <a:prstGeom prst="rect">
-            <a:avLst/>
-          </a:prstGeom>
-        </p:spPr>
-      </p:pic>
-      <p:sp>
-        <p:nvSpPr>
-          <p:cNvPr id="21" name="TextBox 20"/>
-          <p:cNvSpPr txBox="1"/>
-          <p:nvPr/>
-        </p:nvSpPr>
-        <p:spPr>
-          <a:xfrm>
-            <a:off x="786384" y="6327648"/>
-            <a:ext cx="4114800" cy="411480"/>
-          </a:xfrm>
-          <a:prstGeom prst="rect">
-            <a:avLst/>
-          </a:prstGeom>
-          <a:noFill/>
-        </p:spPr>
-        <p:txBody>
-          <a:bodyPr wrap="square" anchor="ctr" lIns="27432" rIns="27432" tIns="9144" bIns="9144">
-            <a:spAutoFit/>
-          </a:bodyPr>
-          <a:lstStyle/>
-          <a:p>
-            <a:pPr algn="l">
-              <a:spcBef>
-                <a:spcPts val="0"/>
-              </a:spcBef>
-              <a:spcAft>
-                <a:spcPts val="200"/>
-              </a:spcAft>
-            </a:pPr>
-            <a:r>
-              <a:rPr sz="1300" b="1" i="0">
-                <a:solidFill>
-                  <a:srgbClr val="0D3D14"/>
-                </a:solidFill>
-                <a:latin typeface="Tahoma"/>
-              </a:rPr>
-              <a:t>THAI SUMMIT GROUP</a:t>
-            </a:r>
-          </a:p>
-        </p:txBody>
-      </p:sp>
-      <p:sp>
-        <p:nvSpPr>
-          <p:cNvPr id="22" name="TextBox 21"/>
-          <p:cNvSpPr txBox="1"/>
-          <p:nvPr/>
-        </p:nvSpPr>
-        <p:spPr>
-          <a:xfrm>
-            <a:off x="11430000" y="6355080"/>
-            <a:ext cx="594360" cy="365760"/>
-          </a:xfrm>
-          <a:prstGeom prst="rect">
-            <a:avLst/>
-          </a:prstGeom>
-          <a:noFill/>
-        </p:spPr>
-        <p:txBody>
-          <a:bodyPr wrap="square" anchor="ctr" lIns="27432" rIns="27432" tIns="9144" bIns="9144">
-            <a:spAutoFit/>
-          </a:bodyPr>
-          <a:lstStyle/>
-          <a:p>
-            <a:pPr algn="r">
-              <a:spcBef>
-                <a:spcPts val="0"/>
-              </a:spcBef>
-              <a:spcAft>
-                <a:spcPts val="200"/>
-              </a:spcAft>
-            </a:pPr>
-            <a:r>
-              <a:rPr sz="1200" b="0" i="0">
-                <a:solidFill>
-                  <a:srgbClr val="555555"/>
+                  <a:srgbClr val="068734"/>
                 </a:solidFill>
                 <a:latin typeface="Tahoma"/>
               </a:rPr>
@@ -16362,16 +16237,16 @@
         </p:nvSpPr>
         <p:spPr>
           <a:xfrm>
-            <a:off x="457200" y="256032"/>
-            <a:ext cx="10881360" cy="868680"/>
-          </a:xfrm>
-          <a:prstGeom prst="rect">
-            <a:avLst/>
-          </a:prstGeom>
-          <a:noFill/>
-        </p:spPr>
-        <p:txBody>
-          <a:bodyPr wrap="square" anchor="ctr" lIns="27432" rIns="27432" tIns="9144" bIns="9144">
+            <a:off x="256032" y="256032"/>
+            <a:ext cx="11430000" cy="649224"/>
+          </a:xfrm>
+          <a:prstGeom prst="rect">
+            <a:avLst/>
+          </a:prstGeom>
+          <a:noFill/>
+        </p:spPr>
+        <p:txBody>
+          <a:bodyPr wrap="square" anchor="t" lIns="27432" rIns="27432" tIns="9144" bIns="9144">
             <a:spAutoFit/>
           </a:bodyPr>
           <a:lstStyle/>
@@ -16385,9 +16260,9 @@
               </a:spcAft>
             </a:pPr>
             <a:r>
-              <a:rPr sz="3400" b="1" i="0">
-                <a:solidFill>
-                  <a:srgbClr val="0D3D14"/>
+              <a:rPr sz="3600" b="1" i="0">
+                <a:solidFill>
+                  <a:srgbClr val="068734"/>
                 </a:solidFill>
                 <a:latin typeface="Tahoma"/>
               </a:rPr>
@@ -16404,8 +16279,8 @@
         </p:nvSpPr>
         <p:spPr>
           <a:xfrm>
-            <a:off x="502920" y="1024128"/>
-            <a:ext cx="10881360" cy="457200"/>
+            <a:off x="384048" y="960120"/>
+            <a:ext cx="11247120" cy="402336"/>
           </a:xfrm>
           <a:prstGeom prst="rect">
             <a:avLst/>
@@ -16427,9 +16302,9 @@
               </a:spcAft>
             </a:pPr>
             <a:r>
-              <a:rPr sz="1900" b="1" i="0">
-                <a:solidFill>
-                  <a:srgbClr val="2C5F2D"/>
+              <a:rPr sz="2000" b="1" i="0">
+                <a:solidFill>
+                  <a:srgbClr val="068734"/>
                 </a:solidFill>
                 <a:latin typeface="Tahoma"/>
               </a:rPr>
@@ -16440,7 +16315,7 @@
       </p:sp>
       <p:pic>
         <p:nvPicPr>
-          <p:cNvPr id="4" name="Picture 3" descr="logo_footer.png"/>
+          <p:cNvPr id="4" name="Picture 3" descr="logo_r01.png"/>
           <p:cNvPicPr>
             <a:picLocks noChangeAspect="1"/>
           </p:cNvPicPr>
@@ -16454,8 +16329,8 @@
         </p:blipFill>
         <p:spPr>
           <a:xfrm>
-            <a:off x="384048" y="6327648"/>
-            <a:ext cx="365760" cy="384048"/>
+            <a:off x="249631" y="6448348"/>
+            <a:ext cx="237744" cy="237744"/>
           </a:xfrm>
           <a:prstGeom prst="rect">
             <a:avLst/>
@@ -16470,8 +16345,8 @@
         </p:nvSpPr>
         <p:spPr>
           <a:xfrm>
-            <a:off x="786384" y="6327648"/>
-            <a:ext cx="4114800" cy="411480"/>
+            <a:off x="566928" y="6353251"/>
+            <a:ext cx="3246120" cy="400507"/>
           </a:xfrm>
           <a:prstGeom prst="rect">
             <a:avLst/>
@@ -16493,9 +16368,9 @@
               </a:spcAft>
             </a:pPr>
             <a:r>
-              <a:rPr sz="1300" b="1" i="0">
-                <a:solidFill>
-                  <a:srgbClr val="0D3D14"/>
+              <a:rPr sz="2000" b="1" i="0">
+                <a:solidFill>
+                  <a:srgbClr val="068734"/>
                 </a:solidFill>
                 <a:latin typeface="Tahoma"/>
               </a:rPr>
@@ -16512,16 +16387,16 @@
         </p:nvSpPr>
         <p:spPr>
           <a:xfrm>
-            <a:off x="11430000" y="6355080"/>
-            <a:ext cx="594360" cy="365760"/>
-          </a:xfrm>
-          <a:prstGeom prst="rect">
-            <a:avLst/>
-          </a:prstGeom>
-          <a:noFill/>
-        </p:spPr>
-        <p:txBody>
-          <a:bodyPr wrap="square" anchor="ctr" lIns="27432" rIns="27432" tIns="9144" bIns="9144">
+            <a:off x="9400032" y="6510528"/>
+            <a:ext cx="2514600" cy="292608"/>
+          </a:xfrm>
+          <a:prstGeom prst="rect">
+            <a:avLst/>
+          </a:prstGeom>
+          <a:noFill/>
+        </p:spPr>
+        <p:txBody>
+          <a:bodyPr wrap="square" anchor="t" lIns="27432" rIns="27432" tIns="9144" bIns="9144">
             <a:spAutoFit/>
           </a:bodyPr>
           <a:lstStyle/>
@@ -16537,7 +16412,7 @@
             <a:r>
               <a:rPr sz="1200" b="0" i="0">
                 <a:solidFill>
-                  <a:srgbClr val="555555"/>
+                  <a:srgbClr val="068734"/>
                 </a:solidFill>
                 <a:latin typeface="Tahoma"/>
               </a:rPr>
@@ -16565,14 +16440,14 @@
           </a:solidFill>
           <a:ln w="9525">
             <a:solidFill>
-              <a:srgbClr val="D8E4D0"/>
+              <a:srgbClr val="D9D9D9"/>
             </a:solidFill>
           </a:ln>
           <a:effectLst/>
           <a:effectLst>
             <a:outerShdw blurRad="50000" dist="20000" dir="5400000" rotWithShape="0">
               <a:srgbClr val="8A99AD">
-                <a:alpha val="38000"/>
+                <a:alpha val="30000"/>
               </a:srgbClr>
             </a:outerShdw>
           </a:effectLst>
@@ -16718,7 +16593,7 @@
             <a:r>
               <a:rPr sz="1400" b="0" i="0">
                 <a:solidFill>
-                  <a:srgbClr val="2C5F2D"/>
+                  <a:srgbClr val="068734"/>
                 </a:solidFill>
                 <a:latin typeface="Tahoma"/>
               </a:rPr>
@@ -16737,7 +16612,7 @@
             <a:r>
               <a:rPr sz="1400" b="0" i="0">
                 <a:solidFill>
-                  <a:srgbClr val="2C5F2D"/>
+                  <a:srgbClr val="068734"/>
                 </a:solidFill>
                 <a:latin typeface="Tahoma"/>
               </a:rPr>
@@ -16756,7 +16631,7 @@
             <a:r>
               <a:rPr sz="1400" b="0" i="0">
                 <a:solidFill>
-                  <a:srgbClr val="2C5F2D"/>
+                  <a:srgbClr val="068734"/>
                 </a:solidFill>
                 <a:latin typeface="Tahoma"/>
               </a:rPr>
@@ -16775,7 +16650,7 @@
             <a:r>
               <a:rPr sz="1400" b="0" i="0">
                 <a:solidFill>
-                  <a:srgbClr val="2C5F2D"/>
+                  <a:srgbClr val="068734"/>
                 </a:solidFill>
                 <a:latin typeface="Tahoma"/>
               </a:rPr>
@@ -16794,7 +16669,7 @@
             <a:r>
               <a:rPr sz="1400" b="0" i="0">
                 <a:solidFill>
-                  <a:srgbClr val="2C5F2D"/>
+                  <a:srgbClr val="068734"/>
                 </a:solidFill>
                 <a:latin typeface="Tahoma"/>
               </a:rPr>
@@ -16822,14 +16697,14 @@
           </a:solidFill>
           <a:ln w="9525">
             <a:solidFill>
-              <a:srgbClr val="D8E4D0"/>
+              <a:srgbClr val="D9D9D9"/>
             </a:solidFill>
           </a:ln>
           <a:effectLst/>
           <a:effectLst>
             <a:outerShdw blurRad="50000" dist="20000" dir="5400000" rotWithShape="0">
               <a:srgbClr val="8A99AD">
-                <a:alpha val="38000"/>
+                <a:alpha val="30000"/>
               </a:srgbClr>
             </a:outerShdw>
           </a:effectLst>
@@ -16975,7 +16850,7 @@
             <a:r>
               <a:rPr sz="1400" b="0" i="0">
                 <a:solidFill>
-                  <a:srgbClr val="2C5F2D"/>
+                  <a:srgbClr val="068734"/>
                 </a:solidFill>
                 <a:latin typeface="Tahoma"/>
               </a:rPr>
@@ -16994,7 +16869,7 @@
             <a:r>
               <a:rPr sz="1400" b="0" i="0">
                 <a:solidFill>
-                  <a:srgbClr val="2C5F2D"/>
+                  <a:srgbClr val="068734"/>
                 </a:solidFill>
                 <a:latin typeface="Tahoma"/>
               </a:rPr>
@@ -17013,7 +16888,7 @@
             <a:r>
               <a:rPr sz="1400" b="0" i="0">
                 <a:solidFill>
-                  <a:srgbClr val="2C5F2D"/>
+                  <a:srgbClr val="068734"/>
                 </a:solidFill>
                 <a:latin typeface="Tahoma"/>
               </a:rPr>
@@ -17032,7 +16907,7 @@
             <a:r>
               <a:rPr sz="1400" b="0" i="0">
                 <a:solidFill>
-                  <a:srgbClr val="2C5F2D"/>
+                  <a:srgbClr val="068734"/>
                 </a:solidFill>
                 <a:latin typeface="Tahoma"/>
               </a:rPr>
@@ -17051,7 +16926,7 @@
             <a:r>
               <a:rPr sz="1400" b="0" i="0">
                 <a:solidFill>
-                  <a:srgbClr val="2C5F2D"/>
+                  <a:srgbClr val="068734"/>
                 </a:solidFill>
                 <a:latin typeface="Tahoma"/>
               </a:rPr>
@@ -17086,16 +16961,16 @@
         </p:nvSpPr>
         <p:spPr>
           <a:xfrm>
-            <a:off x="457200" y="256032"/>
-            <a:ext cx="10881360" cy="868680"/>
-          </a:xfrm>
-          <a:prstGeom prst="rect">
-            <a:avLst/>
-          </a:prstGeom>
-          <a:noFill/>
-        </p:spPr>
-        <p:txBody>
-          <a:bodyPr wrap="square" anchor="ctr" lIns="27432" rIns="27432" tIns="9144" bIns="9144">
+            <a:off x="256032" y="256032"/>
+            <a:ext cx="11430000" cy="649224"/>
+          </a:xfrm>
+          <a:prstGeom prst="rect">
+            <a:avLst/>
+          </a:prstGeom>
+          <a:noFill/>
+        </p:spPr>
+        <p:txBody>
+          <a:bodyPr wrap="square" anchor="t" lIns="27432" rIns="27432" tIns="9144" bIns="9144">
             <a:spAutoFit/>
           </a:bodyPr>
           <a:lstStyle/>
@@ -17109,9 +16984,9 @@
               </a:spcAft>
             </a:pPr>
             <a:r>
-              <a:rPr sz="3400" b="1" i="0">
-                <a:solidFill>
-                  <a:srgbClr val="0D3D14"/>
+              <a:rPr sz="3600" b="1" i="0">
+                <a:solidFill>
+                  <a:srgbClr val="068734"/>
                 </a:solidFill>
                 <a:latin typeface="Tahoma"/>
               </a:rPr>
@@ -17128,8 +17003,8 @@
         </p:nvSpPr>
         <p:spPr>
           <a:xfrm>
-            <a:off x="502920" y="1024128"/>
-            <a:ext cx="10881360" cy="457200"/>
+            <a:off x="384048" y="960120"/>
+            <a:ext cx="11247120" cy="402336"/>
           </a:xfrm>
           <a:prstGeom prst="rect">
             <a:avLst/>
@@ -17151,9 +17026,9 @@
               </a:spcAft>
             </a:pPr>
             <a:r>
-              <a:rPr sz="1900" b="1" i="0">
-                <a:solidFill>
-                  <a:srgbClr val="2C5F2D"/>
+              <a:rPr sz="1750" b="1" i="0">
+                <a:solidFill>
+                  <a:srgbClr val="068734"/>
                 </a:solidFill>
                 <a:latin typeface="Tahoma"/>
               </a:rPr>
@@ -17164,7 +17039,7 @@
       </p:sp>
       <p:pic>
         <p:nvPicPr>
-          <p:cNvPr id="4" name="Picture 3" descr="logo_footer.png"/>
+          <p:cNvPr id="4" name="Picture 3" descr="logo_r01.png"/>
           <p:cNvPicPr>
             <a:picLocks noChangeAspect="1"/>
           </p:cNvPicPr>
@@ -17178,8 +17053,8 @@
         </p:blipFill>
         <p:spPr>
           <a:xfrm>
-            <a:off x="384048" y="6327648"/>
-            <a:ext cx="365760" cy="384048"/>
+            <a:off x="249631" y="6448348"/>
+            <a:ext cx="237744" cy="237744"/>
           </a:xfrm>
           <a:prstGeom prst="rect">
             <a:avLst/>
@@ -17194,8 +17069,8 @@
         </p:nvSpPr>
         <p:spPr>
           <a:xfrm>
-            <a:off x="786384" y="6327648"/>
-            <a:ext cx="4114800" cy="411480"/>
+            <a:off x="566928" y="6353251"/>
+            <a:ext cx="3246120" cy="400507"/>
           </a:xfrm>
           <a:prstGeom prst="rect">
             <a:avLst/>
@@ -17217,9 +17092,9 @@
               </a:spcAft>
             </a:pPr>
             <a:r>
-              <a:rPr sz="1300" b="1" i="0">
-                <a:solidFill>
-                  <a:srgbClr val="0D3D14"/>
+              <a:rPr sz="2000" b="1" i="0">
+                <a:solidFill>
+                  <a:srgbClr val="068734"/>
                 </a:solidFill>
                 <a:latin typeface="Tahoma"/>
               </a:rPr>
@@ -17236,16 +17111,16 @@
         </p:nvSpPr>
         <p:spPr>
           <a:xfrm>
-            <a:off x="11430000" y="6355080"/>
-            <a:ext cx="594360" cy="365760"/>
-          </a:xfrm>
-          <a:prstGeom prst="rect">
-            <a:avLst/>
-          </a:prstGeom>
-          <a:noFill/>
-        </p:spPr>
-        <p:txBody>
-          <a:bodyPr wrap="square" anchor="ctr" lIns="27432" rIns="27432" tIns="9144" bIns="9144">
+            <a:off x="9400032" y="6510528"/>
+            <a:ext cx="2514600" cy="292608"/>
+          </a:xfrm>
+          <a:prstGeom prst="rect">
+            <a:avLst/>
+          </a:prstGeom>
+          <a:noFill/>
+        </p:spPr>
+        <p:txBody>
+          <a:bodyPr wrap="square" anchor="t" lIns="27432" rIns="27432" tIns="9144" bIns="9144">
             <a:spAutoFit/>
           </a:bodyPr>
           <a:lstStyle/>
@@ -17261,7 +17136,7 @@
             <a:r>
               <a:rPr sz="1200" b="0" i="0">
                 <a:solidFill>
-                  <a:srgbClr val="555555"/>
+                  <a:srgbClr val="068734"/>
                 </a:solidFill>
                 <a:latin typeface="Tahoma"/>
               </a:rPr>
@@ -17289,14 +17164,14 @@
           </a:solidFill>
           <a:ln w="9525">
             <a:solidFill>
-              <a:srgbClr val="D8E4D0"/>
+              <a:srgbClr val="D9D9D9"/>
             </a:solidFill>
           </a:ln>
           <a:effectLst/>
           <a:effectLst>
             <a:outerShdw blurRad="50000" dist="20000" dir="5400000" rotWithShape="0">
               <a:srgbClr val="8A99AD">
-                <a:alpha val="38000"/>
+                <a:alpha val="30000"/>
               </a:srgbClr>
             </a:outerShdw>
           </a:effectLst>
@@ -17356,7 +17231,7 @@
             <a:r>
               <a:rPr sz="2400" b="1" i="0">
                 <a:solidFill>
-                  <a:srgbClr val="C0561E"/>
+                  <a:srgbClr val="D95323"/>
                 </a:solidFill>
                 <a:latin typeface="Tahoma"/>
               </a:rPr>
@@ -17468,14 +17343,14 @@
           </a:solidFill>
           <a:ln w="9525">
             <a:solidFill>
-              <a:srgbClr val="D8E4D0"/>
+              <a:srgbClr val="D9D9D9"/>
             </a:solidFill>
           </a:ln>
           <a:effectLst/>
           <a:effectLst>
             <a:outerShdw blurRad="50000" dist="20000" dir="5400000" rotWithShape="0">
               <a:srgbClr val="8A99AD">
-                <a:alpha val="38000"/>
+                <a:alpha val="30000"/>
               </a:srgbClr>
             </a:outerShdw>
           </a:effectLst>
@@ -17535,7 +17410,7 @@
             <a:r>
               <a:rPr sz="2400" b="1" i="0">
                 <a:solidFill>
-                  <a:srgbClr val="C0561E"/>
+                  <a:srgbClr val="D95323"/>
                 </a:solidFill>
                 <a:latin typeface="Tahoma"/>
               </a:rPr>
@@ -17647,14 +17522,14 @@
           </a:solidFill>
           <a:ln w="9525">
             <a:solidFill>
-              <a:srgbClr val="D8E4D0"/>
+              <a:srgbClr val="D9D9D9"/>
             </a:solidFill>
           </a:ln>
           <a:effectLst/>
           <a:effectLst>
             <a:outerShdw blurRad="50000" dist="20000" dir="5400000" rotWithShape="0">
               <a:srgbClr val="8A99AD">
-                <a:alpha val="38000"/>
+                <a:alpha val="30000"/>
               </a:srgbClr>
             </a:outerShdw>
           </a:effectLst>
@@ -17714,7 +17589,7 @@
             <a:r>
               <a:rPr sz="2400" b="1" i="0">
                 <a:solidFill>
-                  <a:srgbClr val="C0561E"/>
+                  <a:srgbClr val="D95323"/>
                 </a:solidFill>
                 <a:latin typeface="Tahoma"/>
               </a:rPr>
@@ -17826,14 +17701,14 @@
           </a:solidFill>
           <a:ln w="9525">
             <a:solidFill>
-              <a:srgbClr val="D8E4D0"/>
+              <a:srgbClr val="D9D9D9"/>
             </a:solidFill>
           </a:ln>
           <a:effectLst/>
           <a:effectLst>
             <a:outerShdw blurRad="50000" dist="20000" dir="5400000" rotWithShape="0">
               <a:srgbClr val="8A99AD">
-                <a:alpha val="38000"/>
+                <a:alpha val="30000"/>
               </a:srgbClr>
             </a:outerShdw>
           </a:effectLst>
@@ -17893,7 +17768,7 @@
             <a:r>
               <a:rPr sz="3000" b="1" i="0">
                 <a:solidFill>
-                  <a:srgbClr val="C0561E"/>
+                  <a:srgbClr val="D95323"/>
                 </a:solidFill>
                 <a:latin typeface="Tahoma"/>
               </a:rPr>
@@ -18038,7 +17913,7 @@
         </p:nvSpPr>
         <p:spPr>
           <a:xfrm>
-            <a:off x="457200" y="3547872"/>
+            <a:off x="457200" y="3566160"/>
             <a:ext cx="11256264" cy="402336"/>
           </a:xfrm>
           <a:prstGeom prst="rect">
@@ -18061,7 +17936,7 @@
               </a:spcAft>
             </a:pPr>
             <a:r>
-              <a:rPr sz="1500" b="1" i="0">
+              <a:rPr sz="2000" b="1" i="0">
                 <a:solidFill>
                   <a:srgbClr val="FFFFFF"/>
                 </a:solidFill>
@@ -18105,7 +17980,7 @@
             <a:r>
               <a:rPr sz="1300" b="0" i="0">
                 <a:solidFill>
-                  <a:srgbClr val="2C5F2D"/>
+                  <a:srgbClr val="068734"/>
                 </a:solidFill>
                 <a:latin typeface="Tahoma"/>
               </a:rPr>
@@ -18147,7 +18022,7 @@
             <a:r>
               <a:rPr sz="1300" b="0" i="0">
                 <a:solidFill>
-                  <a:srgbClr val="2C5F2D"/>
+                  <a:srgbClr val="068734"/>
                 </a:solidFill>
                 <a:latin typeface="Tahoma"/>
               </a:rPr>
@@ -18189,7 +18064,7 @@
             <a:r>
               <a:rPr sz="1300" b="0" i="0">
                 <a:solidFill>
-                  <a:srgbClr val="2C5F2D"/>
+                  <a:srgbClr val="068734"/>
                 </a:solidFill>
                 <a:latin typeface="Tahoma"/>
               </a:rPr>
@@ -18224,16 +18099,16 @@
         </p:nvSpPr>
         <p:spPr>
           <a:xfrm>
-            <a:off x="457200" y="256032"/>
-            <a:ext cx="10881360" cy="868680"/>
-          </a:xfrm>
-          <a:prstGeom prst="rect">
-            <a:avLst/>
-          </a:prstGeom>
-          <a:noFill/>
-        </p:spPr>
-        <p:txBody>
-          <a:bodyPr wrap="square" anchor="ctr" lIns="27432" rIns="27432" tIns="9144" bIns="9144">
+            <a:off x="256032" y="256032"/>
+            <a:ext cx="11430000" cy="649224"/>
+          </a:xfrm>
+          <a:prstGeom prst="rect">
+            <a:avLst/>
+          </a:prstGeom>
+          <a:noFill/>
+        </p:spPr>
+        <p:txBody>
+          <a:bodyPr wrap="square" anchor="t" lIns="27432" rIns="27432" tIns="9144" bIns="9144">
             <a:spAutoFit/>
           </a:bodyPr>
           <a:lstStyle/>
@@ -18247,9 +18122,9 @@
               </a:spcAft>
             </a:pPr>
             <a:r>
-              <a:rPr sz="3400" b="1" i="0">
-                <a:solidFill>
-                  <a:srgbClr val="0D3D14"/>
+              <a:rPr sz="3600" b="1" i="0">
+                <a:solidFill>
+                  <a:srgbClr val="068734"/>
                 </a:solidFill>
                 <a:latin typeface="Tahoma"/>
               </a:rPr>
@@ -18266,8 +18141,8 @@
         </p:nvSpPr>
         <p:spPr>
           <a:xfrm>
-            <a:off x="502920" y="1024128"/>
-            <a:ext cx="10881360" cy="457200"/>
+            <a:off x="384048" y="960120"/>
+            <a:ext cx="11247120" cy="402336"/>
           </a:xfrm>
           <a:prstGeom prst="rect">
             <a:avLst/>
@@ -18289,9 +18164,9 @@
               </a:spcAft>
             </a:pPr>
             <a:r>
-              <a:rPr sz="1900" b="1" i="0">
-                <a:solidFill>
-                  <a:srgbClr val="2C5F2D"/>
+              <a:rPr sz="2000" b="1" i="0">
+                <a:solidFill>
+                  <a:srgbClr val="068734"/>
                 </a:solidFill>
                 <a:latin typeface="Tahoma"/>
               </a:rPr>
@@ -18302,7 +18177,7 @@
       </p:sp>
       <p:pic>
         <p:nvPicPr>
-          <p:cNvPr id="4" name="Picture 3" descr="logo_footer.png"/>
+          <p:cNvPr id="4" name="Picture 3" descr="logo_r01.png"/>
           <p:cNvPicPr>
             <a:picLocks noChangeAspect="1"/>
           </p:cNvPicPr>
@@ -18316,8 +18191,8 @@
         </p:blipFill>
         <p:spPr>
           <a:xfrm>
-            <a:off x="384048" y="6327648"/>
-            <a:ext cx="365760" cy="384048"/>
+            <a:off x="249631" y="6448348"/>
+            <a:ext cx="237744" cy="237744"/>
           </a:xfrm>
           <a:prstGeom prst="rect">
             <a:avLst/>
@@ -18332,8 +18207,8 @@
         </p:nvSpPr>
         <p:spPr>
           <a:xfrm>
-            <a:off x="786384" y="6327648"/>
-            <a:ext cx="4114800" cy="411480"/>
+            <a:off x="566928" y="6353251"/>
+            <a:ext cx="3246120" cy="400507"/>
           </a:xfrm>
           <a:prstGeom prst="rect">
             <a:avLst/>
@@ -18355,9 +18230,9 @@
               </a:spcAft>
             </a:pPr>
             <a:r>
-              <a:rPr sz="1300" b="1" i="0">
-                <a:solidFill>
-                  <a:srgbClr val="0D3D14"/>
+              <a:rPr sz="2000" b="1" i="0">
+                <a:solidFill>
+                  <a:srgbClr val="068734"/>
                 </a:solidFill>
                 <a:latin typeface="Tahoma"/>
               </a:rPr>
@@ -18374,16 +18249,16 @@
         </p:nvSpPr>
         <p:spPr>
           <a:xfrm>
-            <a:off x="11430000" y="6355080"/>
-            <a:ext cx="594360" cy="365760"/>
-          </a:xfrm>
-          <a:prstGeom prst="rect">
-            <a:avLst/>
-          </a:prstGeom>
-          <a:noFill/>
-        </p:spPr>
-        <p:txBody>
-          <a:bodyPr wrap="square" anchor="ctr" lIns="27432" rIns="27432" tIns="9144" bIns="9144">
+            <a:off x="9400032" y="6510528"/>
+            <a:ext cx="2514600" cy="292608"/>
+          </a:xfrm>
+          <a:prstGeom prst="rect">
+            <a:avLst/>
+          </a:prstGeom>
+          <a:noFill/>
+        </p:spPr>
+        <p:txBody>
+          <a:bodyPr wrap="square" anchor="t" lIns="27432" rIns="27432" tIns="9144" bIns="9144">
             <a:spAutoFit/>
           </a:bodyPr>
           <a:lstStyle/>
@@ -18399,7 +18274,7 @@
             <a:r>
               <a:rPr sz="1200" b="0" i="0">
                 <a:solidFill>
-                  <a:srgbClr val="555555"/>
+                  <a:srgbClr val="068734"/>
                 </a:solidFill>
                 <a:latin typeface="Tahoma"/>
               </a:rPr>
@@ -18767,7 +18642,7 @@
             <a:avLst/>
           </a:prstGeom>
           <a:solidFill>
-            <a:srgbClr val="ECF1E9"/>
+            <a:srgbClr val="F2F2F2"/>
           </a:solidFill>
           <a:ln>
             <a:noFill/>
@@ -18829,7 +18704,7 @@
             <a:r>
               <a:rPr sz="1150" b="1" i="0">
                 <a:solidFill>
-                  <a:srgbClr val="2C5F2D"/>
+                  <a:srgbClr val="068734"/>
                 </a:solidFill>
                 <a:latin typeface="Tahoma"/>
               </a:rPr>
@@ -18853,7 +18728,7 @@
             <a:avLst/>
           </a:prstGeom>
           <a:solidFill>
-            <a:srgbClr val="ECF1E9"/>
+            <a:srgbClr val="F2F2F2"/>
           </a:solidFill>
           <a:ln>
             <a:noFill/>
@@ -18915,7 +18790,7 @@
             <a:r>
               <a:rPr sz="1150" b="0" i="0">
                 <a:solidFill>
-                  <a:srgbClr val="2C5F2D"/>
+                  <a:srgbClr val="068734"/>
                 </a:solidFill>
                 <a:latin typeface="Tahoma"/>
               </a:rPr>
@@ -18939,7 +18814,7 @@
             <a:avLst/>
           </a:prstGeom>
           <a:solidFill>
-            <a:srgbClr val="ECF1E9"/>
+            <a:srgbClr val="F2F2F2"/>
           </a:solidFill>
           <a:ln>
             <a:noFill/>
@@ -19001,7 +18876,7 @@
             <a:r>
               <a:rPr sz="1150" b="0" i="0">
                 <a:solidFill>
-                  <a:srgbClr val="2C5F2D"/>
+                  <a:srgbClr val="068734"/>
                 </a:solidFill>
                 <a:latin typeface="Tahoma"/>
               </a:rPr>
@@ -19025,7 +18900,7 @@
             <a:avLst/>
           </a:prstGeom>
           <a:solidFill>
-            <a:srgbClr val="ECF1E9"/>
+            <a:srgbClr val="F2F2F2"/>
           </a:solidFill>
           <a:ln>
             <a:noFill/>
@@ -19087,7 +18962,7 @@
             <a:r>
               <a:rPr sz="1150" b="1" i="0">
                 <a:solidFill>
-                  <a:srgbClr val="2C5F2D"/>
+                  <a:srgbClr val="068734"/>
                 </a:solidFill>
                 <a:latin typeface="Tahoma"/>
               </a:rPr>
@@ -19173,7 +19048,7 @@
             <a:r>
               <a:rPr sz="1150" b="1" i="0">
                 <a:solidFill>
-                  <a:srgbClr val="2C5F2D"/>
+                  <a:srgbClr val="068734"/>
                 </a:solidFill>
                 <a:latin typeface="Tahoma"/>
               </a:rPr>
@@ -19259,7 +19134,7 @@
             <a:r>
               <a:rPr sz="1150" b="0" i="0">
                 <a:solidFill>
-                  <a:srgbClr val="2C5F2D"/>
+                  <a:srgbClr val="068734"/>
                 </a:solidFill>
                 <a:latin typeface="Tahoma"/>
               </a:rPr>
@@ -19345,7 +19220,7 @@
             <a:r>
               <a:rPr sz="1150" b="0" i="0">
                 <a:solidFill>
-                  <a:srgbClr val="2C5F2D"/>
+                  <a:srgbClr val="068734"/>
                 </a:solidFill>
                 <a:latin typeface="Tahoma"/>
               </a:rPr>
@@ -19455,7 +19330,7 @@
             <a:avLst/>
           </a:prstGeom>
           <a:solidFill>
-            <a:srgbClr val="ECF1E9"/>
+            <a:srgbClr val="F2F2F2"/>
           </a:solidFill>
           <a:ln>
             <a:noFill/>
@@ -19517,7 +19392,7 @@
             <a:r>
               <a:rPr sz="1150" b="1" i="0">
                 <a:solidFill>
-                  <a:srgbClr val="2C5F2D"/>
+                  <a:srgbClr val="068734"/>
                 </a:solidFill>
                 <a:latin typeface="Tahoma"/>
               </a:rPr>
@@ -19541,7 +19416,7 @@
             <a:avLst/>
           </a:prstGeom>
           <a:solidFill>
-            <a:srgbClr val="ECF1E9"/>
+            <a:srgbClr val="F2F2F2"/>
           </a:solidFill>
           <a:ln>
             <a:noFill/>
@@ -19603,7 +19478,7 @@
             <a:r>
               <a:rPr sz="1150" b="0" i="0">
                 <a:solidFill>
-                  <a:srgbClr val="2C5F2D"/>
+                  <a:srgbClr val="068734"/>
                 </a:solidFill>
                 <a:latin typeface="Tahoma"/>
               </a:rPr>
@@ -19627,7 +19502,7 @@
             <a:avLst/>
           </a:prstGeom>
           <a:solidFill>
-            <a:srgbClr val="ECF1E9"/>
+            <a:srgbClr val="F2F2F2"/>
           </a:solidFill>
           <a:ln>
             <a:noFill/>
@@ -19689,7 +19564,7 @@
             <a:r>
               <a:rPr sz="1150" b="0" i="0">
                 <a:solidFill>
-                  <a:srgbClr val="2C5F2D"/>
+                  <a:srgbClr val="068734"/>
                 </a:solidFill>
                 <a:latin typeface="Tahoma"/>
               </a:rPr>
@@ -19713,7 +19588,7 @@
             <a:avLst/>
           </a:prstGeom>
           <a:solidFill>
-            <a:srgbClr val="ECF1E9"/>
+            <a:srgbClr val="F2F2F2"/>
           </a:solidFill>
           <a:ln>
             <a:noFill/>
@@ -19861,7 +19736,7 @@
             <a:r>
               <a:rPr sz="1150" b="1" i="0">
                 <a:solidFill>
-                  <a:srgbClr val="2C5F2D"/>
+                  <a:srgbClr val="068734"/>
                 </a:solidFill>
                 <a:latin typeface="Tahoma"/>
               </a:rPr>
@@ -19947,7 +19822,7 @@
             <a:r>
               <a:rPr sz="1150" b="0" i="0">
                 <a:solidFill>
-                  <a:srgbClr val="2C5F2D"/>
+                  <a:srgbClr val="068734"/>
                 </a:solidFill>
                 <a:latin typeface="Tahoma"/>
               </a:rPr>
@@ -20033,7 +19908,7 @@
             <a:r>
               <a:rPr sz="1150" b="0" i="0">
                 <a:solidFill>
-                  <a:srgbClr val="2C5F2D"/>
+                  <a:srgbClr val="068734"/>
                 </a:solidFill>
                 <a:latin typeface="Tahoma"/>
               </a:rPr>
@@ -20119,7 +19994,7 @@
             <a:r>
               <a:rPr sz="1150" b="1" i="0">
                 <a:solidFill>
-                  <a:srgbClr val="2C5F2D"/>
+                  <a:srgbClr val="068734"/>
                 </a:solidFill>
                 <a:latin typeface="Tahoma"/>
               </a:rPr>
@@ -20143,7 +20018,7 @@
             <a:avLst/>
           </a:prstGeom>
           <a:solidFill>
-            <a:srgbClr val="ECF1E9"/>
+            <a:srgbClr val="F2F2F2"/>
           </a:solidFill>
           <a:ln>
             <a:noFill/>
@@ -20205,7 +20080,7 @@
             <a:r>
               <a:rPr sz="1150" b="1" i="0">
                 <a:solidFill>
-                  <a:srgbClr val="2C5F2D"/>
+                  <a:srgbClr val="068734"/>
                 </a:solidFill>
                 <a:latin typeface="Tahoma"/>
               </a:rPr>
@@ -20229,7 +20104,7 @@
             <a:avLst/>
           </a:prstGeom>
           <a:solidFill>
-            <a:srgbClr val="ECF1E9"/>
+            <a:srgbClr val="F2F2F2"/>
           </a:solidFill>
           <a:ln>
             <a:noFill/>
@@ -20291,7 +20166,7 @@
             <a:r>
               <a:rPr sz="1150" b="0" i="0">
                 <a:solidFill>
-                  <a:srgbClr val="2C5F2D"/>
+                  <a:srgbClr val="068734"/>
                 </a:solidFill>
                 <a:latin typeface="Tahoma"/>
               </a:rPr>
@@ -20315,7 +20190,7 @@
             <a:avLst/>
           </a:prstGeom>
           <a:solidFill>
-            <a:srgbClr val="ECF1E9"/>
+            <a:srgbClr val="F2F2F2"/>
           </a:solidFill>
           <a:ln>
             <a:noFill/>
@@ -20377,7 +20252,7 @@
             <a:r>
               <a:rPr sz="1150" b="0" i="0">
                 <a:solidFill>
-                  <a:srgbClr val="2C5F2D"/>
+                  <a:srgbClr val="068734"/>
                 </a:solidFill>
                 <a:latin typeface="Tahoma"/>
               </a:rPr>
@@ -20401,7 +20276,7 @@
             <a:avLst/>
           </a:prstGeom>
           <a:solidFill>
-            <a:srgbClr val="ECF1E9"/>
+            <a:srgbClr val="F2F2F2"/>
           </a:solidFill>
           <a:ln>
             <a:noFill/>
@@ -20463,7 +20338,7 @@
             <a:r>
               <a:rPr sz="1150" b="1" i="0">
                 <a:solidFill>
-                  <a:srgbClr val="2C5F2D"/>
+                  <a:srgbClr val="068734"/>
                 </a:solidFill>
                 <a:latin typeface="Tahoma"/>
               </a:rPr>
@@ -20549,7 +20424,7 @@
             <a:r>
               <a:rPr sz="1150" b="1" i="0">
                 <a:solidFill>
-                  <a:srgbClr val="2C5F2D"/>
+                  <a:srgbClr val="068734"/>
                 </a:solidFill>
                 <a:latin typeface="Tahoma"/>
               </a:rPr>
@@ -20635,7 +20510,7 @@
             <a:r>
               <a:rPr sz="1150" b="0" i="0">
                 <a:solidFill>
-                  <a:srgbClr val="2C5F2D"/>
+                  <a:srgbClr val="068734"/>
                 </a:solidFill>
                 <a:latin typeface="Tahoma"/>
               </a:rPr>
@@ -20721,7 +20596,7 @@
             <a:r>
               <a:rPr sz="1150" b="0" i="0">
                 <a:solidFill>
-                  <a:srgbClr val="2C5F2D"/>
+                  <a:srgbClr val="068734"/>
                 </a:solidFill>
                 <a:latin typeface="Tahoma"/>
               </a:rPr>
@@ -20831,7 +20706,7 @@
             <a:avLst/>
           </a:prstGeom>
           <a:solidFill>
-            <a:srgbClr val="ECF1E9"/>
+            <a:srgbClr val="F2F2F2"/>
           </a:solidFill>
           <a:ln>
             <a:noFill/>
@@ -20893,7 +20768,7 @@
             <a:r>
               <a:rPr sz="1150" b="1" i="0">
                 <a:solidFill>
-                  <a:srgbClr val="2C5F2D"/>
+                  <a:srgbClr val="068734"/>
                 </a:solidFill>
                 <a:latin typeface="Tahoma"/>
               </a:rPr>
@@ -20917,7 +20792,7 @@
             <a:avLst/>
           </a:prstGeom>
           <a:solidFill>
-            <a:srgbClr val="ECF1E9"/>
+            <a:srgbClr val="F2F2F2"/>
           </a:solidFill>
           <a:ln>
             <a:noFill/>
@@ -20979,7 +20854,7 @@
             <a:r>
               <a:rPr sz="1150" b="0" i="0">
                 <a:solidFill>
-                  <a:srgbClr val="2C5F2D"/>
+                  <a:srgbClr val="068734"/>
                 </a:solidFill>
                 <a:latin typeface="Tahoma"/>
               </a:rPr>
@@ -21003,7 +20878,7 @@
             <a:avLst/>
           </a:prstGeom>
           <a:solidFill>
-            <a:srgbClr val="ECF1E9"/>
+            <a:srgbClr val="F2F2F2"/>
           </a:solidFill>
           <a:ln>
             <a:noFill/>
@@ -21065,7 +20940,7 @@
             <a:r>
               <a:rPr sz="1150" b="0" i="0">
                 <a:solidFill>
-                  <a:srgbClr val="2C5F2D"/>
+                  <a:srgbClr val="068734"/>
                 </a:solidFill>
                 <a:latin typeface="Tahoma"/>
               </a:rPr>
@@ -21089,7 +20964,7 @@
             <a:avLst/>
           </a:prstGeom>
           <a:solidFill>
-            <a:srgbClr val="ECF1E9"/>
+            <a:srgbClr val="F2F2F2"/>
           </a:solidFill>
           <a:ln>
             <a:noFill/>
@@ -21151,7 +21026,7 @@
             <a:r>
               <a:rPr sz="1150" b="1" i="0">
                 <a:solidFill>
-                  <a:srgbClr val="C0561E"/>
+                  <a:srgbClr val="D95323"/>
                 </a:solidFill>
                 <a:latin typeface="Tahoma"/>
               </a:rPr>
@@ -21237,7 +21112,7 @@
             <a:r>
               <a:rPr sz="1150" b="1" i="0">
                 <a:solidFill>
-                  <a:srgbClr val="2C5F2D"/>
+                  <a:srgbClr val="068734"/>
                 </a:solidFill>
                 <a:latin typeface="Tahoma"/>
               </a:rPr>
@@ -21323,7 +21198,7 @@
             <a:r>
               <a:rPr sz="1150" b="0" i="0">
                 <a:solidFill>
-                  <a:srgbClr val="2C5F2D"/>
+                  <a:srgbClr val="068734"/>
                 </a:solidFill>
                 <a:latin typeface="Tahoma"/>
               </a:rPr>
@@ -21409,7 +21284,7 @@
             <a:r>
               <a:rPr sz="1150" b="0" i="0">
                 <a:solidFill>
-                  <a:srgbClr val="2C5F2D"/>
+                  <a:srgbClr val="068734"/>
                 </a:solidFill>
                 <a:latin typeface="Tahoma"/>
               </a:rPr>
@@ -21495,7 +21370,7 @@
             <a:r>
               <a:rPr sz="1150" b="1" i="0">
                 <a:solidFill>
-                  <a:srgbClr val="2C5F2D"/>
+                  <a:srgbClr val="068734"/>
                 </a:solidFill>
                 <a:latin typeface="Tahoma"/>
               </a:rPr>
@@ -21519,7 +21394,7 @@
             <a:avLst/>
           </a:prstGeom>
           <a:solidFill>
-            <a:srgbClr val="ECF1E9"/>
+            <a:srgbClr val="F2F2F2"/>
           </a:solidFill>
           <a:ln>
             <a:noFill/>
@@ -21581,7 +21456,7 @@
             <a:r>
               <a:rPr sz="1150" b="1" i="0">
                 <a:solidFill>
-                  <a:srgbClr val="2C5F2D"/>
+                  <a:srgbClr val="068734"/>
                 </a:solidFill>
                 <a:latin typeface="Tahoma"/>
               </a:rPr>
@@ -21605,7 +21480,7 @@
             <a:avLst/>
           </a:prstGeom>
           <a:solidFill>
-            <a:srgbClr val="ECF1E9"/>
+            <a:srgbClr val="F2F2F2"/>
           </a:solidFill>
           <a:ln>
             <a:noFill/>
@@ -21667,7 +21542,7 @@
             <a:r>
               <a:rPr sz="1150" b="0" i="0">
                 <a:solidFill>
-                  <a:srgbClr val="2C5F2D"/>
+                  <a:srgbClr val="068734"/>
                 </a:solidFill>
                 <a:latin typeface="Tahoma"/>
               </a:rPr>
@@ -21691,7 +21566,7 @@
             <a:avLst/>
           </a:prstGeom>
           <a:solidFill>
-            <a:srgbClr val="ECF1E9"/>
+            <a:srgbClr val="F2F2F2"/>
           </a:solidFill>
           <a:ln>
             <a:noFill/>
@@ -21753,7 +21628,7 @@
             <a:r>
               <a:rPr sz="1150" b="0" i="0">
                 <a:solidFill>
-                  <a:srgbClr val="2C5F2D"/>
+                  <a:srgbClr val="068734"/>
                 </a:solidFill>
                 <a:latin typeface="Tahoma"/>
               </a:rPr>
@@ -21777,7 +21652,7 @@
             <a:avLst/>
           </a:prstGeom>
           <a:solidFill>
-            <a:srgbClr val="ECF1E9"/>
+            <a:srgbClr val="F2F2F2"/>
           </a:solidFill>
           <a:ln>
             <a:noFill/>
@@ -21839,7 +21714,7 @@
             <a:r>
               <a:rPr sz="1150" b="1" i="0">
                 <a:solidFill>
-                  <a:srgbClr val="C0561E"/>
+                  <a:srgbClr val="D95323"/>
                 </a:solidFill>
                 <a:latin typeface="Tahoma"/>
               </a:rPr>
@@ -21874,16 +21749,16 @@
         </p:nvSpPr>
         <p:spPr>
           <a:xfrm>
-            <a:off x="457200" y="256032"/>
-            <a:ext cx="10881360" cy="868680"/>
-          </a:xfrm>
-          <a:prstGeom prst="rect">
-            <a:avLst/>
-          </a:prstGeom>
-          <a:noFill/>
-        </p:spPr>
-        <p:txBody>
-          <a:bodyPr wrap="square" anchor="ctr" lIns="27432" rIns="27432" tIns="9144" bIns="9144">
+            <a:off x="256032" y="256032"/>
+            <a:ext cx="11430000" cy="649224"/>
+          </a:xfrm>
+          <a:prstGeom prst="rect">
+            <a:avLst/>
+          </a:prstGeom>
+          <a:noFill/>
+        </p:spPr>
+        <p:txBody>
+          <a:bodyPr wrap="square" anchor="t" lIns="27432" rIns="27432" tIns="9144" bIns="9144">
             <a:spAutoFit/>
           </a:bodyPr>
           <a:lstStyle/>
@@ -21897,9 +21772,9 @@
               </a:spcAft>
             </a:pPr>
             <a:r>
-              <a:rPr sz="3400" b="1" i="0">
-                <a:solidFill>
-                  <a:srgbClr val="0D3D14"/>
+              <a:rPr sz="3600" b="1" i="0">
+                <a:solidFill>
+                  <a:srgbClr val="068734"/>
                 </a:solidFill>
                 <a:latin typeface="Tahoma"/>
               </a:rPr>
@@ -21916,8 +21791,8 @@
         </p:nvSpPr>
         <p:spPr>
           <a:xfrm>
-            <a:off x="502920" y="1024128"/>
-            <a:ext cx="10881360" cy="457200"/>
+            <a:off x="384048" y="960120"/>
+            <a:ext cx="11247120" cy="402336"/>
           </a:xfrm>
           <a:prstGeom prst="rect">
             <a:avLst/>
@@ -21939,9 +21814,9 @@
               </a:spcAft>
             </a:pPr>
             <a:r>
-              <a:rPr sz="1900" b="1" i="0">
-                <a:solidFill>
-                  <a:srgbClr val="2C5F2D"/>
+              <a:rPr sz="2000" b="1" i="0">
+                <a:solidFill>
+                  <a:srgbClr val="068734"/>
                 </a:solidFill>
                 <a:latin typeface="Tahoma"/>
               </a:rPr>
@@ -21952,7 +21827,7 @@
       </p:sp>
       <p:pic>
         <p:nvPicPr>
-          <p:cNvPr id="4" name="Picture 3" descr="logo_footer.png"/>
+          <p:cNvPr id="4" name="Picture 3" descr="logo_r01.png"/>
           <p:cNvPicPr>
             <a:picLocks noChangeAspect="1"/>
           </p:cNvPicPr>
@@ -21966,8 +21841,8 @@
         </p:blipFill>
         <p:spPr>
           <a:xfrm>
-            <a:off x="384048" y="6327648"/>
-            <a:ext cx="365760" cy="384048"/>
+            <a:off x="249631" y="6448348"/>
+            <a:ext cx="237744" cy="237744"/>
           </a:xfrm>
           <a:prstGeom prst="rect">
             <a:avLst/>
@@ -21982,8 +21857,8 @@
         </p:nvSpPr>
         <p:spPr>
           <a:xfrm>
-            <a:off x="786384" y="6327648"/>
-            <a:ext cx="4114800" cy="411480"/>
+            <a:off x="566928" y="6353251"/>
+            <a:ext cx="3246120" cy="400507"/>
           </a:xfrm>
           <a:prstGeom prst="rect">
             <a:avLst/>
@@ -22005,9 +21880,9 @@
               </a:spcAft>
             </a:pPr>
             <a:r>
-              <a:rPr sz="1300" b="1" i="0">
-                <a:solidFill>
-                  <a:srgbClr val="0D3D14"/>
+              <a:rPr sz="2000" b="1" i="0">
+                <a:solidFill>
+                  <a:srgbClr val="068734"/>
                 </a:solidFill>
                 <a:latin typeface="Tahoma"/>
               </a:rPr>
@@ -22024,16 +21899,16 @@
         </p:nvSpPr>
         <p:spPr>
           <a:xfrm>
-            <a:off x="11430000" y="6355080"/>
-            <a:ext cx="594360" cy="365760"/>
-          </a:xfrm>
-          <a:prstGeom prst="rect">
-            <a:avLst/>
-          </a:prstGeom>
-          <a:noFill/>
-        </p:spPr>
-        <p:txBody>
-          <a:bodyPr wrap="square" anchor="ctr" lIns="27432" rIns="27432" tIns="9144" bIns="9144">
+            <a:off x="9400032" y="6510528"/>
+            <a:ext cx="2514600" cy="292608"/>
+          </a:xfrm>
+          <a:prstGeom prst="rect">
+            <a:avLst/>
+          </a:prstGeom>
+          <a:noFill/>
+        </p:spPr>
+        <p:txBody>
+          <a:bodyPr wrap="square" anchor="t" lIns="27432" rIns="27432" tIns="9144" bIns="9144">
             <a:spAutoFit/>
           </a:bodyPr>
           <a:lstStyle/>
@@ -22049,7 +21924,7 @@
             <a:r>
               <a:rPr sz="1200" b="0" i="0">
                 <a:solidFill>
-                  <a:srgbClr val="555555"/>
+                  <a:srgbClr val="068734"/>
                 </a:solidFill>
                 <a:latin typeface="Tahoma"/>
               </a:rPr>
@@ -22417,7 +22292,7 @@
             <a:avLst/>
           </a:prstGeom>
           <a:solidFill>
-            <a:srgbClr val="ECF1E9"/>
+            <a:srgbClr val="F2F2F2"/>
           </a:solidFill>
           <a:ln>
             <a:noFill/>
@@ -22479,7 +22354,7 @@
             <a:r>
               <a:rPr sz="1200" b="1" i="0">
                 <a:solidFill>
-                  <a:srgbClr val="2C5F2D"/>
+                  <a:srgbClr val="068734"/>
                 </a:solidFill>
                 <a:latin typeface="Tahoma"/>
               </a:rPr>
@@ -22503,7 +22378,7 @@
             <a:avLst/>
           </a:prstGeom>
           <a:solidFill>
-            <a:srgbClr val="ECF1E9"/>
+            <a:srgbClr val="F2F2F2"/>
           </a:solidFill>
           <a:ln>
             <a:noFill/>
@@ -22565,7 +22440,7 @@
             <a:r>
               <a:rPr sz="1200" b="0" i="0">
                 <a:solidFill>
-                  <a:srgbClr val="2C5F2D"/>
+                  <a:srgbClr val="068734"/>
                 </a:solidFill>
                 <a:latin typeface="Tahoma"/>
               </a:rPr>
@@ -22589,7 +22464,7 @@
             <a:avLst/>
           </a:prstGeom>
           <a:solidFill>
-            <a:srgbClr val="ECF1E9"/>
+            <a:srgbClr val="F2F2F2"/>
           </a:solidFill>
           <a:ln>
             <a:noFill/>
@@ -22651,7 +22526,7 @@
             <a:r>
               <a:rPr sz="1200" b="0" i="0">
                 <a:solidFill>
-                  <a:srgbClr val="2C5F2D"/>
+                  <a:srgbClr val="068734"/>
                 </a:solidFill>
                 <a:latin typeface="Tahoma"/>
               </a:rPr>
@@ -22675,7 +22550,7 @@
             <a:avLst/>
           </a:prstGeom>
           <a:solidFill>
-            <a:srgbClr val="ECF1E9"/>
+            <a:srgbClr val="F2F2F2"/>
           </a:solidFill>
           <a:ln>
             <a:noFill/>
@@ -22737,7 +22612,7 @@
             <a:r>
               <a:rPr sz="1200" b="1" i="0">
                 <a:solidFill>
-                  <a:srgbClr val="C0561E"/>
+                  <a:srgbClr val="D95323"/>
                 </a:solidFill>
                 <a:latin typeface="Tahoma"/>
               </a:rPr>
@@ -22823,7 +22698,7 @@
             <a:r>
               <a:rPr sz="1200" b="1" i="0">
                 <a:solidFill>
-                  <a:srgbClr val="2C5F2D"/>
+                  <a:srgbClr val="068734"/>
                 </a:solidFill>
                 <a:latin typeface="Tahoma"/>
               </a:rPr>
@@ -22909,7 +22784,7 @@
             <a:r>
               <a:rPr sz="1200" b="0" i="0">
                 <a:solidFill>
-                  <a:srgbClr val="2C5F2D"/>
+                  <a:srgbClr val="068734"/>
                 </a:solidFill>
                 <a:latin typeface="Tahoma"/>
               </a:rPr>
@@ -22995,7 +22870,7 @@
             <a:r>
               <a:rPr sz="1200" b="0" i="0">
                 <a:solidFill>
-                  <a:srgbClr val="2C5F2D"/>
+                  <a:srgbClr val="068734"/>
                 </a:solidFill>
                 <a:latin typeface="Tahoma"/>
               </a:rPr>
@@ -23081,7 +22956,7 @@
             <a:r>
               <a:rPr sz="1200" b="1" i="0">
                 <a:solidFill>
-                  <a:srgbClr val="C0561E"/>
+                  <a:srgbClr val="D95323"/>
                 </a:solidFill>
                 <a:latin typeface="Tahoma"/>
               </a:rPr>
@@ -23105,7 +22980,7 @@
             <a:avLst/>
           </a:prstGeom>
           <a:solidFill>
-            <a:srgbClr val="ECF1E9"/>
+            <a:srgbClr val="F2F2F2"/>
           </a:solidFill>
           <a:ln>
             <a:noFill/>
@@ -23167,7 +23042,7 @@
             <a:r>
               <a:rPr sz="1200" b="1" i="0">
                 <a:solidFill>
-                  <a:srgbClr val="2C5F2D"/>
+                  <a:srgbClr val="068734"/>
                 </a:solidFill>
                 <a:latin typeface="Tahoma"/>
               </a:rPr>
@@ -23191,7 +23066,7 @@
             <a:avLst/>
           </a:prstGeom>
           <a:solidFill>
-            <a:srgbClr val="ECF1E9"/>
+            <a:srgbClr val="F2F2F2"/>
           </a:solidFill>
           <a:ln>
             <a:noFill/>
@@ -23253,7 +23128,7 @@
             <a:r>
               <a:rPr sz="1200" b="0" i="0">
                 <a:solidFill>
-                  <a:srgbClr val="2C5F2D"/>
+                  <a:srgbClr val="068734"/>
                 </a:solidFill>
                 <a:latin typeface="Tahoma"/>
               </a:rPr>
@@ -23277,7 +23152,7 @@
             <a:avLst/>
           </a:prstGeom>
           <a:solidFill>
-            <a:srgbClr val="ECF1E9"/>
+            <a:srgbClr val="F2F2F2"/>
           </a:solidFill>
           <a:ln>
             <a:noFill/>
@@ -23339,7 +23214,7 @@
             <a:r>
               <a:rPr sz="1200" b="0" i="0">
                 <a:solidFill>
-                  <a:srgbClr val="2C5F2D"/>
+                  <a:srgbClr val="068734"/>
                 </a:solidFill>
                 <a:latin typeface="Tahoma"/>
               </a:rPr>
@@ -23363,7 +23238,7 @@
             <a:avLst/>
           </a:prstGeom>
           <a:solidFill>
-            <a:srgbClr val="ECF1E9"/>
+            <a:srgbClr val="F2F2F2"/>
           </a:solidFill>
           <a:ln>
             <a:noFill/>
@@ -23425,7 +23300,7 @@
             <a:r>
               <a:rPr sz="1200" b="1" i="0">
                 <a:solidFill>
-                  <a:srgbClr val="C0561E"/>
+                  <a:srgbClr val="D95323"/>
                 </a:solidFill>
                 <a:latin typeface="Tahoma"/>
               </a:rPr>
@@ -23511,7 +23386,7 @@
             <a:r>
               <a:rPr sz="1200" b="1" i="0">
                 <a:solidFill>
-                  <a:srgbClr val="2C5F2D"/>
+                  <a:srgbClr val="068734"/>
                 </a:solidFill>
                 <a:latin typeface="Tahoma"/>
               </a:rPr>
@@ -23597,7 +23472,7 @@
             <a:r>
               <a:rPr sz="1200" b="0" i="0">
                 <a:solidFill>
-                  <a:srgbClr val="2C5F2D"/>
+                  <a:srgbClr val="068734"/>
                 </a:solidFill>
                 <a:latin typeface="Tahoma"/>
               </a:rPr>
@@ -23683,7 +23558,7 @@
             <a:r>
               <a:rPr sz="1200" b="0" i="0">
                 <a:solidFill>
-                  <a:srgbClr val="2C5F2D"/>
+                  <a:srgbClr val="068734"/>
                 </a:solidFill>
                 <a:latin typeface="Tahoma"/>
               </a:rPr>
@@ -23769,7 +23644,7 @@
             <a:r>
               <a:rPr sz="1200" b="1" i="0">
                 <a:solidFill>
-                  <a:srgbClr val="C0561E"/>
+                  <a:srgbClr val="D95323"/>
                 </a:solidFill>
                 <a:latin typeface="Tahoma"/>
               </a:rPr>
@@ -23793,7 +23668,7 @@
             <a:avLst/>
           </a:prstGeom>
           <a:solidFill>
-            <a:srgbClr val="ECF1E9"/>
+            <a:srgbClr val="F2F2F2"/>
           </a:solidFill>
           <a:ln>
             <a:noFill/>
@@ -23855,7 +23730,7 @@
             <a:r>
               <a:rPr sz="1200" b="1" i="0">
                 <a:solidFill>
-                  <a:srgbClr val="2C5F2D"/>
+                  <a:srgbClr val="068734"/>
                 </a:solidFill>
                 <a:latin typeface="Tahoma"/>
               </a:rPr>
@@ -23879,7 +23754,7 @@
             <a:avLst/>
           </a:prstGeom>
           <a:solidFill>
-            <a:srgbClr val="ECF1E9"/>
+            <a:srgbClr val="F2F2F2"/>
           </a:solidFill>
           <a:ln>
             <a:noFill/>
@@ -23941,7 +23816,7 @@
             <a:r>
               <a:rPr sz="1200" b="0" i="0">
                 <a:solidFill>
-                  <a:srgbClr val="2C5F2D"/>
+                  <a:srgbClr val="068734"/>
                 </a:solidFill>
                 <a:latin typeface="Tahoma"/>
               </a:rPr>
@@ -23965,7 +23840,7 @@
             <a:avLst/>
           </a:prstGeom>
           <a:solidFill>
-            <a:srgbClr val="ECF1E9"/>
+            <a:srgbClr val="F2F2F2"/>
           </a:solidFill>
           <a:ln>
             <a:noFill/>
@@ -24027,7 +23902,7 @@
             <a:r>
               <a:rPr sz="1200" b="0" i="0">
                 <a:solidFill>
-                  <a:srgbClr val="2C5F2D"/>
+                  <a:srgbClr val="068734"/>
                 </a:solidFill>
                 <a:latin typeface="Tahoma"/>
               </a:rPr>
@@ -24051,7 +23926,7 @@
             <a:avLst/>
           </a:prstGeom>
           <a:solidFill>
-            <a:srgbClr val="ECF1E9"/>
+            <a:srgbClr val="F2F2F2"/>
           </a:solidFill>
           <a:ln>
             <a:noFill/>
@@ -24113,7 +23988,7 @@
             <a:r>
               <a:rPr sz="1200" b="1" i="0">
                 <a:solidFill>
-                  <a:srgbClr val="C0561E"/>
+                  <a:srgbClr val="D95323"/>
                 </a:solidFill>
                 <a:latin typeface="Tahoma"/>
               </a:rPr>
@@ -24199,7 +24074,7 @@
             <a:r>
               <a:rPr sz="1200" b="1" i="0">
                 <a:solidFill>
-                  <a:srgbClr val="2C5F2D"/>
+                  <a:srgbClr val="068734"/>
                 </a:solidFill>
                 <a:latin typeface="Tahoma"/>
               </a:rPr>
@@ -24285,7 +24160,7 @@
             <a:r>
               <a:rPr sz="1200" b="0" i="0">
                 <a:solidFill>
-                  <a:srgbClr val="2C5F2D"/>
+                  <a:srgbClr val="068734"/>
                 </a:solidFill>
                 <a:latin typeface="Tahoma"/>
               </a:rPr>
@@ -24371,7 +24246,7 @@
             <a:r>
               <a:rPr sz="1200" b="0" i="0">
                 <a:solidFill>
-                  <a:srgbClr val="2C5F2D"/>
+                  <a:srgbClr val="068734"/>
                 </a:solidFill>
                 <a:latin typeface="Tahoma"/>
               </a:rPr>
@@ -24457,7 +24332,7 @@
             <a:r>
               <a:rPr sz="1200" b="1" i="0">
                 <a:solidFill>
-                  <a:srgbClr val="C0561E"/>
+                  <a:srgbClr val="D95323"/>
                 </a:solidFill>
                 <a:latin typeface="Tahoma"/>
               </a:rPr>
@@ -24481,7 +24356,7 @@
             <a:avLst/>
           </a:prstGeom>
           <a:solidFill>
-            <a:srgbClr val="ECF1E9"/>
+            <a:srgbClr val="F2F2F2"/>
           </a:solidFill>
           <a:ln>
             <a:noFill/>
@@ -24543,7 +24418,7 @@
             <a:r>
               <a:rPr sz="1200" b="1" i="0">
                 <a:solidFill>
-                  <a:srgbClr val="2C5F2D"/>
+                  <a:srgbClr val="068734"/>
                 </a:solidFill>
                 <a:latin typeface="Tahoma"/>
               </a:rPr>
@@ -24567,7 +24442,7 @@
             <a:avLst/>
           </a:prstGeom>
           <a:solidFill>
-            <a:srgbClr val="ECF1E9"/>
+            <a:srgbClr val="F2F2F2"/>
           </a:solidFill>
           <a:ln>
             <a:noFill/>
@@ -24629,7 +24504,7 @@
             <a:r>
               <a:rPr sz="1200" b="0" i="0">
                 <a:solidFill>
-                  <a:srgbClr val="2C5F2D"/>
+                  <a:srgbClr val="068734"/>
                 </a:solidFill>
                 <a:latin typeface="Tahoma"/>
               </a:rPr>
@@ -24653,7 +24528,7 @@
             <a:avLst/>
           </a:prstGeom>
           <a:solidFill>
-            <a:srgbClr val="ECF1E9"/>
+            <a:srgbClr val="F2F2F2"/>
           </a:solidFill>
           <a:ln>
             <a:noFill/>
@@ -24715,7 +24590,7 @@
             <a:r>
               <a:rPr sz="1200" b="0" i="0">
                 <a:solidFill>
-                  <a:srgbClr val="2C5F2D"/>
+                  <a:srgbClr val="068734"/>
                 </a:solidFill>
                 <a:latin typeface="Tahoma"/>
               </a:rPr>
@@ -24739,7 +24614,7 @@
             <a:avLst/>
           </a:prstGeom>
           <a:solidFill>
-            <a:srgbClr val="ECF1E9"/>
+            <a:srgbClr val="F2F2F2"/>
           </a:solidFill>
           <a:ln>
             <a:noFill/>
@@ -24801,7 +24676,7 @@
             <a:r>
               <a:rPr sz="1200" b="1" i="0">
                 <a:solidFill>
-                  <a:srgbClr val="C0561E"/>
+                  <a:srgbClr val="D95323"/>
                 </a:solidFill>
                 <a:latin typeface="Tahoma"/>
               </a:rPr>
@@ -24829,14 +24704,14 @@
           </a:solidFill>
           <a:ln w="9525">
             <a:solidFill>
-              <a:srgbClr val="D8E4D0"/>
+              <a:srgbClr val="D9D9D9"/>
             </a:solidFill>
           </a:ln>
           <a:effectLst/>
           <a:effectLst>
             <a:outerShdw blurRad="50000" dist="20000" dir="5400000" rotWithShape="0">
               <a:srgbClr val="8A99AD">
-                <a:alpha val="38000"/>
+                <a:alpha val="30000"/>
               </a:srgbClr>
             </a:outerShdw>
           </a:effectLst>
@@ -24896,7 +24771,7 @@
             <a:r>
               <a:rPr sz="3000" b="1" i="0">
                 <a:solidFill>
-                  <a:srgbClr val="C0561E"/>
+                  <a:srgbClr val="D95323"/>
                 </a:solidFill>
                 <a:latin typeface="Tahoma"/>
               </a:rPr>
@@ -25008,14 +24883,14 @@
           </a:solidFill>
           <a:ln w="9525">
             <a:solidFill>
-              <a:srgbClr val="D8E4D0"/>
+              <a:srgbClr val="D9D9D9"/>
             </a:solidFill>
           </a:ln>
           <a:effectLst/>
           <a:effectLst>
             <a:outerShdw blurRad="50000" dist="20000" dir="5400000" rotWithShape="0">
               <a:srgbClr val="8A99AD">
-                <a:alpha val="38000"/>
+                <a:alpha val="30000"/>
               </a:srgbClr>
             </a:outerShdw>
           </a:effectLst>
@@ -25075,7 +24950,7 @@
             <a:r>
               <a:rPr sz="3000" b="1" i="0">
                 <a:solidFill>
-                  <a:srgbClr val="C0561E"/>
+                  <a:srgbClr val="D95323"/>
                 </a:solidFill>
                 <a:latin typeface="Tahoma"/>
               </a:rPr>
@@ -25194,16 +25069,16 @@
         </p:nvSpPr>
         <p:spPr>
           <a:xfrm>
-            <a:off x="457200" y="256032"/>
-            <a:ext cx="10881360" cy="868680"/>
-          </a:xfrm>
-          <a:prstGeom prst="rect">
-            <a:avLst/>
-          </a:prstGeom>
-          <a:noFill/>
-        </p:spPr>
-        <p:txBody>
-          <a:bodyPr wrap="square" anchor="ctr" lIns="27432" rIns="27432" tIns="9144" bIns="9144">
+            <a:off x="256032" y="256032"/>
+            <a:ext cx="11430000" cy="649224"/>
+          </a:xfrm>
+          <a:prstGeom prst="rect">
+            <a:avLst/>
+          </a:prstGeom>
+          <a:noFill/>
+        </p:spPr>
+        <p:txBody>
+          <a:bodyPr wrap="square" anchor="t" lIns="27432" rIns="27432" tIns="9144" bIns="9144">
             <a:spAutoFit/>
           </a:bodyPr>
           <a:lstStyle/>
@@ -25217,9 +25092,9 @@
               </a:spcAft>
             </a:pPr>
             <a:r>
-              <a:rPr sz="3400" b="1" i="0">
-                <a:solidFill>
-                  <a:srgbClr val="0D3D14"/>
+              <a:rPr sz="3600" b="1" i="0">
+                <a:solidFill>
+                  <a:srgbClr val="068734"/>
                 </a:solidFill>
                 <a:latin typeface="Tahoma"/>
               </a:rPr>
@@ -25236,8 +25111,8 @@
         </p:nvSpPr>
         <p:spPr>
           <a:xfrm>
-            <a:off x="502920" y="1024128"/>
-            <a:ext cx="10881360" cy="457200"/>
+            <a:off x="384048" y="960120"/>
+            <a:ext cx="11247120" cy="402336"/>
           </a:xfrm>
           <a:prstGeom prst="rect">
             <a:avLst/>
@@ -25259,9 +25134,9 @@
               </a:spcAft>
             </a:pPr>
             <a:r>
-              <a:rPr sz="1900" b="1" i="0">
-                <a:solidFill>
-                  <a:srgbClr val="2C5F2D"/>
+              <a:rPr sz="2000" b="1" i="0">
+                <a:solidFill>
+                  <a:srgbClr val="068734"/>
                 </a:solidFill>
                 <a:latin typeface="Tahoma"/>
               </a:rPr>
@@ -25272,7 +25147,7 @@
       </p:sp>
       <p:pic>
         <p:nvPicPr>
-          <p:cNvPr id="4" name="Picture 3" descr="logo_footer.png"/>
+          <p:cNvPr id="4" name="Picture 3" descr="logo_r01.png"/>
           <p:cNvPicPr>
             <a:picLocks noChangeAspect="1"/>
           </p:cNvPicPr>
@@ -25286,8 +25161,8 @@
         </p:blipFill>
         <p:spPr>
           <a:xfrm>
-            <a:off x="384048" y="6327648"/>
-            <a:ext cx="365760" cy="384048"/>
+            <a:off x="249631" y="6448348"/>
+            <a:ext cx="237744" cy="237744"/>
           </a:xfrm>
           <a:prstGeom prst="rect">
             <a:avLst/>
@@ -25302,8 +25177,8 @@
         </p:nvSpPr>
         <p:spPr>
           <a:xfrm>
-            <a:off x="786384" y="6327648"/>
-            <a:ext cx="4114800" cy="411480"/>
+            <a:off x="566928" y="6353251"/>
+            <a:ext cx="3246120" cy="400507"/>
           </a:xfrm>
           <a:prstGeom prst="rect">
             <a:avLst/>
@@ -25325,9 +25200,9 @@
               </a:spcAft>
             </a:pPr>
             <a:r>
-              <a:rPr sz="1300" b="1" i="0">
-                <a:solidFill>
-                  <a:srgbClr val="0D3D14"/>
+              <a:rPr sz="2000" b="1" i="0">
+                <a:solidFill>
+                  <a:srgbClr val="068734"/>
                 </a:solidFill>
                 <a:latin typeface="Tahoma"/>
               </a:rPr>
@@ -25344,16 +25219,16 @@
         </p:nvSpPr>
         <p:spPr>
           <a:xfrm>
-            <a:off x="11430000" y="6355080"/>
-            <a:ext cx="594360" cy="365760"/>
-          </a:xfrm>
-          <a:prstGeom prst="rect">
-            <a:avLst/>
-          </a:prstGeom>
-          <a:noFill/>
-        </p:spPr>
-        <p:txBody>
-          <a:bodyPr wrap="square" anchor="ctr" lIns="27432" rIns="27432" tIns="9144" bIns="9144">
+            <a:off x="9400032" y="6510528"/>
+            <a:ext cx="2514600" cy="292608"/>
+          </a:xfrm>
+          <a:prstGeom prst="rect">
+            <a:avLst/>
+          </a:prstGeom>
+          <a:noFill/>
+        </p:spPr>
+        <p:txBody>
+          <a:bodyPr wrap="square" anchor="t" lIns="27432" rIns="27432" tIns="9144" bIns="9144">
             <a:spAutoFit/>
           </a:bodyPr>
           <a:lstStyle/>
@@ -25369,7 +25244,7 @@
             <a:r>
               <a:rPr sz="1200" b="0" i="0">
                 <a:solidFill>
-                  <a:srgbClr val="555555"/>
+                  <a:srgbClr val="068734"/>
                 </a:solidFill>
                 <a:latin typeface="Tahoma"/>
               </a:rPr>
@@ -25393,7 +25268,7 @@
             <a:avLst/>
           </a:prstGeom>
           <a:solidFill>
-            <a:srgbClr val="2C5F2D"/>
+            <a:srgbClr val="068734"/>
           </a:solidFill>
           <a:ln>
             <a:noFill/>
@@ -25483,14 +25358,14 @@
           </a:solidFill>
           <a:ln w="9525">
             <a:solidFill>
-              <a:srgbClr val="D8E4D0"/>
+              <a:srgbClr val="D9D9D9"/>
             </a:solidFill>
           </a:ln>
           <a:effectLst/>
           <a:effectLst>
             <a:outerShdw blurRad="50000" dist="20000" dir="5400000" rotWithShape="0">
               <a:srgbClr val="8A99AD">
-                <a:alpha val="38000"/>
+                <a:alpha val="30000"/>
               </a:srgbClr>
             </a:outerShdw>
           </a:effectLst>
@@ -25636,7 +25511,7 @@
             <a:r>
               <a:rPr sz="1250" b="0" i="0">
                 <a:solidFill>
-                  <a:srgbClr val="2C5F2D"/>
+                  <a:srgbClr val="068734"/>
                 </a:solidFill>
                 <a:latin typeface="Tahoma"/>
               </a:rPr>
@@ -25655,7 +25530,7 @@
             <a:r>
               <a:rPr sz="1250" b="0" i="0">
                 <a:solidFill>
-                  <a:srgbClr val="2C5F2D"/>
+                  <a:srgbClr val="068734"/>
                 </a:solidFill>
                 <a:latin typeface="Tahoma"/>
               </a:rPr>
@@ -25674,7 +25549,7 @@
             <a:r>
               <a:rPr sz="1250" b="0" i="0">
                 <a:solidFill>
-                  <a:srgbClr val="2C5F2D"/>
+                  <a:srgbClr val="068734"/>
                 </a:solidFill>
                 <a:latin typeface="Tahoma"/>
               </a:rPr>
@@ -25693,7 +25568,7 @@
             <a:r>
               <a:rPr sz="1250" b="0" i="0">
                 <a:solidFill>
-                  <a:srgbClr val="2C5F2D"/>
+                  <a:srgbClr val="068734"/>
                 </a:solidFill>
                 <a:latin typeface="Tahoma"/>
               </a:rPr>
@@ -25721,14 +25596,14 @@
           </a:solidFill>
           <a:ln w="9525">
             <a:solidFill>
-              <a:srgbClr val="D8E4D0"/>
+              <a:srgbClr val="D9D9D9"/>
             </a:solidFill>
           </a:ln>
           <a:effectLst/>
           <a:effectLst>
             <a:outerShdw blurRad="50000" dist="20000" dir="5400000" rotWithShape="0">
               <a:srgbClr val="8A99AD">
-                <a:alpha val="38000"/>
+                <a:alpha val="30000"/>
               </a:srgbClr>
             </a:outerShdw>
           </a:effectLst>
@@ -25874,7 +25749,7 @@
             <a:r>
               <a:rPr sz="1250" b="0" i="0">
                 <a:solidFill>
-                  <a:srgbClr val="2C5F2D"/>
+                  <a:srgbClr val="068734"/>
                 </a:solidFill>
                 <a:latin typeface="Tahoma"/>
               </a:rPr>
@@ -25893,7 +25768,7 @@
             <a:r>
               <a:rPr sz="1250" b="0" i="0">
                 <a:solidFill>
-                  <a:srgbClr val="2C5F2D"/>
+                  <a:srgbClr val="068734"/>
                 </a:solidFill>
                 <a:latin typeface="Tahoma"/>
               </a:rPr>
@@ -25912,7 +25787,7 @@
             <a:r>
               <a:rPr sz="1250" b="0" i="0">
                 <a:solidFill>
-                  <a:srgbClr val="2C5F2D"/>
+                  <a:srgbClr val="068734"/>
                 </a:solidFill>
                 <a:latin typeface="Tahoma"/>
               </a:rPr>
@@ -25931,7 +25806,7 @@
             <a:r>
               <a:rPr sz="1250" b="0" i="0">
                 <a:solidFill>
-                  <a:srgbClr val="2C5F2D"/>
+                  <a:srgbClr val="068734"/>
                 </a:solidFill>
                 <a:latin typeface="Tahoma"/>
               </a:rPr>
@@ -25959,14 +25834,14 @@
           </a:solidFill>
           <a:ln w="9525">
             <a:solidFill>
-              <a:srgbClr val="D8E4D0"/>
+              <a:srgbClr val="D9D9D9"/>
             </a:solidFill>
           </a:ln>
           <a:effectLst/>
           <a:effectLst>
             <a:outerShdw blurRad="50000" dist="20000" dir="5400000" rotWithShape="0">
               <a:srgbClr val="8A99AD">
-                <a:alpha val="38000"/>
+                <a:alpha val="30000"/>
               </a:srgbClr>
             </a:outerShdw>
           </a:effectLst>
@@ -26008,7 +25883,7 @@
             <a:avLst/>
           </a:prstGeom>
           <a:solidFill>
-            <a:srgbClr val="C0561E"/>
+            <a:srgbClr val="D95323"/>
           </a:solidFill>
           <a:ln>
             <a:noFill/>
@@ -26112,7 +25987,7 @@
             <a:r>
               <a:rPr sz="1250" b="0" i="0">
                 <a:solidFill>
-                  <a:srgbClr val="2C5F2D"/>
+                  <a:srgbClr val="068734"/>
                 </a:solidFill>
                 <a:latin typeface="Tahoma"/>
               </a:rPr>
@@ -26131,7 +26006,7 @@
             <a:r>
               <a:rPr sz="1250" b="0" i="0">
                 <a:solidFill>
-                  <a:srgbClr val="2C5F2D"/>
+                  <a:srgbClr val="068734"/>
                 </a:solidFill>
                 <a:latin typeface="Tahoma"/>
               </a:rPr>
@@ -26150,7 +26025,7 @@
             <a:r>
               <a:rPr sz="1250" b="0" i="0">
                 <a:solidFill>
-                  <a:srgbClr val="2C5F2D"/>
+                  <a:srgbClr val="068734"/>
                 </a:solidFill>
                 <a:latin typeface="Tahoma"/>
               </a:rPr>
@@ -26169,7 +26044,7 @@
             <a:r>
               <a:rPr sz="1250" b="0" i="0">
                 <a:solidFill>
-                  <a:srgbClr val="2C5F2D"/>
+                  <a:srgbClr val="068734"/>
                 </a:solidFill>
                 <a:latin typeface="Tahoma"/>
               </a:rPr>
@@ -26193,7 +26068,7 @@
             <a:avLst/>
           </a:prstGeom>
           <a:solidFill>
-            <a:srgbClr val="ECF1E9"/>
+            <a:srgbClr val="F2F2F2"/>
           </a:solidFill>
           <a:ln>
             <a:noFill/>
@@ -26264,7 +26139,7 @@
             <a:r>
               <a:rPr sz="1200" b="0" i="0">
                 <a:solidFill>
-                  <a:srgbClr val="2C5F2D"/>
+                  <a:srgbClr val="068734"/>
                 </a:solidFill>
                 <a:latin typeface="Tahoma"/>
               </a:rPr>
@@ -26385,16 +26260,16 @@
         </p:nvSpPr>
         <p:spPr>
           <a:xfrm>
-            <a:off x="457200" y="256032"/>
-            <a:ext cx="10881360" cy="868680"/>
-          </a:xfrm>
-          <a:prstGeom prst="rect">
-            <a:avLst/>
-          </a:prstGeom>
-          <a:noFill/>
-        </p:spPr>
-        <p:txBody>
-          <a:bodyPr wrap="square" anchor="ctr" lIns="27432" rIns="27432" tIns="9144" bIns="9144">
+            <a:off x="256032" y="256032"/>
+            <a:ext cx="11430000" cy="649224"/>
+          </a:xfrm>
+          <a:prstGeom prst="rect">
+            <a:avLst/>
+          </a:prstGeom>
+          <a:noFill/>
+        </p:spPr>
+        <p:txBody>
+          <a:bodyPr wrap="square" anchor="t" lIns="27432" rIns="27432" tIns="9144" bIns="9144">
             <a:spAutoFit/>
           </a:bodyPr>
           <a:lstStyle/>
@@ -26408,9 +26283,9 @@
               </a:spcAft>
             </a:pPr>
             <a:r>
-              <a:rPr sz="3400" b="1" i="0">
-                <a:solidFill>
-                  <a:srgbClr val="0D3D14"/>
+              <a:rPr sz="3600" b="1" i="0">
+                <a:solidFill>
+                  <a:srgbClr val="068734"/>
                 </a:solidFill>
                 <a:latin typeface="Tahoma"/>
               </a:rPr>
@@ -26427,8 +26302,8 @@
         </p:nvSpPr>
         <p:spPr>
           <a:xfrm>
-            <a:off x="502920" y="1024128"/>
-            <a:ext cx="10881360" cy="457200"/>
+            <a:off x="384048" y="960120"/>
+            <a:ext cx="11247120" cy="402336"/>
           </a:xfrm>
           <a:prstGeom prst="rect">
             <a:avLst/>
@@ -26450,9 +26325,9 @@
               </a:spcAft>
             </a:pPr>
             <a:r>
-              <a:rPr sz="1900" b="1" i="0">
-                <a:solidFill>
-                  <a:srgbClr val="2C5F2D"/>
+              <a:rPr sz="2000" b="1" i="0">
+                <a:solidFill>
+                  <a:srgbClr val="068734"/>
                 </a:solidFill>
                 <a:latin typeface="Tahoma"/>
               </a:rPr>
@@ -26463,7 +26338,7 @@
       </p:sp>
       <p:pic>
         <p:nvPicPr>
-          <p:cNvPr id="4" name="Picture 3" descr="logo_footer.png"/>
+          <p:cNvPr id="4" name="Picture 3" descr="logo_r01.png"/>
           <p:cNvPicPr>
             <a:picLocks noChangeAspect="1"/>
           </p:cNvPicPr>
@@ -26477,8 +26352,8 @@
         </p:blipFill>
         <p:spPr>
           <a:xfrm>
-            <a:off x="384048" y="6327648"/>
-            <a:ext cx="365760" cy="384048"/>
+            <a:off x="249631" y="6448348"/>
+            <a:ext cx="237744" cy="237744"/>
           </a:xfrm>
           <a:prstGeom prst="rect">
             <a:avLst/>
@@ -26493,8 +26368,8 @@
         </p:nvSpPr>
         <p:spPr>
           <a:xfrm>
-            <a:off x="786384" y="6327648"/>
-            <a:ext cx="4114800" cy="411480"/>
+            <a:off x="566928" y="6353251"/>
+            <a:ext cx="3246120" cy="400507"/>
           </a:xfrm>
           <a:prstGeom prst="rect">
             <a:avLst/>
@@ -26516,9 +26391,9 @@
               </a:spcAft>
             </a:pPr>
             <a:r>
-              <a:rPr sz="1300" b="1" i="0">
-                <a:solidFill>
-                  <a:srgbClr val="0D3D14"/>
+              <a:rPr sz="2000" b="1" i="0">
+                <a:solidFill>
+                  <a:srgbClr val="068734"/>
                 </a:solidFill>
                 <a:latin typeface="Tahoma"/>
               </a:rPr>
@@ -26535,16 +26410,16 @@
         </p:nvSpPr>
         <p:spPr>
           <a:xfrm>
-            <a:off x="11430000" y="6355080"/>
-            <a:ext cx="594360" cy="365760"/>
-          </a:xfrm>
-          <a:prstGeom prst="rect">
-            <a:avLst/>
-          </a:prstGeom>
-          <a:noFill/>
-        </p:spPr>
-        <p:txBody>
-          <a:bodyPr wrap="square" anchor="ctr" lIns="27432" rIns="27432" tIns="9144" bIns="9144">
+            <a:off x="9400032" y="6510528"/>
+            <a:ext cx="2514600" cy="292608"/>
+          </a:xfrm>
+          <a:prstGeom prst="rect">
+            <a:avLst/>
+          </a:prstGeom>
+          <a:noFill/>
+        </p:spPr>
+        <p:txBody>
+          <a:bodyPr wrap="square" anchor="t" lIns="27432" rIns="27432" tIns="9144" bIns="9144">
             <a:spAutoFit/>
           </a:bodyPr>
           <a:lstStyle/>
@@ -26560,7 +26435,7 @@
             <a:r>
               <a:rPr sz="1200" b="0" i="0">
                 <a:solidFill>
-                  <a:srgbClr val="555555"/>
+                  <a:srgbClr val="068734"/>
                 </a:solidFill>
                 <a:latin typeface="Tahoma"/>
               </a:rPr>
@@ -26584,7 +26459,7 @@
             <a:avLst/>
           </a:prstGeom>
           <a:solidFill>
-            <a:srgbClr val="2C5F2D"/>
+            <a:srgbClr val="068734"/>
           </a:solidFill>
           <a:ln>
             <a:noFill/>
@@ -26674,14 +26549,14 @@
           </a:solidFill>
           <a:ln w="9525">
             <a:solidFill>
-              <a:srgbClr val="D8E4D0"/>
+              <a:srgbClr val="D9D9D9"/>
             </a:solidFill>
           </a:ln>
           <a:effectLst/>
           <a:effectLst>
             <a:outerShdw blurRad="50000" dist="20000" dir="5400000" rotWithShape="0">
               <a:srgbClr val="8A99AD">
-                <a:alpha val="38000"/>
+                <a:alpha val="30000"/>
               </a:srgbClr>
             </a:outerShdw>
           </a:effectLst>
@@ -26827,7 +26702,7 @@
             <a:r>
               <a:rPr sz="1250" b="0" i="0">
                 <a:solidFill>
-                  <a:srgbClr val="2C5F2D"/>
+                  <a:srgbClr val="068734"/>
                 </a:solidFill>
                 <a:latin typeface="Tahoma"/>
               </a:rPr>
@@ -26846,7 +26721,7 @@
             <a:r>
               <a:rPr sz="1250" b="0" i="0">
                 <a:solidFill>
-                  <a:srgbClr val="2C5F2D"/>
+                  <a:srgbClr val="068734"/>
                 </a:solidFill>
                 <a:latin typeface="Tahoma"/>
               </a:rPr>
@@ -26865,7 +26740,7 @@
             <a:r>
               <a:rPr sz="1250" b="0" i="0">
                 <a:solidFill>
-                  <a:srgbClr val="2C5F2D"/>
+                  <a:srgbClr val="068734"/>
                 </a:solidFill>
                 <a:latin typeface="Tahoma"/>
               </a:rPr>
@@ -26884,7 +26759,7 @@
             <a:r>
               <a:rPr sz="1250" b="0" i="0">
                 <a:solidFill>
-                  <a:srgbClr val="2C5F2D"/>
+                  <a:srgbClr val="068734"/>
                 </a:solidFill>
                 <a:latin typeface="Tahoma"/>
               </a:rPr>
@@ -26912,14 +26787,14 @@
           </a:solidFill>
           <a:ln w="9525">
             <a:solidFill>
-              <a:srgbClr val="D8E4D0"/>
+              <a:srgbClr val="D9D9D9"/>
             </a:solidFill>
           </a:ln>
           <a:effectLst/>
           <a:effectLst>
             <a:outerShdw blurRad="50000" dist="20000" dir="5400000" rotWithShape="0">
               <a:srgbClr val="8A99AD">
-                <a:alpha val="38000"/>
+                <a:alpha val="30000"/>
               </a:srgbClr>
             </a:outerShdw>
           </a:effectLst>
@@ -27065,7 +26940,7 @@
             <a:r>
               <a:rPr sz="1250" b="0" i="0">
                 <a:solidFill>
-                  <a:srgbClr val="2C5F2D"/>
+                  <a:srgbClr val="068734"/>
                 </a:solidFill>
                 <a:latin typeface="Tahoma"/>
               </a:rPr>
@@ -27084,7 +26959,7 @@
             <a:r>
               <a:rPr sz="1250" b="0" i="0">
                 <a:solidFill>
-                  <a:srgbClr val="2C5F2D"/>
+                  <a:srgbClr val="068734"/>
                 </a:solidFill>
                 <a:latin typeface="Tahoma"/>
               </a:rPr>
@@ -27103,7 +26978,7 @@
             <a:r>
               <a:rPr sz="1250" b="0" i="0">
                 <a:solidFill>
-                  <a:srgbClr val="2C5F2D"/>
+                  <a:srgbClr val="068734"/>
                 </a:solidFill>
                 <a:latin typeface="Tahoma"/>
               </a:rPr>
@@ -27122,7 +26997,7 @@
             <a:r>
               <a:rPr sz="1250" b="0" i="0">
                 <a:solidFill>
-                  <a:srgbClr val="2C5F2D"/>
+                  <a:srgbClr val="068734"/>
                 </a:solidFill>
                 <a:latin typeface="Tahoma"/>
               </a:rPr>
@@ -27150,14 +27025,14 @@
           </a:solidFill>
           <a:ln w="9525">
             <a:solidFill>
-              <a:srgbClr val="D8E4D0"/>
+              <a:srgbClr val="D9D9D9"/>
             </a:solidFill>
           </a:ln>
           <a:effectLst/>
           <a:effectLst>
             <a:outerShdw blurRad="50000" dist="20000" dir="5400000" rotWithShape="0">
               <a:srgbClr val="8A99AD">
-                <a:alpha val="38000"/>
+                <a:alpha val="30000"/>
               </a:srgbClr>
             </a:outerShdw>
           </a:effectLst>
@@ -27199,7 +27074,7 @@
             <a:avLst/>
           </a:prstGeom>
           <a:solidFill>
-            <a:srgbClr val="C0561E"/>
+            <a:srgbClr val="D95323"/>
           </a:solidFill>
           <a:ln>
             <a:noFill/>
@@ -27303,7 +27178,7 @@
             <a:r>
               <a:rPr sz="1250" b="0" i="0">
                 <a:solidFill>
-                  <a:srgbClr val="2C5F2D"/>
+                  <a:srgbClr val="068734"/>
                 </a:solidFill>
                 <a:latin typeface="Tahoma"/>
               </a:rPr>
@@ -27322,7 +27197,7 @@
             <a:r>
               <a:rPr sz="1250" b="0" i="0">
                 <a:solidFill>
-                  <a:srgbClr val="2C5F2D"/>
+                  <a:srgbClr val="068734"/>
                 </a:solidFill>
                 <a:latin typeface="Tahoma"/>
               </a:rPr>
@@ -27341,7 +27216,7 @@
             <a:r>
               <a:rPr sz="1250" b="0" i="0">
                 <a:solidFill>
-                  <a:srgbClr val="2C5F2D"/>
+                  <a:srgbClr val="068734"/>
                 </a:solidFill>
                 <a:latin typeface="Tahoma"/>
               </a:rPr>
@@ -27360,7 +27235,7 @@
             <a:r>
               <a:rPr sz="1250" b="0" i="0">
                 <a:solidFill>
-                  <a:srgbClr val="2C5F2D"/>
+                  <a:srgbClr val="068734"/>
                 </a:solidFill>
                 <a:latin typeface="Tahoma"/>
               </a:rPr>
@@ -27384,7 +27259,7 @@
             <a:avLst/>
           </a:prstGeom>
           <a:solidFill>
-            <a:srgbClr val="ECF1E9"/>
+            <a:srgbClr val="F2F2F2"/>
           </a:solidFill>
           <a:ln>
             <a:noFill/>
@@ -27455,7 +27330,7 @@
             <a:r>
               <a:rPr sz="1200" b="0" i="0">
                 <a:solidFill>
-                  <a:srgbClr val="2C5F2D"/>
+                  <a:srgbClr val="068734"/>
                 </a:solidFill>
                 <a:latin typeface="Tahoma"/>
               </a:rPr>
@@ -27576,16 +27451,16 @@
         </p:nvSpPr>
         <p:spPr>
           <a:xfrm>
-            <a:off x="457200" y="256032"/>
-            <a:ext cx="10881360" cy="868680"/>
-          </a:xfrm>
-          <a:prstGeom prst="rect">
-            <a:avLst/>
-          </a:prstGeom>
-          <a:noFill/>
-        </p:spPr>
-        <p:txBody>
-          <a:bodyPr wrap="square" anchor="ctr" lIns="27432" rIns="27432" tIns="9144" bIns="9144">
+            <a:off x="256032" y="256032"/>
+            <a:ext cx="11430000" cy="649224"/>
+          </a:xfrm>
+          <a:prstGeom prst="rect">
+            <a:avLst/>
+          </a:prstGeom>
+          <a:noFill/>
+        </p:spPr>
+        <p:txBody>
+          <a:bodyPr wrap="square" anchor="t" lIns="27432" rIns="27432" tIns="9144" bIns="9144">
             <a:spAutoFit/>
           </a:bodyPr>
           <a:lstStyle/>
@@ -27599,9 +27474,9 @@
               </a:spcAft>
             </a:pPr>
             <a:r>
-              <a:rPr sz="3400" b="1" i="0">
-                <a:solidFill>
-                  <a:srgbClr val="0D3D14"/>
+              <a:rPr sz="3600" b="1" i="0">
+                <a:solidFill>
+                  <a:srgbClr val="068734"/>
                 </a:solidFill>
                 <a:latin typeface="Tahoma"/>
               </a:rPr>
@@ -27618,8 +27493,8 @@
         </p:nvSpPr>
         <p:spPr>
           <a:xfrm>
-            <a:off x="502920" y="1024128"/>
-            <a:ext cx="10881360" cy="457200"/>
+            <a:off x="384048" y="960120"/>
+            <a:ext cx="11247120" cy="402336"/>
           </a:xfrm>
           <a:prstGeom prst="rect">
             <a:avLst/>
@@ -27641,9 +27516,9 @@
               </a:spcAft>
             </a:pPr>
             <a:r>
-              <a:rPr sz="1900" b="1" i="0">
-                <a:solidFill>
-                  <a:srgbClr val="2C5F2D"/>
+              <a:rPr sz="2000" b="1" i="0">
+                <a:solidFill>
+                  <a:srgbClr val="068734"/>
                 </a:solidFill>
                 <a:latin typeface="Tahoma"/>
               </a:rPr>
@@ -27654,7 +27529,7 @@
       </p:sp>
       <p:pic>
         <p:nvPicPr>
-          <p:cNvPr id="4" name="Picture 3" descr="logo_footer.png"/>
+          <p:cNvPr id="4" name="Picture 3" descr="logo_r01.png"/>
           <p:cNvPicPr>
             <a:picLocks noChangeAspect="1"/>
           </p:cNvPicPr>
@@ -27668,8 +27543,8 @@
         </p:blipFill>
         <p:spPr>
           <a:xfrm>
-            <a:off x="384048" y="6327648"/>
-            <a:ext cx="365760" cy="384048"/>
+            <a:off x="249631" y="6448348"/>
+            <a:ext cx="237744" cy="237744"/>
           </a:xfrm>
           <a:prstGeom prst="rect">
             <a:avLst/>
@@ -27684,8 +27559,8 @@
         </p:nvSpPr>
         <p:spPr>
           <a:xfrm>
-            <a:off x="786384" y="6327648"/>
-            <a:ext cx="4114800" cy="411480"/>
+            <a:off x="566928" y="6353251"/>
+            <a:ext cx="3246120" cy="400507"/>
           </a:xfrm>
           <a:prstGeom prst="rect">
             <a:avLst/>
@@ -27707,9 +27582,9 @@
               </a:spcAft>
             </a:pPr>
             <a:r>
-              <a:rPr sz="1300" b="1" i="0">
-                <a:solidFill>
-                  <a:srgbClr val="0D3D14"/>
+              <a:rPr sz="2000" b="1" i="0">
+                <a:solidFill>
+                  <a:srgbClr val="068734"/>
                 </a:solidFill>
                 <a:latin typeface="Tahoma"/>
               </a:rPr>
@@ -27726,16 +27601,16 @@
         </p:nvSpPr>
         <p:spPr>
           <a:xfrm>
-            <a:off x="11430000" y="6355080"/>
-            <a:ext cx="594360" cy="365760"/>
-          </a:xfrm>
-          <a:prstGeom prst="rect">
-            <a:avLst/>
-          </a:prstGeom>
-          <a:noFill/>
-        </p:spPr>
-        <p:txBody>
-          <a:bodyPr wrap="square" anchor="ctr" lIns="27432" rIns="27432" tIns="9144" bIns="9144">
+            <a:off x="9400032" y="6510528"/>
+            <a:ext cx="2514600" cy="292608"/>
+          </a:xfrm>
+          <a:prstGeom prst="rect">
+            <a:avLst/>
+          </a:prstGeom>
+          <a:noFill/>
+        </p:spPr>
+        <p:txBody>
+          <a:bodyPr wrap="square" anchor="t" lIns="27432" rIns="27432" tIns="9144" bIns="9144">
             <a:spAutoFit/>
           </a:bodyPr>
           <a:lstStyle/>
@@ -27751,7 +27626,7 @@
             <a:r>
               <a:rPr sz="1200" b="0" i="0">
                 <a:solidFill>
-                  <a:srgbClr val="555555"/>
+                  <a:srgbClr val="068734"/>
                 </a:solidFill>
                 <a:latin typeface="Tahoma"/>
               </a:rPr>
@@ -27775,7 +27650,7 @@
             <a:avLst/>
           </a:prstGeom>
           <a:solidFill>
-            <a:srgbClr val="C0561E"/>
+            <a:srgbClr val="D95323"/>
           </a:solidFill>
           <a:ln>
             <a:noFill/>
@@ -27865,14 +27740,14 @@
           </a:solidFill>
           <a:ln w="9525">
             <a:solidFill>
-              <a:srgbClr val="D8E4D0"/>
+              <a:srgbClr val="D9D9D9"/>
             </a:solidFill>
           </a:ln>
           <a:effectLst/>
           <a:effectLst>
             <a:outerShdw blurRad="50000" dist="20000" dir="5400000" rotWithShape="0">
               <a:srgbClr val="8A99AD">
-                <a:alpha val="38000"/>
+                <a:alpha val="30000"/>
               </a:srgbClr>
             </a:outerShdw>
           </a:effectLst>
@@ -28018,7 +27893,7 @@
             <a:r>
               <a:rPr sz="1250" b="0" i="0">
                 <a:solidFill>
-                  <a:srgbClr val="2C5F2D"/>
+                  <a:srgbClr val="068734"/>
                 </a:solidFill>
                 <a:latin typeface="Tahoma"/>
               </a:rPr>
@@ -28037,7 +27912,7 @@
             <a:r>
               <a:rPr sz="1250" b="0" i="0">
                 <a:solidFill>
-                  <a:srgbClr val="2C5F2D"/>
+                  <a:srgbClr val="068734"/>
                 </a:solidFill>
                 <a:latin typeface="Tahoma"/>
               </a:rPr>
@@ -28056,7 +27931,7 @@
             <a:r>
               <a:rPr sz="1250" b="0" i="0">
                 <a:solidFill>
-                  <a:srgbClr val="2C5F2D"/>
+                  <a:srgbClr val="068734"/>
                 </a:solidFill>
                 <a:latin typeface="Tahoma"/>
               </a:rPr>
@@ -28075,7 +27950,7 @@
             <a:r>
               <a:rPr sz="1250" b="0" i="0">
                 <a:solidFill>
-                  <a:srgbClr val="2C5F2D"/>
+                  <a:srgbClr val="068734"/>
                 </a:solidFill>
                 <a:latin typeface="Tahoma"/>
               </a:rPr>
@@ -28103,14 +27978,14 @@
           </a:solidFill>
           <a:ln w="9525">
             <a:solidFill>
-              <a:srgbClr val="D8E4D0"/>
+              <a:srgbClr val="D9D9D9"/>
             </a:solidFill>
           </a:ln>
           <a:effectLst/>
           <a:effectLst>
             <a:outerShdw blurRad="50000" dist="20000" dir="5400000" rotWithShape="0">
               <a:srgbClr val="8A99AD">
-                <a:alpha val="38000"/>
+                <a:alpha val="30000"/>
               </a:srgbClr>
             </a:outerShdw>
           </a:effectLst>
@@ -28256,7 +28131,7 @@
             <a:r>
               <a:rPr sz="1250" b="0" i="0">
                 <a:solidFill>
-                  <a:srgbClr val="2C5F2D"/>
+                  <a:srgbClr val="068734"/>
                 </a:solidFill>
                 <a:latin typeface="Tahoma"/>
               </a:rPr>
@@ -28275,7 +28150,7 @@
             <a:r>
               <a:rPr sz="1250" b="0" i="0">
                 <a:solidFill>
-                  <a:srgbClr val="2C5F2D"/>
+                  <a:srgbClr val="068734"/>
                 </a:solidFill>
                 <a:latin typeface="Tahoma"/>
               </a:rPr>
@@ -28294,7 +28169,7 @@
             <a:r>
               <a:rPr sz="1250" b="0" i="0">
                 <a:solidFill>
-                  <a:srgbClr val="2C5F2D"/>
+                  <a:srgbClr val="068734"/>
                 </a:solidFill>
                 <a:latin typeface="Tahoma"/>
               </a:rPr>
@@ -28313,7 +28188,7 @@
             <a:r>
               <a:rPr sz="1250" b="0" i="0">
                 <a:solidFill>
-                  <a:srgbClr val="2C5F2D"/>
+                  <a:srgbClr val="068734"/>
                 </a:solidFill>
                 <a:latin typeface="Tahoma"/>
               </a:rPr>
@@ -28341,14 +28216,14 @@
           </a:solidFill>
           <a:ln w="9525">
             <a:solidFill>
-              <a:srgbClr val="D8E4D0"/>
+              <a:srgbClr val="D9D9D9"/>
             </a:solidFill>
           </a:ln>
           <a:effectLst/>
           <a:effectLst>
             <a:outerShdw blurRad="50000" dist="20000" dir="5400000" rotWithShape="0">
               <a:srgbClr val="8A99AD">
-                <a:alpha val="38000"/>
+                <a:alpha val="30000"/>
               </a:srgbClr>
             </a:outerShdw>
           </a:effectLst>
@@ -28390,7 +28265,7 @@
             <a:avLst/>
           </a:prstGeom>
           <a:solidFill>
-            <a:srgbClr val="C0561E"/>
+            <a:srgbClr val="D95323"/>
           </a:solidFill>
           <a:ln>
             <a:noFill/>
@@ -28494,7 +28369,7 @@
             <a:r>
               <a:rPr sz="1250" b="0" i="0">
                 <a:solidFill>
-                  <a:srgbClr val="2C5F2D"/>
+                  <a:srgbClr val="068734"/>
                 </a:solidFill>
                 <a:latin typeface="Tahoma"/>
               </a:rPr>
@@ -28513,7 +28388,7 @@
             <a:r>
               <a:rPr sz="1250" b="0" i="0">
                 <a:solidFill>
-                  <a:srgbClr val="2C5F2D"/>
+                  <a:srgbClr val="068734"/>
                 </a:solidFill>
                 <a:latin typeface="Tahoma"/>
               </a:rPr>
@@ -28532,7 +28407,7 @@
             <a:r>
               <a:rPr sz="1250" b="0" i="0">
                 <a:solidFill>
-                  <a:srgbClr val="2C5F2D"/>
+                  <a:srgbClr val="068734"/>
                 </a:solidFill>
                 <a:latin typeface="Tahoma"/>
               </a:rPr>
@@ -28556,7 +28431,7 @@
             <a:avLst/>
           </a:prstGeom>
           <a:solidFill>
-            <a:srgbClr val="ECF1E9"/>
+            <a:srgbClr val="F2F2F2"/>
           </a:solidFill>
           <a:ln>
             <a:noFill/>
@@ -28627,7 +28502,7 @@
             <a:r>
               <a:rPr sz="1200" b="0" i="0">
                 <a:solidFill>
-                  <a:srgbClr val="2C5F2D"/>
+                  <a:srgbClr val="068734"/>
                 </a:solidFill>
                 <a:latin typeface="Tahoma"/>
               </a:rPr>
